--- a/office-hours/GitHub-Actions-Office-Hours-Aug-Sep-2026.pptx
+++ b/office-hours/GitHub-Actions-Office-Hours-Aug-Sep-2026.pptx
@@ -21,6 +21,8 @@
     <p:sldId id="269" r:id="rId21"/>
     <p:sldId id="270" r:id="rId22"/>
     <p:sldId id="271" r:id="rId23"/>
+    <p:sldId id="272" r:id="rId24"/>
+    <p:sldId id="273" r:id="rId25"/>
   </p:sldIdLst>
   <p:sldSz cx="12191695" cy="6858000" type="screen4x3"/>
   <p:notesSz cx="6858000" cy="9144000"/>
@@ -579,7 +581,7 @@
               </a:defRPr>
             </a:pPr>
             <a:r>
-              <a:t>This session covers six GitHub Actions updates from August and early September 2026, two practical demonstrations, and five workflow performance techniques.</a:t>
+              <a:t>This session covers six GitHub Actions updates from August and early September 2026, three practical demonstrations, and five workflow performance techniques.</a:t>
             </a:r>
           </a:p>
           <a:p>
@@ -633,7 +635,7 @@
               </a:defRPr>
             </a:pPr>
             <a:r>
-              <a:t>• Set the promise: practical changes, two small demos, and actions attendees can take this week.</a:t>
+              <a:t>• Set the promise: practical changes, three small demos, and actions attendees can take this week.</a:t>
             </a:r>
           </a:p>
           <a:p>
@@ -749,7 +751,7 @@
               </a:defRPr>
             </a:pPr>
             <a:r>
-              <a:t>Timing: 4 minutes</a:t>
+              <a:t>Timing: 3 minutes</a:t>
             </a:r>
           </a:p>
           <a:p>
@@ -1232,7 +1234,7 @@
               </a:defRPr>
             </a:pPr>
             <a:r>
-              <a:t>A single manually dispatched workflow runs two independent jobs to demonstrate reusable-workflow provenance and least-privilege Dependabot access.</a:t>
+              <a:t>A single manually dispatched workflow runs three independent jobs to demonstrate reusable-workflow provenance, least-privilege Dependabot access, and separate CodeQL workload attribution.</a:t>
             </a:r>
           </a:p>
           <a:p>
@@ -1305,7 +1307,7 @@
               </a:defRPr>
             </a:pPr>
             <a:r>
-              <a:t>• While it starts, explain that the two jobs are independent.</a:t>
+              <a:t>• While it starts, explain that the three jobs are independent.</a:t>
             </a:r>
           </a:p>
           <a:p>
@@ -1888,7 +1890,7 @@
               </a:defRPr>
             </a:pPr>
             <a:r>
-              <a:t>Timing: 5 minutes</a:t>
+              <a:t>Timing: 3 minutes</a:t>
             </a:r>
           </a:p>
           <a:p>
@@ -1923,7 +1925,7 @@
               </a:defRPr>
             </a:pPr>
             <a:r>
-              <a:t>The highest-leverage performance improvements eliminate stale runs, reuse expensive deterministic work, prevent unnecessary jobs, control matrix growth, and distinguish queue time from execution time.</a:t>
+              <a:t>GitHub Code Quality runs now have a distinct actor and dynamic workflow path, allowing Actions reports and API consumers to separate quality analysis from code scanning.</a:t>
             </a:r>
           </a:p>
           <a:p>
@@ -1958,7 +1960,7 @@
               </a:defRPr>
             </a:pPr>
             <a:r>
-              <a:t>• Spend about 45 seconds on each tip.</a:t>
+              <a:t>• Open the code-quality-attribution job summary.</a:t>
             </a:r>
           </a:p>
           <a:p>
@@ -1977,7 +1979,7 @@
               </a:defRPr>
             </a:pPr>
             <a:r>
-              <a:t>• Concurrency avoids paying for obsolete commits.</a:t>
+              <a:t>• Compare the actor, expected path, run count, and latest observed path in each row.</a:t>
             </a:r>
           </a:p>
           <a:p>
@@ -1996,7 +1998,7 @@
               </a:defRPr>
             </a:pPr>
             <a:r>
-              <a:t>• Cache only expensive deterministic inputs.</a:t>
+              <a:t>• Explain that zero Code Quality runs means the feature is not enabled or has not completed a run in this repository.</a:t>
             </a:r>
           </a:p>
           <a:p>
@@ -2015,7 +2017,7 @@
               </a:defRPr>
             </a:pPr>
             <a:r>
-              <a:t>• Filters prevent runner allocation entirely.</a:t>
+              <a:t>• Use a prepared screenshot if needed.</a:t>
             </a:r>
           </a:p>
           <a:p>
@@ -2034,26 +2036,7 @@
               </a:defRPr>
             </a:pPr>
             <a:r>
-              <a:t>• Matrices often grow quadratically.</a:t>
-            </a:r>
-          </a:p>
-          <a:p>
-            <a:pPr>
-              <a:lnSpc>
-                <a:spcPct val="110000"/>
-              </a:lnSpc>
-              <a:spcAft>
-                <a:spcPts val="700"/>
-              </a:spcAft>
-              <a:defRPr sz="1500">
-                <a:solidFill>
-                  <a:srgbClr val="202020"/>
-                </a:solidFill>
-                <a:latin typeface="Aptos"/>
-              </a:defRPr>
-            </a:pPr>
-            <a:r>
-              <a:t>• Finally, inspect queue time separately: a faster build cannot fix runner scarcity.</a:t>
+              <a:t>• Close by showing which dashboard or billing filters must be updated.</a:t>
             </a:r>
           </a:p>
         </p:txBody>
@@ -2150,7 +2133,7 @@
               </a:defRPr>
             </a:pPr>
             <a:r>
-              <a:t>Timing: 3 minutes, then 15 minutes Q&amp;A</a:t>
+              <a:t>Timing: 5 minutes</a:t>
             </a:r>
           </a:p>
           <a:p>
@@ -2185,7 +2168,7 @@
               </a:defRPr>
             </a:pPr>
             <a:r>
-              <a:t>The immediate next steps are to test the new Arm64 image, review retention and reporting dependencies, and adopt narrower permissions plus native workflow provenance.</a:t>
+              <a:t>The highest-leverage performance improvements eliminate stale runs, reuse expensive deterministic work, prevent unnecessary jobs, control matrix growth, and distinguish queue time from execution time.</a:t>
             </a:r>
           </a:p>
           <a:p>
@@ -2220,7 +2203,7 @@
               </a:defRPr>
             </a:pPr>
             <a:r>
-              <a:t>• Recap the three action categories.</a:t>
+              <a:t>• Spend about 45 seconds on each tip.</a:t>
             </a:r>
           </a:p>
           <a:p>
@@ -2239,7 +2222,7 @@
               </a:defRPr>
             </a:pPr>
             <a:r>
-              <a:t>• Transition to questions.</a:t>
+              <a:t>• Concurrency avoids paying for obsolete commits.</a:t>
             </a:r>
           </a:p>
           <a:p>
@@ -2258,7 +2241,7 @@
               </a:defRPr>
             </a:pPr>
             <a:r>
-              <a:t>• Useful prompts: Which runner fleet is hardest to maintain?</a:t>
+              <a:t>• Cache only expensive deterministic inputs.</a:t>
             </a:r>
           </a:p>
           <a:p>
@@ -2277,7 +2260,7 @@
               </a:defRPr>
             </a:pPr>
             <a:r>
-              <a:t>• Where do shared workflows lack provenance?</a:t>
+              <a:t>• Filters prevent runner allocation entirely.</a:t>
             </a:r>
           </a:p>
           <a:p>
@@ -2296,7 +2279,455 @@
               </a:defRPr>
             </a:pPr>
             <a:r>
+              <a:t>• Matrices often grow quadratically.</a:t>
+            </a:r>
+          </a:p>
+          <a:p>
+            <a:pPr>
+              <a:lnSpc>
+                <a:spcPct val="110000"/>
+              </a:lnSpc>
+              <a:spcAft>
+                <a:spcPts val="700"/>
+              </a:spcAft>
+              <a:defRPr sz="1500">
+                <a:solidFill>
+                  <a:srgbClr val="202020"/>
+                </a:solidFill>
+                <a:latin typeface="Aptos"/>
+              </a:defRPr>
+            </a:pPr>
+            <a:r>
+              <a:t>• Finally, inspect queue time separately: a faster build cannot fix runner scarcity.</a:t>
+            </a:r>
+          </a:p>
+        </p:txBody>
+      </p:sp>
+      <p:sp>
+        <p:nvSpPr>
+          <p:cNvPr id="4" name="Slide Number Placeholder 3"/>
+          <p:cNvSpPr>
+            <a:spLocks noGrp="1"/>
+          </p:cNvSpPr>
+          <p:nvPr>
+            <p:ph type="sldNum" idx="5" sz="quarter"/>
+          </p:nvPr>
+        </p:nvSpPr>
+        <p:spPr/>
+      </p:sp>
+    </p:spTree>
+  </p:cSld>
+  <p:clrMapOvr>
+    <a:masterClrMapping/>
+  </p:clrMapOvr>
+</p:notes>
+</file>
+
+<file path=ppt/notesSlides/notesSlide17.xml><?xml version="1.0" encoding="utf-8"?>
+<p:notes xmlns:a="http://schemas.openxmlformats.org/drawingml/2006/main" xmlns:p="http://schemas.openxmlformats.org/presentationml/2006/main" xmlns:r="http://schemas.openxmlformats.org/officeDocument/2006/relationships">
+  <p:cSld>
+    <p:spTree>
+      <p:nvGrpSpPr>
+        <p:cNvPr id="1" name=""/>
+        <p:cNvGrpSpPr/>
+        <p:nvPr/>
+      </p:nvGrpSpPr>
+      <p:grpSpPr>
+        <a:xfrm>
+          <a:off x="0" y="0"/>
+          <a:ext cx="0" cy="0"/>
+          <a:chOff x="0" y="0"/>
+          <a:chExt cx="0" cy="0"/>
+        </a:xfrm>
+      </p:grpSpPr>
+      <p:sp>
+        <p:nvSpPr>
+          <p:cNvPr id="2" name="Slide Image Placeholder 1"/>
+          <p:cNvSpPr>
+            <a:spLocks noGrp="1"/>
+          </p:cNvSpPr>
+          <p:nvPr>
+            <p:ph type="sldImg" idx="2"/>
+          </p:nvPr>
+        </p:nvSpPr>
+        <p:spPr/>
+      </p:sp>
+      <p:sp>
+        <p:nvSpPr>
+          <p:cNvPr id="3" name="Notes Placeholder 2"/>
+          <p:cNvSpPr>
+            <a:spLocks noGrp="1"/>
+          </p:cNvSpPr>
+          <p:nvPr>
+            <p:ph type="body" idx="3" sz="quarter"/>
+          </p:nvPr>
+        </p:nvSpPr>
+        <p:spPr/>
+        <p:txBody>
+          <a:bodyPr wrap="square"/>
+          <a:lstStyle/>
+          <a:p>
+            <a:pPr>
+              <a:spcAft>
+                <a:spcPts val="800"/>
+              </a:spcAft>
+              <a:defRPr sz="2000" b="1">
+                <a:solidFill>
+                  <a:srgbClr val="1F4E79"/>
+                </a:solidFill>
+                <a:latin typeface="Aptos"/>
+              </a:defRPr>
+            </a:pPr>
+            <a:r>
+              <a:t>PRESENTER NOTES</a:t>
+            </a:r>
+          </a:p>
+          <a:p>
+            <a:pPr>
+              <a:spcAft>
+                <a:spcPts val="1200"/>
+              </a:spcAft>
+              <a:defRPr sz="1600" b="1">
+                <a:solidFill>
+                  <a:srgbClr val="2E7D32"/>
+                </a:solidFill>
+                <a:latin typeface="Aptos"/>
+              </a:defRPr>
+            </a:pPr>
+            <a:r>
+              <a:t>Timing: 3 minutes, then 15 minutes Q&amp;A</a:t>
+            </a:r>
+          </a:p>
+          <a:p>
+            <a:pPr>
+              <a:spcAft>
+                <a:spcPts val="500"/>
+              </a:spcAft>
+              <a:defRPr sz="1600" b="1">
+                <a:solidFill>
+                  <a:srgbClr val="1F4E79"/>
+                </a:solidFill>
+                <a:latin typeface="Aptos"/>
+              </a:defRPr>
+            </a:pPr>
+            <a:r>
+              <a:t>Feature summary</a:t>
+            </a:r>
+          </a:p>
+          <a:p>
+            <a:pPr>
+              <a:lnSpc>
+                <a:spcPct val="110000"/>
+              </a:lnSpc>
+              <a:spcAft>
+                <a:spcPts val="1200"/>
+              </a:spcAft>
+              <a:defRPr sz="1500">
+                <a:solidFill>
+                  <a:srgbClr val="202020"/>
+                </a:solidFill>
+                <a:latin typeface="Aptos"/>
+              </a:defRPr>
+            </a:pPr>
+            <a:r>
+              <a:t>The immediate next steps are to test the new Arm64 image, review retention and reporting dependencies, and adopt narrower permissions plus native workflow provenance.</a:t>
+            </a:r>
+          </a:p>
+          <a:p>
+            <a:pPr>
+              <a:spcAft>
+                <a:spcPts val="500"/>
+              </a:spcAft>
+              <a:defRPr sz="1600" b="1">
+                <a:solidFill>
+                  <a:srgbClr val="1F4E79"/>
+                </a:solidFill>
+                <a:latin typeface="Aptos"/>
+              </a:defRPr>
+            </a:pPr>
+            <a:r>
+              <a:t>Presenter cues</a:t>
+            </a:r>
+          </a:p>
+          <a:p>
+            <a:pPr>
+              <a:lnSpc>
+                <a:spcPct val="110000"/>
+              </a:lnSpc>
+              <a:spcAft>
+                <a:spcPts val="700"/>
+              </a:spcAft>
+              <a:defRPr sz="1500">
+                <a:solidFill>
+                  <a:srgbClr val="202020"/>
+                </a:solidFill>
+                <a:latin typeface="Aptos"/>
+              </a:defRPr>
+            </a:pPr>
+            <a:r>
+              <a:t>• Recap the three action categories.</a:t>
+            </a:r>
+          </a:p>
+          <a:p>
+            <a:pPr>
+              <a:lnSpc>
+                <a:spcPct val="110000"/>
+              </a:lnSpc>
+              <a:spcAft>
+                <a:spcPts val="700"/>
+              </a:spcAft>
+              <a:defRPr sz="1500">
+                <a:solidFill>
+                  <a:srgbClr val="202020"/>
+                </a:solidFill>
+                <a:latin typeface="Aptos"/>
+              </a:defRPr>
+            </a:pPr>
+            <a:r>
+              <a:t>• Transition to questions.</a:t>
+            </a:r>
+          </a:p>
+          <a:p>
+            <a:pPr>
+              <a:lnSpc>
+                <a:spcPct val="110000"/>
+              </a:lnSpc>
+              <a:spcAft>
+                <a:spcPts val="700"/>
+              </a:spcAft>
+              <a:defRPr sz="1500">
+                <a:solidFill>
+                  <a:srgbClr val="202020"/>
+                </a:solidFill>
+                <a:latin typeface="Aptos"/>
+              </a:defRPr>
+            </a:pPr>
+            <a:r>
+              <a:t>• Useful prompts: Which runner fleet is hardest to maintain?</a:t>
+            </a:r>
+          </a:p>
+          <a:p>
+            <a:pPr>
+              <a:lnSpc>
+                <a:spcPct val="110000"/>
+              </a:lnSpc>
+              <a:spcAft>
+                <a:spcPts val="700"/>
+              </a:spcAft>
+              <a:defRPr sz="1500">
+                <a:solidFill>
+                  <a:srgbClr val="202020"/>
+                </a:solidFill>
+                <a:latin typeface="Aptos"/>
+              </a:defRPr>
+            </a:pPr>
+            <a:r>
+              <a:t>• Where do shared workflows lack provenance?</a:t>
+            </a:r>
+          </a:p>
+          <a:p>
+            <a:pPr>
+              <a:lnSpc>
+                <a:spcPct val="110000"/>
+              </a:lnSpc>
+              <a:spcAft>
+                <a:spcPts val="700"/>
+              </a:spcAft>
+              <a:defRPr sz="1500">
+                <a:solidFill>
+                  <a:srgbClr val="202020"/>
+                </a:solidFill>
+                <a:latin typeface="Aptos"/>
+              </a:defRPr>
+            </a:pPr>
+            <a:r>
               <a:t>• What is the longest feedback-time bottleneck today?</a:t>
+            </a:r>
+          </a:p>
+        </p:txBody>
+      </p:sp>
+      <p:sp>
+        <p:nvSpPr>
+          <p:cNvPr id="4" name="Slide Number Placeholder 3"/>
+          <p:cNvSpPr>
+            <a:spLocks noGrp="1"/>
+          </p:cNvSpPr>
+          <p:nvPr>
+            <p:ph type="sldNum" idx="5" sz="quarter"/>
+          </p:nvPr>
+        </p:nvSpPr>
+        <p:spPr/>
+      </p:sp>
+    </p:spTree>
+  </p:cSld>
+  <p:clrMapOvr>
+    <a:masterClrMapping/>
+  </p:clrMapOvr>
+</p:notes>
+</file>
+
+<file path=ppt/notesSlides/notesSlide18.xml><?xml version="1.0" encoding="utf-8"?>
+<p:notes xmlns:a="http://schemas.openxmlformats.org/drawingml/2006/main" xmlns:p="http://schemas.openxmlformats.org/presentationml/2006/main" xmlns:r="http://schemas.openxmlformats.org/officeDocument/2006/relationships">
+  <p:cSld>
+    <p:spTree>
+      <p:nvGrpSpPr>
+        <p:cNvPr id="1" name=""/>
+        <p:cNvGrpSpPr/>
+        <p:nvPr/>
+      </p:nvGrpSpPr>
+      <p:grpSpPr>
+        <a:xfrm>
+          <a:off x="0" y="0"/>
+          <a:ext cx="0" cy="0"/>
+          <a:chOff x="0" y="0"/>
+          <a:chExt cx="0" cy="0"/>
+        </a:xfrm>
+      </p:grpSpPr>
+      <p:sp>
+        <p:nvSpPr>
+          <p:cNvPr id="2" name="Slide Image Placeholder 1"/>
+          <p:cNvSpPr>
+            <a:spLocks noGrp="1"/>
+          </p:cNvSpPr>
+          <p:nvPr>
+            <p:ph type="sldImg" idx="2"/>
+          </p:nvPr>
+        </p:nvSpPr>
+        <p:spPr/>
+      </p:sp>
+      <p:sp>
+        <p:nvSpPr>
+          <p:cNvPr id="3" name="Notes Placeholder 2"/>
+          <p:cNvSpPr>
+            <a:spLocks noGrp="1"/>
+          </p:cNvSpPr>
+          <p:nvPr>
+            <p:ph type="body" idx="3" sz="quarter"/>
+          </p:nvPr>
+        </p:nvSpPr>
+        <p:spPr/>
+        <p:txBody>
+          <a:bodyPr wrap="square"/>
+          <a:lstStyle/>
+          <a:p>
+            <a:pPr>
+              <a:spcAft>
+                <a:spcPts val="800"/>
+              </a:spcAft>
+              <a:defRPr sz="2000" b="1">
+                <a:solidFill>
+                  <a:srgbClr val="1F4E79"/>
+                </a:solidFill>
+                <a:latin typeface="Aptos"/>
+              </a:defRPr>
+            </a:pPr>
+            <a:r>
+              <a:t>PRESENTER NOTES</a:t>
+            </a:r>
+          </a:p>
+          <a:p>
+            <a:pPr>
+              <a:spcAft>
+                <a:spcPts val="1200"/>
+              </a:spcAft>
+              <a:defRPr sz="1600" b="1">
+                <a:solidFill>
+                  <a:srgbClr val="2E7D32"/>
+                </a:solidFill>
+                <a:latin typeface="Aptos"/>
+              </a:defRPr>
+            </a:pPr>
+            <a:r>
+              <a:t>Timing: Reference slide; no presentation time required</a:t>
+            </a:r>
+          </a:p>
+          <a:p>
+            <a:pPr>
+              <a:spcAft>
+                <a:spcPts val="500"/>
+              </a:spcAft>
+              <a:defRPr sz="1600" b="1">
+                <a:solidFill>
+                  <a:srgbClr val="1F4E79"/>
+                </a:solidFill>
+                <a:latin typeface="Aptos"/>
+              </a:defRPr>
+            </a:pPr>
+            <a:r>
+              <a:t>Feature summary</a:t>
+            </a:r>
+          </a:p>
+          <a:p>
+            <a:pPr>
+              <a:lnSpc>
+                <a:spcPct val="110000"/>
+              </a:lnSpc>
+              <a:spcAft>
+                <a:spcPts val="1200"/>
+              </a:spcAft>
+              <a:defRPr sz="1500">
+                <a:solidFill>
+                  <a:srgbClr val="202020"/>
+                </a:solidFill>
+                <a:latin typeface="Aptos"/>
+              </a:defRPr>
+            </a:pPr>
+            <a:r>
+              <a:t>This slide provides the official GitHub Changelog source for every feature covered in the presentation.</a:t>
+            </a:r>
+          </a:p>
+          <a:p>
+            <a:pPr>
+              <a:spcAft>
+                <a:spcPts val="500"/>
+              </a:spcAft>
+              <a:defRPr sz="1600" b="1">
+                <a:solidFill>
+                  <a:srgbClr val="1F4E79"/>
+                </a:solidFill>
+                <a:latin typeface="Aptos"/>
+              </a:defRPr>
+            </a:pPr>
+            <a:r>
+              <a:t>Presenter cues</a:t>
+            </a:r>
+          </a:p>
+          <a:p>
+            <a:pPr>
+              <a:lnSpc>
+                <a:spcPct val="110000"/>
+              </a:lnSpc>
+              <a:spcAft>
+                <a:spcPts val="700"/>
+              </a:spcAft>
+              <a:defRPr sz="1500">
+                <a:solidFill>
+                  <a:srgbClr val="202020"/>
+                </a:solidFill>
+                <a:latin typeface="Aptos"/>
+              </a:defRPr>
+            </a:pPr>
+            <a:r>
+              <a:t>• Leave this slide displayed after Q&amp;A or share it with attendees as a follow-up resource.</a:t>
+            </a:r>
+          </a:p>
+          <a:p>
+            <a:pPr>
+              <a:lnSpc>
+                <a:spcPct val="110000"/>
+              </a:lnSpc>
+              <a:spcAft>
+                <a:spcPts val="700"/>
+              </a:spcAft>
+              <a:defRPr sz="1500">
+                <a:solidFill>
+                  <a:srgbClr val="202020"/>
+                </a:solidFill>
+                <a:latin typeface="Aptos"/>
+              </a:defRPr>
+            </a:pPr>
+            <a:r>
+              <a:t>• Each URL is clickable.</a:t>
             </a:r>
           </a:p>
         </p:txBody>
@@ -2784,7 +3215,7 @@
               </a:defRPr>
             </a:pPr>
             <a:r>
-              <a:t>Timing: 3 minutes</a:t>
+              <a:t>Timing: 2 minutes</a:t>
             </a:r>
           </a:p>
           <a:p>
@@ -3175,7 +3606,7 @@
               </a:defRPr>
             </a:pPr>
             <a:r>
-              <a:t>Timing: 4 minutes</a:t>
+              <a:t>Timing: 3 minutes</a:t>
             </a:r>
           </a:p>
           <a:p>
@@ -7130,7 +7561,7 @@
                 </a:solidFill>
                 <a:latin typeface="Aptos"/>
               </a:rPr>
-              <a:t>Six updates · two live demos · five performance moves</a:t>
+              <a:t>Six updates · three live demos · five performance moves</a:t>
             </a:r>
           </a:p>
         </p:txBody>
@@ -8901,7 +9332,7 @@
                 </a:solidFill>
                 <a:latin typeface="Aptos"/>
               </a:rPr>
-              <a:t>Demo setup: one dispatch, two visible results</a:t>
+              <a:t>Demo setup: one dispatch, three visible results</a:t>
             </a:r>
           </a:p>
         </p:txBody>
@@ -9144,8 +9575,8 @@
         </p:nvSpPr>
         <p:spPr>
           <a:xfrm>
-            <a:off x="4892040" y="2057400"/>
-            <a:ext cx="2743200" cy="1143000"/>
+            <a:off x="4892040" y="1783080"/>
+            <a:ext cx="2743200" cy="960120"/>
           </a:xfrm>
           <a:prstGeom prst="roundRect">
             <a:avLst/>
@@ -9189,7 +9620,7 @@
         </p:nvSpPr>
         <p:spPr>
           <a:xfrm>
-            <a:off x="4892040" y="2432304"/>
+            <a:off x="4892040" y="2112264"/>
             <a:ext cx="2743200" cy="274320"/>
           </a:xfrm>
           <a:prstGeom prst="rect">
@@ -9205,7 +9636,7 @@
           <a:p>
             <a:pPr algn="ctr"/>
             <a:r>
-              <a:rPr sz="1700" b="1">
+              <a:rPr sz="1600" b="1">
                 <a:solidFill>
                   <a:srgbClr val="F0F6FC"/>
                 </a:solidFill>
@@ -9224,8 +9655,8 @@
         </p:nvSpPr>
         <p:spPr>
           <a:xfrm>
-            <a:off x="4892040" y="3703320"/>
-            <a:ext cx="2743200" cy="1143000"/>
+            <a:off x="4892040" y="3063240"/>
+            <a:ext cx="2743200" cy="960120"/>
           </a:xfrm>
           <a:prstGeom prst="roundRect">
             <a:avLst/>
@@ -9269,7 +9700,7 @@
         </p:nvSpPr>
         <p:spPr>
           <a:xfrm>
-            <a:off x="4892040" y="4078224"/>
+            <a:off x="4892040" y="3392424"/>
             <a:ext cx="2743200" cy="274320"/>
           </a:xfrm>
           <a:prstGeom prst="rect">
@@ -9285,7 +9716,7 @@
           <a:p>
             <a:pPr algn="ctr"/>
             <a:r>
-              <a:rPr sz="1700" b="1">
+              <a:rPr sz="1600" b="1">
                 <a:solidFill>
                   <a:srgbClr val="F0F6FC"/>
                 </a:solidFill>
@@ -9298,7 +9729,87 @@
       </p:sp>
       <p:sp>
         <p:nvSpPr>
-          <p:cNvPr id="14" name="TextBox 13"/>
+          <p:cNvPr id="14" name="Rounded Rectangle 13"/>
+          <p:cNvSpPr/>
+          <p:nvPr/>
+        </p:nvSpPr>
+        <p:spPr>
+          <a:xfrm>
+            <a:off x="4892040" y="4343400"/>
+            <a:ext cx="2743200" cy="960120"/>
+          </a:xfrm>
+          <a:prstGeom prst="roundRect">
+            <a:avLst/>
+          </a:prstGeom>
+          <a:solidFill>
+            <a:srgbClr val="161B22"/>
+          </a:solidFill>
+          <a:ln>
+            <a:solidFill>
+              <a:srgbClr val="58A6FF"/>
+            </a:solidFill>
+          </a:ln>
+        </p:spPr>
+        <p:style>
+          <a:lnRef idx="1">
+            <a:schemeClr val="accent1"/>
+          </a:lnRef>
+          <a:fillRef idx="3">
+            <a:schemeClr val="accent1"/>
+          </a:fillRef>
+          <a:effectRef idx="2">
+            <a:schemeClr val="accent1"/>
+          </a:effectRef>
+          <a:fontRef idx="minor">
+            <a:schemeClr val="lt1"/>
+          </a:fontRef>
+        </p:style>
+        <p:txBody>
+          <a:bodyPr rtlCol="0" anchor="ctr"/>
+          <a:lstStyle/>
+          <a:p>
+            <a:pPr algn="ctr"/>
+          </a:p>
+        </p:txBody>
+      </p:sp>
+      <p:sp>
+        <p:nvSpPr>
+          <p:cNvPr id="15" name="TextBox 14"/>
+          <p:cNvSpPr txBox="1"/>
+          <p:nvPr/>
+        </p:nvSpPr>
+        <p:spPr>
+          <a:xfrm>
+            <a:off x="4892040" y="4672584"/>
+            <a:ext cx="2743200" cy="274320"/>
+          </a:xfrm>
+          <a:prstGeom prst="rect">
+            <a:avLst/>
+          </a:prstGeom>
+          <a:noFill/>
+        </p:spPr>
+        <p:txBody>
+          <a:bodyPr wrap="square" lIns="36576" rIns="36576" tIns="36576" bIns="36576" anchor="t">
+            <a:spAutoFit/>
+          </a:bodyPr>
+          <a:lstStyle/>
+          <a:p>
+            <a:pPr algn="ctr"/>
+            <a:r>
+              <a:rPr sz="1600" b="1">
+                <a:solidFill>
+                  <a:srgbClr val="F0F6FC"/>
+                </a:solidFill>
+                <a:latin typeface="Aptos"/>
+              </a:rPr>
+              <a:t>CodeQL attribution</a:t>
+            </a:r>
+          </a:p>
+        </p:txBody>
+      </p:sp>
+      <p:sp>
+        <p:nvSpPr>
+          <p:cNvPr id="16" name="TextBox 15"/>
           <p:cNvSpPr txBox="1"/>
           <p:nvPr/>
         </p:nvSpPr>
@@ -9333,7 +9844,7 @@
       </p:sp>
       <p:sp>
         <p:nvSpPr>
-          <p:cNvPr id="15" name="Rounded Rectangle 14"/>
+          <p:cNvPr id="17" name="Rounded Rectangle 16"/>
           <p:cNvSpPr/>
           <p:nvPr/>
         </p:nvSpPr>
@@ -9378,7 +9889,7 @@
       </p:sp>
       <p:sp>
         <p:nvSpPr>
-          <p:cNvPr id="16" name="TextBox 15"/>
+          <p:cNvPr id="18" name="TextBox 17"/>
           <p:cNvSpPr txBox="1"/>
           <p:nvPr/>
         </p:nvSpPr>
@@ -9413,7 +9924,7 @@
       </p:sp>
       <p:sp>
         <p:nvSpPr>
-          <p:cNvPr id="17" name="TextBox 16"/>
+          <p:cNvPr id="19" name="TextBox 18"/>
           <p:cNvSpPr txBox="1"/>
           <p:nvPr/>
         </p:nvSpPr>
@@ -9448,7 +9959,7 @@
       </p:sp>
       <p:sp>
         <p:nvSpPr>
-          <p:cNvPr id="18" name="TextBox 17"/>
+          <p:cNvPr id="20" name="TextBox 19"/>
           <p:cNvSpPr txBox="1"/>
           <p:nvPr/>
         </p:nvSpPr>
@@ -10636,7 +11147,7 @@
                 </a:solidFill>
                 <a:latin typeface="Aptos"/>
               </a:rPr>
-              <a:t>FINAL FIVE MINUTES</a:t>
+              <a:t>LIVE DEMO · 3 MINUTES</a:t>
             </a:r>
           </a:p>
         </p:txBody>
@@ -10671,7 +11182,7 @@
                 </a:solidFill>
                 <a:latin typeface="Aptos"/>
               </a:rPr>
-              <a:t>Five performance moves with outsized returns</a:t>
+              <a:t>Demo 3: separate CodeQL workload attribution</a:t>
             </a:r>
           </a:p>
         </p:txBody>
@@ -10764,14 +11275,176 @@
         </p:nvSpPr>
         <p:spPr>
           <a:xfrm>
-            <a:off x="777240" y="1700784"/>
-            <a:ext cx="530352" cy="530352"/>
+            <a:off x="777240" y="1828800"/>
+            <a:ext cx="4937760" cy="1234440"/>
           </a:xfrm>
           <a:prstGeom prst="roundRect">
             <a:avLst/>
           </a:prstGeom>
           <a:solidFill>
-            <a:srgbClr val="58A6FF"/>
+            <a:srgbClr val="161B22"/>
+          </a:solidFill>
+          <a:ln>
+            <a:solidFill>
+              <a:srgbClr val="21262D"/>
+            </a:solidFill>
+          </a:ln>
+        </p:spPr>
+        <p:style>
+          <a:lnRef idx="1">
+            <a:schemeClr val="accent1"/>
+          </a:lnRef>
+          <a:fillRef idx="3">
+            <a:schemeClr val="accent1"/>
+          </a:fillRef>
+          <a:effectRef idx="2">
+            <a:schemeClr val="accent1"/>
+          </a:effectRef>
+          <a:fontRef idx="minor">
+            <a:schemeClr val="lt1"/>
+          </a:fontRef>
+        </p:style>
+        <p:txBody>
+          <a:bodyPr rtlCol="0" anchor="ctr"/>
+          <a:lstStyle/>
+          <a:p>
+            <a:pPr algn="ctr"/>
+          </a:p>
+        </p:txBody>
+      </p:sp>
+      <p:sp>
+        <p:nvSpPr>
+          <p:cNvPr id="7" name="TextBox 6"/>
+          <p:cNvSpPr txBox="1"/>
+          <p:nvPr/>
+        </p:nvSpPr>
+        <p:spPr>
+          <a:xfrm>
+            <a:off x="1005840" y="2029968"/>
+            <a:ext cx="4480560" cy="868680"/>
+          </a:xfrm>
+          <a:prstGeom prst="rect">
+            <a:avLst/>
+          </a:prstGeom>
+          <a:noFill/>
+        </p:spPr>
+        <p:txBody>
+          <a:bodyPr wrap="square" lIns="36576" rIns="36576" tIns="36576" bIns="36576" anchor="t">
+            <a:spAutoFit/>
+          </a:bodyPr>
+          <a:lstStyle/>
+          <a:p>
+            <a:pPr algn="l"/>
+            <a:r>
+              <a:rPr sz="1600" b="0">
+                <a:solidFill>
+                  <a:srgbClr val="F0F6FC"/>
+                </a:solidFill>
+                <a:latin typeface="Cascadia Mono"/>
+              </a:rPr>
+              <a:t>gh api "repos/$GITHUB_REPOSITORY/
+  actions/runs?actor=github-code-quality"</a:t>
+            </a:r>
+          </a:p>
+        </p:txBody>
+      </p:sp>
+      <p:sp>
+        <p:nvSpPr>
+          <p:cNvPr id="8" name="Rounded Rectangle 7"/>
+          <p:cNvSpPr/>
+          <p:nvPr/>
+        </p:nvSpPr>
+        <p:spPr>
+          <a:xfrm>
+            <a:off x="6080760" y="1828800"/>
+            <a:ext cx="5303520" cy="1234440"/>
+          </a:xfrm>
+          <a:prstGeom prst="roundRect">
+            <a:avLst/>
+          </a:prstGeom>
+          <a:solidFill>
+            <a:srgbClr val="161B22"/>
+          </a:solidFill>
+          <a:ln>
+            <a:solidFill>
+              <a:srgbClr val="21262D"/>
+            </a:solidFill>
+          </a:ln>
+        </p:spPr>
+        <p:style>
+          <a:lnRef idx="1">
+            <a:schemeClr val="accent1"/>
+          </a:lnRef>
+          <a:fillRef idx="3">
+            <a:schemeClr val="accent1"/>
+          </a:fillRef>
+          <a:effectRef idx="2">
+            <a:schemeClr val="accent1"/>
+          </a:effectRef>
+          <a:fontRef idx="minor">
+            <a:schemeClr val="lt1"/>
+          </a:fontRef>
+        </p:style>
+        <p:txBody>
+          <a:bodyPr rtlCol="0" anchor="ctr"/>
+          <a:lstStyle/>
+          <a:p>
+            <a:pPr algn="ctr"/>
+          </a:p>
+        </p:txBody>
+      </p:sp>
+      <p:sp>
+        <p:nvSpPr>
+          <p:cNvPr id="9" name="TextBox 8"/>
+          <p:cNvSpPr txBox="1"/>
+          <p:nvPr/>
+        </p:nvSpPr>
+        <p:spPr>
+          <a:xfrm>
+            <a:off x="6309360" y="2029968"/>
+            <a:ext cx="4846320" cy="868680"/>
+          </a:xfrm>
+          <a:prstGeom prst="rect">
+            <a:avLst/>
+          </a:prstGeom>
+          <a:noFill/>
+        </p:spPr>
+        <p:txBody>
+          <a:bodyPr wrap="square" lIns="36576" rIns="36576" tIns="36576" bIns="36576" anchor="t">
+            <a:spAutoFit/>
+          </a:bodyPr>
+          <a:lstStyle/>
+          <a:p>
+            <a:pPr algn="l"/>
+            <a:r>
+              <a:rPr sz="1600" b="0">
+                <a:solidFill>
+                  <a:srgbClr val="F0F6FC"/>
+                </a:solidFill>
+                <a:latin typeface="Cascadia Mono"/>
+              </a:rPr>
+              <a:t>gh api "repos/$GITHUB_REPOSITORY/
+  actions/runs?actor=github-advanced-security"</a:t>
+            </a:r>
+          </a:p>
+        </p:txBody>
+      </p:sp>
+      <p:sp>
+        <p:nvSpPr>
+          <p:cNvPr id="10" name="Rounded Rectangle 9"/>
+          <p:cNvSpPr/>
+          <p:nvPr/>
+        </p:nvSpPr>
+        <p:spPr>
+          <a:xfrm>
+            <a:off x="777240" y="3429000"/>
+            <a:ext cx="4937760" cy="1371600"/>
+          </a:xfrm>
+          <a:prstGeom prst="roundRect">
+            <a:avLst/>
+          </a:prstGeom>
+          <a:solidFill>
+            <a:srgbClr val="161B22"/>
           </a:solidFill>
           <a:ln>
             <a:solidFill>
@@ -10803,14 +11476,14 @@
       </p:sp>
       <p:sp>
         <p:nvSpPr>
-          <p:cNvPr id="7" name="TextBox 6"/>
-          <p:cNvSpPr txBox="1"/>
-          <p:nvPr/>
-        </p:nvSpPr>
-        <p:spPr>
-          <a:xfrm>
-            <a:off x="777240" y="1828800"/>
-            <a:ext cx="530352" cy="219456"/>
+          <p:cNvPr id="11" name="TextBox 10"/>
+          <p:cNvSpPr txBox="1"/>
+          <p:nvPr/>
+        </p:nvSpPr>
+        <p:spPr>
+          <a:xfrm>
+            <a:off x="1024128" y="3675887"/>
+            <a:ext cx="1828800" cy="274320"/>
           </a:xfrm>
           <a:prstGeom prst="rect">
             <a:avLst/>
@@ -10823,29 +11496,29 @@
           </a:bodyPr>
           <a:lstStyle/>
           <a:p>
-            <a:pPr algn="ctr"/>
-            <a:r>
-              <a:rPr sz="1300" b="1">
-                <a:solidFill>
-                  <a:srgbClr val="0D1117"/>
-                </a:solidFill>
-                <a:latin typeface="Aptos"/>
-              </a:rPr>
-              <a:t>1</a:t>
-            </a:r>
-          </a:p>
-        </p:txBody>
-      </p:sp>
-      <p:sp>
-        <p:nvSpPr>
-          <p:cNvPr id="8" name="TextBox 7"/>
-          <p:cNvSpPr txBox="1"/>
-          <p:nvPr/>
-        </p:nvSpPr>
-        <p:spPr>
-          <a:xfrm>
-            <a:off x="1536192" y="1691640"/>
-            <a:ext cx="2560320" cy="310896"/>
+            <a:pPr algn="l"/>
+            <a:r>
+              <a:rPr sz="1800" b="1">
+                <a:solidFill>
+                  <a:srgbClr val="58A6FF"/>
+                </a:solidFill>
+                <a:latin typeface="Aptos"/>
+              </a:rPr>
+              <a:t>Code Quality</a:t>
+            </a:r>
+          </a:p>
+        </p:txBody>
+      </p:sp>
+      <p:sp>
+        <p:nvSpPr>
+          <p:cNvPr id="12" name="TextBox 11"/>
+          <p:cNvSpPr txBox="1"/>
+          <p:nvPr/>
+        </p:nvSpPr>
+        <p:spPr>
+          <a:xfrm>
+            <a:off x="1024128" y="4050791"/>
+            <a:ext cx="4114800" cy="246888"/>
           </a:xfrm>
           <a:prstGeom prst="rect">
             <a:avLst/>
@@ -10860,27 +11533,27 @@
           <a:p>
             <a:pPr algn="l"/>
             <a:r>
-              <a:rPr sz="1800" b="1">
+              <a:rPr sz="1400" b="0">
                 <a:solidFill>
                   <a:srgbClr val="F0F6FC"/>
                 </a:solidFill>
-                <a:latin typeface="Aptos"/>
-              </a:rPr>
-              <a:t>Cancel stale work</a:t>
-            </a:r>
-          </a:p>
-        </p:txBody>
-      </p:sp>
-      <p:sp>
-        <p:nvSpPr>
-          <p:cNvPr id="9" name="TextBox 8"/>
-          <p:cNvSpPr txBox="1"/>
-          <p:nvPr/>
-        </p:nvSpPr>
-        <p:spPr>
-          <a:xfrm>
-            <a:off x="3886200" y="1719072"/>
-            <a:ext cx="7223760" cy="292608"/>
+                <a:latin typeface="Cascadia Mono"/>
+              </a:rPr>
+              <a:t>actor: github-code-quality</a:t>
+            </a:r>
+          </a:p>
+        </p:txBody>
+      </p:sp>
+      <p:sp>
+        <p:nvSpPr>
+          <p:cNvPr id="13" name="TextBox 12"/>
+          <p:cNvSpPr txBox="1"/>
+          <p:nvPr/>
+        </p:nvSpPr>
+        <p:spPr>
+          <a:xfrm>
+            <a:off x="1024128" y="4379976"/>
+            <a:ext cx="4389120" cy="246888"/>
           </a:xfrm>
           <a:prstGeom prst="rect">
             <a:avLst/>
@@ -10895,33 +11568,33 @@
           <a:p>
             <a:pPr algn="l"/>
             <a:r>
-              <a:rPr sz="1500" b="0">
-                <a:solidFill>
-                  <a:srgbClr val="8B949E"/>
-                </a:solidFill>
-                <a:latin typeface="Aptos"/>
-              </a:rPr>
-              <a:t>Use concurrency groups with cancel-in-progress for PRs.</a:t>
-            </a:r>
-          </a:p>
-        </p:txBody>
-      </p:sp>
-      <p:sp>
-        <p:nvSpPr>
-          <p:cNvPr id="10" name="Rounded Rectangle 9"/>
+              <a:rPr sz="1300" b="0">
+                <a:solidFill>
+                  <a:srgbClr val="F0F6FC"/>
+                </a:solidFill>
+                <a:latin typeface="Cascadia Mono"/>
+              </a:rPr>
+              <a:t>path: dynamic/github-code-quality/codeql</a:t>
+            </a:r>
+          </a:p>
+        </p:txBody>
+      </p:sp>
+      <p:sp>
+        <p:nvSpPr>
+          <p:cNvPr id="14" name="Rounded Rectangle 13"/>
           <p:cNvSpPr/>
           <p:nvPr/>
         </p:nvSpPr>
         <p:spPr>
           <a:xfrm>
-            <a:off x="777240" y="2569464"/>
-            <a:ext cx="530352" cy="530352"/>
+            <a:off x="6080760" y="3429000"/>
+            <a:ext cx="5303520" cy="1371600"/>
           </a:xfrm>
           <a:prstGeom prst="roundRect">
             <a:avLst/>
           </a:prstGeom>
           <a:solidFill>
-            <a:srgbClr val="BC8CFF"/>
+            <a:srgbClr val="161B22"/>
           </a:solidFill>
           <a:ln>
             <a:solidFill>
@@ -10953,14 +11626,14 @@
       </p:sp>
       <p:sp>
         <p:nvSpPr>
-          <p:cNvPr id="11" name="TextBox 10"/>
-          <p:cNvSpPr txBox="1"/>
-          <p:nvPr/>
-        </p:nvSpPr>
-        <p:spPr>
-          <a:xfrm>
-            <a:off x="777240" y="2697480"/>
-            <a:ext cx="530352" cy="219456"/>
+          <p:cNvPr id="15" name="TextBox 14"/>
+          <p:cNvSpPr txBox="1"/>
+          <p:nvPr/>
+        </p:nvSpPr>
+        <p:spPr>
+          <a:xfrm>
+            <a:off x="6327648" y="3675887"/>
+            <a:ext cx="1828800" cy="274320"/>
           </a:xfrm>
           <a:prstGeom prst="rect">
             <a:avLst/>
@@ -10973,622 +11646,127 @@
           </a:bodyPr>
           <a:lstStyle/>
           <a:p>
+            <a:pPr algn="l"/>
+            <a:r>
+              <a:rPr sz="1800" b="1">
+                <a:solidFill>
+                  <a:srgbClr val="BC8CFF"/>
+                </a:solidFill>
+                <a:latin typeface="Aptos"/>
+              </a:rPr>
+              <a:t>Code scanning</a:t>
+            </a:r>
+          </a:p>
+        </p:txBody>
+      </p:sp>
+      <p:sp>
+        <p:nvSpPr>
+          <p:cNvPr id="16" name="TextBox 15"/>
+          <p:cNvSpPr txBox="1"/>
+          <p:nvPr/>
+        </p:nvSpPr>
+        <p:spPr>
+          <a:xfrm>
+            <a:off x="6327648" y="4050791"/>
+            <a:ext cx="4389120" cy="246888"/>
+          </a:xfrm>
+          <a:prstGeom prst="rect">
+            <a:avLst/>
+          </a:prstGeom>
+          <a:noFill/>
+        </p:spPr>
+        <p:txBody>
+          <a:bodyPr wrap="square" lIns="36576" rIns="36576" tIns="36576" bIns="36576" anchor="t">
+            <a:spAutoFit/>
+          </a:bodyPr>
+          <a:lstStyle/>
+          <a:p>
+            <a:pPr algn="l"/>
+            <a:r>
+              <a:rPr sz="1400" b="0">
+                <a:solidFill>
+                  <a:srgbClr val="F0F6FC"/>
+                </a:solidFill>
+                <a:latin typeface="Cascadia Mono"/>
+              </a:rPr>
+              <a:t>actor: github-advanced-security</a:t>
+            </a:r>
+          </a:p>
+        </p:txBody>
+      </p:sp>
+      <p:sp>
+        <p:nvSpPr>
+          <p:cNvPr id="17" name="TextBox 16"/>
+          <p:cNvSpPr txBox="1"/>
+          <p:nvPr/>
+        </p:nvSpPr>
+        <p:spPr>
+          <a:xfrm>
+            <a:off x="6327648" y="4379976"/>
+            <a:ext cx="4572000" cy="246888"/>
+          </a:xfrm>
+          <a:prstGeom prst="rect">
+            <a:avLst/>
+          </a:prstGeom>
+          <a:noFill/>
+        </p:spPr>
+        <p:txBody>
+          <a:bodyPr wrap="square" lIns="36576" rIns="36576" tIns="36576" bIns="36576" anchor="t">
+            <a:spAutoFit/>
+          </a:bodyPr>
+          <a:lstStyle/>
+          <a:p>
+            <a:pPr algn="l"/>
+            <a:r>
+              <a:rPr sz="1300" b="0">
+                <a:solidFill>
+                  <a:srgbClr val="F0F6FC"/>
+                </a:solidFill>
+                <a:latin typeface="Cascadia Mono"/>
+              </a:rPr>
+              <a:t>path: dynamic/github-code-scanning/codeql</a:t>
+            </a:r>
+          </a:p>
+        </p:txBody>
+      </p:sp>
+      <p:sp>
+        <p:nvSpPr>
+          <p:cNvPr id="18" name="TextBox 17"/>
+          <p:cNvSpPr txBox="1"/>
+          <p:nvPr/>
+        </p:nvSpPr>
+        <p:spPr>
+          <a:xfrm>
+            <a:off x="1005840" y="5532120"/>
+            <a:ext cx="10149840" cy="365760"/>
+          </a:xfrm>
+          <a:prstGeom prst="rect">
+            <a:avLst/>
+          </a:prstGeom>
+          <a:noFill/>
+        </p:spPr>
+        <p:txBody>
+          <a:bodyPr wrap="square" lIns="36576" rIns="36576" tIns="36576" bIns="36576" anchor="t">
+            <a:spAutoFit/>
+          </a:bodyPr>
+          <a:lstStyle/>
+          <a:p>
             <a:pPr algn="ctr"/>
             <a:r>
-              <a:rPr sz="1300" b="1">
-                <a:solidFill>
-                  <a:srgbClr val="0D1117"/>
-                </a:solidFill>
-                <a:latin typeface="Aptos"/>
-              </a:rPr>
-              <a:t>2</a:t>
-            </a:r>
-          </a:p>
-        </p:txBody>
-      </p:sp>
-      <p:sp>
-        <p:nvSpPr>
-          <p:cNvPr id="12" name="TextBox 11"/>
-          <p:cNvSpPr txBox="1"/>
-          <p:nvPr/>
-        </p:nvSpPr>
-        <p:spPr>
-          <a:xfrm>
-            <a:off x="1536192" y="2560320"/>
-            <a:ext cx="2560320" cy="310896"/>
-          </a:xfrm>
-          <a:prstGeom prst="rect">
-            <a:avLst/>
-          </a:prstGeom>
-          <a:noFill/>
-        </p:spPr>
-        <p:txBody>
-          <a:bodyPr wrap="square" lIns="36576" rIns="36576" tIns="36576" bIns="36576" anchor="t">
-            <a:spAutoFit/>
-          </a:bodyPr>
-          <a:lstStyle/>
-          <a:p>
-            <a:pPr algn="l"/>
-            <a:r>
-              <a:rPr sz="1800" b="1">
-                <a:solidFill>
-                  <a:srgbClr val="F0F6FC"/>
-                </a:solidFill>
-                <a:latin typeface="Aptos"/>
-              </a:rPr>
-              <a:t>Cache with intent</a:t>
-            </a:r>
-          </a:p>
-        </p:txBody>
-      </p:sp>
-      <p:sp>
-        <p:nvSpPr>
-          <p:cNvPr id="13" name="TextBox 12"/>
-          <p:cNvSpPr txBox="1"/>
-          <p:nvPr/>
-        </p:nvSpPr>
-        <p:spPr>
-          <a:xfrm>
-            <a:off x="3886200" y="2587752"/>
-            <a:ext cx="7223760" cy="292608"/>
-          </a:xfrm>
-          <a:prstGeom prst="rect">
-            <a:avLst/>
-          </a:prstGeom>
-          <a:noFill/>
-        </p:spPr>
-        <p:txBody>
-          <a:bodyPr wrap="square" lIns="36576" rIns="36576" tIns="36576" bIns="36576" anchor="t">
-            <a:spAutoFit/>
-          </a:bodyPr>
-          <a:lstStyle/>
-          <a:p>
-            <a:pPr algn="l"/>
-            <a:r>
-              <a:rPr sz="1500" b="0">
-                <a:solidFill>
-                  <a:srgbClr val="8B949E"/>
-                </a:solidFill>
-                <a:latin typeface="Aptos"/>
-              </a:rPr>
-              <a:t>Key on lockfiles; restore broadly; measure hit rate.</a:t>
-            </a:r>
-          </a:p>
-        </p:txBody>
-      </p:sp>
-      <p:sp>
-        <p:nvSpPr>
-          <p:cNvPr id="14" name="Rounded Rectangle 13"/>
-          <p:cNvSpPr/>
-          <p:nvPr/>
-        </p:nvSpPr>
-        <p:spPr>
-          <a:xfrm>
-            <a:off x="777240" y="3438144"/>
-            <a:ext cx="530352" cy="530352"/>
-          </a:xfrm>
-          <a:prstGeom prst="roundRect">
-            <a:avLst/>
-          </a:prstGeom>
-          <a:solidFill>
-            <a:srgbClr val="3FB950"/>
-          </a:solidFill>
-          <a:ln>
-            <a:solidFill>
-              <a:srgbClr val="3FB950"/>
-            </a:solidFill>
-          </a:ln>
-        </p:spPr>
-        <p:style>
-          <a:lnRef idx="1">
-            <a:schemeClr val="accent1"/>
-          </a:lnRef>
-          <a:fillRef idx="3">
-            <a:schemeClr val="accent1"/>
-          </a:fillRef>
-          <a:effectRef idx="2">
-            <a:schemeClr val="accent1"/>
-          </a:effectRef>
-          <a:fontRef idx="minor">
-            <a:schemeClr val="lt1"/>
-          </a:fontRef>
-        </p:style>
-        <p:txBody>
-          <a:bodyPr rtlCol="0" anchor="ctr"/>
-          <a:lstStyle/>
-          <a:p>
-            <a:pPr algn="ctr"/>
-          </a:p>
-        </p:txBody>
-      </p:sp>
-      <p:sp>
-        <p:nvSpPr>
-          <p:cNvPr id="15" name="TextBox 14"/>
-          <p:cNvSpPr txBox="1"/>
-          <p:nvPr/>
-        </p:nvSpPr>
-        <p:spPr>
-          <a:xfrm>
-            <a:off x="777240" y="3566160"/>
-            <a:ext cx="530352" cy="219456"/>
-          </a:xfrm>
-          <a:prstGeom prst="rect">
-            <a:avLst/>
-          </a:prstGeom>
-          <a:noFill/>
-        </p:spPr>
-        <p:txBody>
-          <a:bodyPr wrap="square" lIns="36576" rIns="36576" tIns="36576" bIns="36576" anchor="t">
-            <a:spAutoFit/>
-          </a:bodyPr>
-          <a:lstStyle/>
-          <a:p>
-            <a:pPr algn="ctr"/>
-            <a:r>
-              <a:rPr sz="1300" b="1">
-                <a:solidFill>
-                  <a:srgbClr val="0D1117"/>
-                </a:solidFill>
-                <a:latin typeface="Aptos"/>
-              </a:rPr>
-              <a:t>3</a:t>
-            </a:r>
-          </a:p>
-        </p:txBody>
-      </p:sp>
-      <p:sp>
-        <p:nvSpPr>
-          <p:cNvPr id="16" name="TextBox 15"/>
-          <p:cNvSpPr txBox="1"/>
-          <p:nvPr/>
-        </p:nvSpPr>
-        <p:spPr>
-          <a:xfrm>
-            <a:off x="1536192" y="3429000"/>
-            <a:ext cx="2560320" cy="310896"/>
-          </a:xfrm>
-          <a:prstGeom prst="rect">
-            <a:avLst/>
-          </a:prstGeom>
-          <a:noFill/>
-        </p:spPr>
-        <p:txBody>
-          <a:bodyPr wrap="square" lIns="36576" rIns="36576" tIns="36576" bIns="36576" anchor="t">
-            <a:spAutoFit/>
-          </a:bodyPr>
-          <a:lstStyle/>
-          <a:p>
-            <a:pPr algn="l"/>
-            <a:r>
-              <a:rPr sz="1800" b="1">
-                <a:solidFill>
-                  <a:srgbClr val="F0F6FC"/>
-                </a:solidFill>
-                <a:latin typeface="Aptos"/>
-              </a:rPr>
-              <a:t>Filter early</a:t>
-            </a:r>
-          </a:p>
-        </p:txBody>
-      </p:sp>
-      <p:sp>
-        <p:nvSpPr>
-          <p:cNvPr id="17" name="TextBox 16"/>
-          <p:cNvSpPr txBox="1"/>
-          <p:nvPr/>
-        </p:nvSpPr>
-        <p:spPr>
-          <a:xfrm>
-            <a:off x="3886200" y="3456432"/>
-            <a:ext cx="7223760" cy="292608"/>
-          </a:xfrm>
-          <a:prstGeom prst="rect">
-            <a:avLst/>
-          </a:prstGeom>
-          <a:noFill/>
-        </p:spPr>
-        <p:txBody>
-          <a:bodyPr wrap="square" lIns="36576" rIns="36576" tIns="36576" bIns="36576" anchor="t">
-            <a:spAutoFit/>
-          </a:bodyPr>
-          <a:lstStyle/>
-          <a:p>
-            <a:pPr algn="l"/>
-            <a:r>
-              <a:rPr sz="1500" b="0">
-                <a:solidFill>
-                  <a:srgbClr val="8B949E"/>
-                </a:solidFill>
-                <a:latin typeface="Aptos"/>
-              </a:rPr>
-              <a:t>Use paths, branches, and job if conditions before runners start.</a:t>
-            </a:r>
-          </a:p>
-        </p:txBody>
-      </p:sp>
-      <p:sp>
-        <p:nvSpPr>
-          <p:cNvPr id="18" name="Rounded Rectangle 17"/>
-          <p:cNvSpPr/>
-          <p:nvPr/>
-        </p:nvSpPr>
-        <p:spPr>
-          <a:xfrm>
-            <a:off x="777240" y="4306824"/>
-            <a:ext cx="530352" cy="530352"/>
-          </a:xfrm>
-          <a:prstGeom prst="roundRect">
-            <a:avLst/>
-          </a:prstGeom>
-          <a:solidFill>
-            <a:srgbClr val="D29922"/>
-          </a:solidFill>
-          <a:ln>
-            <a:solidFill>
-              <a:srgbClr val="D29922"/>
-            </a:solidFill>
-          </a:ln>
-        </p:spPr>
-        <p:style>
-          <a:lnRef idx="1">
-            <a:schemeClr val="accent1"/>
-          </a:lnRef>
-          <a:fillRef idx="3">
-            <a:schemeClr val="accent1"/>
-          </a:fillRef>
-          <a:effectRef idx="2">
-            <a:schemeClr val="accent1"/>
-          </a:effectRef>
-          <a:fontRef idx="minor">
-            <a:schemeClr val="lt1"/>
-          </a:fontRef>
-        </p:style>
-        <p:txBody>
-          <a:bodyPr rtlCol="0" anchor="ctr"/>
-          <a:lstStyle/>
-          <a:p>
-            <a:pPr algn="ctr"/>
+              <a:rPr sz="1900" b="1">
+                <a:solidFill>
+                  <a:srgbClr val="3FB950"/>
+                </a:solidFill>
+                <a:latin typeface="Aptos"/>
+              </a:rPr>
+              <a:t>Land the point: quality and security are now independently reportable.</a:t>
+            </a:r>
           </a:p>
         </p:txBody>
       </p:sp>
       <p:sp>
         <p:nvSpPr>
           <p:cNvPr id="19" name="TextBox 18"/>
-          <p:cNvSpPr txBox="1"/>
-          <p:nvPr/>
-        </p:nvSpPr>
-        <p:spPr>
-          <a:xfrm>
-            <a:off x="777240" y="4434840"/>
-            <a:ext cx="530352" cy="219456"/>
-          </a:xfrm>
-          <a:prstGeom prst="rect">
-            <a:avLst/>
-          </a:prstGeom>
-          <a:noFill/>
-        </p:spPr>
-        <p:txBody>
-          <a:bodyPr wrap="square" lIns="36576" rIns="36576" tIns="36576" bIns="36576" anchor="t">
-            <a:spAutoFit/>
-          </a:bodyPr>
-          <a:lstStyle/>
-          <a:p>
-            <a:pPr algn="ctr"/>
-            <a:r>
-              <a:rPr sz="1300" b="1">
-                <a:solidFill>
-                  <a:srgbClr val="0D1117"/>
-                </a:solidFill>
-                <a:latin typeface="Aptos"/>
-              </a:rPr>
-              <a:t>4</a:t>
-            </a:r>
-          </a:p>
-        </p:txBody>
-      </p:sp>
-      <p:sp>
-        <p:nvSpPr>
-          <p:cNvPr id="20" name="TextBox 19"/>
-          <p:cNvSpPr txBox="1"/>
-          <p:nvPr/>
-        </p:nvSpPr>
-        <p:spPr>
-          <a:xfrm>
-            <a:off x="1536192" y="4297680"/>
-            <a:ext cx="2560320" cy="310896"/>
-          </a:xfrm>
-          <a:prstGeom prst="rect">
-            <a:avLst/>
-          </a:prstGeom>
-          <a:noFill/>
-        </p:spPr>
-        <p:txBody>
-          <a:bodyPr wrap="square" lIns="36576" rIns="36576" tIns="36576" bIns="36576" anchor="t">
-            <a:spAutoFit/>
-          </a:bodyPr>
-          <a:lstStyle/>
-          <a:p>
-            <a:pPr algn="l"/>
-            <a:r>
-              <a:rPr sz="1800" b="1">
-                <a:solidFill>
-                  <a:srgbClr val="F0F6FC"/>
-                </a:solidFill>
-                <a:latin typeface="Aptos"/>
-              </a:rPr>
-              <a:t>Shrink the matrix</a:t>
-            </a:r>
-          </a:p>
-        </p:txBody>
-      </p:sp>
-      <p:sp>
-        <p:nvSpPr>
-          <p:cNvPr id="21" name="TextBox 20"/>
-          <p:cNvSpPr txBox="1"/>
-          <p:nvPr/>
-        </p:nvSpPr>
-        <p:spPr>
-          <a:xfrm>
-            <a:off x="3886200" y="4325112"/>
-            <a:ext cx="7223760" cy="292608"/>
-          </a:xfrm>
-          <a:prstGeom prst="rect">
-            <a:avLst/>
-          </a:prstGeom>
-          <a:noFill/>
-        </p:spPr>
-        <p:txBody>
-          <a:bodyPr wrap="square" lIns="36576" rIns="36576" tIns="36576" bIns="36576" anchor="t">
-            <a:spAutoFit/>
-          </a:bodyPr>
-          <a:lstStyle/>
-          <a:p>
-            <a:pPr algn="l"/>
-            <a:r>
-              <a:rPr sz="1500" b="0">
-                <a:solidFill>
-                  <a:srgbClr val="8B949E"/>
-                </a:solidFill>
-                <a:latin typeface="Aptos"/>
-              </a:rPr>
-              <a:t>Test representative combinations first; expand on main or nightly.</a:t>
-            </a:r>
-          </a:p>
-        </p:txBody>
-      </p:sp>
-      <p:sp>
-        <p:nvSpPr>
-          <p:cNvPr id="22" name="Rounded Rectangle 21"/>
-          <p:cNvSpPr/>
-          <p:nvPr/>
-        </p:nvSpPr>
-        <p:spPr>
-          <a:xfrm>
-            <a:off x="777240" y="5175504"/>
-            <a:ext cx="530352" cy="530352"/>
-          </a:xfrm>
-          <a:prstGeom prst="roundRect">
-            <a:avLst/>
-          </a:prstGeom>
-          <a:solidFill>
-            <a:srgbClr val="F85149"/>
-          </a:solidFill>
-          <a:ln>
-            <a:solidFill>
-              <a:srgbClr val="F85149"/>
-            </a:solidFill>
-          </a:ln>
-        </p:spPr>
-        <p:style>
-          <a:lnRef idx="1">
-            <a:schemeClr val="accent1"/>
-          </a:lnRef>
-          <a:fillRef idx="3">
-            <a:schemeClr val="accent1"/>
-          </a:fillRef>
-          <a:effectRef idx="2">
-            <a:schemeClr val="accent1"/>
-          </a:effectRef>
-          <a:fontRef idx="minor">
-            <a:schemeClr val="lt1"/>
-          </a:fontRef>
-        </p:style>
-        <p:txBody>
-          <a:bodyPr rtlCol="0" anchor="ctr"/>
-          <a:lstStyle/>
-          <a:p>
-            <a:pPr algn="ctr"/>
-          </a:p>
-        </p:txBody>
-      </p:sp>
-      <p:sp>
-        <p:nvSpPr>
-          <p:cNvPr id="23" name="TextBox 22"/>
-          <p:cNvSpPr txBox="1"/>
-          <p:nvPr/>
-        </p:nvSpPr>
-        <p:spPr>
-          <a:xfrm>
-            <a:off x="777240" y="5303520"/>
-            <a:ext cx="530352" cy="219456"/>
-          </a:xfrm>
-          <a:prstGeom prst="rect">
-            <a:avLst/>
-          </a:prstGeom>
-          <a:noFill/>
-        </p:spPr>
-        <p:txBody>
-          <a:bodyPr wrap="square" lIns="36576" rIns="36576" tIns="36576" bIns="36576" anchor="t">
-            <a:spAutoFit/>
-          </a:bodyPr>
-          <a:lstStyle/>
-          <a:p>
-            <a:pPr algn="ctr"/>
-            <a:r>
-              <a:rPr sz="1300" b="1">
-                <a:solidFill>
-                  <a:srgbClr val="0D1117"/>
-                </a:solidFill>
-                <a:latin typeface="Aptos"/>
-              </a:rPr>
-              <a:t>5</a:t>
-            </a:r>
-          </a:p>
-        </p:txBody>
-      </p:sp>
-      <p:sp>
-        <p:nvSpPr>
-          <p:cNvPr id="24" name="TextBox 23"/>
-          <p:cNvSpPr txBox="1"/>
-          <p:nvPr/>
-        </p:nvSpPr>
-        <p:spPr>
-          <a:xfrm>
-            <a:off x="1536192" y="5166360"/>
-            <a:ext cx="2560320" cy="310896"/>
-          </a:xfrm>
-          <a:prstGeom prst="rect">
-            <a:avLst/>
-          </a:prstGeom>
-          <a:noFill/>
-        </p:spPr>
-        <p:txBody>
-          <a:bodyPr wrap="square" lIns="36576" rIns="36576" tIns="36576" bIns="36576" anchor="t">
-            <a:spAutoFit/>
-          </a:bodyPr>
-          <a:lstStyle/>
-          <a:p>
-            <a:pPr algn="l"/>
-            <a:r>
-              <a:rPr sz="1800" b="1">
-                <a:solidFill>
-                  <a:srgbClr val="F0F6FC"/>
-                </a:solidFill>
-                <a:latin typeface="Aptos"/>
-              </a:rPr>
-              <a:t>Measure the queue</a:t>
-            </a:r>
-          </a:p>
-        </p:txBody>
-      </p:sp>
-      <p:sp>
-        <p:nvSpPr>
-          <p:cNvPr id="25" name="TextBox 24"/>
-          <p:cNvSpPr txBox="1"/>
-          <p:nvPr/>
-        </p:nvSpPr>
-        <p:spPr>
-          <a:xfrm>
-            <a:off x="3886200" y="5193792"/>
-            <a:ext cx="7223760" cy="292608"/>
-          </a:xfrm>
-          <a:prstGeom prst="rect">
-            <a:avLst/>
-          </a:prstGeom>
-          <a:noFill/>
-        </p:spPr>
-        <p:txBody>
-          <a:bodyPr wrap="square" lIns="36576" rIns="36576" tIns="36576" bIns="36576" anchor="t">
-            <a:spAutoFit/>
-          </a:bodyPr>
-          <a:lstStyle/>
-          <a:p>
-            <a:pPr algn="l"/>
-            <a:r>
-              <a:rPr sz="1500" b="0">
-                <a:solidFill>
-                  <a:srgbClr val="8B949E"/>
-                </a:solidFill>
-                <a:latin typeface="Aptos"/>
-              </a:rPr>
-              <a:t>Separate queue time from execution time before changing code.</a:t>
-            </a:r>
-          </a:p>
-        </p:txBody>
-      </p:sp>
-      <p:sp>
-        <p:nvSpPr>
-          <p:cNvPr id="26" name="Rounded Rectangle 25"/>
-          <p:cNvSpPr/>
-          <p:nvPr/>
-        </p:nvSpPr>
-        <p:spPr>
-          <a:xfrm>
-            <a:off x="777240" y="6062472"/>
-            <a:ext cx="10561320" cy="384048"/>
-          </a:xfrm>
-          <a:prstGeom prst="roundRect">
-            <a:avLst/>
-          </a:prstGeom>
-          <a:solidFill>
-            <a:srgbClr val="21262D"/>
-          </a:solidFill>
-          <a:ln>
-            <a:solidFill>
-              <a:srgbClr val="21262D"/>
-            </a:solidFill>
-          </a:ln>
-        </p:spPr>
-        <p:style>
-          <a:lnRef idx="1">
-            <a:schemeClr val="accent1"/>
-          </a:lnRef>
-          <a:fillRef idx="3">
-            <a:schemeClr val="accent1"/>
-          </a:fillRef>
-          <a:effectRef idx="2">
-            <a:schemeClr val="accent1"/>
-          </a:effectRef>
-          <a:fontRef idx="minor">
-            <a:schemeClr val="lt1"/>
-          </a:fontRef>
-        </p:style>
-        <p:txBody>
-          <a:bodyPr rtlCol="0" anchor="ctr"/>
-          <a:lstStyle/>
-          <a:p>
-            <a:pPr algn="ctr"/>
-          </a:p>
-        </p:txBody>
-      </p:sp>
-      <p:sp>
-        <p:nvSpPr>
-          <p:cNvPr id="27" name="TextBox 26"/>
-          <p:cNvSpPr txBox="1"/>
-          <p:nvPr/>
-        </p:nvSpPr>
-        <p:spPr>
-          <a:xfrm>
-            <a:off x="777240" y="6153912"/>
-            <a:ext cx="10561320" cy="201168"/>
-          </a:xfrm>
-          <a:prstGeom prst="rect">
-            <a:avLst/>
-          </a:prstGeom>
-          <a:noFill/>
-        </p:spPr>
-        <p:txBody>
-          <a:bodyPr wrap="square" lIns="36576" rIns="36576" tIns="36576" bIns="36576" anchor="t">
-            <a:spAutoFit/>
-          </a:bodyPr>
-          <a:lstStyle/>
-          <a:p>
-            <a:pPr algn="ctr"/>
-            <a:r>
-              <a:rPr sz="1300" b="1">
-                <a:solidFill>
-                  <a:srgbClr val="F0F6FC"/>
-                </a:solidFill>
-                <a:latin typeface="Aptos"/>
-              </a:rPr>
-              <a:t>Optimize total feedback time—not just step duration.</a:t>
-            </a:r>
-          </a:p>
-        </p:txBody>
-      </p:sp>
-      <p:sp>
-        <p:nvSpPr>
-          <p:cNvPr id="28" name="TextBox 27"/>
           <p:cNvSpPr txBox="1"/>
           <p:nvPr/>
         </p:nvSpPr>
@@ -11677,7 +11855,7 @@
                 </a:solidFill>
                 <a:latin typeface="Aptos"/>
               </a:rPr>
-              <a:t>CLOSE</a:t>
+              <a:t>FINAL FIVE MINUTES</a:t>
             </a:r>
           </a:p>
         </p:txBody>
@@ -11712,7 +11890,7 @@
                 </a:solidFill>
                 <a:latin typeface="Aptos"/>
               </a:rPr>
-              <a:t>Three actions for next week</a:t>
+              <a:t>Five performance moves with outsized returns</a:t>
             </a:r>
           </a:p>
         </p:txBody>
@@ -11805,6 +11983,1047 @@
         </p:nvSpPr>
         <p:spPr>
           <a:xfrm>
+            <a:off x="777240" y="1700784"/>
+            <a:ext cx="530352" cy="530352"/>
+          </a:xfrm>
+          <a:prstGeom prst="roundRect">
+            <a:avLst/>
+          </a:prstGeom>
+          <a:solidFill>
+            <a:srgbClr val="58A6FF"/>
+          </a:solidFill>
+          <a:ln>
+            <a:solidFill>
+              <a:srgbClr val="58A6FF"/>
+            </a:solidFill>
+          </a:ln>
+        </p:spPr>
+        <p:style>
+          <a:lnRef idx="1">
+            <a:schemeClr val="accent1"/>
+          </a:lnRef>
+          <a:fillRef idx="3">
+            <a:schemeClr val="accent1"/>
+          </a:fillRef>
+          <a:effectRef idx="2">
+            <a:schemeClr val="accent1"/>
+          </a:effectRef>
+          <a:fontRef idx="minor">
+            <a:schemeClr val="lt1"/>
+          </a:fontRef>
+        </p:style>
+        <p:txBody>
+          <a:bodyPr rtlCol="0" anchor="ctr"/>
+          <a:lstStyle/>
+          <a:p>
+            <a:pPr algn="ctr"/>
+          </a:p>
+        </p:txBody>
+      </p:sp>
+      <p:sp>
+        <p:nvSpPr>
+          <p:cNvPr id="7" name="TextBox 6"/>
+          <p:cNvSpPr txBox="1"/>
+          <p:nvPr/>
+        </p:nvSpPr>
+        <p:spPr>
+          <a:xfrm>
+            <a:off x="777240" y="1828800"/>
+            <a:ext cx="530352" cy="219456"/>
+          </a:xfrm>
+          <a:prstGeom prst="rect">
+            <a:avLst/>
+          </a:prstGeom>
+          <a:noFill/>
+        </p:spPr>
+        <p:txBody>
+          <a:bodyPr wrap="square" lIns="36576" rIns="36576" tIns="36576" bIns="36576" anchor="t">
+            <a:spAutoFit/>
+          </a:bodyPr>
+          <a:lstStyle/>
+          <a:p>
+            <a:pPr algn="ctr"/>
+            <a:r>
+              <a:rPr sz="1300" b="1">
+                <a:solidFill>
+                  <a:srgbClr val="0D1117"/>
+                </a:solidFill>
+                <a:latin typeface="Aptos"/>
+              </a:rPr>
+              <a:t>1</a:t>
+            </a:r>
+          </a:p>
+        </p:txBody>
+      </p:sp>
+      <p:sp>
+        <p:nvSpPr>
+          <p:cNvPr id="8" name="TextBox 7"/>
+          <p:cNvSpPr txBox="1"/>
+          <p:nvPr/>
+        </p:nvSpPr>
+        <p:spPr>
+          <a:xfrm>
+            <a:off x="1536192" y="1691640"/>
+            <a:ext cx="2560320" cy="310896"/>
+          </a:xfrm>
+          <a:prstGeom prst="rect">
+            <a:avLst/>
+          </a:prstGeom>
+          <a:noFill/>
+        </p:spPr>
+        <p:txBody>
+          <a:bodyPr wrap="square" lIns="36576" rIns="36576" tIns="36576" bIns="36576" anchor="t">
+            <a:spAutoFit/>
+          </a:bodyPr>
+          <a:lstStyle/>
+          <a:p>
+            <a:pPr algn="l"/>
+            <a:r>
+              <a:rPr sz="1800" b="1">
+                <a:solidFill>
+                  <a:srgbClr val="F0F6FC"/>
+                </a:solidFill>
+                <a:latin typeface="Aptos"/>
+              </a:rPr>
+              <a:t>Cancel stale work</a:t>
+            </a:r>
+          </a:p>
+        </p:txBody>
+      </p:sp>
+      <p:sp>
+        <p:nvSpPr>
+          <p:cNvPr id="9" name="TextBox 8"/>
+          <p:cNvSpPr txBox="1"/>
+          <p:nvPr/>
+        </p:nvSpPr>
+        <p:spPr>
+          <a:xfrm>
+            <a:off x="3886200" y="1719072"/>
+            <a:ext cx="7223760" cy="292608"/>
+          </a:xfrm>
+          <a:prstGeom prst="rect">
+            <a:avLst/>
+          </a:prstGeom>
+          <a:noFill/>
+        </p:spPr>
+        <p:txBody>
+          <a:bodyPr wrap="square" lIns="36576" rIns="36576" tIns="36576" bIns="36576" anchor="t">
+            <a:spAutoFit/>
+          </a:bodyPr>
+          <a:lstStyle/>
+          <a:p>
+            <a:pPr algn="l"/>
+            <a:r>
+              <a:rPr sz="1500" b="0">
+                <a:solidFill>
+                  <a:srgbClr val="8B949E"/>
+                </a:solidFill>
+                <a:latin typeface="Aptos"/>
+              </a:rPr>
+              <a:t>Use concurrency groups with cancel-in-progress for PRs.</a:t>
+            </a:r>
+          </a:p>
+        </p:txBody>
+      </p:sp>
+      <p:sp>
+        <p:nvSpPr>
+          <p:cNvPr id="10" name="Rounded Rectangle 9"/>
+          <p:cNvSpPr/>
+          <p:nvPr/>
+        </p:nvSpPr>
+        <p:spPr>
+          <a:xfrm>
+            <a:off x="777240" y="2569464"/>
+            <a:ext cx="530352" cy="530352"/>
+          </a:xfrm>
+          <a:prstGeom prst="roundRect">
+            <a:avLst/>
+          </a:prstGeom>
+          <a:solidFill>
+            <a:srgbClr val="BC8CFF"/>
+          </a:solidFill>
+          <a:ln>
+            <a:solidFill>
+              <a:srgbClr val="BC8CFF"/>
+            </a:solidFill>
+          </a:ln>
+        </p:spPr>
+        <p:style>
+          <a:lnRef idx="1">
+            <a:schemeClr val="accent1"/>
+          </a:lnRef>
+          <a:fillRef idx="3">
+            <a:schemeClr val="accent1"/>
+          </a:fillRef>
+          <a:effectRef idx="2">
+            <a:schemeClr val="accent1"/>
+          </a:effectRef>
+          <a:fontRef idx="minor">
+            <a:schemeClr val="lt1"/>
+          </a:fontRef>
+        </p:style>
+        <p:txBody>
+          <a:bodyPr rtlCol="0" anchor="ctr"/>
+          <a:lstStyle/>
+          <a:p>
+            <a:pPr algn="ctr"/>
+          </a:p>
+        </p:txBody>
+      </p:sp>
+      <p:sp>
+        <p:nvSpPr>
+          <p:cNvPr id="11" name="TextBox 10"/>
+          <p:cNvSpPr txBox="1"/>
+          <p:nvPr/>
+        </p:nvSpPr>
+        <p:spPr>
+          <a:xfrm>
+            <a:off x="777240" y="2697480"/>
+            <a:ext cx="530352" cy="219456"/>
+          </a:xfrm>
+          <a:prstGeom prst="rect">
+            <a:avLst/>
+          </a:prstGeom>
+          <a:noFill/>
+        </p:spPr>
+        <p:txBody>
+          <a:bodyPr wrap="square" lIns="36576" rIns="36576" tIns="36576" bIns="36576" anchor="t">
+            <a:spAutoFit/>
+          </a:bodyPr>
+          <a:lstStyle/>
+          <a:p>
+            <a:pPr algn="ctr"/>
+            <a:r>
+              <a:rPr sz="1300" b="1">
+                <a:solidFill>
+                  <a:srgbClr val="0D1117"/>
+                </a:solidFill>
+                <a:latin typeface="Aptos"/>
+              </a:rPr>
+              <a:t>2</a:t>
+            </a:r>
+          </a:p>
+        </p:txBody>
+      </p:sp>
+      <p:sp>
+        <p:nvSpPr>
+          <p:cNvPr id="12" name="TextBox 11"/>
+          <p:cNvSpPr txBox="1"/>
+          <p:nvPr/>
+        </p:nvSpPr>
+        <p:spPr>
+          <a:xfrm>
+            <a:off x="1536192" y="2560320"/>
+            <a:ext cx="2560320" cy="310896"/>
+          </a:xfrm>
+          <a:prstGeom prst="rect">
+            <a:avLst/>
+          </a:prstGeom>
+          <a:noFill/>
+        </p:spPr>
+        <p:txBody>
+          <a:bodyPr wrap="square" lIns="36576" rIns="36576" tIns="36576" bIns="36576" anchor="t">
+            <a:spAutoFit/>
+          </a:bodyPr>
+          <a:lstStyle/>
+          <a:p>
+            <a:pPr algn="l"/>
+            <a:r>
+              <a:rPr sz="1800" b="1">
+                <a:solidFill>
+                  <a:srgbClr val="F0F6FC"/>
+                </a:solidFill>
+                <a:latin typeface="Aptos"/>
+              </a:rPr>
+              <a:t>Cache with intent</a:t>
+            </a:r>
+          </a:p>
+        </p:txBody>
+      </p:sp>
+      <p:sp>
+        <p:nvSpPr>
+          <p:cNvPr id="13" name="TextBox 12"/>
+          <p:cNvSpPr txBox="1"/>
+          <p:nvPr/>
+        </p:nvSpPr>
+        <p:spPr>
+          <a:xfrm>
+            <a:off x="3886200" y="2587752"/>
+            <a:ext cx="7223760" cy="292608"/>
+          </a:xfrm>
+          <a:prstGeom prst="rect">
+            <a:avLst/>
+          </a:prstGeom>
+          <a:noFill/>
+        </p:spPr>
+        <p:txBody>
+          <a:bodyPr wrap="square" lIns="36576" rIns="36576" tIns="36576" bIns="36576" anchor="t">
+            <a:spAutoFit/>
+          </a:bodyPr>
+          <a:lstStyle/>
+          <a:p>
+            <a:pPr algn="l"/>
+            <a:r>
+              <a:rPr sz="1500" b="0">
+                <a:solidFill>
+                  <a:srgbClr val="8B949E"/>
+                </a:solidFill>
+                <a:latin typeface="Aptos"/>
+              </a:rPr>
+              <a:t>Key on lockfiles; restore broadly; measure hit rate.</a:t>
+            </a:r>
+          </a:p>
+        </p:txBody>
+      </p:sp>
+      <p:sp>
+        <p:nvSpPr>
+          <p:cNvPr id="14" name="Rounded Rectangle 13"/>
+          <p:cNvSpPr/>
+          <p:nvPr/>
+        </p:nvSpPr>
+        <p:spPr>
+          <a:xfrm>
+            <a:off x="777240" y="3438144"/>
+            <a:ext cx="530352" cy="530352"/>
+          </a:xfrm>
+          <a:prstGeom prst="roundRect">
+            <a:avLst/>
+          </a:prstGeom>
+          <a:solidFill>
+            <a:srgbClr val="3FB950"/>
+          </a:solidFill>
+          <a:ln>
+            <a:solidFill>
+              <a:srgbClr val="3FB950"/>
+            </a:solidFill>
+          </a:ln>
+        </p:spPr>
+        <p:style>
+          <a:lnRef idx="1">
+            <a:schemeClr val="accent1"/>
+          </a:lnRef>
+          <a:fillRef idx="3">
+            <a:schemeClr val="accent1"/>
+          </a:fillRef>
+          <a:effectRef idx="2">
+            <a:schemeClr val="accent1"/>
+          </a:effectRef>
+          <a:fontRef idx="minor">
+            <a:schemeClr val="lt1"/>
+          </a:fontRef>
+        </p:style>
+        <p:txBody>
+          <a:bodyPr rtlCol="0" anchor="ctr"/>
+          <a:lstStyle/>
+          <a:p>
+            <a:pPr algn="ctr"/>
+          </a:p>
+        </p:txBody>
+      </p:sp>
+      <p:sp>
+        <p:nvSpPr>
+          <p:cNvPr id="15" name="TextBox 14"/>
+          <p:cNvSpPr txBox="1"/>
+          <p:nvPr/>
+        </p:nvSpPr>
+        <p:spPr>
+          <a:xfrm>
+            <a:off x="777240" y="3566160"/>
+            <a:ext cx="530352" cy="219456"/>
+          </a:xfrm>
+          <a:prstGeom prst="rect">
+            <a:avLst/>
+          </a:prstGeom>
+          <a:noFill/>
+        </p:spPr>
+        <p:txBody>
+          <a:bodyPr wrap="square" lIns="36576" rIns="36576" tIns="36576" bIns="36576" anchor="t">
+            <a:spAutoFit/>
+          </a:bodyPr>
+          <a:lstStyle/>
+          <a:p>
+            <a:pPr algn="ctr"/>
+            <a:r>
+              <a:rPr sz="1300" b="1">
+                <a:solidFill>
+                  <a:srgbClr val="0D1117"/>
+                </a:solidFill>
+                <a:latin typeface="Aptos"/>
+              </a:rPr>
+              <a:t>3</a:t>
+            </a:r>
+          </a:p>
+        </p:txBody>
+      </p:sp>
+      <p:sp>
+        <p:nvSpPr>
+          <p:cNvPr id="16" name="TextBox 15"/>
+          <p:cNvSpPr txBox="1"/>
+          <p:nvPr/>
+        </p:nvSpPr>
+        <p:spPr>
+          <a:xfrm>
+            <a:off x="1536192" y="3429000"/>
+            <a:ext cx="2560320" cy="310896"/>
+          </a:xfrm>
+          <a:prstGeom prst="rect">
+            <a:avLst/>
+          </a:prstGeom>
+          <a:noFill/>
+        </p:spPr>
+        <p:txBody>
+          <a:bodyPr wrap="square" lIns="36576" rIns="36576" tIns="36576" bIns="36576" anchor="t">
+            <a:spAutoFit/>
+          </a:bodyPr>
+          <a:lstStyle/>
+          <a:p>
+            <a:pPr algn="l"/>
+            <a:r>
+              <a:rPr sz="1800" b="1">
+                <a:solidFill>
+                  <a:srgbClr val="F0F6FC"/>
+                </a:solidFill>
+                <a:latin typeface="Aptos"/>
+              </a:rPr>
+              <a:t>Filter early</a:t>
+            </a:r>
+          </a:p>
+        </p:txBody>
+      </p:sp>
+      <p:sp>
+        <p:nvSpPr>
+          <p:cNvPr id="17" name="TextBox 16"/>
+          <p:cNvSpPr txBox="1"/>
+          <p:nvPr/>
+        </p:nvSpPr>
+        <p:spPr>
+          <a:xfrm>
+            <a:off x="3886200" y="3456432"/>
+            <a:ext cx="7223760" cy="292608"/>
+          </a:xfrm>
+          <a:prstGeom prst="rect">
+            <a:avLst/>
+          </a:prstGeom>
+          <a:noFill/>
+        </p:spPr>
+        <p:txBody>
+          <a:bodyPr wrap="square" lIns="36576" rIns="36576" tIns="36576" bIns="36576" anchor="t">
+            <a:spAutoFit/>
+          </a:bodyPr>
+          <a:lstStyle/>
+          <a:p>
+            <a:pPr algn="l"/>
+            <a:r>
+              <a:rPr sz="1500" b="0">
+                <a:solidFill>
+                  <a:srgbClr val="8B949E"/>
+                </a:solidFill>
+                <a:latin typeface="Aptos"/>
+              </a:rPr>
+              <a:t>Use paths, branches, and job if conditions before runners start.</a:t>
+            </a:r>
+          </a:p>
+        </p:txBody>
+      </p:sp>
+      <p:sp>
+        <p:nvSpPr>
+          <p:cNvPr id="18" name="Rounded Rectangle 17"/>
+          <p:cNvSpPr/>
+          <p:nvPr/>
+        </p:nvSpPr>
+        <p:spPr>
+          <a:xfrm>
+            <a:off x="777240" y="4306824"/>
+            <a:ext cx="530352" cy="530352"/>
+          </a:xfrm>
+          <a:prstGeom prst="roundRect">
+            <a:avLst/>
+          </a:prstGeom>
+          <a:solidFill>
+            <a:srgbClr val="D29922"/>
+          </a:solidFill>
+          <a:ln>
+            <a:solidFill>
+              <a:srgbClr val="D29922"/>
+            </a:solidFill>
+          </a:ln>
+        </p:spPr>
+        <p:style>
+          <a:lnRef idx="1">
+            <a:schemeClr val="accent1"/>
+          </a:lnRef>
+          <a:fillRef idx="3">
+            <a:schemeClr val="accent1"/>
+          </a:fillRef>
+          <a:effectRef idx="2">
+            <a:schemeClr val="accent1"/>
+          </a:effectRef>
+          <a:fontRef idx="minor">
+            <a:schemeClr val="lt1"/>
+          </a:fontRef>
+        </p:style>
+        <p:txBody>
+          <a:bodyPr rtlCol="0" anchor="ctr"/>
+          <a:lstStyle/>
+          <a:p>
+            <a:pPr algn="ctr"/>
+          </a:p>
+        </p:txBody>
+      </p:sp>
+      <p:sp>
+        <p:nvSpPr>
+          <p:cNvPr id="19" name="TextBox 18"/>
+          <p:cNvSpPr txBox="1"/>
+          <p:nvPr/>
+        </p:nvSpPr>
+        <p:spPr>
+          <a:xfrm>
+            <a:off x="777240" y="4434840"/>
+            <a:ext cx="530352" cy="219456"/>
+          </a:xfrm>
+          <a:prstGeom prst="rect">
+            <a:avLst/>
+          </a:prstGeom>
+          <a:noFill/>
+        </p:spPr>
+        <p:txBody>
+          <a:bodyPr wrap="square" lIns="36576" rIns="36576" tIns="36576" bIns="36576" anchor="t">
+            <a:spAutoFit/>
+          </a:bodyPr>
+          <a:lstStyle/>
+          <a:p>
+            <a:pPr algn="ctr"/>
+            <a:r>
+              <a:rPr sz="1300" b="1">
+                <a:solidFill>
+                  <a:srgbClr val="0D1117"/>
+                </a:solidFill>
+                <a:latin typeface="Aptos"/>
+              </a:rPr>
+              <a:t>4</a:t>
+            </a:r>
+          </a:p>
+        </p:txBody>
+      </p:sp>
+      <p:sp>
+        <p:nvSpPr>
+          <p:cNvPr id="20" name="TextBox 19"/>
+          <p:cNvSpPr txBox="1"/>
+          <p:nvPr/>
+        </p:nvSpPr>
+        <p:spPr>
+          <a:xfrm>
+            <a:off x="1536192" y="4297680"/>
+            <a:ext cx="2560320" cy="310896"/>
+          </a:xfrm>
+          <a:prstGeom prst="rect">
+            <a:avLst/>
+          </a:prstGeom>
+          <a:noFill/>
+        </p:spPr>
+        <p:txBody>
+          <a:bodyPr wrap="square" lIns="36576" rIns="36576" tIns="36576" bIns="36576" anchor="t">
+            <a:spAutoFit/>
+          </a:bodyPr>
+          <a:lstStyle/>
+          <a:p>
+            <a:pPr algn="l"/>
+            <a:r>
+              <a:rPr sz="1800" b="1">
+                <a:solidFill>
+                  <a:srgbClr val="F0F6FC"/>
+                </a:solidFill>
+                <a:latin typeface="Aptos"/>
+              </a:rPr>
+              <a:t>Shrink the matrix</a:t>
+            </a:r>
+          </a:p>
+        </p:txBody>
+      </p:sp>
+      <p:sp>
+        <p:nvSpPr>
+          <p:cNvPr id="21" name="TextBox 20"/>
+          <p:cNvSpPr txBox="1"/>
+          <p:nvPr/>
+        </p:nvSpPr>
+        <p:spPr>
+          <a:xfrm>
+            <a:off x="3886200" y="4325112"/>
+            <a:ext cx="7223760" cy="292608"/>
+          </a:xfrm>
+          <a:prstGeom prst="rect">
+            <a:avLst/>
+          </a:prstGeom>
+          <a:noFill/>
+        </p:spPr>
+        <p:txBody>
+          <a:bodyPr wrap="square" lIns="36576" rIns="36576" tIns="36576" bIns="36576" anchor="t">
+            <a:spAutoFit/>
+          </a:bodyPr>
+          <a:lstStyle/>
+          <a:p>
+            <a:pPr algn="l"/>
+            <a:r>
+              <a:rPr sz="1500" b="0">
+                <a:solidFill>
+                  <a:srgbClr val="8B949E"/>
+                </a:solidFill>
+                <a:latin typeface="Aptos"/>
+              </a:rPr>
+              <a:t>Test representative combinations first; expand on main or nightly.</a:t>
+            </a:r>
+          </a:p>
+        </p:txBody>
+      </p:sp>
+      <p:sp>
+        <p:nvSpPr>
+          <p:cNvPr id="22" name="Rounded Rectangle 21"/>
+          <p:cNvSpPr/>
+          <p:nvPr/>
+        </p:nvSpPr>
+        <p:spPr>
+          <a:xfrm>
+            <a:off x="777240" y="5175504"/>
+            <a:ext cx="530352" cy="530352"/>
+          </a:xfrm>
+          <a:prstGeom prst="roundRect">
+            <a:avLst/>
+          </a:prstGeom>
+          <a:solidFill>
+            <a:srgbClr val="F85149"/>
+          </a:solidFill>
+          <a:ln>
+            <a:solidFill>
+              <a:srgbClr val="F85149"/>
+            </a:solidFill>
+          </a:ln>
+        </p:spPr>
+        <p:style>
+          <a:lnRef idx="1">
+            <a:schemeClr val="accent1"/>
+          </a:lnRef>
+          <a:fillRef idx="3">
+            <a:schemeClr val="accent1"/>
+          </a:fillRef>
+          <a:effectRef idx="2">
+            <a:schemeClr val="accent1"/>
+          </a:effectRef>
+          <a:fontRef idx="minor">
+            <a:schemeClr val="lt1"/>
+          </a:fontRef>
+        </p:style>
+        <p:txBody>
+          <a:bodyPr rtlCol="0" anchor="ctr"/>
+          <a:lstStyle/>
+          <a:p>
+            <a:pPr algn="ctr"/>
+          </a:p>
+        </p:txBody>
+      </p:sp>
+      <p:sp>
+        <p:nvSpPr>
+          <p:cNvPr id="23" name="TextBox 22"/>
+          <p:cNvSpPr txBox="1"/>
+          <p:nvPr/>
+        </p:nvSpPr>
+        <p:spPr>
+          <a:xfrm>
+            <a:off x="777240" y="5303520"/>
+            <a:ext cx="530352" cy="219456"/>
+          </a:xfrm>
+          <a:prstGeom prst="rect">
+            <a:avLst/>
+          </a:prstGeom>
+          <a:noFill/>
+        </p:spPr>
+        <p:txBody>
+          <a:bodyPr wrap="square" lIns="36576" rIns="36576" tIns="36576" bIns="36576" anchor="t">
+            <a:spAutoFit/>
+          </a:bodyPr>
+          <a:lstStyle/>
+          <a:p>
+            <a:pPr algn="ctr"/>
+            <a:r>
+              <a:rPr sz="1300" b="1">
+                <a:solidFill>
+                  <a:srgbClr val="0D1117"/>
+                </a:solidFill>
+                <a:latin typeface="Aptos"/>
+              </a:rPr>
+              <a:t>5</a:t>
+            </a:r>
+          </a:p>
+        </p:txBody>
+      </p:sp>
+      <p:sp>
+        <p:nvSpPr>
+          <p:cNvPr id="24" name="TextBox 23"/>
+          <p:cNvSpPr txBox="1"/>
+          <p:nvPr/>
+        </p:nvSpPr>
+        <p:spPr>
+          <a:xfrm>
+            <a:off x="1536192" y="5166360"/>
+            <a:ext cx="2560320" cy="310896"/>
+          </a:xfrm>
+          <a:prstGeom prst="rect">
+            <a:avLst/>
+          </a:prstGeom>
+          <a:noFill/>
+        </p:spPr>
+        <p:txBody>
+          <a:bodyPr wrap="square" lIns="36576" rIns="36576" tIns="36576" bIns="36576" anchor="t">
+            <a:spAutoFit/>
+          </a:bodyPr>
+          <a:lstStyle/>
+          <a:p>
+            <a:pPr algn="l"/>
+            <a:r>
+              <a:rPr sz="1800" b="1">
+                <a:solidFill>
+                  <a:srgbClr val="F0F6FC"/>
+                </a:solidFill>
+                <a:latin typeface="Aptos"/>
+              </a:rPr>
+              <a:t>Measure the queue</a:t>
+            </a:r>
+          </a:p>
+        </p:txBody>
+      </p:sp>
+      <p:sp>
+        <p:nvSpPr>
+          <p:cNvPr id="25" name="TextBox 24"/>
+          <p:cNvSpPr txBox="1"/>
+          <p:nvPr/>
+        </p:nvSpPr>
+        <p:spPr>
+          <a:xfrm>
+            <a:off x="3886200" y="5193792"/>
+            <a:ext cx="7223760" cy="292608"/>
+          </a:xfrm>
+          <a:prstGeom prst="rect">
+            <a:avLst/>
+          </a:prstGeom>
+          <a:noFill/>
+        </p:spPr>
+        <p:txBody>
+          <a:bodyPr wrap="square" lIns="36576" rIns="36576" tIns="36576" bIns="36576" anchor="t">
+            <a:spAutoFit/>
+          </a:bodyPr>
+          <a:lstStyle/>
+          <a:p>
+            <a:pPr algn="l"/>
+            <a:r>
+              <a:rPr sz="1500" b="0">
+                <a:solidFill>
+                  <a:srgbClr val="8B949E"/>
+                </a:solidFill>
+                <a:latin typeface="Aptos"/>
+              </a:rPr>
+              <a:t>Separate queue time from execution time before changing code.</a:t>
+            </a:r>
+          </a:p>
+        </p:txBody>
+      </p:sp>
+      <p:sp>
+        <p:nvSpPr>
+          <p:cNvPr id="26" name="Rounded Rectangle 25"/>
+          <p:cNvSpPr/>
+          <p:nvPr/>
+        </p:nvSpPr>
+        <p:spPr>
+          <a:xfrm>
+            <a:off x="777240" y="6062472"/>
+            <a:ext cx="10561320" cy="384048"/>
+          </a:xfrm>
+          <a:prstGeom prst="roundRect">
+            <a:avLst/>
+          </a:prstGeom>
+          <a:solidFill>
+            <a:srgbClr val="21262D"/>
+          </a:solidFill>
+          <a:ln>
+            <a:solidFill>
+              <a:srgbClr val="21262D"/>
+            </a:solidFill>
+          </a:ln>
+        </p:spPr>
+        <p:style>
+          <a:lnRef idx="1">
+            <a:schemeClr val="accent1"/>
+          </a:lnRef>
+          <a:fillRef idx="3">
+            <a:schemeClr val="accent1"/>
+          </a:fillRef>
+          <a:effectRef idx="2">
+            <a:schemeClr val="accent1"/>
+          </a:effectRef>
+          <a:fontRef idx="minor">
+            <a:schemeClr val="lt1"/>
+          </a:fontRef>
+        </p:style>
+        <p:txBody>
+          <a:bodyPr rtlCol="0" anchor="ctr"/>
+          <a:lstStyle/>
+          <a:p>
+            <a:pPr algn="ctr"/>
+          </a:p>
+        </p:txBody>
+      </p:sp>
+      <p:sp>
+        <p:nvSpPr>
+          <p:cNvPr id="27" name="TextBox 26"/>
+          <p:cNvSpPr txBox="1"/>
+          <p:nvPr/>
+        </p:nvSpPr>
+        <p:spPr>
+          <a:xfrm>
+            <a:off x="777240" y="6153912"/>
+            <a:ext cx="10561320" cy="201168"/>
+          </a:xfrm>
+          <a:prstGeom prst="rect">
+            <a:avLst/>
+          </a:prstGeom>
+          <a:noFill/>
+        </p:spPr>
+        <p:txBody>
+          <a:bodyPr wrap="square" lIns="36576" rIns="36576" tIns="36576" bIns="36576" anchor="t">
+            <a:spAutoFit/>
+          </a:bodyPr>
+          <a:lstStyle/>
+          <a:p>
+            <a:pPr algn="ctr"/>
+            <a:r>
+              <a:rPr sz="1300" b="1">
+                <a:solidFill>
+                  <a:srgbClr val="F0F6FC"/>
+                </a:solidFill>
+                <a:latin typeface="Aptos"/>
+              </a:rPr>
+              <a:t>Optimize total feedback time—not just step duration.</a:t>
+            </a:r>
+          </a:p>
+        </p:txBody>
+      </p:sp>
+      <p:sp>
+        <p:nvSpPr>
+          <p:cNvPr id="28" name="TextBox 27"/>
+          <p:cNvSpPr txBox="1"/>
+          <p:nvPr/>
+        </p:nvSpPr>
+        <p:spPr>
+          <a:xfrm>
+            <a:off x="640080" y="6519672"/>
+            <a:ext cx="5852160" cy="182880"/>
+          </a:xfrm>
+          <a:prstGeom prst="rect">
+            <a:avLst/>
+          </a:prstGeom>
+          <a:noFill/>
+        </p:spPr>
+        <p:txBody>
+          <a:bodyPr wrap="square" lIns="36576" rIns="36576" tIns="36576" bIns="36576" anchor="t">
+            <a:spAutoFit/>
+          </a:bodyPr>
+          <a:lstStyle/>
+          <a:p>
+            <a:pPr algn="l"/>
+            <a:r>
+              <a:rPr sz="900" b="0">
+                <a:solidFill>
+                  <a:srgbClr val="8B949E"/>
+                </a:solidFill>
+                <a:latin typeface="Aptos"/>
+              </a:rPr>
+              <a:t>GitHub Actions Office Hour · Sep 2026</a:t>
+            </a:r>
+          </a:p>
+        </p:txBody>
+      </p:sp>
+    </p:spTree>
+  </p:cSld>
+  <p:clrMapOvr>
+    <a:masterClrMapping/>
+  </p:clrMapOvr>
+</p:sld>
+</file>
+
+<file path=ppt/slides/slide17.xml><?xml version="1.0" encoding="utf-8"?>
+<p:sld xmlns:a="http://schemas.openxmlformats.org/drawingml/2006/main" xmlns:p="http://schemas.openxmlformats.org/presentationml/2006/main" xmlns:r="http://schemas.openxmlformats.org/officeDocument/2006/relationships">
+  <p:cSld>
+    <p:bg>
+      <p:bgPr>
+        <a:solidFill>
+          <a:srgbClr val="0D1117"/>
+        </a:solidFill>
+        <a:effectLst/>
+      </p:bgPr>
+    </p:bg>
+    <p:spTree>
+      <p:nvGrpSpPr>
+        <p:cNvPr id="1" name=""/>
+        <p:cNvGrpSpPr/>
+        <p:nvPr/>
+      </p:nvGrpSpPr>
+      <p:grpSpPr/>
+      <p:sp>
+        <p:nvSpPr>
+          <p:cNvPr id="2" name="TextBox 1"/>
+          <p:cNvSpPr txBox="1"/>
+          <p:nvPr/>
+        </p:nvSpPr>
+        <p:spPr>
+          <a:xfrm>
+            <a:off x="640080" y="292608"/>
+            <a:ext cx="6400800" cy="274320"/>
+          </a:xfrm>
+          <a:prstGeom prst="rect">
+            <a:avLst/>
+          </a:prstGeom>
+          <a:noFill/>
+        </p:spPr>
+        <p:txBody>
+          <a:bodyPr wrap="square" lIns="36576" rIns="36576" tIns="36576" bIns="36576" anchor="t">
+            <a:spAutoFit/>
+          </a:bodyPr>
+          <a:lstStyle/>
+          <a:p>
+            <a:pPr algn="l"/>
+            <a:r>
+              <a:rPr sz="1100" b="1">
+                <a:solidFill>
+                  <a:srgbClr val="58A6FF"/>
+                </a:solidFill>
+                <a:latin typeface="Aptos"/>
+              </a:rPr>
+              <a:t>CLOSE</a:t>
+            </a:r>
+          </a:p>
+        </p:txBody>
+      </p:sp>
+      <p:sp>
+        <p:nvSpPr>
+          <p:cNvPr id="3" name="TextBox 2"/>
+          <p:cNvSpPr txBox="1"/>
+          <p:nvPr/>
+        </p:nvSpPr>
+        <p:spPr>
+          <a:xfrm>
+            <a:off x="640080" y="667512"/>
+            <a:ext cx="10789920" cy="658368"/>
+          </a:xfrm>
+          <a:prstGeom prst="rect">
+            <a:avLst/>
+          </a:prstGeom>
+          <a:noFill/>
+        </p:spPr>
+        <p:txBody>
+          <a:bodyPr wrap="square" lIns="36576" rIns="36576" tIns="36576" bIns="36576" anchor="t">
+            <a:spAutoFit/>
+          </a:bodyPr>
+          <a:lstStyle/>
+          <a:p>
+            <a:pPr algn="l"/>
+            <a:r>
+              <a:rPr sz="3000" b="1">
+                <a:solidFill>
+                  <a:srgbClr val="F0F6FC"/>
+                </a:solidFill>
+                <a:latin typeface="Aptos"/>
+              </a:rPr>
+              <a:t>Three actions for next week</a:t>
+            </a:r>
+          </a:p>
+        </p:txBody>
+      </p:sp>
+      <p:sp>
+        <p:nvSpPr>
+          <p:cNvPr id="4" name="Rectangle 3"/>
+          <p:cNvSpPr/>
+          <p:nvPr/>
+        </p:nvSpPr>
+        <p:spPr>
+          <a:xfrm>
+            <a:off x="640080" y="1417320"/>
+            <a:ext cx="914400" cy="45720"/>
+          </a:xfrm>
+          <a:prstGeom prst="rect">
+            <a:avLst/>
+          </a:prstGeom>
+          <a:solidFill>
+            <a:srgbClr val="BC8CFF"/>
+          </a:solidFill>
+          <a:ln>
+            <a:solidFill>
+              <a:srgbClr val="BC8CFF"/>
+            </a:solidFill>
+          </a:ln>
+        </p:spPr>
+        <p:style>
+          <a:lnRef idx="1">
+            <a:schemeClr val="accent1"/>
+          </a:lnRef>
+          <a:fillRef idx="3">
+            <a:schemeClr val="accent1"/>
+          </a:fillRef>
+          <a:effectRef idx="2">
+            <a:schemeClr val="accent1"/>
+          </a:effectRef>
+          <a:fontRef idx="minor">
+            <a:schemeClr val="lt1"/>
+          </a:fontRef>
+        </p:style>
+        <p:txBody>
+          <a:bodyPr rtlCol="0" anchor="ctr"/>
+          <a:lstStyle/>
+          <a:p>
+            <a:pPr algn="ctr"/>
+          </a:p>
+        </p:txBody>
+      </p:sp>
+      <p:sp>
+        <p:nvSpPr>
+          <p:cNvPr id="5" name="TextBox 4"/>
+          <p:cNvSpPr txBox="1"/>
+          <p:nvPr/>
+        </p:nvSpPr>
+        <p:spPr>
+          <a:xfrm>
+            <a:off x="11109960" y="310896"/>
+            <a:ext cx="457200" cy="274320"/>
+          </a:xfrm>
+          <a:prstGeom prst="rect">
+            <a:avLst/>
+          </a:prstGeom>
+          <a:noFill/>
+        </p:spPr>
+        <p:txBody>
+          <a:bodyPr wrap="square" lIns="36576" rIns="36576" tIns="36576" bIns="36576" anchor="t">
+            <a:spAutoFit/>
+          </a:bodyPr>
+          <a:lstStyle/>
+          <a:p>
+            <a:pPr algn="r"/>
+            <a:r>
+              <a:rPr sz="1100" b="1">
+                <a:solidFill>
+                  <a:srgbClr val="8B949E"/>
+                </a:solidFill>
+                <a:latin typeface="Aptos"/>
+              </a:rPr>
+              <a:t>17</a:t>
+            </a:r>
+          </a:p>
+        </p:txBody>
+      </p:sp>
+      <p:sp>
+        <p:nvSpPr>
+          <p:cNvPr id="6" name="Rounded Rectangle 5"/>
+          <p:cNvSpPr/>
+          <p:nvPr/>
+        </p:nvSpPr>
+        <p:spPr>
+          <a:xfrm>
             <a:off x="731520" y="1828800"/>
             <a:ext cx="3429000" cy="3108960"/>
           </a:xfrm>
@@ -12455,6 +13674,948 @@
       <p:sp>
         <p:nvSpPr>
           <p:cNvPr id="23" name="TextBox 22"/>
+          <p:cNvSpPr txBox="1"/>
+          <p:nvPr/>
+        </p:nvSpPr>
+        <p:spPr>
+          <a:xfrm>
+            <a:off x="640080" y="6519672"/>
+            <a:ext cx="5852160" cy="182880"/>
+          </a:xfrm>
+          <a:prstGeom prst="rect">
+            <a:avLst/>
+          </a:prstGeom>
+          <a:noFill/>
+        </p:spPr>
+        <p:txBody>
+          <a:bodyPr wrap="square" lIns="36576" rIns="36576" tIns="36576" bIns="36576" anchor="t">
+            <a:spAutoFit/>
+          </a:bodyPr>
+          <a:lstStyle/>
+          <a:p>
+            <a:pPr algn="l"/>
+            <a:r>
+              <a:rPr sz="900" b="0">
+                <a:solidFill>
+                  <a:srgbClr val="8B949E"/>
+                </a:solidFill>
+                <a:latin typeface="Aptos"/>
+              </a:rPr>
+              <a:t>GitHub Actions Office Hour · Sep 2026</a:t>
+            </a:r>
+          </a:p>
+        </p:txBody>
+      </p:sp>
+    </p:spTree>
+  </p:cSld>
+  <p:clrMapOvr>
+    <a:masterClrMapping/>
+  </p:clrMapOvr>
+</p:sld>
+</file>
+
+<file path=ppt/slides/slide18.xml><?xml version="1.0" encoding="utf-8"?>
+<p:sld xmlns:a="http://schemas.openxmlformats.org/drawingml/2006/main" xmlns:p="http://schemas.openxmlformats.org/presentationml/2006/main" xmlns:r="http://schemas.openxmlformats.org/officeDocument/2006/relationships">
+  <p:cSld>
+    <p:bg>
+      <p:bgPr>
+        <a:solidFill>
+          <a:srgbClr val="0D1117"/>
+        </a:solidFill>
+        <a:effectLst/>
+      </p:bgPr>
+    </p:bg>
+    <p:spTree>
+      <p:nvGrpSpPr>
+        <p:cNvPr id="1" name=""/>
+        <p:cNvGrpSpPr/>
+        <p:nvPr/>
+      </p:nvGrpSpPr>
+      <p:grpSpPr/>
+      <p:sp>
+        <p:nvSpPr>
+          <p:cNvPr id="2" name="TextBox 1"/>
+          <p:cNvSpPr txBox="1"/>
+          <p:nvPr/>
+        </p:nvSpPr>
+        <p:spPr>
+          <a:xfrm>
+            <a:off x="640080" y="292608"/>
+            <a:ext cx="6400800" cy="274320"/>
+          </a:xfrm>
+          <a:prstGeom prst="rect">
+            <a:avLst/>
+          </a:prstGeom>
+          <a:noFill/>
+        </p:spPr>
+        <p:txBody>
+          <a:bodyPr wrap="square" lIns="36576" rIns="36576" tIns="36576" bIns="36576" anchor="t">
+            <a:spAutoFit/>
+          </a:bodyPr>
+          <a:lstStyle/>
+          <a:p>
+            <a:pPr algn="l"/>
+            <a:r>
+              <a:rPr sz="1100" b="1">
+                <a:solidFill>
+                  <a:srgbClr val="58A6FF"/>
+                </a:solidFill>
+                <a:latin typeface="Aptos"/>
+              </a:rPr>
+              <a:t>GITHUB CHANGELOG</a:t>
+            </a:r>
+          </a:p>
+        </p:txBody>
+      </p:sp>
+      <p:sp>
+        <p:nvSpPr>
+          <p:cNvPr id="3" name="TextBox 2"/>
+          <p:cNvSpPr txBox="1"/>
+          <p:nvPr/>
+        </p:nvSpPr>
+        <p:spPr>
+          <a:xfrm>
+            <a:off x="640080" y="667512"/>
+            <a:ext cx="10789920" cy="658368"/>
+          </a:xfrm>
+          <a:prstGeom prst="rect">
+            <a:avLst/>
+          </a:prstGeom>
+          <a:noFill/>
+        </p:spPr>
+        <p:txBody>
+          <a:bodyPr wrap="square" lIns="36576" rIns="36576" tIns="36576" bIns="36576" anchor="t">
+            <a:spAutoFit/>
+          </a:bodyPr>
+          <a:lstStyle/>
+          <a:p>
+            <a:pPr algn="l"/>
+            <a:r>
+              <a:rPr sz="3000" b="1">
+                <a:solidFill>
+                  <a:srgbClr val="F0F6FC"/>
+                </a:solidFill>
+                <a:latin typeface="Aptos"/>
+              </a:rPr>
+              <a:t>Feature references</a:t>
+            </a:r>
+          </a:p>
+        </p:txBody>
+      </p:sp>
+      <p:sp>
+        <p:nvSpPr>
+          <p:cNvPr id="4" name="Rectangle 3"/>
+          <p:cNvSpPr/>
+          <p:nvPr/>
+        </p:nvSpPr>
+        <p:spPr>
+          <a:xfrm>
+            <a:off x="640080" y="1417320"/>
+            <a:ext cx="914400" cy="45720"/>
+          </a:xfrm>
+          <a:prstGeom prst="rect">
+            <a:avLst/>
+          </a:prstGeom>
+          <a:solidFill>
+            <a:srgbClr val="BC8CFF"/>
+          </a:solidFill>
+          <a:ln>
+            <a:solidFill>
+              <a:srgbClr val="BC8CFF"/>
+            </a:solidFill>
+          </a:ln>
+        </p:spPr>
+        <p:style>
+          <a:lnRef idx="1">
+            <a:schemeClr val="accent1"/>
+          </a:lnRef>
+          <a:fillRef idx="3">
+            <a:schemeClr val="accent1"/>
+          </a:fillRef>
+          <a:effectRef idx="2">
+            <a:schemeClr val="accent1"/>
+          </a:effectRef>
+          <a:fontRef idx="minor">
+            <a:schemeClr val="lt1"/>
+          </a:fontRef>
+        </p:style>
+        <p:txBody>
+          <a:bodyPr rtlCol="0" anchor="ctr"/>
+          <a:lstStyle/>
+          <a:p>
+            <a:pPr algn="ctr"/>
+          </a:p>
+        </p:txBody>
+      </p:sp>
+      <p:sp>
+        <p:nvSpPr>
+          <p:cNvPr id="5" name="TextBox 4"/>
+          <p:cNvSpPr txBox="1"/>
+          <p:nvPr/>
+        </p:nvSpPr>
+        <p:spPr>
+          <a:xfrm>
+            <a:off x="11109960" y="310896"/>
+            <a:ext cx="457200" cy="274320"/>
+          </a:xfrm>
+          <a:prstGeom prst="rect">
+            <a:avLst/>
+          </a:prstGeom>
+          <a:noFill/>
+        </p:spPr>
+        <p:txBody>
+          <a:bodyPr wrap="square" lIns="36576" rIns="36576" tIns="36576" bIns="36576" anchor="t">
+            <a:spAutoFit/>
+          </a:bodyPr>
+          <a:lstStyle/>
+          <a:p>
+            <a:pPr algn="r"/>
+            <a:r>
+              <a:rPr sz="1100" b="1">
+                <a:solidFill>
+                  <a:srgbClr val="8B949E"/>
+                </a:solidFill>
+                <a:latin typeface="Aptos"/>
+              </a:rPr>
+              <a:t>18</a:t>
+            </a:r>
+          </a:p>
+        </p:txBody>
+      </p:sp>
+      <p:sp>
+        <p:nvSpPr>
+          <p:cNvPr id="6" name="Rounded Rectangle 5"/>
+          <p:cNvSpPr/>
+          <p:nvPr/>
+        </p:nvSpPr>
+        <p:spPr>
+          <a:xfrm>
+            <a:off x="731520" y="1664208"/>
+            <a:ext cx="10744200" cy="612648"/>
+          </a:xfrm>
+          <a:prstGeom prst="roundRect">
+            <a:avLst/>
+          </a:prstGeom>
+          <a:solidFill>
+            <a:srgbClr val="161B22"/>
+          </a:solidFill>
+          <a:ln>
+            <a:solidFill>
+              <a:srgbClr val="21262D"/>
+            </a:solidFill>
+          </a:ln>
+        </p:spPr>
+        <p:style>
+          <a:lnRef idx="1">
+            <a:schemeClr val="accent1"/>
+          </a:lnRef>
+          <a:fillRef idx="3">
+            <a:schemeClr val="accent1"/>
+          </a:fillRef>
+          <a:effectRef idx="2">
+            <a:schemeClr val="accent1"/>
+          </a:effectRef>
+          <a:fontRef idx="minor">
+            <a:schemeClr val="lt1"/>
+          </a:fontRef>
+        </p:style>
+        <p:txBody>
+          <a:bodyPr rtlCol="0" anchor="ctr"/>
+          <a:lstStyle/>
+          <a:p>
+            <a:pPr algn="ctr"/>
+          </a:p>
+        </p:txBody>
+      </p:sp>
+      <p:sp>
+        <p:nvSpPr>
+          <p:cNvPr id="7" name="TextBox 6"/>
+          <p:cNvSpPr txBox="1"/>
+          <p:nvPr/>
+        </p:nvSpPr>
+        <p:spPr>
+          <a:xfrm>
+            <a:off x="960120" y="1755648"/>
+            <a:ext cx="4206240" cy="228600"/>
+          </a:xfrm>
+          <a:prstGeom prst="rect">
+            <a:avLst/>
+          </a:prstGeom>
+          <a:noFill/>
+        </p:spPr>
+        <p:txBody>
+          <a:bodyPr wrap="square" lIns="36576" rIns="36576" tIns="36576" bIns="36576" anchor="t">
+            <a:spAutoFit/>
+          </a:bodyPr>
+          <a:lstStyle/>
+          <a:p>
+            <a:pPr algn="l"/>
+            <a:r>
+              <a:rPr sz="1400" b="1">
+                <a:solidFill>
+                  <a:srgbClr val="F0F6FC"/>
+                </a:solidFill>
+                <a:latin typeface="Aptos"/>
+              </a:rPr>
+              <a:t>Windows 11 Arm64 with Visual Studio 2026</a:t>
+            </a:r>
+          </a:p>
+        </p:txBody>
+      </p:sp>
+      <p:sp>
+        <p:nvSpPr>
+          <p:cNvPr id="8" name="TextBox 7"/>
+          <p:cNvSpPr txBox="1"/>
+          <p:nvPr/>
+        </p:nvSpPr>
+        <p:spPr>
+          <a:xfrm>
+            <a:off x="5074920" y="1746504"/>
+            <a:ext cx="6080760" cy="347472"/>
+          </a:xfrm>
+          <a:prstGeom prst="rect">
+            <a:avLst/>
+          </a:prstGeom>
+          <a:noFill/>
+        </p:spPr>
+        <p:txBody>
+          <a:bodyPr wrap="square" lIns="36576" rIns="36576" tIns="36576" bIns="36576" anchor="t">
+            <a:spAutoFit/>
+          </a:bodyPr>
+          <a:lstStyle/>
+          <a:p>
+            <a:pPr algn="l"/>
+            <a:r>
+              <a:rPr sz="900" b="0" u="sng">
+                <a:solidFill>
+                  <a:srgbClr val="58A6FF"/>
+                </a:solidFill>
+                <a:latin typeface="Cascadia Mono"/>
+                <a:hlinkClick r:id="rId2"/>
+              </a:rPr>
+              <a:t>https://github.blog/changelog/2026-08-20-windows-11-arm64-vs2026-image-generally-available</a:t>
+            </a:r>
+          </a:p>
+        </p:txBody>
+      </p:sp>
+      <p:sp>
+        <p:nvSpPr>
+          <p:cNvPr id="9" name="Rounded Rectangle 8"/>
+          <p:cNvSpPr/>
+          <p:nvPr/>
+        </p:nvSpPr>
+        <p:spPr>
+          <a:xfrm>
+            <a:off x="731520" y="2414016"/>
+            <a:ext cx="10744200" cy="612648"/>
+          </a:xfrm>
+          <a:prstGeom prst="roundRect">
+            <a:avLst/>
+          </a:prstGeom>
+          <a:solidFill>
+            <a:srgbClr val="161B22"/>
+          </a:solidFill>
+          <a:ln>
+            <a:solidFill>
+              <a:srgbClr val="21262D"/>
+            </a:solidFill>
+          </a:ln>
+        </p:spPr>
+        <p:style>
+          <a:lnRef idx="1">
+            <a:schemeClr val="accent1"/>
+          </a:lnRef>
+          <a:fillRef idx="3">
+            <a:schemeClr val="accent1"/>
+          </a:fillRef>
+          <a:effectRef idx="2">
+            <a:schemeClr val="accent1"/>
+          </a:effectRef>
+          <a:fontRef idx="minor">
+            <a:schemeClr val="lt1"/>
+          </a:fontRef>
+        </p:style>
+        <p:txBody>
+          <a:bodyPr rtlCol="0" anchor="ctr"/>
+          <a:lstStyle/>
+          <a:p>
+            <a:pPr algn="ctr"/>
+          </a:p>
+        </p:txBody>
+      </p:sp>
+      <p:sp>
+        <p:nvSpPr>
+          <p:cNvPr id="10" name="TextBox 9"/>
+          <p:cNvSpPr txBox="1"/>
+          <p:nvPr/>
+        </p:nvSpPr>
+        <p:spPr>
+          <a:xfrm>
+            <a:off x="960120" y="2505456"/>
+            <a:ext cx="4206240" cy="228600"/>
+          </a:xfrm>
+          <a:prstGeom prst="rect">
+            <a:avLst/>
+          </a:prstGeom>
+          <a:noFill/>
+        </p:spPr>
+        <p:txBody>
+          <a:bodyPr wrap="square" lIns="36576" rIns="36576" tIns="36576" bIns="36576" anchor="t">
+            <a:spAutoFit/>
+          </a:bodyPr>
+          <a:lstStyle/>
+          <a:p>
+            <a:pPr algn="l"/>
+            <a:r>
+              <a:rPr sz="1400" b="1">
+                <a:solidFill>
+                  <a:srgbClr val="F0F6FC"/>
+                </a:solidFill>
+                <a:latin typeface="Aptos"/>
+              </a:rPr>
+              <a:t>Separate GitHub Actions path for GitHub Code Quality</a:t>
+            </a:r>
+          </a:p>
+        </p:txBody>
+      </p:sp>
+      <p:sp>
+        <p:nvSpPr>
+          <p:cNvPr id="11" name="TextBox 10"/>
+          <p:cNvSpPr txBox="1"/>
+          <p:nvPr/>
+        </p:nvSpPr>
+        <p:spPr>
+          <a:xfrm>
+            <a:off x="5074920" y="2496312"/>
+            <a:ext cx="6080760" cy="347472"/>
+          </a:xfrm>
+          <a:prstGeom prst="rect">
+            <a:avLst/>
+          </a:prstGeom>
+          <a:noFill/>
+        </p:spPr>
+        <p:txBody>
+          <a:bodyPr wrap="square" lIns="36576" rIns="36576" tIns="36576" bIns="36576" anchor="t">
+            <a:spAutoFit/>
+          </a:bodyPr>
+          <a:lstStyle/>
+          <a:p>
+            <a:pPr algn="l"/>
+            <a:r>
+              <a:rPr sz="900" b="0" u="sng">
+                <a:solidFill>
+                  <a:srgbClr val="58A6FF"/>
+                </a:solidFill>
+                <a:latin typeface="Cascadia Mono"/>
+                <a:hlinkClick r:id="rId3"/>
+              </a:rPr>
+              <a:t>https://github.blog/changelog/2026-08-20-separate-github-actions-path-for-github-code-quality</a:t>
+            </a:r>
+          </a:p>
+        </p:txBody>
+      </p:sp>
+      <p:sp>
+        <p:nvSpPr>
+          <p:cNvPr id="12" name="Rounded Rectangle 11"/>
+          <p:cNvSpPr/>
+          <p:nvPr/>
+        </p:nvSpPr>
+        <p:spPr>
+          <a:xfrm>
+            <a:off x="731520" y="3163824"/>
+            <a:ext cx="10744200" cy="612648"/>
+          </a:xfrm>
+          <a:prstGeom prst="roundRect">
+            <a:avLst/>
+          </a:prstGeom>
+          <a:solidFill>
+            <a:srgbClr val="161B22"/>
+          </a:solidFill>
+          <a:ln>
+            <a:solidFill>
+              <a:srgbClr val="21262D"/>
+            </a:solidFill>
+          </a:ln>
+        </p:spPr>
+        <p:style>
+          <a:lnRef idx="1">
+            <a:schemeClr val="accent1"/>
+          </a:lnRef>
+          <a:fillRef idx="3">
+            <a:schemeClr val="accent1"/>
+          </a:fillRef>
+          <a:effectRef idx="2">
+            <a:schemeClr val="accent1"/>
+          </a:effectRef>
+          <a:fontRef idx="minor">
+            <a:schemeClr val="lt1"/>
+          </a:fontRef>
+        </p:style>
+        <p:txBody>
+          <a:bodyPr rtlCol="0" anchor="ctr"/>
+          <a:lstStyle/>
+          <a:p>
+            <a:pPr algn="ctr"/>
+          </a:p>
+        </p:txBody>
+      </p:sp>
+      <p:sp>
+        <p:nvSpPr>
+          <p:cNvPr id="13" name="TextBox 12"/>
+          <p:cNvSpPr txBox="1"/>
+          <p:nvPr/>
+        </p:nvSpPr>
+        <p:spPr>
+          <a:xfrm>
+            <a:off x="960120" y="3255264"/>
+            <a:ext cx="4206240" cy="228600"/>
+          </a:xfrm>
+          <a:prstGeom prst="rect">
+            <a:avLst/>
+          </a:prstGeom>
+          <a:noFill/>
+        </p:spPr>
+        <p:txBody>
+          <a:bodyPr wrap="square" lIns="36576" rIns="36576" tIns="36576" bIns="36576" anchor="t">
+            <a:spAutoFit/>
+          </a:bodyPr>
+          <a:lstStyle/>
+          <a:p>
+            <a:pPr algn="l"/>
+            <a:r>
+              <a:rPr sz="1400" b="1">
+                <a:solidFill>
+                  <a:srgbClr val="F0F6FC"/>
+                </a:solidFill>
+                <a:latin typeface="Aptos"/>
+              </a:rPr>
+              <a:t>Actions retention for checks, workflow runs, and statuses</a:t>
+            </a:r>
+          </a:p>
+        </p:txBody>
+      </p:sp>
+      <p:sp>
+        <p:nvSpPr>
+          <p:cNvPr id="14" name="TextBox 13"/>
+          <p:cNvSpPr txBox="1"/>
+          <p:nvPr/>
+        </p:nvSpPr>
+        <p:spPr>
+          <a:xfrm>
+            <a:off x="5074920" y="3246120"/>
+            <a:ext cx="6080760" cy="347472"/>
+          </a:xfrm>
+          <a:prstGeom prst="rect">
+            <a:avLst/>
+          </a:prstGeom>
+          <a:noFill/>
+        </p:spPr>
+        <p:txBody>
+          <a:bodyPr wrap="square" lIns="36576" rIns="36576" tIns="36576" bIns="36576" anchor="t">
+            <a:spAutoFit/>
+          </a:bodyPr>
+          <a:lstStyle/>
+          <a:p>
+            <a:pPr algn="l"/>
+            <a:r>
+              <a:rPr sz="900" b="0" u="sng">
+                <a:solidFill>
+                  <a:srgbClr val="58A6FF"/>
+                </a:solidFill>
+                <a:latin typeface="Cascadia Mono"/>
+                <a:hlinkClick r:id="rId4"/>
+              </a:rPr>
+              <a:t>https://github.blog/changelog/2026-08-27-actions-retention-will-cover-checks-workflow-runs-and-statuses</a:t>
+            </a:r>
+          </a:p>
+        </p:txBody>
+      </p:sp>
+      <p:sp>
+        <p:nvSpPr>
+          <p:cNvPr id="15" name="Rounded Rectangle 14"/>
+          <p:cNvSpPr/>
+          <p:nvPr/>
+        </p:nvSpPr>
+        <p:spPr>
+          <a:xfrm>
+            <a:off x="731520" y="3913632"/>
+            <a:ext cx="10744200" cy="612648"/>
+          </a:xfrm>
+          <a:prstGeom prst="roundRect">
+            <a:avLst/>
+          </a:prstGeom>
+          <a:solidFill>
+            <a:srgbClr val="161B22"/>
+          </a:solidFill>
+          <a:ln>
+            <a:solidFill>
+              <a:srgbClr val="21262D"/>
+            </a:solidFill>
+          </a:ln>
+        </p:spPr>
+        <p:style>
+          <a:lnRef idx="1">
+            <a:schemeClr val="accent1"/>
+          </a:lnRef>
+          <a:fillRef idx="3">
+            <a:schemeClr val="accent1"/>
+          </a:fillRef>
+          <a:effectRef idx="2">
+            <a:schemeClr val="accent1"/>
+          </a:effectRef>
+          <a:fontRef idx="minor">
+            <a:schemeClr val="lt1"/>
+          </a:fontRef>
+        </p:style>
+        <p:txBody>
+          <a:bodyPr rtlCol="0" anchor="ctr"/>
+          <a:lstStyle/>
+          <a:p>
+            <a:pPr algn="ctr"/>
+          </a:p>
+        </p:txBody>
+      </p:sp>
+      <p:sp>
+        <p:nvSpPr>
+          <p:cNvPr id="16" name="TextBox 15"/>
+          <p:cNvSpPr txBox="1"/>
+          <p:nvPr/>
+        </p:nvSpPr>
+        <p:spPr>
+          <a:xfrm>
+            <a:off x="960120" y="4005072"/>
+            <a:ext cx="4206240" cy="228600"/>
+          </a:xfrm>
+          <a:prstGeom prst="rect">
+            <a:avLst/>
+          </a:prstGeom>
+          <a:noFill/>
+        </p:spPr>
+        <p:txBody>
+          <a:bodyPr wrap="square" lIns="36576" rIns="36576" tIns="36576" bIns="36576" anchor="t">
+            <a:spAutoFit/>
+          </a:bodyPr>
+          <a:lstStyle/>
+          <a:p>
+            <a:pPr algn="l"/>
+            <a:r>
+              <a:rPr sz="1400" b="1">
+                <a:solidFill>
+                  <a:srgbClr val="F0F6FC"/>
+                </a:solidFill>
+                <a:latin typeface="Aptos"/>
+              </a:rPr>
+              <a:t>REST API for runner version deprecations</a:t>
+            </a:r>
+          </a:p>
+        </p:txBody>
+      </p:sp>
+      <p:sp>
+        <p:nvSpPr>
+          <p:cNvPr id="17" name="TextBox 16"/>
+          <p:cNvSpPr txBox="1"/>
+          <p:nvPr/>
+        </p:nvSpPr>
+        <p:spPr>
+          <a:xfrm>
+            <a:off x="5074920" y="3995928"/>
+            <a:ext cx="6080760" cy="347472"/>
+          </a:xfrm>
+          <a:prstGeom prst="rect">
+            <a:avLst/>
+          </a:prstGeom>
+          <a:noFill/>
+        </p:spPr>
+        <p:txBody>
+          <a:bodyPr wrap="square" lIns="36576" rIns="36576" tIns="36576" bIns="36576" anchor="t">
+            <a:spAutoFit/>
+          </a:bodyPr>
+          <a:lstStyle/>
+          <a:p>
+            <a:pPr algn="l"/>
+            <a:r>
+              <a:rPr sz="900" b="0" u="sng">
+                <a:solidFill>
+                  <a:srgbClr val="58A6FF"/>
+                </a:solidFill>
+                <a:latin typeface="Cascadia Mono"/>
+                <a:hlinkClick r:id="rId5"/>
+              </a:rPr>
+              <a:t>https://github.blog/changelog/2026-09-03-github-actions-early-september-2026-updates</a:t>
+            </a:r>
+          </a:p>
+        </p:txBody>
+      </p:sp>
+      <p:sp>
+        <p:nvSpPr>
+          <p:cNvPr id="18" name="Rounded Rectangle 17"/>
+          <p:cNvSpPr/>
+          <p:nvPr/>
+        </p:nvSpPr>
+        <p:spPr>
+          <a:xfrm>
+            <a:off x="731520" y="4663440"/>
+            <a:ext cx="10744200" cy="612648"/>
+          </a:xfrm>
+          <a:prstGeom prst="roundRect">
+            <a:avLst/>
+          </a:prstGeom>
+          <a:solidFill>
+            <a:srgbClr val="161B22"/>
+          </a:solidFill>
+          <a:ln>
+            <a:solidFill>
+              <a:srgbClr val="21262D"/>
+            </a:solidFill>
+          </a:ln>
+        </p:spPr>
+        <p:style>
+          <a:lnRef idx="1">
+            <a:schemeClr val="accent1"/>
+          </a:lnRef>
+          <a:fillRef idx="3">
+            <a:schemeClr val="accent1"/>
+          </a:fillRef>
+          <a:effectRef idx="2">
+            <a:schemeClr val="accent1"/>
+          </a:effectRef>
+          <a:fontRef idx="minor">
+            <a:schemeClr val="lt1"/>
+          </a:fontRef>
+        </p:style>
+        <p:txBody>
+          <a:bodyPr rtlCol="0" anchor="ctr"/>
+          <a:lstStyle/>
+          <a:p>
+            <a:pPr algn="ctr"/>
+          </a:p>
+        </p:txBody>
+      </p:sp>
+      <p:sp>
+        <p:nvSpPr>
+          <p:cNvPr id="19" name="TextBox 18"/>
+          <p:cNvSpPr txBox="1"/>
+          <p:nvPr/>
+        </p:nvSpPr>
+        <p:spPr>
+          <a:xfrm>
+            <a:off x="960120" y="4754879"/>
+            <a:ext cx="4206240" cy="228600"/>
+          </a:xfrm>
+          <a:prstGeom prst="rect">
+            <a:avLst/>
+          </a:prstGeom>
+          <a:noFill/>
+        </p:spPr>
+        <p:txBody>
+          <a:bodyPr wrap="square" lIns="36576" rIns="36576" tIns="36576" bIns="36576" anchor="t">
+            <a:spAutoFit/>
+          </a:bodyPr>
+          <a:lstStyle/>
+          <a:p>
+            <a:pPr algn="l"/>
+            <a:r>
+              <a:rPr sz="1400" b="1">
+                <a:solidFill>
+                  <a:srgbClr val="F0F6FC"/>
+                </a:solidFill>
+                <a:latin typeface="Aptos"/>
+              </a:rPr>
+              <a:t>vulnerability-alerts permission for GITHUB_TOKEN</a:t>
+            </a:r>
+          </a:p>
+        </p:txBody>
+      </p:sp>
+      <p:sp>
+        <p:nvSpPr>
+          <p:cNvPr id="20" name="TextBox 19"/>
+          <p:cNvSpPr txBox="1"/>
+          <p:nvPr/>
+        </p:nvSpPr>
+        <p:spPr>
+          <a:xfrm>
+            <a:off x="5074920" y="4745736"/>
+            <a:ext cx="6080760" cy="347472"/>
+          </a:xfrm>
+          <a:prstGeom prst="rect">
+            <a:avLst/>
+          </a:prstGeom>
+          <a:noFill/>
+        </p:spPr>
+        <p:txBody>
+          <a:bodyPr wrap="square" lIns="36576" rIns="36576" tIns="36576" bIns="36576" anchor="t">
+            <a:spAutoFit/>
+          </a:bodyPr>
+          <a:lstStyle/>
+          <a:p>
+            <a:pPr algn="l"/>
+            <a:r>
+              <a:rPr sz="900" b="0" u="sng">
+                <a:solidFill>
+                  <a:srgbClr val="58A6FF"/>
+                </a:solidFill>
+                <a:latin typeface="Cascadia Mono"/>
+                <a:hlinkClick r:id="rId5"/>
+              </a:rPr>
+              <a:t>https://github.blog/changelog/2026-09-03-github-actions-early-september-2026-updates</a:t>
+            </a:r>
+          </a:p>
+        </p:txBody>
+      </p:sp>
+      <p:sp>
+        <p:nvSpPr>
+          <p:cNvPr id="21" name="Rounded Rectangle 20"/>
+          <p:cNvSpPr/>
+          <p:nvPr/>
+        </p:nvSpPr>
+        <p:spPr>
+          <a:xfrm>
+            <a:off x="731520" y="5413248"/>
+            <a:ext cx="10744200" cy="612648"/>
+          </a:xfrm>
+          <a:prstGeom prst="roundRect">
+            <a:avLst/>
+          </a:prstGeom>
+          <a:solidFill>
+            <a:srgbClr val="161B22"/>
+          </a:solidFill>
+          <a:ln>
+            <a:solidFill>
+              <a:srgbClr val="21262D"/>
+            </a:solidFill>
+          </a:ln>
+        </p:spPr>
+        <p:style>
+          <a:lnRef idx="1">
+            <a:schemeClr val="accent1"/>
+          </a:lnRef>
+          <a:fillRef idx="3">
+            <a:schemeClr val="accent1"/>
+          </a:fillRef>
+          <a:effectRef idx="2">
+            <a:schemeClr val="accent1"/>
+          </a:effectRef>
+          <a:fontRef idx="minor">
+            <a:schemeClr val="lt1"/>
+          </a:fontRef>
+        </p:style>
+        <p:txBody>
+          <a:bodyPr rtlCol="0" anchor="ctr"/>
+          <a:lstStyle/>
+          <a:p>
+            <a:pPr algn="ctr"/>
+          </a:p>
+        </p:txBody>
+      </p:sp>
+      <p:sp>
+        <p:nvSpPr>
+          <p:cNvPr id="22" name="TextBox 21"/>
+          <p:cNvSpPr txBox="1"/>
+          <p:nvPr/>
+        </p:nvSpPr>
+        <p:spPr>
+          <a:xfrm>
+            <a:off x="960120" y="5504688"/>
+            <a:ext cx="4206240" cy="228600"/>
+          </a:xfrm>
+          <a:prstGeom prst="rect">
+            <a:avLst/>
+          </a:prstGeom>
+          <a:noFill/>
+        </p:spPr>
+        <p:txBody>
+          <a:bodyPr wrap="square" lIns="36576" rIns="36576" tIns="36576" bIns="36576" anchor="t">
+            <a:spAutoFit/>
+          </a:bodyPr>
+          <a:lstStyle/>
+          <a:p>
+            <a:pPr algn="l"/>
+            <a:r>
+              <a:rPr sz="1400" b="1">
+                <a:solidFill>
+                  <a:srgbClr val="F0F6FC"/>
+                </a:solidFill>
+                <a:latin typeface="Aptos"/>
+              </a:rPr>
+              <a:t>Reusable workflow job context properties</a:t>
+            </a:r>
+          </a:p>
+        </p:txBody>
+      </p:sp>
+      <p:sp>
+        <p:nvSpPr>
+          <p:cNvPr id="23" name="TextBox 22"/>
+          <p:cNvSpPr txBox="1"/>
+          <p:nvPr/>
+        </p:nvSpPr>
+        <p:spPr>
+          <a:xfrm>
+            <a:off x="5074920" y="5495544"/>
+            <a:ext cx="6080760" cy="347472"/>
+          </a:xfrm>
+          <a:prstGeom prst="rect">
+            <a:avLst/>
+          </a:prstGeom>
+          <a:noFill/>
+        </p:spPr>
+        <p:txBody>
+          <a:bodyPr wrap="square" lIns="36576" rIns="36576" tIns="36576" bIns="36576" anchor="t">
+            <a:spAutoFit/>
+          </a:bodyPr>
+          <a:lstStyle/>
+          <a:p>
+            <a:pPr algn="l"/>
+            <a:r>
+              <a:rPr sz="900" b="0" u="sng">
+                <a:solidFill>
+                  <a:srgbClr val="58A6FF"/>
+                </a:solidFill>
+                <a:latin typeface="Cascadia Mono"/>
+                <a:hlinkClick r:id="rId5"/>
+              </a:rPr>
+              <a:t>https://github.blog/changelog/2026-09-03-github-actions-early-september-2026-updates</a:t>
+            </a:r>
+          </a:p>
+        </p:txBody>
+      </p:sp>
+      <p:sp>
+        <p:nvSpPr>
+          <p:cNvPr id="24" name="TextBox 23"/>
+          <p:cNvSpPr txBox="1"/>
+          <p:nvPr/>
+        </p:nvSpPr>
+        <p:spPr>
+          <a:xfrm>
+            <a:off x="777240" y="6236208"/>
+            <a:ext cx="10607040" cy="228600"/>
+          </a:xfrm>
+          <a:prstGeom prst="rect">
+            <a:avLst/>
+          </a:prstGeom>
+          <a:noFill/>
+        </p:spPr>
+        <p:txBody>
+          <a:bodyPr wrap="square" lIns="36576" rIns="36576" tIns="36576" bIns="36576" anchor="t">
+            <a:spAutoFit/>
+          </a:bodyPr>
+          <a:lstStyle/>
+          <a:p>
+            <a:pPr algn="ctr"/>
+            <a:r>
+              <a:rPr sz="1100" b="0">
+                <a:solidFill>
+                  <a:srgbClr val="8B949E"/>
+                </a:solidFill>
+                <a:latin typeface="Aptos"/>
+              </a:rPr>
+              <a:t>Links are clickable in Slide Show and Normal view.</a:t>
+            </a:r>
+          </a:p>
+        </p:txBody>
+      </p:sp>
+      <p:sp>
+        <p:nvSpPr>
+          <p:cNvPr id="25" name="TextBox 24"/>
           <p:cNvSpPr txBox="1"/>
           <p:nvPr/>
         </p:nvSpPr>
@@ -13403,7 +15564,7 @@
                 </a:solidFill>
                 <a:latin typeface="Aptos"/>
               </a:rPr>
-              <a:t>Two demos</a:t>
+              <a:t>Three demos</a:t>
             </a:r>
           </a:p>
         </p:txBody>

--- a/office-hours/GitHub-Actions-Office-Hours-Aug-Sep-2026.pptx
+++ b/office-hours/GitHub-Actions-Office-Hours-Aug-Sep-2026.pptx
@@ -4,27 +4,30 @@
   <p:sldMasterIdLst>
     <p:sldMasterId id="2147483648" r:id="rId1"/>
   </p:sldMasterIdLst>
+  <p:notesMasterIdLst>
+    <p:notesMasterId r:id="rId20"/>
+  </p:notesMasterIdLst>
   <p:sldIdLst>
-    <p:sldId id="256" r:id="rId7"/>
-    <p:sldId id="257" r:id="rId9"/>
-    <p:sldId id="258" r:id="rId10"/>
-    <p:sldId id="259" r:id="rId11"/>
-    <p:sldId id="260" r:id="rId12"/>
-    <p:sldId id="261" r:id="rId13"/>
-    <p:sldId id="262" r:id="rId14"/>
-    <p:sldId id="263" r:id="rId15"/>
-    <p:sldId id="264" r:id="rId16"/>
-    <p:sldId id="265" r:id="rId17"/>
-    <p:sldId id="266" r:id="rId18"/>
-    <p:sldId id="267" r:id="rId19"/>
-    <p:sldId id="268" r:id="rId20"/>
-    <p:sldId id="269" r:id="rId21"/>
-    <p:sldId id="270" r:id="rId22"/>
-    <p:sldId id="271" r:id="rId23"/>
-    <p:sldId id="272" r:id="rId24"/>
-    <p:sldId id="273" r:id="rId25"/>
+    <p:sldId id="256" r:id="rId2"/>
+    <p:sldId id="257" r:id="rId3"/>
+    <p:sldId id="258" r:id="rId4"/>
+    <p:sldId id="259" r:id="rId5"/>
+    <p:sldId id="260" r:id="rId6"/>
+    <p:sldId id="261" r:id="rId7"/>
+    <p:sldId id="262" r:id="rId8"/>
+    <p:sldId id="263" r:id="rId9"/>
+    <p:sldId id="264" r:id="rId10"/>
+    <p:sldId id="265" r:id="rId11"/>
+    <p:sldId id="266" r:id="rId12"/>
+    <p:sldId id="267" r:id="rId13"/>
+    <p:sldId id="268" r:id="rId14"/>
+    <p:sldId id="269" r:id="rId15"/>
+    <p:sldId id="270" r:id="rId16"/>
+    <p:sldId id="271" r:id="rId17"/>
+    <p:sldId id="272" r:id="rId18"/>
+    <p:sldId id="273" r:id="rId19"/>
   </p:sldIdLst>
-  <p:sldSz cx="12191695" cy="6858000" type="screen4x3"/>
+  <p:sldSz cx="12192000" cy="6858000"/>
   <p:notesSz cx="6858000" cy="9144000"/>
   <p:defaultTextStyle>
     <a:defPPr>
@@ -121,11 +124,27 @@
       </a:defRPr>
     </a:lvl9pPr>
   </p:defaultTextStyle>
+  <p:extLst>
+    <p:ext uri="{EFAFB233-063F-42B5-8137-9DF3F51BA10A}">
+      <p15:sldGuideLst xmlns:p15="http://schemas.microsoft.com/office/powerpoint/2012/main">
+        <p15:guide id="1" orient="horz" pos="2160">
+          <p15:clr>
+            <a:srgbClr val="A4A3A4"/>
+          </p15:clr>
+        </p15:guide>
+        <p15:guide id="2" pos="2880">
+          <p15:clr>
+            <a:srgbClr val="A4A3A4"/>
+          </p15:clr>
+        </p15:guide>
+      </p15:sldGuideLst>
+    </p:ext>
+  </p:extLst>
 </p:presentation>
 </file>
 
 <file path=ppt/notesMasters/notesMaster1.xml><?xml version="1.0" encoding="utf-8"?>
-<p:notesMaster xmlns:a="http://schemas.openxmlformats.org/drawingml/2006/main" xmlns:p="http://schemas.openxmlformats.org/presentationml/2006/main" xmlns:r="http://schemas.openxmlformats.org/officeDocument/2006/relationships">
+<p:notesMaster xmlns:a="http://schemas.openxmlformats.org/drawingml/2006/main" xmlns:r="http://schemas.openxmlformats.org/officeDocument/2006/relationships" xmlns:p="http://schemas.openxmlformats.org/presentationml/2006/main">
   <p:cSld>
     <p:bg>
       <p:bgRef idx="1001">
@@ -146,241 +165,16 @@
           <a:chExt cx="0" cy="0"/>
         </a:xfrm>
       </p:grpSpPr>
-      <p:sp>
-        <p:nvSpPr>
-          <p:cNvPr id="2" name="Header Placeholder 1"/>
-          <p:cNvSpPr>
-            <a:spLocks noGrp="1"/>
-          </p:cNvSpPr>
-          <p:nvPr>
-            <p:ph type="hdr" sz="quarter"/>
-          </p:nvPr>
-        </p:nvSpPr>
-        <p:spPr>
-          <a:xfrm>
-            <a:off x="0" y="0"/>
-            <a:ext cx="2971800" cy="457200"/>
-          </a:xfrm>
-          <a:prstGeom prst="rect">
-            <a:avLst/>
-          </a:prstGeom>
-        </p:spPr>
-        <p:txBody>
-          <a:bodyPr vert="horz" lIns="91440" tIns="45720" rIns="91440" bIns="45720" rtlCol="0"/>
-          <a:lstStyle>
-            <a:lvl1pPr algn="l">
-              <a:defRPr sz="1200"/>
-            </a:lvl1pPr>
-          </a:lstStyle>
-          <a:p>
-            <a:endParaRPr lang="en-US"/>
-          </a:p>
-        </p:txBody>
-      </p:sp>
-      <p:sp>
-        <p:nvSpPr>
-          <p:cNvPr id="3" name="Date Placeholder 2"/>
-          <p:cNvSpPr>
-            <a:spLocks noGrp="1"/>
-          </p:cNvSpPr>
-          <p:nvPr>
-            <p:ph type="dt" idx="1"/>
-          </p:nvPr>
-        </p:nvSpPr>
-        <p:spPr>
-          <a:xfrm>
-            <a:off x="3884613" y="0"/>
-            <a:ext cx="2971800" cy="457200"/>
-          </a:xfrm>
-          <a:prstGeom prst="rect">
-            <a:avLst/>
-          </a:prstGeom>
-        </p:spPr>
-        <p:txBody>
-          <a:bodyPr vert="horz" lIns="91440" tIns="45720" rIns="91440" bIns="45720" rtlCol="0"/>
-          <a:lstStyle>
-            <a:lvl1pPr algn="r">
-              <a:defRPr sz="1200"/>
-            </a:lvl1pPr>
-          </a:lstStyle>
-          <a:p>
-            <a:fld id="{0F89C1C7-3DCD-1040-A9CF-14679D8B5DDD}" type="datetimeFigureOut">
-              <a:rPr lang="en-US" smtClean="0"/>
-              <a:t>10/17/16</a:t>
-            </a:fld>
-            <a:endParaRPr lang="en-US"/>
-          </a:p>
-        </p:txBody>
-      </p:sp>
-      <p:sp>
-        <p:nvSpPr>
-          <p:cNvPr id="4" name="Slide Image Placeholder 3"/>
-          <p:cNvSpPr>
-            <a:spLocks noGrp="1" noRot="1" noChangeAspect="1"/>
-          </p:cNvSpPr>
-          <p:nvPr>
-            <p:ph type="sldImg" idx="2"/>
-          </p:nvPr>
-        </p:nvSpPr>
-        <p:spPr>
-          <a:xfrm>
-            <a:off x="1143000" y="685800"/>
-            <a:ext cx="4572000" cy="3429000"/>
-          </a:xfrm>
-          <a:prstGeom prst="rect">
-            <a:avLst/>
-          </a:prstGeom>
-          <a:noFill/>
-          <a:ln w="12700">
-            <a:solidFill>
-              <a:prstClr val="black"/>
-            </a:solidFill>
-          </a:ln>
-        </p:spPr>
-        <p:txBody>
-          <a:bodyPr vert="horz" lIns="91440" tIns="45720" rIns="91440" bIns="45720" rtlCol="0" anchor="ctr"/>
-          <a:lstStyle/>
-          <a:p>
-            <a:endParaRPr lang="en-US"/>
-          </a:p>
-        </p:txBody>
-      </p:sp>
-      <p:sp>
-        <p:nvSpPr>
-          <p:cNvPr id="5" name="Notes Placeholder 4"/>
-          <p:cNvSpPr>
-            <a:spLocks noGrp="1"/>
-          </p:cNvSpPr>
-          <p:nvPr>
-            <p:ph type="body" sz="quarter" idx="3"/>
-          </p:nvPr>
-        </p:nvSpPr>
-        <p:spPr>
-          <a:xfrm>
-            <a:off x="685800" y="4343400"/>
-            <a:ext cx="5486400" cy="4114800"/>
-          </a:xfrm>
-          <a:prstGeom prst="rect">
-            <a:avLst/>
-          </a:prstGeom>
-        </p:spPr>
-        <p:txBody>
-          <a:bodyPr vert="horz" lIns="91440" tIns="45720" rIns="91440" bIns="45720" rtlCol="0"/>
-          <a:lstStyle/>
-          <a:p>
-            <a:pPr lvl="0"/>
-            <a:r>
-              <a:rPr lang="en-US" smtClean="0"/>
-              <a:t>Click to edit Master text styles</a:t>
-            </a:r>
-          </a:p>
-          <a:p>
-            <a:pPr lvl="1"/>
-            <a:r>
-              <a:rPr lang="en-US" smtClean="0"/>
-              <a:t>Second level</a:t>
-            </a:r>
-          </a:p>
-          <a:p>
-            <a:pPr lvl="2"/>
-            <a:r>
-              <a:rPr lang="en-US" smtClean="0"/>
-              <a:t>Third level</a:t>
-            </a:r>
-          </a:p>
-          <a:p>
-            <a:pPr lvl="3"/>
-            <a:r>
-              <a:rPr lang="en-US" smtClean="0"/>
-              <a:t>Fourth level</a:t>
-            </a:r>
-          </a:p>
-          <a:p>
-            <a:pPr lvl="4"/>
-            <a:r>
-              <a:rPr lang="en-US" smtClean="0"/>
-              <a:t>Fifth level</a:t>
-            </a:r>
-            <a:endParaRPr lang="en-US"/>
-          </a:p>
-        </p:txBody>
-      </p:sp>
-      <p:sp>
-        <p:nvSpPr>
-          <p:cNvPr id="6" name="Footer Placeholder 5"/>
-          <p:cNvSpPr>
-            <a:spLocks noGrp="1"/>
-          </p:cNvSpPr>
-          <p:nvPr>
-            <p:ph type="ftr" sz="quarter" idx="4"/>
-          </p:nvPr>
-        </p:nvSpPr>
-        <p:spPr>
-          <a:xfrm>
-            <a:off x="0" y="8685213"/>
-            <a:ext cx="2971800" cy="457200"/>
-          </a:xfrm>
-          <a:prstGeom prst="rect">
-            <a:avLst/>
-          </a:prstGeom>
-        </p:spPr>
-        <p:txBody>
-          <a:bodyPr vert="horz" lIns="91440" tIns="45720" rIns="91440" bIns="45720" rtlCol="0" anchor="b"/>
-          <a:lstStyle>
-            <a:lvl1pPr algn="l">
-              <a:defRPr sz="1200"/>
-            </a:lvl1pPr>
-          </a:lstStyle>
-          <a:p>
-            <a:endParaRPr lang="en-US"/>
-          </a:p>
-        </p:txBody>
-      </p:sp>
-      <p:sp>
-        <p:nvSpPr>
-          <p:cNvPr id="7" name="Slide Number Placeholder 6"/>
-          <p:cNvSpPr>
-            <a:spLocks noGrp="1"/>
-          </p:cNvSpPr>
-          <p:nvPr>
-            <p:ph type="sldNum" sz="quarter" idx="5"/>
-          </p:nvPr>
-        </p:nvSpPr>
-        <p:spPr>
-          <a:xfrm>
-            <a:off x="3884613" y="8685213"/>
-            <a:ext cx="2971800" cy="457200"/>
-          </a:xfrm>
-          <a:prstGeom prst="rect">
-            <a:avLst/>
-          </a:prstGeom>
-        </p:spPr>
-        <p:txBody>
-          <a:bodyPr vert="horz" lIns="91440" tIns="45720" rIns="91440" bIns="45720" rtlCol="0" anchor="b"/>
-          <a:lstStyle>
-            <a:lvl1pPr algn="r">
-              <a:defRPr sz="1200"/>
-            </a:lvl1pPr>
-          </a:lstStyle>
-          <a:p>
-            <a:fld id="{BB5E49A5-4136-284D-997B-48E1D791AD67}" type="slidenum">
-              <a:rPr lang="en-US" smtClean="0"/>
-              <a:t>‹#›</a:t>
-            </a:fld>
-            <a:endParaRPr lang="en-US"/>
-          </a:p>
-        </p:txBody>
-      </p:sp>
     </p:spTree>
     <p:extLst>
       <p:ext uri="{BB962C8B-B14F-4D97-AF65-F5344CB8AC3E}">
-        <p14:creationId xmlns:p14="http://schemas.microsoft.com/office/powerpoint/2010/main" val="2623252185"/>
+        <p14:creationId xmlns:p14="http://schemas.microsoft.com/office/powerpoint/2010/main" val="3526918136"/>
       </p:ext>
     </p:extLst>
   </p:cSld>
   <p:clrMap bg1="lt1" tx1="dk1" bg2="lt2" tx2="dk2" accent1="accent1" accent2="accent2" accent3="accent3" accent4="accent4" accent5="accent5" accent6="accent6" hlink="hlink" folHlink="folHlink"/>
   <p:notesStyle>
-    <a:lvl1pPr marL="0" algn="l" defTabSz="457200" rtl="0" eaLnBrk="1" latinLnBrk="0" hangingPunct="1">
+    <a:lvl1pPr marL="0" algn="l" defTabSz="914400" rtl="0" eaLnBrk="1" latinLnBrk="0" hangingPunct="1">
       <a:defRPr sz="1200" kern="1200">
         <a:solidFill>
           <a:schemeClr val="tx1"/>
@@ -390,7 +184,7 @@
         <a:cs typeface="+mn-cs"/>
       </a:defRPr>
     </a:lvl1pPr>
-    <a:lvl2pPr marL="457200" algn="l" defTabSz="457200" rtl="0" eaLnBrk="1" latinLnBrk="0" hangingPunct="1">
+    <a:lvl2pPr marL="457200" algn="l" defTabSz="914400" rtl="0" eaLnBrk="1" latinLnBrk="0" hangingPunct="1">
       <a:defRPr sz="1200" kern="1200">
         <a:solidFill>
           <a:schemeClr val="tx1"/>
@@ -400,7 +194,7 @@
         <a:cs typeface="+mn-cs"/>
       </a:defRPr>
     </a:lvl2pPr>
-    <a:lvl3pPr marL="914400" algn="l" defTabSz="457200" rtl="0" eaLnBrk="1" latinLnBrk="0" hangingPunct="1">
+    <a:lvl3pPr marL="914400" algn="l" defTabSz="914400" rtl="0" eaLnBrk="1" latinLnBrk="0" hangingPunct="1">
       <a:defRPr sz="1200" kern="1200">
         <a:solidFill>
           <a:schemeClr val="tx1"/>
@@ -410,7 +204,7 @@
         <a:cs typeface="+mn-cs"/>
       </a:defRPr>
     </a:lvl3pPr>
-    <a:lvl4pPr marL="1371600" algn="l" defTabSz="457200" rtl="0" eaLnBrk="1" latinLnBrk="0" hangingPunct="1">
+    <a:lvl4pPr marL="1371600" algn="l" defTabSz="914400" rtl="0" eaLnBrk="1" latinLnBrk="0" hangingPunct="1">
       <a:defRPr sz="1200" kern="1200">
         <a:solidFill>
           <a:schemeClr val="tx1"/>
@@ -420,7 +214,7 @@
         <a:cs typeface="+mn-cs"/>
       </a:defRPr>
     </a:lvl4pPr>
-    <a:lvl5pPr marL="1828800" algn="l" defTabSz="457200" rtl="0" eaLnBrk="1" latinLnBrk="0" hangingPunct="1">
+    <a:lvl5pPr marL="1828800" algn="l" defTabSz="914400" rtl="0" eaLnBrk="1" latinLnBrk="0" hangingPunct="1">
       <a:defRPr sz="1200" kern="1200">
         <a:solidFill>
           <a:schemeClr val="tx1"/>
@@ -430,7 +224,7 @@
         <a:cs typeface="+mn-cs"/>
       </a:defRPr>
     </a:lvl5pPr>
-    <a:lvl6pPr marL="2286000" algn="l" defTabSz="457200" rtl="0" eaLnBrk="1" latinLnBrk="0" hangingPunct="1">
+    <a:lvl6pPr marL="2286000" algn="l" defTabSz="914400" rtl="0" eaLnBrk="1" latinLnBrk="0" hangingPunct="1">
       <a:defRPr sz="1200" kern="1200">
         <a:solidFill>
           <a:schemeClr val="tx1"/>
@@ -440,7 +234,7 @@
         <a:cs typeface="+mn-cs"/>
       </a:defRPr>
     </a:lvl6pPr>
-    <a:lvl7pPr marL="2743200" algn="l" defTabSz="457200" rtl="0" eaLnBrk="1" latinLnBrk="0" hangingPunct="1">
+    <a:lvl7pPr marL="2743200" algn="l" defTabSz="914400" rtl="0" eaLnBrk="1" latinLnBrk="0" hangingPunct="1">
       <a:defRPr sz="1200" kern="1200">
         <a:solidFill>
           <a:schemeClr val="tx1"/>
@@ -450,7 +244,7 @@
         <a:cs typeface="+mn-cs"/>
       </a:defRPr>
     </a:lvl7pPr>
-    <a:lvl8pPr marL="3200400" algn="l" defTabSz="457200" rtl="0" eaLnBrk="1" latinLnBrk="0" hangingPunct="1">
+    <a:lvl8pPr marL="3200400" algn="l" defTabSz="914400" rtl="0" eaLnBrk="1" latinLnBrk="0" hangingPunct="1">
       <a:defRPr sz="1200" kern="1200">
         <a:solidFill>
           <a:schemeClr val="tx1"/>
@@ -460,7 +254,7 @@
         <a:cs typeface="+mn-cs"/>
       </a:defRPr>
     </a:lvl8pPr>
-    <a:lvl9pPr marL="3657600" algn="l" defTabSz="457200" rtl="0" eaLnBrk="1" latinLnBrk="0" hangingPunct="1">
+    <a:lvl9pPr marL="3657600" algn="l" defTabSz="914400" rtl="0" eaLnBrk="1" latinLnBrk="0" hangingPunct="1">
       <a:defRPr sz="1200" kern="1200">
         <a:solidFill>
           <a:schemeClr val="tx1"/>
@@ -475,7 +269,7 @@
 </file>
 
 <file path=ppt/notesSlides/notesSlide1.xml><?xml version="1.0" encoding="utf-8"?>
-<p:notes xmlns:a="http://schemas.openxmlformats.org/drawingml/2006/main" xmlns:p="http://schemas.openxmlformats.org/presentationml/2006/main" xmlns:r="http://schemas.openxmlformats.org/officeDocument/2006/relationships">
+<p:notes xmlns:a="http://schemas.openxmlformats.org/drawingml/2006/main" xmlns:r="http://schemas.openxmlformats.org/officeDocument/2006/relationships" xmlns:p="http://schemas.openxmlformats.org/presentationml/2006/main">
   <p:cSld>
     <p:spTree>
       <p:nvGrpSpPr>
@@ -495,7 +289,7 @@
         <p:nvSpPr>
           <p:cNvPr id="2" name="Slide Image Placeholder 1"/>
           <p:cNvSpPr>
-            <a:spLocks noGrp="1"/>
+            <a:spLocks noGrp="1" noRot="1" noChangeAspect="1"/>
           </p:cNvSpPr>
           <p:nvPr>
             <p:ph type="sldImg" idx="2"/>
@@ -510,7 +304,7 @@
             <a:spLocks noGrp="1"/>
           </p:cNvSpPr>
           <p:nvPr>
-            <p:ph type="body" idx="3" sz="quarter"/>
+            <p:ph type="body" sz="quarter" idx="3"/>
           </p:nvPr>
         </p:nvSpPr>
         <p:spPr/>
@@ -666,7 +460,7 @@
             <a:spLocks noGrp="1"/>
           </p:cNvSpPr>
           <p:nvPr>
-            <p:ph type="sldNum" idx="5" sz="quarter"/>
+            <p:ph type="sldNum" sz="quarter" idx="5"/>
           </p:nvPr>
         </p:nvSpPr>
         <p:spPr/>
@@ -680,7 +474,7 @@
 </file>
 
 <file path=ppt/notesSlides/notesSlide10.xml><?xml version="1.0" encoding="utf-8"?>
-<p:notes xmlns:a="http://schemas.openxmlformats.org/drawingml/2006/main" xmlns:p="http://schemas.openxmlformats.org/presentationml/2006/main" xmlns:r="http://schemas.openxmlformats.org/officeDocument/2006/relationships">
+<p:notes xmlns:a="http://schemas.openxmlformats.org/drawingml/2006/main" xmlns:r="http://schemas.openxmlformats.org/officeDocument/2006/relationships" xmlns:p="http://schemas.openxmlformats.org/presentationml/2006/main">
   <p:cSld>
     <p:spTree>
       <p:nvGrpSpPr>
@@ -700,7 +494,7 @@
         <p:nvSpPr>
           <p:cNvPr id="2" name="Slide Image Placeholder 1"/>
           <p:cNvSpPr>
-            <a:spLocks noGrp="1"/>
+            <a:spLocks noGrp="1" noRot="1" noChangeAspect="1"/>
           </p:cNvSpPr>
           <p:nvPr>
             <p:ph type="sldImg" idx="2"/>
@@ -715,7 +509,7 @@
             <a:spLocks noGrp="1"/>
           </p:cNvSpPr>
           <p:nvPr>
-            <p:ph type="body" idx="3" sz="quarter"/>
+            <p:ph type="body" sz="quarter" idx="3"/>
           </p:nvPr>
         </p:nvSpPr>
         <p:spPr/>
@@ -735,6 +529,7 @@
               </a:defRPr>
             </a:pPr>
             <a:r>
+              <a:rPr dirty="0"/>
               <a:t>PRESENTER NOTES</a:t>
             </a:r>
           </a:p>
@@ -751,6 +546,7 @@
               </a:defRPr>
             </a:pPr>
             <a:r>
+              <a:rPr dirty="0"/>
               <a:t>Timing: 3 minutes</a:t>
             </a:r>
           </a:p>
@@ -767,6 +563,7 @@
               </a:defRPr>
             </a:pPr>
             <a:r>
+              <a:rPr dirty="0"/>
               <a:t>Feature summary</a:t>
             </a:r>
           </a:p>
@@ -786,7 +583,16 @@
               </a:defRPr>
             </a:pPr>
             <a:r>
-              <a:t>The new vulnerability-alerts permission gives GITHUB_TOKEN read-only access to Dependabot alerts without requiring a personal access token or broader security scope.</a:t>
+              <a:rPr dirty="0"/>
+              <a:t>The new vulnerability-alerts permission gives GITHUB_TOKEN read-only access to </a:t>
+            </a:r>
+            <a:r>
+              <a:rPr dirty="0" err="1"/>
+              <a:t>Dependabot</a:t>
+            </a:r>
+            <a:r>
+              <a:rPr dirty="0"/>
+              <a:t> alerts without requiring a personal access token or broader security scope.</a:t>
             </a:r>
           </a:p>
           <a:p>
@@ -802,6 +608,7 @@
               </a:defRPr>
             </a:pPr>
             <a:r>
+              <a:rPr dirty="0"/>
               <a:t>Presenter cues</a:t>
             </a:r>
           </a:p>
@@ -821,6 +628,7 @@
               </a:defRPr>
             </a:pPr>
             <a:r>
+              <a:rPr dirty="0"/>
               <a:t>• Show the permission name and emphasize job-level scoping.</a:t>
             </a:r>
           </a:p>
@@ -840,6 +648,7 @@
               </a:defRPr>
             </a:pPr>
             <a:r>
+              <a:rPr dirty="0"/>
               <a:t>• A good pattern is contents: read at workflow level, then grant vulnerability-alerts: read only to the reporting job.</a:t>
             </a:r>
           </a:p>
@@ -859,8 +668,110 @@
               </a:defRPr>
             </a:pPr>
             <a:r>
+              <a:rPr dirty="0"/>
               <a:t>• This is simpler to audit than a PAT and limits blast radius.</a:t>
             </a:r>
+            <a:endParaRPr lang="en-US" dirty="0"/>
+          </a:p>
+          <a:p>
+            <a:pPr>
+              <a:lnSpc>
+                <a:spcPct val="110000"/>
+              </a:lnSpc>
+              <a:spcAft>
+                <a:spcPts val="700"/>
+              </a:spcAft>
+              <a:defRPr sz="1500">
+                <a:solidFill>
+                  <a:srgbClr val="202020"/>
+                </a:solidFill>
+                <a:latin typeface="Aptos"/>
+              </a:defRPr>
+            </a:pPr>
+            <a:endParaRPr lang="en-US" dirty="0"/>
+          </a:p>
+          <a:p>
+            <a:pPr>
+              <a:lnSpc>
+                <a:spcPct val="110000"/>
+              </a:lnSpc>
+              <a:spcAft>
+                <a:spcPts val="700"/>
+              </a:spcAft>
+              <a:defRPr sz="1500">
+                <a:solidFill>
+                  <a:srgbClr val="202020"/>
+                </a:solidFill>
+                <a:latin typeface="Aptos"/>
+              </a:defRPr>
+            </a:pPr>
+            <a:r>
+              <a:rPr lang="en-US" dirty="0"/>
+              <a:t>Notes</a:t>
+            </a:r>
+          </a:p>
+          <a:p>
+            <a:pPr>
+              <a:lnSpc>
+                <a:spcPct val="110000"/>
+              </a:lnSpc>
+              <a:spcAft>
+                <a:spcPts val="700"/>
+              </a:spcAft>
+              <a:defRPr sz="1500">
+                <a:solidFill>
+                  <a:srgbClr val="202020"/>
+                </a:solidFill>
+                <a:latin typeface="Aptos"/>
+              </a:defRPr>
+            </a:pPr>
+            <a:r>
+              <a:rPr lang="en-US" dirty="0"/>
+              <a:t>• Show the PAT setting.</a:t>
+            </a:r>
+          </a:p>
+          <a:p>
+            <a:pPr>
+              <a:lnSpc>
+                <a:spcPct val="100000"/>
+              </a:lnSpc>
+              <a:spcAft>
+                <a:spcPts val="700"/>
+              </a:spcAft>
+              <a:defRPr sz="1500">
+                <a:solidFill>
+                  <a:srgbClr val="202020"/>
+                </a:solidFill>
+                <a:latin typeface="Aptos"/>
+              </a:defRPr>
+            </a:pPr>
+            <a:r>
+              <a:rPr lang="en-US" dirty="0"/>
+              <a:t>• </a:t>
+            </a:r>
+            <a:r>
+              <a:rPr lang="en-US" sz="1500" kern="1200" dirty="0" err="1">
+                <a:solidFill>
+                  <a:srgbClr val="202020"/>
+                </a:solidFill>
+                <a:latin typeface="Aptos"/>
+                <a:ea typeface="+mn-ea"/>
+                <a:cs typeface="+mn-cs"/>
+              </a:rPr>
+              <a:t>Dependabot</a:t>
+            </a:r>
+            <a:r>
+              <a:rPr lang="en-US" sz="1500" kern="1200" dirty="0">
+                <a:solidFill>
+                  <a:srgbClr val="202020"/>
+                </a:solidFill>
+                <a:latin typeface="Aptos"/>
+                <a:ea typeface="+mn-ea"/>
+                <a:cs typeface="+mn-cs"/>
+              </a:rPr>
+              <a:t> alerts are GitHub's automated notifications that flag known security vulnerabilities in the dependencies your project uses</a:t>
+            </a:r>
+            <a:endParaRPr dirty="0"/>
           </a:p>
         </p:txBody>
       </p:sp>
@@ -871,7 +782,7 @@
             <a:spLocks noGrp="1"/>
           </p:cNvSpPr>
           <p:nvPr>
-            <p:ph type="sldNum" idx="5" sz="quarter"/>
+            <p:ph type="sldNum" sz="quarter" idx="5"/>
           </p:nvPr>
         </p:nvSpPr>
         <p:spPr/>
@@ -885,7 +796,7 @@
 </file>
 
 <file path=ppt/notesSlides/notesSlide11.xml><?xml version="1.0" encoding="utf-8"?>
-<p:notes xmlns:a="http://schemas.openxmlformats.org/drawingml/2006/main" xmlns:p="http://schemas.openxmlformats.org/presentationml/2006/main" xmlns:r="http://schemas.openxmlformats.org/officeDocument/2006/relationships">
+<p:notes xmlns:a="http://schemas.openxmlformats.org/drawingml/2006/main" xmlns:r="http://schemas.openxmlformats.org/officeDocument/2006/relationships" xmlns:p="http://schemas.openxmlformats.org/presentationml/2006/main">
   <p:cSld>
     <p:spTree>
       <p:nvGrpSpPr>
@@ -905,7 +816,7 @@
         <p:nvSpPr>
           <p:cNvPr id="2" name="Slide Image Placeholder 1"/>
           <p:cNvSpPr>
-            <a:spLocks noGrp="1"/>
+            <a:spLocks noGrp="1" noRot="1" noChangeAspect="1"/>
           </p:cNvSpPr>
           <p:nvPr>
             <p:ph type="sldImg" idx="2"/>
@@ -920,7 +831,7 @@
             <a:spLocks noGrp="1"/>
           </p:cNvSpPr>
           <p:nvPr>
-            <p:ph type="body" idx="3" sz="quarter"/>
+            <p:ph type="body" sz="quarter" idx="3"/>
           </p:nvPr>
         </p:nvSpPr>
         <p:spPr/>
@@ -1114,7 +1025,7 @@
             <a:spLocks noGrp="1"/>
           </p:cNvSpPr>
           <p:nvPr>
-            <p:ph type="sldNum" idx="5" sz="quarter"/>
+            <p:ph type="sldNum" sz="quarter" idx="5"/>
           </p:nvPr>
         </p:nvSpPr>
         <p:spPr/>
@@ -1128,7 +1039,7 @@
 </file>
 
 <file path=ppt/notesSlides/notesSlide12.xml><?xml version="1.0" encoding="utf-8"?>
-<p:notes xmlns:a="http://schemas.openxmlformats.org/drawingml/2006/main" xmlns:p="http://schemas.openxmlformats.org/presentationml/2006/main" xmlns:r="http://schemas.openxmlformats.org/officeDocument/2006/relationships">
+<p:notes xmlns:a="http://schemas.openxmlformats.org/drawingml/2006/main" xmlns:r="http://schemas.openxmlformats.org/officeDocument/2006/relationships" xmlns:p="http://schemas.openxmlformats.org/presentationml/2006/main">
   <p:cSld>
     <p:spTree>
       <p:nvGrpSpPr>
@@ -1148,7 +1059,7 @@
         <p:nvSpPr>
           <p:cNvPr id="2" name="Slide Image Placeholder 1"/>
           <p:cNvSpPr>
-            <a:spLocks noGrp="1"/>
+            <a:spLocks noGrp="1" noRot="1" noChangeAspect="1"/>
           </p:cNvSpPr>
           <p:nvPr>
             <p:ph type="sldImg" idx="2"/>
@@ -1163,7 +1074,7 @@
             <a:spLocks noGrp="1"/>
           </p:cNvSpPr>
           <p:nvPr>
-            <p:ph type="body" idx="3" sz="quarter"/>
+            <p:ph type="body" sz="quarter" idx="3"/>
           </p:nvPr>
         </p:nvSpPr>
         <p:spPr/>
@@ -1338,7 +1249,7 @@
             <a:spLocks noGrp="1"/>
           </p:cNvSpPr>
           <p:nvPr>
-            <p:ph type="sldNum" idx="5" sz="quarter"/>
+            <p:ph type="sldNum" sz="quarter" idx="5"/>
           </p:nvPr>
         </p:nvSpPr>
         <p:spPr/>
@@ -1352,7 +1263,7 @@
 </file>
 
 <file path=ppt/notesSlides/notesSlide13.xml><?xml version="1.0" encoding="utf-8"?>
-<p:notes xmlns:a="http://schemas.openxmlformats.org/drawingml/2006/main" xmlns:p="http://schemas.openxmlformats.org/presentationml/2006/main" xmlns:r="http://schemas.openxmlformats.org/officeDocument/2006/relationships">
+<p:notes xmlns:a="http://schemas.openxmlformats.org/drawingml/2006/main" xmlns:r="http://schemas.openxmlformats.org/officeDocument/2006/relationships" xmlns:p="http://schemas.openxmlformats.org/presentationml/2006/main">
   <p:cSld>
     <p:spTree>
       <p:nvGrpSpPr>
@@ -1372,7 +1283,7 @@
         <p:nvSpPr>
           <p:cNvPr id="2" name="Slide Image Placeholder 1"/>
           <p:cNvSpPr>
-            <a:spLocks noGrp="1"/>
+            <a:spLocks noGrp="1" noRot="1" noChangeAspect="1"/>
           </p:cNvSpPr>
           <p:nvPr>
             <p:ph type="sldImg" idx="2"/>
@@ -1387,7 +1298,7 @@
             <a:spLocks noGrp="1"/>
           </p:cNvSpPr>
           <p:nvPr>
-            <p:ph type="body" idx="3" sz="quarter"/>
+            <p:ph type="body" sz="quarter" idx="3"/>
           </p:nvPr>
         </p:nvSpPr>
         <p:spPr/>
@@ -1581,7 +1492,7 @@
             <a:spLocks noGrp="1"/>
           </p:cNvSpPr>
           <p:nvPr>
-            <p:ph type="sldNum" idx="5" sz="quarter"/>
+            <p:ph type="sldNum" sz="quarter" idx="5"/>
           </p:nvPr>
         </p:nvSpPr>
         <p:spPr/>
@@ -1595,7 +1506,7 @@
 </file>
 
 <file path=ppt/notesSlides/notesSlide14.xml><?xml version="1.0" encoding="utf-8"?>
-<p:notes xmlns:a="http://schemas.openxmlformats.org/drawingml/2006/main" xmlns:p="http://schemas.openxmlformats.org/presentationml/2006/main" xmlns:r="http://schemas.openxmlformats.org/officeDocument/2006/relationships">
+<p:notes xmlns:a="http://schemas.openxmlformats.org/drawingml/2006/main" xmlns:r="http://schemas.openxmlformats.org/officeDocument/2006/relationships" xmlns:p="http://schemas.openxmlformats.org/presentationml/2006/main">
   <p:cSld>
     <p:spTree>
       <p:nvGrpSpPr>
@@ -1615,7 +1526,7 @@
         <p:nvSpPr>
           <p:cNvPr id="2" name="Slide Image Placeholder 1"/>
           <p:cNvSpPr>
-            <a:spLocks noGrp="1"/>
+            <a:spLocks noGrp="1" noRot="1" noChangeAspect="1"/>
           </p:cNvSpPr>
           <p:nvPr>
             <p:ph type="sldImg" idx="2"/>
@@ -1630,7 +1541,7 @@
             <a:spLocks noGrp="1"/>
           </p:cNvSpPr>
           <p:nvPr>
-            <p:ph type="body" idx="3" sz="quarter"/>
+            <p:ph type="body" sz="quarter" idx="3"/>
           </p:nvPr>
         </p:nvSpPr>
         <p:spPr/>
@@ -1805,7 +1716,7 @@
             <a:spLocks noGrp="1"/>
           </p:cNvSpPr>
           <p:nvPr>
-            <p:ph type="sldNum" idx="5" sz="quarter"/>
+            <p:ph type="sldNum" sz="quarter" idx="5"/>
           </p:nvPr>
         </p:nvSpPr>
         <p:spPr/>
@@ -1819,7 +1730,7 @@
 </file>
 
 <file path=ppt/notesSlides/notesSlide15.xml><?xml version="1.0" encoding="utf-8"?>
-<p:notes xmlns:a="http://schemas.openxmlformats.org/drawingml/2006/main" xmlns:p="http://schemas.openxmlformats.org/presentationml/2006/main" xmlns:r="http://schemas.openxmlformats.org/officeDocument/2006/relationships">
+<p:notes xmlns:a="http://schemas.openxmlformats.org/drawingml/2006/main" xmlns:r="http://schemas.openxmlformats.org/officeDocument/2006/relationships" xmlns:p="http://schemas.openxmlformats.org/presentationml/2006/main">
   <p:cSld>
     <p:spTree>
       <p:nvGrpSpPr>
@@ -1839,7 +1750,7 @@
         <p:nvSpPr>
           <p:cNvPr id="2" name="Slide Image Placeholder 1"/>
           <p:cNvSpPr>
-            <a:spLocks noGrp="1"/>
+            <a:spLocks noGrp="1" noRot="1" noChangeAspect="1"/>
           </p:cNvSpPr>
           <p:nvPr>
             <p:ph type="sldImg" idx="2"/>
@@ -1854,7 +1765,7 @@
             <a:spLocks noGrp="1"/>
           </p:cNvSpPr>
           <p:nvPr>
-            <p:ph type="body" idx="3" sz="quarter"/>
+            <p:ph type="body" sz="quarter" idx="3"/>
           </p:nvPr>
         </p:nvSpPr>
         <p:spPr/>
@@ -2048,7 +1959,7 @@
             <a:spLocks noGrp="1"/>
           </p:cNvSpPr>
           <p:nvPr>
-            <p:ph type="sldNum" idx="5" sz="quarter"/>
+            <p:ph type="sldNum" sz="quarter" idx="5"/>
           </p:nvPr>
         </p:nvSpPr>
         <p:spPr/>
@@ -2062,7 +1973,7 @@
 </file>
 
 <file path=ppt/notesSlides/notesSlide16.xml><?xml version="1.0" encoding="utf-8"?>
-<p:notes xmlns:a="http://schemas.openxmlformats.org/drawingml/2006/main" xmlns:p="http://schemas.openxmlformats.org/presentationml/2006/main" xmlns:r="http://schemas.openxmlformats.org/officeDocument/2006/relationships">
+<p:notes xmlns:a="http://schemas.openxmlformats.org/drawingml/2006/main" xmlns:r="http://schemas.openxmlformats.org/officeDocument/2006/relationships" xmlns:p="http://schemas.openxmlformats.org/presentationml/2006/main">
   <p:cSld>
     <p:spTree>
       <p:nvGrpSpPr>
@@ -2082,7 +1993,7 @@
         <p:nvSpPr>
           <p:cNvPr id="2" name="Slide Image Placeholder 1"/>
           <p:cNvSpPr>
-            <a:spLocks noGrp="1"/>
+            <a:spLocks noGrp="1" noRot="1" noChangeAspect="1"/>
           </p:cNvSpPr>
           <p:nvPr>
             <p:ph type="sldImg" idx="2"/>
@@ -2097,7 +2008,7 @@
             <a:spLocks noGrp="1"/>
           </p:cNvSpPr>
           <p:nvPr>
-            <p:ph type="body" idx="3" sz="quarter"/>
+            <p:ph type="body" sz="quarter" idx="3"/>
           </p:nvPr>
         </p:nvSpPr>
         <p:spPr/>
@@ -2117,6 +2028,7 @@
               </a:defRPr>
             </a:pPr>
             <a:r>
+              <a:rPr dirty="0"/>
               <a:t>PRESENTER NOTES</a:t>
             </a:r>
           </a:p>
@@ -2133,6 +2045,7 @@
               </a:defRPr>
             </a:pPr>
             <a:r>
+              <a:rPr dirty="0"/>
               <a:t>Timing: 5 minutes</a:t>
             </a:r>
           </a:p>
@@ -2149,6 +2062,7 @@
               </a:defRPr>
             </a:pPr>
             <a:r>
+              <a:rPr dirty="0"/>
               <a:t>Feature summary</a:t>
             </a:r>
           </a:p>
@@ -2168,6 +2082,7 @@
               </a:defRPr>
             </a:pPr>
             <a:r>
+              <a:rPr dirty="0"/>
               <a:t>The highest-leverage performance improvements eliminate stale runs, reuse expensive deterministic work, prevent unnecessary jobs, control matrix growth, and distinguish queue time from execution time.</a:t>
             </a:r>
           </a:p>
@@ -2184,6 +2099,7 @@
               </a:defRPr>
             </a:pPr>
             <a:r>
+              <a:rPr dirty="0"/>
               <a:t>Presenter cues</a:t>
             </a:r>
           </a:p>
@@ -2203,6 +2119,7 @@
               </a:defRPr>
             </a:pPr>
             <a:r>
+              <a:rPr dirty="0"/>
               <a:t>• Spend about 45 seconds on each tip.</a:t>
             </a:r>
           </a:p>
@@ -2222,6 +2139,7 @@
               </a:defRPr>
             </a:pPr>
             <a:r>
+              <a:rPr dirty="0"/>
               <a:t>• Concurrency avoids paying for obsolete commits.</a:t>
             </a:r>
           </a:p>
@@ -2241,6 +2159,7 @@
               </a:defRPr>
             </a:pPr>
             <a:r>
+              <a:rPr dirty="0"/>
               <a:t>• Cache only expensive deterministic inputs.</a:t>
             </a:r>
           </a:p>
@@ -2260,6 +2179,7 @@
               </a:defRPr>
             </a:pPr>
             <a:r>
+              <a:rPr dirty="0"/>
               <a:t>• Filters prevent runner allocation entirely.</a:t>
             </a:r>
           </a:p>
@@ -2279,7 +2199,449 @@
               </a:defRPr>
             </a:pPr>
             <a:r>
+              <a:rPr dirty="0"/>
               <a:t>• Matrices often grow quadratically.</a:t>
+            </a:r>
+          </a:p>
+          <a:p>
+            <a:r>
+              <a:rPr dirty="0"/>
+              <a:t>• Finally, inspect queue time separately: a faster build cannot fix runner scarcity.</a:t>
+            </a:r>
+            <a:br>
+              <a:rPr lang="en-US" dirty="0"/>
+            </a:br>
+            <a:br>
+              <a:rPr lang="en-US" dirty="0"/>
+            </a:br>
+            <a:r>
+              <a:rPr lang="en-US" dirty="0"/>
+              <a:t>Here's more context on each of the five moves from that </a:t>
+            </a:r>
+            <a:r>
+              <a:rPr lang="en-US"/>
+              <a:t>slide:</a:t>
+            </a:r>
+          </a:p>
+          <a:p>
+            <a:endParaRPr lang="en-US" dirty="0"/>
+          </a:p>
+          <a:p>
+            <a:r>
+              <a:rPr lang="en-US" b="1" dirty="0"/>
+              <a:t>1. Cancel stale work</a:t>
+            </a:r>
+            <a:r>
+              <a:rPr lang="en-US" dirty="0"/>
+              <a:t> When you push multiple commits to the same PR in quick succession, GitHub Actions will happily run a full workflow for every single push — including ones that are already obsolete by the time they'd finish. Using </a:t>
+            </a:r>
+            <a:r>
+              <a:rPr lang="en-US" sz="1200" kern="1200" dirty="0">
+                <a:solidFill>
+                  <a:schemeClr val="tx1"/>
+                </a:solidFill>
+                <a:latin typeface="+mn-lt"/>
+                <a:ea typeface="+mn-ea"/>
+                <a:cs typeface="+mn-cs"/>
+              </a:rPr>
+              <a:t>concurrency</a:t>
+            </a:r>
+            <a:r>
+              <a:rPr lang="en-US" dirty="0"/>
+              <a:t> groups with </a:t>
+            </a:r>
+            <a:r>
+              <a:rPr lang="en-US" sz="1200" kern="1200" dirty="0">
+                <a:solidFill>
+                  <a:schemeClr val="tx1"/>
+                </a:solidFill>
+                <a:latin typeface="+mn-lt"/>
+                <a:ea typeface="+mn-ea"/>
+                <a:cs typeface="+mn-cs"/>
+              </a:rPr>
+              <a:t>cancel-in-progress: true</a:t>
+            </a:r>
+            <a:r>
+              <a:rPr lang="en-US" dirty="0"/>
+              <a:t> ties workflow runs to a group key (typically the PR or branch ref), so a new push automatically cancels the previous run for that same group instead of letting it finish. This saves runner minutes (and money, if you're on paid runners) and gets you feedback on your latest commit faster instead of waiting behind a queue of already-stale runs.</a:t>
+            </a:r>
+          </a:p>
+          <a:p>
+            <a:r>
+              <a:rPr lang="en-US" sz="1200" kern="1200" dirty="0">
+                <a:solidFill>
+                  <a:schemeClr val="tx1"/>
+                </a:solidFill>
+                <a:latin typeface="+mn-lt"/>
+                <a:ea typeface="+mn-ea"/>
+                <a:cs typeface="+mn-cs"/>
+              </a:rPr>
+              <a:t>concurrency:</a:t>
+            </a:r>
+          </a:p>
+          <a:p>
+            <a:r>
+              <a:rPr lang="en-US" sz="1200" kern="1200" dirty="0">
+                <a:solidFill>
+                  <a:schemeClr val="tx1"/>
+                </a:solidFill>
+                <a:latin typeface="+mn-lt"/>
+                <a:ea typeface="+mn-ea"/>
+                <a:cs typeface="+mn-cs"/>
+              </a:rPr>
+              <a:t>  group: ${{ </a:t>
+            </a:r>
+            <a:r>
+              <a:rPr lang="en-US" sz="1200" kern="1200" dirty="0" err="1">
+                <a:solidFill>
+                  <a:schemeClr val="tx1"/>
+                </a:solidFill>
+                <a:latin typeface="+mn-lt"/>
+                <a:ea typeface="+mn-ea"/>
+                <a:cs typeface="+mn-cs"/>
+              </a:rPr>
+              <a:t>github.workflow</a:t>
+            </a:r>
+            <a:r>
+              <a:rPr lang="en-US" sz="1200" kern="1200" dirty="0">
+                <a:solidFill>
+                  <a:schemeClr val="tx1"/>
+                </a:solidFill>
+                <a:latin typeface="+mn-lt"/>
+                <a:ea typeface="+mn-ea"/>
+                <a:cs typeface="+mn-cs"/>
+              </a:rPr>
+              <a:t> }}-${{ </a:t>
+            </a:r>
+            <a:r>
+              <a:rPr lang="en-US" sz="1200" kern="1200" dirty="0" err="1">
+                <a:solidFill>
+                  <a:schemeClr val="tx1"/>
+                </a:solidFill>
+                <a:latin typeface="+mn-lt"/>
+                <a:ea typeface="+mn-ea"/>
+                <a:cs typeface="+mn-cs"/>
+              </a:rPr>
+              <a:t>github.ref</a:t>
+            </a:r>
+            <a:r>
+              <a:rPr lang="en-US" sz="1200" kern="1200" dirty="0">
+                <a:solidFill>
+                  <a:schemeClr val="tx1"/>
+                </a:solidFill>
+                <a:latin typeface="+mn-lt"/>
+                <a:ea typeface="+mn-ea"/>
+                <a:cs typeface="+mn-cs"/>
+              </a:rPr>
+              <a:t> }}</a:t>
+            </a:r>
+          </a:p>
+          <a:p>
+            <a:r>
+              <a:rPr lang="en-US" sz="1200" kern="1200" dirty="0">
+                <a:solidFill>
+                  <a:schemeClr val="tx1"/>
+                </a:solidFill>
+                <a:latin typeface="+mn-lt"/>
+                <a:ea typeface="+mn-ea"/>
+                <a:cs typeface="+mn-cs"/>
+              </a:rPr>
+              <a:t>  cancel-in-progress: true</a:t>
+            </a:r>
+          </a:p>
+          <a:p>
+            <a:endParaRPr lang="en-US" sz="1200" kern="1200" dirty="0">
+              <a:solidFill>
+                <a:schemeClr val="tx1"/>
+              </a:solidFill>
+              <a:latin typeface="+mn-lt"/>
+              <a:ea typeface="+mn-ea"/>
+              <a:cs typeface="+mn-cs"/>
+            </a:endParaRPr>
+          </a:p>
+          <a:p>
+            <a:r>
+              <a:rPr lang="en-US" b="1" dirty="0"/>
+              <a:t>2. Cache with intent</a:t>
+            </a:r>
+            <a:r>
+              <a:rPr lang="en-US" dirty="0"/>
+              <a:t> The </a:t>
+            </a:r>
+            <a:r>
+              <a:rPr lang="en-US" sz="1200" kern="1200" dirty="0">
+                <a:solidFill>
+                  <a:schemeClr val="tx1"/>
+                </a:solidFill>
+                <a:latin typeface="+mn-lt"/>
+                <a:ea typeface="+mn-ea"/>
+                <a:cs typeface="+mn-cs"/>
+              </a:rPr>
+              <a:t>actions/cache</a:t>
+            </a:r>
+            <a:r>
+              <a:rPr lang="en-US" dirty="0"/>
+              <a:t> action can dramatically speed up dependency installation (</a:t>
+            </a:r>
+            <a:r>
+              <a:rPr lang="en-US" dirty="0" err="1"/>
+              <a:t>npm</a:t>
+            </a:r>
+            <a:r>
+              <a:rPr lang="en-US" dirty="0"/>
+              <a:t>, pip, Maven, etc.) by skipping redundant downloads — but only if your cache key strategy is deliberate. Keying on </a:t>
+            </a:r>
+            <a:r>
+              <a:rPr lang="en-US" dirty="0" err="1"/>
+              <a:t>lockfiles</a:t>
+            </a:r>
+            <a:r>
+              <a:rPr lang="en-US" dirty="0"/>
+              <a:t> (like </a:t>
+            </a:r>
+            <a:r>
+              <a:rPr lang="en-US" sz="1200" kern="1200" dirty="0">
+                <a:solidFill>
+                  <a:schemeClr val="tx1"/>
+                </a:solidFill>
+                <a:latin typeface="+mn-lt"/>
+                <a:ea typeface="+mn-ea"/>
+                <a:cs typeface="+mn-cs"/>
+              </a:rPr>
+              <a:t>package-</a:t>
+            </a:r>
+            <a:r>
+              <a:rPr lang="en-US" sz="1200" kern="1200" dirty="0" err="1">
+                <a:solidFill>
+                  <a:schemeClr val="tx1"/>
+                </a:solidFill>
+                <a:latin typeface="+mn-lt"/>
+                <a:ea typeface="+mn-ea"/>
+                <a:cs typeface="+mn-cs"/>
+              </a:rPr>
+              <a:t>lock.json</a:t>
+            </a:r>
+            <a:r>
+              <a:rPr lang="en-US" dirty="0"/>
+              <a:t> or </a:t>
+            </a:r>
+            <a:r>
+              <a:rPr lang="en-US" sz="1200" kern="1200" dirty="0" err="1">
+                <a:solidFill>
+                  <a:schemeClr val="tx1"/>
+                </a:solidFill>
+                <a:latin typeface="+mn-lt"/>
+                <a:ea typeface="+mn-ea"/>
+                <a:cs typeface="+mn-cs"/>
+              </a:rPr>
+              <a:t>poetry.lock</a:t>
+            </a:r>
+            <a:r>
+              <a:rPr lang="en-US" dirty="0"/>
+              <a:t>) means the cache only invalidates when dependencies actually change, rather than on every commit. "Restore broadly" typically refers to using fallback/partial-match </a:t>
+            </a:r>
+            <a:r>
+              <a:rPr lang="en-US" sz="1200" kern="1200" dirty="0">
+                <a:solidFill>
+                  <a:schemeClr val="tx1"/>
+                </a:solidFill>
+                <a:latin typeface="+mn-lt"/>
+                <a:ea typeface="+mn-ea"/>
+                <a:cs typeface="+mn-cs"/>
+              </a:rPr>
+              <a:t>restore-keys</a:t>
+            </a:r>
+            <a:r>
+              <a:rPr lang="en-US" dirty="0"/>
+              <a:t> so a near-miss (e.g., different </a:t>
+            </a:r>
+            <a:r>
+              <a:rPr lang="en-US" dirty="0" err="1"/>
+              <a:t>lockfile</a:t>
+            </a:r>
+            <a:r>
+              <a:rPr lang="en-US" dirty="0"/>
+              <a:t> hash but same major deps) still gets you a useful partial cache instead of starting from zero. And actually tracking your cache hit rate matters because a cache that's frequently missing isn't earning its complexity — it just adds overhead without the payoff.</a:t>
+            </a:r>
+          </a:p>
+          <a:p>
+            <a:endParaRPr lang="en-US" dirty="0"/>
+          </a:p>
+          <a:p>
+            <a:r>
+              <a:rPr lang="en-US" b="1" dirty="0"/>
+              <a:t>3. Filter early</a:t>
+            </a:r>
+            <a:r>
+              <a:rPr lang="en-US" dirty="0"/>
+              <a:t> Every workflow run that spins up a runner costs time and (often) money, even if the job immediately exits because "nothing relevant changed." Using </a:t>
+            </a:r>
+            <a:r>
+              <a:rPr lang="en-US" sz="1200" kern="1200" dirty="0">
+                <a:solidFill>
+                  <a:schemeClr val="tx1"/>
+                </a:solidFill>
+                <a:latin typeface="+mn-lt"/>
+                <a:ea typeface="+mn-ea"/>
+                <a:cs typeface="+mn-cs"/>
+              </a:rPr>
+              <a:t>paths</a:t>
+            </a:r>
+            <a:r>
+              <a:rPr lang="en-US" dirty="0"/>
+              <a:t>/</a:t>
+            </a:r>
+            <a:r>
+              <a:rPr lang="en-US" sz="1200" kern="1200" dirty="0">
+                <a:solidFill>
+                  <a:schemeClr val="tx1"/>
+                </a:solidFill>
+                <a:latin typeface="+mn-lt"/>
+                <a:ea typeface="+mn-ea"/>
+                <a:cs typeface="+mn-cs"/>
+              </a:rPr>
+              <a:t>paths-ignore</a:t>
+            </a:r>
+            <a:r>
+              <a:rPr lang="en-US" dirty="0"/>
+              <a:t> and </a:t>
+            </a:r>
+            <a:r>
+              <a:rPr lang="en-US" sz="1200" kern="1200" dirty="0">
+                <a:solidFill>
+                  <a:schemeClr val="tx1"/>
+                </a:solidFill>
+                <a:latin typeface="+mn-lt"/>
+                <a:ea typeface="+mn-ea"/>
+                <a:cs typeface="+mn-cs"/>
+              </a:rPr>
+              <a:t>branches</a:t>
+            </a:r>
+            <a:r>
+              <a:rPr lang="en-US" dirty="0"/>
+              <a:t>/</a:t>
+            </a:r>
+            <a:r>
+              <a:rPr lang="en-US" sz="1200" kern="1200" dirty="0">
+                <a:solidFill>
+                  <a:schemeClr val="tx1"/>
+                </a:solidFill>
+                <a:latin typeface="+mn-lt"/>
+                <a:ea typeface="+mn-ea"/>
+                <a:cs typeface="+mn-cs"/>
+              </a:rPr>
+              <a:t>branches-ignore</a:t>
+            </a:r>
+            <a:r>
+              <a:rPr lang="en-US" dirty="0"/>
+              <a:t> filters at the trigger level means GitHub decides not to start a run at all for irrelevant changes (e.g., a docs-only PR doesn't need to trigger your full test suite). Job-level </a:t>
+            </a:r>
+            <a:r>
+              <a:rPr lang="en-US" sz="1200" kern="1200" dirty="0">
+                <a:solidFill>
+                  <a:schemeClr val="tx1"/>
+                </a:solidFill>
+                <a:latin typeface="+mn-lt"/>
+                <a:ea typeface="+mn-ea"/>
+                <a:cs typeface="+mn-cs"/>
+              </a:rPr>
+              <a:t>if</a:t>
+            </a:r>
+            <a:r>
+              <a:rPr lang="en-US" dirty="0"/>
+              <a:t> conditions go a step further — the workflow starts, but individual jobs skip based on conditions (like </a:t>
+            </a:r>
+            <a:r>
+              <a:rPr lang="en-US" sz="1200" kern="1200" dirty="0">
+                <a:solidFill>
+                  <a:schemeClr val="tx1"/>
+                </a:solidFill>
+                <a:latin typeface="+mn-lt"/>
+                <a:ea typeface="+mn-ea"/>
+                <a:cs typeface="+mn-cs"/>
+              </a:rPr>
+              <a:t>if: </a:t>
+            </a:r>
+            <a:r>
+              <a:rPr lang="en-US" sz="1200" kern="1200" dirty="0" err="1">
+                <a:solidFill>
+                  <a:schemeClr val="tx1"/>
+                </a:solidFill>
+                <a:latin typeface="+mn-lt"/>
+                <a:ea typeface="+mn-ea"/>
+                <a:cs typeface="+mn-cs"/>
+              </a:rPr>
+              <a:t>github.event_name</a:t>
+            </a:r>
+            <a:r>
+              <a:rPr lang="en-US" sz="1200" kern="1200" dirty="0">
+                <a:solidFill>
+                  <a:schemeClr val="tx1"/>
+                </a:solidFill>
+                <a:latin typeface="+mn-lt"/>
+                <a:ea typeface="+mn-ea"/>
+                <a:cs typeface="+mn-cs"/>
+              </a:rPr>
+              <a:t> == 'push'</a:t>
+            </a:r>
+            <a:r>
+              <a:rPr lang="en-US" dirty="0"/>
+              <a:t>) without wasting time provisioning a runner and checking out code just to immediately bail out.</a:t>
+            </a:r>
+          </a:p>
+          <a:p>
+            <a:endParaRPr lang="en-US" dirty="0"/>
+          </a:p>
+          <a:p>
+            <a:r>
+              <a:rPr lang="en-US" b="1" dirty="0"/>
+              <a:t>4. Shrink the matrix</a:t>
+            </a:r>
+            <a:r>
+              <a:rPr lang="en-US" dirty="0"/>
+              <a:t> Build matrices (testing across multiple OS versions, language versions, dependency versions, etc.) multiply your total CI time and cost linearly with every dimension you add — a 3×3×3 matrix is 27 separate jobs. The suggestion here is to run a smaller, "representative" subset of that matrix on every PR (e.g., just Ubuntu + latest Python) for fast everyday feedback, then reserve the full expanded matrix for less frequent triggers like merges to </a:t>
+            </a:r>
+            <a:r>
+              <a:rPr lang="en-US" sz="1200" kern="1200" dirty="0">
+                <a:solidFill>
+                  <a:schemeClr val="tx1"/>
+                </a:solidFill>
+                <a:latin typeface="+mn-lt"/>
+                <a:ea typeface="+mn-ea"/>
+                <a:cs typeface="+mn-cs"/>
+              </a:rPr>
+              <a:t>main</a:t>
+            </a:r>
+            <a:r>
+              <a:rPr lang="en-US" dirty="0"/>
+              <a:t> or a nightly scheduled run. This keeps the common case (iterating on a PR) fast, while still getting full compatibility coverage on a regular cadence rather than every single push.</a:t>
+            </a:r>
+          </a:p>
+          <a:p>
+            <a:endParaRPr lang="en-US" dirty="0"/>
+          </a:p>
+          <a:p>
+            <a:r>
+              <a:rPr lang="en-US" b="1" dirty="0"/>
+              <a:t>5. Measure the queue</a:t>
+            </a:r>
+            <a:r>
+              <a:rPr lang="en-US" dirty="0"/>
+              <a:t> It's easy to assume a "slow CI" complaint means your test suite itself is slow, but often a big chunk of the delay is queue time — the gap between a workflow being triggered and a runner actually being available to execute it (due to concurrency limits, runner availability, or org-wide capacity constraints). If you don't separate queue time from execution time in your metrics, you might spend real engineering effort optimizing test code that was never the bottleneck, while the actual fix (more runners, higher concurrency limits, self-hosted capacity) goes unaddressed. GitHub's workflow run API and job timestamps let you calculate this split directly, so it's worth checking before assuming code-level changes are the answer.</a:t>
+            </a:r>
+          </a:p>
+          <a:p>
+            <a:r>
+              <a:rPr lang="en-US" dirty="0"/>
+              <a:t>The closing line — </a:t>
+            </a:r>
+            <a:r>
+              <a:rPr lang="en-US" b="1" dirty="0"/>
+              <a:t>"Optimize total feedback time, not just step duration"</a:t>
+            </a:r>
+            <a:r>
+              <a:rPr lang="en-US" dirty="0"/>
+              <a:t> — ties all five together: the real metric that matters to a developer waiting on CI is the total wall-clock time from push to result, and that includes queueing, redundant runs, and unnecessary matrix expansion — not just how fast any single step executes in isolation.</a:t>
             </a:r>
           </a:p>
           <a:p>
@@ -2297,9 +2659,7 @@
                 <a:latin typeface="Aptos"/>
               </a:defRPr>
             </a:pPr>
-            <a:r>
-              <a:t>• Finally, inspect queue time separately: a faster build cannot fix runner scarcity.</a:t>
-            </a:r>
+            <a:endParaRPr dirty="0"/>
           </a:p>
         </p:txBody>
       </p:sp>
@@ -2310,7 +2670,7 @@
             <a:spLocks noGrp="1"/>
           </p:cNvSpPr>
           <p:nvPr>
-            <p:ph type="sldNum" idx="5" sz="quarter"/>
+            <p:ph type="sldNum" sz="quarter" idx="5"/>
           </p:nvPr>
         </p:nvSpPr>
         <p:spPr/>
@@ -2324,7 +2684,7 @@
 </file>
 
 <file path=ppt/notesSlides/notesSlide17.xml><?xml version="1.0" encoding="utf-8"?>
-<p:notes xmlns:a="http://schemas.openxmlformats.org/drawingml/2006/main" xmlns:p="http://schemas.openxmlformats.org/presentationml/2006/main" xmlns:r="http://schemas.openxmlformats.org/officeDocument/2006/relationships">
+<p:notes xmlns:a="http://schemas.openxmlformats.org/drawingml/2006/main" xmlns:r="http://schemas.openxmlformats.org/officeDocument/2006/relationships" xmlns:p="http://schemas.openxmlformats.org/presentationml/2006/main">
   <p:cSld>
     <p:spTree>
       <p:nvGrpSpPr>
@@ -2344,7 +2704,7 @@
         <p:nvSpPr>
           <p:cNvPr id="2" name="Slide Image Placeholder 1"/>
           <p:cNvSpPr>
-            <a:spLocks noGrp="1"/>
+            <a:spLocks noGrp="1" noRot="1" noChangeAspect="1"/>
           </p:cNvSpPr>
           <p:nvPr>
             <p:ph type="sldImg" idx="2"/>
@@ -2359,7 +2719,7 @@
             <a:spLocks noGrp="1"/>
           </p:cNvSpPr>
           <p:nvPr>
-            <p:ph type="body" idx="3" sz="quarter"/>
+            <p:ph type="body" sz="quarter" idx="3"/>
           </p:nvPr>
         </p:nvSpPr>
         <p:spPr/>
@@ -2553,7 +2913,7 @@
             <a:spLocks noGrp="1"/>
           </p:cNvSpPr>
           <p:nvPr>
-            <p:ph type="sldNum" idx="5" sz="quarter"/>
+            <p:ph type="sldNum" sz="quarter" idx="5"/>
           </p:nvPr>
         </p:nvSpPr>
         <p:spPr/>
@@ -2567,7 +2927,7 @@
 </file>
 
 <file path=ppt/notesSlides/notesSlide18.xml><?xml version="1.0" encoding="utf-8"?>
-<p:notes xmlns:a="http://schemas.openxmlformats.org/drawingml/2006/main" xmlns:p="http://schemas.openxmlformats.org/presentationml/2006/main" xmlns:r="http://schemas.openxmlformats.org/officeDocument/2006/relationships">
+<p:notes xmlns:a="http://schemas.openxmlformats.org/drawingml/2006/main" xmlns:r="http://schemas.openxmlformats.org/officeDocument/2006/relationships" xmlns:p="http://schemas.openxmlformats.org/presentationml/2006/main">
   <p:cSld>
     <p:spTree>
       <p:nvGrpSpPr>
@@ -2587,7 +2947,7 @@
         <p:nvSpPr>
           <p:cNvPr id="2" name="Slide Image Placeholder 1"/>
           <p:cNvSpPr>
-            <a:spLocks noGrp="1"/>
+            <a:spLocks noGrp="1" noRot="1" noChangeAspect="1"/>
           </p:cNvSpPr>
           <p:nvPr>
             <p:ph type="sldImg" idx="2"/>
@@ -2602,7 +2962,7 @@
             <a:spLocks noGrp="1"/>
           </p:cNvSpPr>
           <p:nvPr>
-            <p:ph type="body" idx="3" sz="quarter"/>
+            <p:ph type="body" sz="quarter" idx="3"/>
           </p:nvPr>
         </p:nvSpPr>
         <p:spPr/>
@@ -2622,6 +2982,7 @@
               </a:defRPr>
             </a:pPr>
             <a:r>
+              <a:rPr dirty="0"/>
               <a:t>PRESENTER NOTES</a:t>
             </a:r>
           </a:p>
@@ -2638,6 +2999,7 @@
               </a:defRPr>
             </a:pPr>
             <a:r>
+              <a:rPr dirty="0"/>
               <a:t>Timing: Reference slide; no presentation time required</a:t>
             </a:r>
           </a:p>
@@ -2654,6 +3016,7 @@
               </a:defRPr>
             </a:pPr>
             <a:r>
+              <a:rPr dirty="0"/>
               <a:t>Feature summary</a:t>
             </a:r>
           </a:p>
@@ -2673,6 +3036,7 @@
               </a:defRPr>
             </a:pPr>
             <a:r>
+              <a:rPr dirty="0"/>
               <a:t>This slide provides the official GitHub Changelog source for every feature covered in the presentation.</a:t>
             </a:r>
           </a:p>
@@ -2689,6 +3053,7 @@
               </a:defRPr>
             </a:pPr>
             <a:r>
+              <a:rPr dirty="0"/>
               <a:t>Presenter cues</a:t>
             </a:r>
           </a:p>
@@ -2708,6 +3073,7 @@
               </a:defRPr>
             </a:pPr>
             <a:r>
+              <a:rPr dirty="0"/>
               <a:t>• Leave this slide displayed after Q&amp;A or share it with attendees as a follow-up resource.</a:t>
             </a:r>
           </a:p>
@@ -2727,6 +3093,7 @@
               </a:defRPr>
             </a:pPr>
             <a:r>
+              <a:rPr dirty="0"/>
               <a:t>• Each URL is clickable.</a:t>
             </a:r>
           </a:p>
@@ -2739,7 +3106,7 @@
             <a:spLocks noGrp="1"/>
           </p:cNvSpPr>
           <p:nvPr>
-            <p:ph type="sldNum" idx="5" sz="quarter"/>
+            <p:ph type="sldNum" sz="quarter" idx="5"/>
           </p:nvPr>
         </p:nvSpPr>
         <p:spPr/>
@@ -2753,7 +3120,7 @@
 </file>
 
 <file path=ppt/notesSlides/notesSlide2.xml><?xml version="1.0" encoding="utf-8"?>
-<p:notes xmlns:a="http://schemas.openxmlformats.org/drawingml/2006/main" xmlns:p="http://schemas.openxmlformats.org/presentationml/2006/main" xmlns:r="http://schemas.openxmlformats.org/officeDocument/2006/relationships">
+<p:notes xmlns:a="http://schemas.openxmlformats.org/drawingml/2006/main" xmlns:r="http://schemas.openxmlformats.org/officeDocument/2006/relationships" xmlns:p="http://schemas.openxmlformats.org/presentationml/2006/main">
   <p:cSld>
     <p:spTree>
       <p:nvGrpSpPr>
@@ -2773,7 +3140,7 @@
         <p:nvSpPr>
           <p:cNvPr id="2" name="Slide Image Placeholder 1"/>
           <p:cNvSpPr>
-            <a:spLocks noGrp="1"/>
+            <a:spLocks noGrp="1" noRot="1" noChangeAspect="1"/>
           </p:cNvSpPr>
           <p:nvPr>
             <p:ph type="sldImg" idx="2"/>
@@ -2788,7 +3155,7 @@
             <a:spLocks noGrp="1"/>
           </p:cNvSpPr>
           <p:nvPr>
-            <p:ph type="body" idx="3" sz="quarter"/>
+            <p:ph type="body" sz="quarter" idx="3"/>
           </p:nvPr>
         </p:nvSpPr>
         <p:spPr/>
@@ -2944,7 +3311,7 @@
             <a:spLocks noGrp="1"/>
           </p:cNvSpPr>
           <p:nvPr>
-            <p:ph type="sldNum" idx="5" sz="quarter"/>
+            <p:ph type="sldNum" sz="quarter" idx="5"/>
           </p:nvPr>
         </p:nvSpPr>
         <p:spPr/>
@@ -2958,7 +3325,7 @@
 </file>
 
 <file path=ppt/notesSlides/notesSlide3.xml><?xml version="1.0" encoding="utf-8"?>
-<p:notes xmlns:a="http://schemas.openxmlformats.org/drawingml/2006/main" xmlns:p="http://schemas.openxmlformats.org/presentationml/2006/main" xmlns:r="http://schemas.openxmlformats.org/officeDocument/2006/relationships">
+<p:notes xmlns:a="http://schemas.openxmlformats.org/drawingml/2006/main" xmlns:r="http://schemas.openxmlformats.org/officeDocument/2006/relationships" xmlns:p="http://schemas.openxmlformats.org/presentationml/2006/main">
   <p:cSld>
     <p:spTree>
       <p:nvGrpSpPr>
@@ -2978,7 +3345,7 @@
         <p:nvSpPr>
           <p:cNvPr id="2" name="Slide Image Placeholder 1"/>
           <p:cNvSpPr>
-            <a:spLocks noGrp="1"/>
+            <a:spLocks noGrp="1" noRot="1" noChangeAspect="1"/>
           </p:cNvSpPr>
           <p:nvPr>
             <p:ph type="sldImg" idx="2"/>
@@ -2993,7 +3360,7 @@
             <a:spLocks noGrp="1"/>
           </p:cNvSpPr>
           <p:nvPr>
-            <p:ph type="body" idx="3" sz="quarter"/>
+            <p:ph type="body" sz="quarter" idx="3"/>
           </p:nvPr>
         </p:nvSpPr>
         <p:spPr/>
@@ -3130,7 +3497,7 @@
             <a:spLocks noGrp="1"/>
           </p:cNvSpPr>
           <p:nvPr>
-            <p:ph type="sldNum" idx="5" sz="quarter"/>
+            <p:ph type="sldNum" sz="quarter" idx="5"/>
           </p:nvPr>
         </p:nvSpPr>
         <p:spPr/>
@@ -3144,7 +3511,7 @@
 </file>
 
 <file path=ppt/notesSlides/notesSlide4.xml><?xml version="1.0" encoding="utf-8"?>
-<p:notes xmlns:a="http://schemas.openxmlformats.org/drawingml/2006/main" xmlns:p="http://schemas.openxmlformats.org/presentationml/2006/main" xmlns:r="http://schemas.openxmlformats.org/officeDocument/2006/relationships">
+<p:notes xmlns:a="http://schemas.openxmlformats.org/drawingml/2006/main" xmlns:r="http://schemas.openxmlformats.org/officeDocument/2006/relationships" xmlns:p="http://schemas.openxmlformats.org/presentationml/2006/main">
   <p:cSld>
     <p:spTree>
       <p:nvGrpSpPr>
@@ -3164,7 +3531,7 @@
         <p:nvSpPr>
           <p:cNvPr id="2" name="Slide Image Placeholder 1"/>
           <p:cNvSpPr>
-            <a:spLocks noGrp="1"/>
+            <a:spLocks noGrp="1" noRot="1" noChangeAspect="1"/>
           </p:cNvSpPr>
           <p:nvPr>
             <p:ph type="sldImg" idx="2"/>
@@ -3179,7 +3546,7 @@
             <a:spLocks noGrp="1"/>
           </p:cNvSpPr>
           <p:nvPr>
-            <p:ph type="body" idx="3" sz="quarter"/>
+            <p:ph type="body" sz="quarter" idx="3"/>
           </p:nvPr>
         </p:nvSpPr>
         <p:spPr/>
@@ -3316,7 +3683,7 @@
             <a:spLocks noGrp="1"/>
           </p:cNvSpPr>
           <p:nvPr>
-            <p:ph type="sldNum" idx="5" sz="quarter"/>
+            <p:ph type="sldNum" sz="quarter" idx="5"/>
           </p:nvPr>
         </p:nvSpPr>
         <p:spPr/>
@@ -3330,7 +3697,7 @@
 </file>
 
 <file path=ppt/notesSlides/notesSlide5.xml><?xml version="1.0" encoding="utf-8"?>
-<p:notes xmlns:a="http://schemas.openxmlformats.org/drawingml/2006/main" xmlns:p="http://schemas.openxmlformats.org/presentationml/2006/main" xmlns:r="http://schemas.openxmlformats.org/officeDocument/2006/relationships">
+<p:notes xmlns:a="http://schemas.openxmlformats.org/drawingml/2006/main" xmlns:r="http://schemas.openxmlformats.org/officeDocument/2006/relationships" xmlns:p="http://schemas.openxmlformats.org/presentationml/2006/main">
   <p:cSld>
     <p:spTree>
       <p:nvGrpSpPr>
@@ -3350,7 +3717,7 @@
         <p:nvSpPr>
           <p:cNvPr id="2" name="Slide Image Placeholder 1"/>
           <p:cNvSpPr>
-            <a:spLocks noGrp="1"/>
+            <a:spLocks noGrp="1" noRot="1" noChangeAspect="1"/>
           </p:cNvSpPr>
           <p:nvPr>
             <p:ph type="sldImg" idx="2"/>
@@ -3365,7 +3732,7 @@
             <a:spLocks noGrp="1"/>
           </p:cNvSpPr>
           <p:nvPr>
-            <p:ph type="body" idx="3" sz="quarter"/>
+            <p:ph type="body" sz="quarter" idx="3"/>
           </p:nvPr>
         </p:nvSpPr>
         <p:spPr/>
@@ -3521,7 +3888,7 @@
             <a:spLocks noGrp="1"/>
           </p:cNvSpPr>
           <p:nvPr>
-            <p:ph type="sldNum" idx="5" sz="quarter"/>
+            <p:ph type="sldNum" sz="quarter" idx="5"/>
           </p:nvPr>
         </p:nvSpPr>
         <p:spPr/>
@@ -3535,7 +3902,7 @@
 </file>
 
 <file path=ppt/notesSlides/notesSlide6.xml><?xml version="1.0" encoding="utf-8"?>
-<p:notes xmlns:a="http://schemas.openxmlformats.org/drawingml/2006/main" xmlns:p="http://schemas.openxmlformats.org/presentationml/2006/main" xmlns:r="http://schemas.openxmlformats.org/officeDocument/2006/relationships">
+<p:notes xmlns:a="http://schemas.openxmlformats.org/drawingml/2006/main" xmlns:r="http://schemas.openxmlformats.org/officeDocument/2006/relationships" xmlns:p="http://schemas.openxmlformats.org/presentationml/2006/main">
   <p:cSld>
     <p:spTree>
       <p:nvGrpSpPr>
@@ -3555,7 +3922,7 @@
         <p:nvSpPr>
           <p:cNvPr id="2" name="Slide Image Placeholder 1"/>
           <p:cNvSpPr>
-            <a:spLocks noGrp="1"/>
+            <a:spLocks noGrp="1" noRot="1" noChangeAspect="1"/>
           </p:cNvSpPr>
           <p:nvPr>
             <p:ph type="sldImg" idx="2"/>
@@ -3570,7 +3937,7 @@
             <a:spLocks noGrp="1"/>
           </p:cNvSpPr>
           <p:nvPr>
-            <p:ph type="body" idx="3" sz="quarter"/>
+            <p:ph type="body" sz="quarter" idx="3"/>
           </p:nvPr>
         </p:nvSpPr>
         <p:spPr/>
@@ -3590,6 +3957,7 @@
               </a:defRPr>
             </a:pPr>
             <a:r>
+              <a:rPr dirty="0"/>
               <a:t>PRESENTER NOTES</a:t>
             </a:r>
           </a:p>
@@ -3606,6 +3974,7 @@
               </a:defRPr>
             </a:pPr>
             <a:r>
+              <a:rPr dirty="0"/>
               <a:t>Timing: 3 minutes</a:t>
             </a:r>
           </a:p>
@@ -3622,6 +3991,7 @@
               </a:defRPr>
             </a:pPr>
             <a:r>
+              <a:rPr dirty="0"/>
               <a:t>Feature summary</a:t>
             </a:r>
           </a:p>
@@ -3641,6 +4011,7 @@
               </a:defRPr>
             </a:pPr>
             <a:r>
+              <a:rPr dirty="0"/>
               <a:t>Starting October 1, 2026, one Actions retention setting controls checks, workflow runs, statuses, artifacts, and logs; the default is 90 days.</a:t>
             </a:r>
           </a:p>
@@ -3657,6 +4028,7 @@
               </a:defRPr>
             </a:pPr>
             <a:r>
+              <a:rPr dirty="0"/>
               <a:t>Presenter cues</a:t>
             </a:r>
           </a:p>
@@ -3676,6 +4048,7 @@
               </a:defRPr>
             </a:pPr>
             <a:r>
+              <a:rPr dirty="0"/>
               <a:t>• Previously, checks, runs, and statuses could remain for 400+ days regardless of artifact/log retention.</a:t>
             </a:r>
           </a:p>
@@ -3695,6 +4068,7 @@
               </a:defRPr>
             </a:pPr>
             <a:r>
+              <a:rPr dirty="0"/>
               <a:t>• Starting October 1, the same setting governs all five.</a:t>
             </a:r>
           </a:p>
@@ -3714,7 +4088,12 @@
               </a:defRPr>
             </a:pPr>
             <a:r>
-              <a:t>• Ask: does anyone rely on old run URLs for audits, support, or release evidence?</a:t>
+              <a:rPr dirty="0"/>
+              <a:t>• </a:t>
+            </a:r>
+            <a:r>
+              <a:rPr lang="en-US" dirty="0"/>
+              <a:t>Export what must outlive the configured window.</a:t>
             </a:r>
           </a:p>
           <a:p>
@@ -3733,8 +4112,10 @@
               </a:defRPr>
             </a:pPr>
             <a:r>
-              <a:t>• Export what must outlive the configured window.</a:t>
-            </a:r>
+              <a:rPr dirty="0"/>
+              <a:t>• Metadata is not billed, but artifacts and logs are.</a:t>
+            </a:r>
+            <a:endParaRPr lang="en-US" dirty="0"/>
           </a:p>
           <a:p>
             <a:pPr>
@@ -3751,9 +4132,131 @@
                 <a:latin typeface="Aptos"/>
               </a:defRPr>
             </a:pPr>
-            <a:r>
-              <a:t>• Metadata is not billed, but artifacts and logs are.</a:t>
-            </a:r>
+            <a:endParaRPr lang="en-US" dirty="0"/>
+          </a:p>
+          <a:p>
+            <a:pPr>
+              <a:lnSpc>
+                <a:spcPct val="110000"/>
+              </a:lnSpc>
+              <a:spcAft>
+                <a:spcPts val="700"/>
+              </a:spcAft>
+              <a:defRPr sz="1500">
+                <a:solidFill>
+                  <a:srgbClr val="202020"/>
+                </a:solidFill>
+                <a:latin typeface="Aptos"/>
+              </a:defRPr>
+            </a:pPr>
+            <a:r>
+              <a:rPr lang="en-US" sz="1600" b="1" kern="1200" dirty="0">
+                <a:solidFill>
+                  <a:srgbClr val="1F4E79"/>
+                </a:solidFill>
+                <a:latin typeface="Aptos"/>
+                <a:ea typeface="+mn-ea"/>
+                <a:cs typeface="+mn-cs"/>
+              </a:rPr>
+              <a:t>Notes</a:t>
+            </a:r>
+          </a:p>
+          <a:p>
+            <a:pPr>
+              <a:lnSpc>
+                <a:spcPct val="100000"/>
+              </a:lnSpc>
+              <a:spcAft>
+                <a:spcPts val="700"/>
+              </a:spcAft>
+              <a:defRPr sz="1500">
+                <a:solidFill>
+                  <a:srgbClr val="202020"/>
+                </a:solidFill>
+                <a:latin typeface="Aptos"/>
+              </a:defRPr>
+            </a:pPr>
+            <a:r>
+              <a:rPr lang="en-US" dirty="0"/>
+              <a:t>• </a:t>
+            </a:r>
+            <a:r>
+              <a:rPr lang="en-US" sz="1500" b="0" i="0" kern="1200" dirty="0">
+                <a:solidFill>
+                  <a:srgbClr val="202020"/>
+                </a:solidFill>
+                <a:effectLst/>
+                <a:latin typeface="Aptos"/>
+                <a:ea typeface="+mn-ea"/>
+                <a:cs typeface="+mn-cs"/>
+              </a:rPr>
+              <a:t>Starting October 1, 2026, checks, workflow runs, and statuses will be governed by the same Actions retention setting that already controls how long artifacts and logs are kept, with a default of 90 days. Until now, checks, workflow runs, and statuses were retained for 400+ days regardless of your retention configuration. After this change, they will automatically be cleaned up once they pass the artifact and log retention period configured for your repository, organization, or enterprise.</a:t>
+            </a:r>
+          </a:p>
+          <a:p>
+            <a:pPr>
+              <a:lnSpc>
+                <a:spcPct val="100000"/>
+              </a:lnSpc>
+              <a:spcAft>
+                <a:spcPts val="700"/>
+              </a:spcAft>
+              <a:defRPr sz="1500">
+                <a:solidFill>
+                  <a:srgbClr val="202020"/>
+                </a:solidFill>
+                <a:latin typeface="Aptos"/>
+              </a:defRPr>
+            </a:pPr>
+            <a:r>
+              <a:rPr lang="en-US" dirty="0"/>
+              <a:t>• </a:t>
+            </a:r>
+            <a:r>
+              <a:rPr lang="en-US" sz="1500" b="0" i="0" kern="1200" dirty="0">
+                <a:solidFill>
+                  <a:srgbClr val="202020"/>
+                </a:solidFill>
+                <a:effectLst/>
+                <a:latin typeface="Aptos"/>
+                <a:ea typeface="+mn-ea"/>
+                <a:cs typeface="+mn-cs"/>
+              </a:rPr>
+              <a:t>Settings -&gt; Actions -&gt; General</a:t>
+            </a:r>
+          </a:p>
+          <a:p>
+            <a:pPr>
+              <a:lnSpc>
+                <a:spcPct val="100000"/>
+              </a:lnSpc>
+              <a:spcAft>
+                <a:spcPts val="700"/>
+              </a:spcAft>
+              <a:defRPr sz="1500">
+                <a:solidFill>
+                  <a:srgbClr val="202020"/>
+                </a:solidFill>
+                <a:latin typeface="Aptos"/>
+              </a:defRPr>
+            </a:pPr>
+            <a:r>
+              <a:rPr lang="en-US" dirty="0"/>
+              <a:t>• </a:t>
+            </a:r>
+            <a:r>
+              <a:rPr lang="en-US" sz="1500" b="0" i="0" kern="1200" dirty="0">
+                <a:solidFill>
+                  <a:srgbClr val="202020"/>
+                </a:solidFill>
+                <a:effectLst/>
+                <a:latin typeface="Aptos"/>
+                <a:ea typeface="+mn-ea"/>
+                <a:cs typeface="+mn-cs"/>
+              </a:rPr>
+              <a:t>You can export the data via the GitHub CLI.</a:t>
+            </a:r>
+            <a:endParaRPr dirty="0"/>
           </a:p>
         </p:txBody>
       </p:sp>
@@ -3764,7 +4267,7 @@
             <a:spLocks noGrp="1"/>
           </p:cNvSpPr>
           <p:nvPr>
-            <p:ph type="sldNum" idx="5" sz="quarter"/>
+            <p:ph type="sldNum" sz="quarter" idx="5"/>
           </p:nvPr>
         </p:nvSpPr>
         <p:spPr/>
@@ -3778,7 +4281,7 @@
 </file>
 
 <file path=ppt/notesSlides/notesSlide7.xml><?xml version="1.0" encoding="utf-8"?>
-<p:notes xmlns:a="http://schemas.openxmlformats.org/drawingml/2006/main" xmlns:p="http://schemas.openxmlformats.org/presentationml/2006/main" xmlns:r="http://schemas.openxmlformats.org/officeDocument/2006/relationships">
+<p:notes xmlns:a="http://schemas.openxmlformats.org/drawingml/2006/main" xmlns:r="http://schemas.openxmlformats.org/officeDocument/2006/relationships" xmlns:p="http://schemas.openxmlformats.org/presentationml/2006/main">
   <p:cSld>
     <p:spTree>
       <p:nvGrpSpPr>
@@ -3798,7 +4301,7 @@
         <p:nvSpPr>
           <p:cNvPr id="2" name="Slide Image Placeholder 1"/>
           <p:cNvSpPr>
-            <a:spLocks noGrp="1"/>
+            <a:spLocks noGrp="1" noRot="1" noChangeAspect="1"/>
           </p:cNvSpPr>
           <p:nvPr>
             <p:ph type="sldImg" idx="2"/>
@@ -3813,7 +4316,7 @@
             <a:spLocks noGrp="1"/>
           </p:cNvSpPr>
           <p:nvPr>
-            <p:ph type="body" idx="3" sz="quarter"/>
+            <p:ph type="body" sz="quarter" idx="3"/>
           </p:nvPr>
         </p:nvSpPr>
         <p:spPr/>
@@ -3833,6 +4336,7 @@
               </a:defRPr>
             </a:pPr>
             <a:r>
+              <a:rPr dirty="0"/>
               <a:t>PRESENTER NOTES</a:t>
             </a:r>
           </a:p>
@@ -3849,6 +4353,7 @@
               </a:defRPr>
             </a:pPr>
             <a:r>
+              <a:rPr dirty="0"/>
               <a:t>Timing: 2 minutes</a:t>
             </a:r>
           </a:p>
@@ -3865,6 +4370,7 @@
               </a:defRPr>
             </a:pPr>
             <a:r>
+              <a:rPr dirty="0"/>
               <a:t>Feature summary</a:t>
             </a:r>
           </a:p>
@@ -3884,7 +4390,16 @@
               </a:defRPr>
             </a:pPr>
             <a:r>
-              <a:t>GitHub Code Quality Actions runs now use a dedicated dynamic path and github-code-quality actor, separating quality analysis from code-scanning activity in reports.</a:t>
+              <a:rPr dirty="0"/>
+              <a:t>GitHub Code Quality Actions runs now use a dedicated dynamic path and </a:t>
+            </a:r>
+            <a:r>
+              <a:rPr dirty="0" err="1"/>
+              <a:t>github</a:t>
+            </a:r>
+            <a:r>
+              <a:rPr dirty="0"/>
+              <a:t>-code-quality actor, separating quality analysis from code-scanning activity in reports.</a:t>
             </a:r>
           </a:p>
           <a:p>
@@ -3900,6 +4415,7 @@
               </a:defRPr>
             </a:pPr>
             <a:r>
+              <a:rPr dirty="0"/>
               <a:t>Presenter cues</a:t>
             </a:r>
           </a:p>
@@ -3919,6 +4435,7 @@
               </a:defRPr>
             </a:pPr>
             <a:r>
+              <a:rPr dirty="0"/>
               <a:t>• This is primarily a reporting and automation compatibility change.</a:t>
             </a:r>
           </a:p>
@@ -3938,6 +4455,7 @@
               </a:defRPr>
             </a:pPr>
             <a:r>
+              <a:rPr dirty="0"/>
               <a:t>• Existing analysis keeps running.</a:t>
             </a:r>
           </a:p>
@@ -3957,7 +4475,16 @@
               </a:defRPr>
             </a:pPr>
             <a:r>
-              <a:t>• The migration task is to update anything that classifies a run by the old dynamic path or github-advanced-security actor.</a:t>
+              <a:rPr dirty="0"/>
+              <a:t>• The migration task is to update anything that classifies a run by the old dynamic path or </a:t>
+            </a:r>
+            <a:r>
+              <a:rPr dirty="0" err="1"/>
+              <a:t>github</a:t>
+            </a:r>
+            <a:r>
+              <a:rPr dirty="0"/>
+              <a:t>-advanced-security actor.</a:t>
             </a:r>
           </a:p>
         </p:txBody>
@@ -3969,7 +4496,7 @@
             <a:spLocks noGrp="1"/>
           </p:cNvSpPr>
           <p:nvPr>
-            <p:ph type="sldNum" idx="5" sz="quarter"/>
+            <p:ph type="sldNum" sz="quarter" idx="5"/>
           </p:nvPr>
         </p:nvSpPr>
         <p:spPr/>
@@ -3983,7 +4510,7 @@
 </file>
 
 <file path=ppt/notesSlides/notesSlide8.xml><?xml version="1.0" encoding="utf-8"?>
-<p:notes xmlns:a="http://schemas.openxmlformats.org/drawingml/2006/main" xmlns:p="http://schemas.openxmlformats.org/presentationml/2006/main" xmlns:r="http://schemas.openxmlformats.org/officeDocument/2006/relationships">
+<p:notes xmlns:a="http://schemas.openxmlformats.org/drawingml/2006/main" xmlns:r="http://schemas.openxmlformats.org/officeDocument/2006/relationships" xmlns:p="http://schemas.openxmlformats.org/presentationml/2006/main">
   <p:cSld>
     <p:spTree>
       <p:nvGrpSpPr>
@@ -4003,7 +4530,7 @@
         <p:nvSpPr>
           <p:cNvPr id="2" name="Slide Image Placeholder 1"/>
           <p:cNvSpPr>
-            <a:spLocks noGrp="1"/>
+            <a:spLocks noGrp="1" noRot="1" noChangeAspect="1"/>
           </p:cNvSpPr>
           <p:nvPr>
             <p:ph type="sldImg" idx="2"/>
@@ -4018,7 +4545,7 @@
             <a:spLocks noGrp="1"/>
           </p:cNvSpPr>
           <p:nvPr>
-            <p:ph type="body" idx="3" sz="quarter"/>
+            <p:ph type="body" sz="quarter" idx="3"/>
           </p:nvPr>
         </p:nvSpPr>
         <p:spPr/>
@@ -4174,7 +4701,7 @@
             <a:spLocks noGrp="1"/>
           </p:cNvSpPr>
           <p:nvPr>
-            <p:ph type="sldNum" idx="5" sz="quarter"/>
+            <p:ph type="sldNum" sz="quarter" idx="5"/>
           </p:nvPr>
         </p:nvSpPr>
         <p:spPr/>
@@ -4188,7 +4715,7 @@
 </file>
 
 <file path=ppt/notesSlides/notesSlide9.xml><?xml version="1.0" encoding="utf-8"?>
-<p:notes xmlns:a="http://schemas.openxmlformats.org/drawingml/2006/main" xmlns:p="http://schemas.openxmlformats.org/presentationml/2006/main" xmlns:r="http://schemas.openxmlformats.org/officeDocument/2006/relationships">
+<p:notes xmlns:a="http://schemas.openxmlformats.org/drawingml/2006/main" xmlns:r="http://schemas.openxmlformats.org/officeDocument/2006/relationships" xmlns:p="http://schemas.openxmlformats.org/presentationml/2006/main">
   <p:cSld>
     <p:spTree>
       <p:nvGrpSpPr>
@@ -4208,7 +4735,7 @@
         <p:nvSpPr>
           <p:cNvPr id="2" name="Slide Image Placeholder 1"/>
           <p:cNvSpPr>
-            <a:spLocks noGrp="1"/>
+            <a:spLocks noGrp="1" noRot="1" noChangeAspect="1"/>
           </p:cNvSpPr>
           <p:nvPr>
             <p:ph type="sldImg" idx="2"/>
@@ -4223,7 +4750,7 @@
             <a:spLocks noGrp="1"/>
           </p:cNvSpPr>
           <p:nvPr>
-            <p:ph type="body" idx="3" sz="quarter"/>
+            <p:ph type="body" sz="quarter" idx="3"/>
           </p:nvPr>
         </p:nvSpPr>
         <p:spPr/>
@@ -4243,6 +4770,7 @@
               </a:defRPr>
             </a:pPr>
             <a:r>
+              <a:rPr dirty="0"/>
               <a:t>PRESENTER NOTES</a:t>
             </a:r>
           </a:p>
@@ -4259,6 +4787,7 @@
               </a:defRPr>
             </a:pPr>
             <a:r>
+              <a:rPr dirty="0"/>
               <a:t>Timing: 3 minutes</a:t>
             </a:r>
           </a:p>
@@ -4275,6 +4804,7 @@
               </a:defRPr>
             </a:pPr>
             <a:r>
+              <a:rPr dirty="0"/>
               <a:t>Feature summary</a:t>
             </a:r>
           </a:p>
@@ -4294,6 +4824,7 @@
               </a:defRPr>
             </a:pPr>
             <a:r>
+              <a:rPr dirty="0"/>
               <a:t>A new REST API reports registration and runtime deprecation dates for a specific Actions runner version at repository, organization, or enterprise scope.</a:t>
             </a:r>
           </a:p>
@@ -4310,6 +4841,7 @@
               </a:defRPr>
             </a:pPr>
             <a:r>
+              <a:rPr dirty="0"/>
               <a:t>Presenter cues</a:t>
             </a:r>
           </a:p>
@@ -4329,6 +4861,7 @@
               </a:defRPr>
             </a:pPr>
             <a:r>
+              <a:rPr dirty="0"/>
               <a:t>• Differentiate runner binary versions from hosted runner image labels.</a:t>
             </a:r>
           </a:p>
@@ -4348,6 +4881,7 @@
               </a:defRPr>
             </a:pPr>
             <a:r>
+              <a:rPr dirty="0"/>
               <a:t>• This endpoint is most valuable for self-hosted fleets.</a:t>
             </a:r>
           </a:p>
@@ -4367,8 +4901,276 @@
               </a:defRPr>
             </a:pPr>
             <a:r>
+              <a:rPr dirty="0"/>
               <a:t>• A scheduled inventory process can query every version in use and alert before either cutoff.</a:t>
             </a:r>
+            <a:endParaRPr lang="en-US" dirty="0"/>
+          </a:p>
+          <a:p>
+            <a:pPr>
+              <a:lnSpc>
+                <a:spcPct val="110000"/>
+              </a:lnSpc>
+              <a:spcAft>
+                <a:spcPts val="700"/>
+              </a:spcAft>
+              <a:defRPr sz="1500">
+                <a:solidFill>
+                  <a:srgbClr val="202020"/>
+                </a:solidFill>
+                <a:latin typeface="Aptos"/>
+              </a:defRPr>
+            </a:pPr>
+            <a:endParaRPr lang="en-US" dirty="0"/>
+          </a:p>
+          <a:p>
+            <a:pPr>
+              <a:lnSpc>
+                <a:spcPct val="110000"/>
+              </a:lnSpc>
+              <a:spcAft>
+                <a:spcPts val="700"/>
+              </a:spcAft>
+              <a:defRPr sz="1500">
+                <a:solidFill>
+                  <a:srgbClr val="202020"/>
+                </a:solidFill>
+                <a:latin typeface="Aptos"/>
+              </a:defRPr>
+            </a:pPr>
+            <a:r>
+              <a:rPr lang="en-US" sz="1600" b="1" kern="1200" dirty="0">
+                <a:solidFill>
+                  <a:srgbClr val="1F4E79"/>
+                </a:solidFill>
+                <a:latin typeface="Aptos"/>
+                <a:ea typeface="+mn-ea"/>
+                <a:cs typeface="+mn-cs"/>
+              </a:rPr>
+              <a:t>Notes</a:t>
+            </a:r>
+          </a:p>
+          <a:p>
+            <a:pPr marL="0" marR="0" lvl="0" indent="0" algn="l" defTabSz="914400" rtl="0" eaLnBrk="1" fontAlgn="auto" latinLnBrk="0" hangingPunct="1">
+              <a:lnSpc>
+                <a:spcPct val="110000"/>
+              </a:lnSpc>
+              <a:spcBef>
+                <a:spcPts val="0"/>
+              </a:spcBef>
+              <a:spcAft>
+                <a:spcPts val="700"/>
+              </a:spcAft>
+              <a:buClrTx/>
+              <a:buSzTx/>
+              <a:buFontTx/>
+              <a:buNone/>
+              <a:tabLst/>
+              <a:defRPr sz="1500">
+                <a:solidFill>
+                  <a:srgbClr val="202020"/>
+                </a:solidFill>
+                <a:latin typeface="Aptos"/>
+              </a:defRPr>
+            </a:pPr>
+            <a:r>
+              <a:rPr lang="en-US" dirty="0"/>
+              <a:t>• Can be invoked using curl, GitHub CLI, Python, and even an Action using the GitHub CLI.</a:t>
+            </a:r>
+          </a:p>
+          <a:p>
+            <a:pPr marL="0" marR="0" lvl="0" indent="0" algn="l" defTabSz="914400" rtl="0" eaLnBrk="1" fontAlgn="auto" latinLnBrk="0" hangingPunct="1">
+              <a:lnSpc>
+                <a:spcPct val="110000"/>
+              </a:lnSpc>
+              <a:spcBef>
+                <a:spcPts val="0"/>
+              </a:spcBef>
+              <a:spcAft>
+                <a:spcPts val="700"/>
+              </a:spcAft>
+              <a:buClrTx/>
+              <a:buSzTx/>
+              <a:buFont typeface="Arial" panose="020B0604020202020204" pitchFamily="34" charset="0"/>
+              <a:buNone/>
+              <a:tabLst/>
+              <a:defRPr sz="1500">
+                <a:solidFill>
+                  <a:srgbClr val="202020"/>
+                </a:solidFill>
+                <a:latin typeface="Aptos"/>
+              </a:defRPr>
+            </a:pPr>
+            <a:r>
+              <a:rPr lang="en-US" dirty="0"/>
+              <a:t>• </a:t>
+            </a:r>
+            <a:r>
+              <a:rPr lang="en-US" sz="1500" kern="1200" dirty="0" err="1">
+                <a:solidFill>
+                  <a:srgbClr val="202020"/>
+                </a:solidFill>
+                <a:latin typeface="Aptos"/>
+                <a:ea typeface="+mn-ea"/>
+                <a:cs typeface="+mn-cs"/>
+              </a:rPr>
+              <a:t>gh</a:t>
+            </a:r>
+            <a:r>
+              <a:rPr lang="en-US" sz="1500" kern="1200" dirty="0">
+                <a:solidFill>
+                  <a:srgbClr val="202020"/>
+                </a:solidFill>
+                <a:latin typeface="Aptos"/>
+                <a:ea typeface="+mn-ea"/>
+                <a:cs typeface="+mn-cs"/>
+              </a:rPr>
+              <a:t> </a:t>
+            </a:r>
+            <a:r>
+              <a:rPr lang="en-US" sz="1500" kern="1200" dirty="0" err="1">
+                <a:solidFill>
+                  <a:srgbClr val="202020"/>
+                </a:solidFill>
+                <a:latin typeface="Aptos"/>
+                <a:ea typeface="+mn-ea"/>
+                <a:cs typeface="+mn-cs"/>
+              </a:rPr>
+              <a:t>api</a:t>
+            </a:r>
+            <a:r>
+              <a:rPr lang="en-US" sz="1500" kern="1200" dirty="0">
+                <a:solidFill>
+                  <a:srgbClr val="202020"/>
+                </a:solidFill>
+                <a:latin typeface="Aptos"/>
+                <a:ea typeface="+mn-ea"/>
+                <a:cs typeface="+mn-cs"/>
+              </a:rPr>
+              <a:t> repos/</a:t>
+            </a:r>
+            <a:r>
+              <a:rPr lang="en-US" sz="1500" kern="1200" dirty="0" err="1">
+                <a:solidFill>
+                  <a:srgbClr val="202020"/>
+                </a:solidFill>
+                <a:latin typeface="Aptos"/>
+                <a:ea typeface="+mn-ea"/>
+                <a:cs typeface="+mn-cs"/>
+              </a:rPr>
+              <a:t>seandorsett</a:t>
+            </a:r>
+            <a:r>
+              <a:rPr lang="en-US" sz="1500" kern="1200" dirty="0">
+                <a:solidFill>
+                  <a:srgbClr val="202020"/>
+                </a:solidFill>
+                <a:latin typeface="Aptos"/>
+                <a:ea typeface="+mn-ea"/>
+                <a:cs typeface="+mn-cs"/>
+              </a:rPr>
+              <a:t>/</a:t>
+            </a:r>
+            <a:r>
+              <a:rPr lang="en-US" sz="1500" kern="1200" dirty="0" err="1">
+                <a:solidFill>
+                  <a:srgbClr val="202020"/>
+                </a:solidFill>
+                <a:latin typeface="Aptos"/>
+                <a:ea typeface="+mn-ea"/>
+                <a:cs typeface="+mn-cs"/>
+              </a:rPr>
+              <a:t>gha</a:t>
+            </a:r>
+            <a:r>
+              <a:rPr lang="en-US" sz="1500" kern="1200" dirty="0">
+                <a:solidFill>
+                  <a:srgbClr val="202020"/>
+                </a:solidFill>
+                <a:latin typeface="Aptos"/>
+                <a:ea typeface="+mn-ea"/>
+                <a:cs typeface="+mn-cs"/>
+              </a:rPr>
+              <a:t>-office-hours-</a:t>
+            </a:r>
+            <a:r>
+              <a:rPr lang="en-US" sz="1500" kern="1200" dirty="0" err="1">
+                <a:solidFill>
+                  <a:srgbClr val="202020"/>
+                </a:solidFill>
+                <a:latin typeface="Aptos"/>
+                <a:ea typeface="+mn-ea"/>
+                <a:cs typeface="+mn-cs"/>
+              </a:rPr>
+              <a:t>sep</a:t>
+            </a:r>
+            <a:r>
+              <a:rPr lang="en-US" sz="1500" kern="1200" dirty="0">
+                <a:solidFill>
+                  <a:srgbClr val="202020"/>
+                </a:solidFill>
+                <a:latin typeface="Aptos"/>
+                <a:ea typeface="+mn-ea"/>
+                <a:cs typeface="+mn-cs"/>
+              </a:rPr>
+              <a:t>/actions/runners/deprecations/2.337.0</a:t>
+            </a:r>
+          </a:p>
+          <a:p>
+            <a:pPr marL="0" marR="0" lvl="0" indent="0" algn="l" defTabSz="914400" rtl="0" eaLnBrk="1" fontAlgn="auto" latinLnBrk="0" hangingPunct="1">
+              <a:lnSpc>
+                <a:spcPct val="110000"/>
+              </a:lnSpc>
+              <a:spcBef>
+                <a:spcPts val="0"/>
+              </a:spcBef>
+              <a:spcAft>
+                <a:spcPts val="700"/>
+              </a:spcAft>
+              <a:buClrTx/>
+              <a:buSzTx/>
+              <a:buFont typeface="Arial" panose="020B0604020202020204" pitchFamily="34" charset="0"/>
+              <a:buNone/>
+              <a:tabLst/>
+              <a:defRPr sz="1500">
+                <a:solidFill>
+                  <a:srgbClr val="202020"/>
+                </a:solidFill>
+                <a:latin typeface="Aptos"/>
+              </a:defRPr>
+            </a:pPr>
+            <a:r>
+              <a:rPr lang="en-US" dirty="0"/>
+              <a:t>• </a:t>
+            </a:r>
+            <a:r>
+              <a:rPr lang="en-US" sz="1500" kern="1200" dirty="0">
+                <a:solidFill>
+                  <a:srgbClr val="202020"/>
+                </a:solidFill>
+                <a:latin typeface="Aptos"/>
+                <a:ea typeface="+mn-ea"/>
+                <a:cs typeface="+mn-cs"/>
+              </a:rPr>
+              <a:t>May get a 404 if the version is not yet in the database.</a:t>
+            </a:r>
+          </a:p>
+          <a:p>
+            <a:pPr>
+              <a:lnSpc>
+                <a:spcPct val="110000"/>
+              </a:lnSpc>
+              <a:spcAft>
+                <a:spcPts val="700"/>
+              </a:spcAft>
+              <a:defRPr sz="1500">
+                <a:solidFill>
+                  <a:srgbClr val="202020"/>
+                </a:solidFill>
+                <a:latin typeface="Aptos"/>
+              </a:defRPr>
+            </a:pPr>
+            <a:endParaRPr dirty="0"/>
           </a:p>
         </p:txBody>
       </p:sp>
@@ -4379,7 +5181,7 @@
             <a:spLocks noGrp="1"/>
           </p:cNvSpPr>
           <p:nvPr>
-            <p:ph type="sldNum" idx="5" sz="quarter"/>
+            <p:ph type="sldNum" sz="quarter" idx="5"/>
           </p:nvPr>
         </p:nvSpPr>
         <p:spPr/>
@@ -4430,10 +5232,9 @@
           <a:lstStyle/>
           <a:p>
             <a:r>
-              <a:rPr lang="en-US" smtClean="0"/>
+              <a:rPr lang="en-US"/>
               <a:t>Click to edit Master title style</a:t>
             </a:r>
-            <a:endParaRPr lang="en-US"/>
           </a:p>
         </p:txBody>
       </p:sp>
@@ -4549,10 +5350,9 @@
           </a:lstStyle>
           <a:p>
             <a:r>
-              <a:rPr lang="en-US" smtClean="0"/>
+              <a:rPr lang="en-US"/>
               <a:t>Click to edit Master subtitle style</a:t>
             </a:r>
-            <a:endParaRPr lang="en-US"/>
           </a:p>
         </p:txBody>
       </p:sp>
@@ -4573,7 +5373,7 @@
           <a:p>
             <a:fld id="{5BCAD085-E8A6-8845-BD4E-CB4CCA059FC4}" type="datetimeFigureOut">
               <a:rPr lang="en-US" smtClean="0"/>
-              <a:t>1/27/13</a:t>
+              <a:t>9/7/2026</a:t>
             </a:fld>
             <a:endParaRPr lang="en-US"/>
           </a:p>
@@ -4667,10 +5467,9 @@
           <a:lstStyle/>
           <a:p>
             <a:r>
-              <a:rPr lang="en-US" smtClean="0"/>
+              <a:rPr lang="en-US"/>
               <a:t>Click to edit Master title style</a:t>
             </a:r>
-            <a:endParaRPr lang="en-US"/>
           </a:p>
         </p:txBody>
       </p:sp>
@@ -4691,38 +5490,37 @@
           <a:p>
             <a:pPr lvl="0"/>
             <a:r>
-              <a:rPr lang="en-US" smtClean="0"/>
+              <a:rPr lang="en-US"/>
               <a:t>Click to edit Master text styles</a:t>
             </a:r>
           </a:p>
           <a:p>
             <a:pPr lvl="1"/>
             <a:r>
-              <a:rPr lang="en-US" smtClean="0"/>
+              <a:rPr lang="en-US"/>
               <a:t>Second level</a:t>
             </a:r>
           </a:p>
           <a:p>
             <a:pPr lvl="2"/>
             <a:r>
-              <a:rPr lang="en-US" smtClean="0"/>
+              <a:rPr lang="en-US"/>
               <a:t>Third level</a:t>
             </a:r>
           </a:p>
           <a:p>
             <a:pPr lvl="3"/>
             <a:r>
-              <a:rPr lang="en-US" smtClean="0"/>
+              <a:rPr lang="en-US"/>
               <a:t>Fourth level</a:t>
             </a:r>
           </a:p>
           <a:p>
             <a:pPr lvl="4"/>
             <a:r>
-              <a:rPr lang="en-US" smtClean="0"/>
+              <a:rPr lang="en-US"/>
               <a:t>Fifth level</a:t>
             </a:r>
-            <a:endParaRPr lang="en-US"/>
           </a:p>
         </p:txBody>
       </p:sp>
@@ -4743,7 +5541,7 @@
           <a:p>
             <a:fld id="{5BCAD085-E8A6-8845-BD4E-CB4CCA059FC4}" type="datetimeFigureOut">
               <a:rPr lang="en-US" smtClean="0"/>
-              <a:t>1/27/13</a:t>
+              <a:t>9/7/2026</a:t>
             </a:fld>
             <a:endParaRPr lang="en-US"/>
           </a:p>
@@ -4842,10 +5640,9 @@
           <a:lstStyle/>
           <a:p>
             <a:r>
-              <a:rPr lang="en-US" smtClean="0"/>
+              <a:rPr lang="en-US"/>
               <a:t>Click to edit Master title style</a:t>
             </a:r>
-            <a:endParaRPr lang="en-US"/>
           </a:p>
         </p:txBody>
       </p:sp>
@@ -4871,38 +5668,37 @@
           <a:p>
             <a:pPr lvl="0"/>
             <a:r>
-              <a:rPr lang="en-US" smtClean="0"/>
+              <a:rPr lang="en-US"/>
               <a:t>Click to edit Master text styles</a:t>
             </a:r>
           </a:p>
           <a:p>
             <a:pPr lvl="1"/>
             <a:r>
-              <a:rPr lang="en-US" smtClean="0"/>
+              <a:rPr lang="en-US"/>
               <a:t>Second level</a:t>
             </a:r>
           </a:p>
           <a:p>
             <a:pPr lvl="2"/>
             <a:r>
-              <a:rPr lang="en-US" smtClean="0"/>
+              <a:rPr lang="en-US"/>
               <a:t>Third level</a:t>
             </a:r>
           </a:p>
           <a:p>
             <a:pPr lvl="3"/>
             <a:r>
-              <a:rPr lang="en-US" smtClean="0"/>
+              <a:rPr lang="en-US"/>
               <a:t>Fourth level</a:t>
             </a:r>
           </a:p>
           <a:p>
             <a:pPr lvl="4"/>
             <a:r>
-              <a:rPr lang="en-US" smtClean="0"/>
+              <a:rPr lang="en-US"/>
               <a:t>Fifth level</a:t>
             </a:r>
-            <a:endParaRPr lang="en-US"/>
           </a:p>
         </p:txBody>
       </p:sp>
@@ -4923,7 +5719,7 @@
           <a:p>
             <a:fld id="{5BCAD085-E8A6-8845-BD4E-CB4CCA059FC4}" type="datetimeFigureOut">
               <a:rPr lang="en-US" smtClean="0"/>
-              <a:t>1/27/13</a:t>
+              <a:t>9/7/2026</a:t>
             </a:fld>
             <a:endParaRPr lang="en-US"/>
           </a:p>
@@ -5017,10 +5813,9 @@
           <a:lstStyle/>
           <a:p>
             <a:r>
-              <a:rPr lang="en-US" smtClean="0"/>
+              <a:rPr lang="en-US"/>
               <a:t>Click to edit Master title style</a:t>
             </a:r>
-            <a:endParaRPr lang="en-US"/>
           </a:p>
         </p:txBody>
       </p:sp>
@@ -5041,38 +5836,37 @@
           <a:p>
             <a:pPr lvl="0"/>
             <a:r>
-              <a:rPr lang="en-US" smtClean="0"/>
+              <a:rPr lang="en-US"/>
               <a:t>Click to edit Master text styles</a:t>
             </a:r>
           </a:p>
           <a:p>
             <a:pPr lvl="1"/>
             <a:r>
-              <a:rPr lang="en-US" smtClean="0"/>
+              <a:rPr lang="en-US"/>
               <a:t>Second level</a:t>
             </a:r>
           </a:p>
           <a:p>
             <a:pPr lvl="2"/>
             <a:r>
-              <a:rPr lang="en-US" smtClean="0"/>
+              <a:rPr lang="en-US"/>
               <a:t>Third level</a:t>
             </a:r>
           </a:p>
           <a:p>
             <a:pPr lvl="3"/>
             <a:r>
-              <a:rPr lang="en-US" smtClean="0"/>
+              <a:rPr lang="en-US"/>
               <a:t>Fourth level</a:t>
             </a:r>
           </a:p>
           <a:p>
             <a:pPr lvl="4"/>
             <a:r>
-              <a:rPr lang="en-US" smtClean="0"/>
+              <a:rPr lang="en-US"/>
               <a:t>Fifth level</a:t>
             </a:r>
-            <a:endParaRPr lang="en-US"/>
           </a:p>
         </p:txBody>
       </p:sp>
@@ -5093,7 +5887,7 @@
           <a:p>
             <a:fld id="{5BCAD085-E8A6-8845-BD4E-CB4CCA059FC4}" type="datetimeFigureOut">
               <a:rPr lang="en-US" smtClean="0"/>
-              <a:t>1/27/13</a:t>
+              <a:t>9/7/2026</a:t>
             </a:fld>
             <a:endParaRPr lang="en-US"/>
           </a:p>
@@ -5196,10 +5990,9 @@
           </a:lstStyle>
           <a:p>
             <a:r>
-              <a:rPr lang="en-US" smtClean="0"/>
+              <a:rPr lang="en-US"/>
               <a:t>Click to edit Master title style</a:t>
             </a:r>
-            <a:endParaRPr lang="en-US"/>
           </a:p>
         </p:txBody>
       </p:sp>
@@ -5316,7 +6109,7 @@
           <a:p>
             <a:pPr lvl="0"/>
             <a:r>
-              <a:rPr lang="en-US" smtClean="0"/>
+              <a:rPr lang="en-US"/>
               <a:t>Click to edit Master text styles</a:t>
             </a:r>
           </a:p>
@@ -5339,7 +6132,7 @@
           <a:p>
             <a:fld id="{5BCAD085-E8A6-8845-BD4E-CB4CCA059FC4}" type="datetimeFigureOut">
               <a:rPr lang="en-US" smtClean="0"/>
-              <a:t>1/27/13</a:t>
+              <a:t>9/7/2026</a:t>
             </a:fld>
             <a:endParaRPr lang="en-US"/>
           </a:p>
@@ -5433,10 +6226,9 @@
           <a:lstStyle/>
           <a:p>
             <a:r>
-              <a:rPr lang="en-US" smtClean="0"/>
+              <a:rPr lang="en-US"/>
               <a:t>Click to edit Master title style</a:t>
             </a:r>
-            <a:endParaRPr lang="en-US"/>
           </a:p>
         </p:txBody>
       </p:sp>
@@ -5490,38 +6282,37 @@
           <a:p>
             <a:pPr lvl="0"/>
             <a:r>
-              <a:rPr lang="en-US" smtClean="0"/>
+              <a:rPr lang="en-US"/>
               <a:t>Click to edit Master text styles</a:t>
             </a:r>
           </a:p>
           <a:p>
             <a:pPr lvl="1"/>
             <a:r>
-              <a:rPr lang="en-US" smtClean="0"/>
+              <a:rPr lang="en-US"/>
               <a:t>Second level</a:t>
             </a:r>
           </a:p>
           <a:p>
             <a:pPr lvl="2"/>
             <a:r>
-              <a:rPr lang="en-US" smtClean="0"/>
+              <a:rPr lang="en-US"/>
               <a:t>Third level</a:t>
             </a:r>
           </a:p>
           <a:p>
             <a:pPr lvl="3"/>
             <a:r>
-              <a:rPr lang="en-US" smtClean="0"/>
+              <a:rPr lang="en-US"/>
               <a:t>Fourth level</a:t>
             </a:r>
           </a:p>
           <a:p>
             <a:pPr lvl="4"/>
             <a:r>
-              <a:rPr lang="en-US" smtClean="0"/>
+              <a:rPr lang="en-US"/>
               <a:t>Fifth level</a:t>
             </a:r>
-            <a:endParaRPr lang="en-US"/>
           </a:p>
         </p:txBody>
       </p:sp>
@@ -5575,38 +6366,37 @@
           <a:p>
             <a:pPr lvl="0"/>
             <a:r>
-              <a:rPr lang="en-US" smtClean="0"/>
+              <a:rPr lang="en-US"/>
               <a:t>Click to edit Master text styles</a:t>
             </a:r>
           </a:p>
           <a:p>
             <a:pPr lvl="1"/>
             <a:r>
-              <a:rPr lang="en-US" smtClean="0"/>
+              <a:rPr lang="en-US"/>
               <a:t>Second level</a:t>
             </a:r>
           </a:p>
           <a:p>
             <a:pPr lvl="2"/>
             <a:r>
-              <a:rPr lang="en-US" smtClean="0"/>
+              <a:rPr lang="en-US"/>
               <a:t>Third level</a:t>
             </a:r>
           </a:p>
           <a:p>
             <a:pPr lvl="3"/>
             <a:r>
-              <a:rPr lang="en-US" smtClean="0"/>
+              <a:rPr lang="en-US"/>
               <a:t>Fourth level</a:t>
             </a:r>
           </a:p>
           <a:p>
             <a:pPr lvl="4"/>
             <a:r>
-              <a:rPr lang="en-US" smtClean="0"/>
+              <a:rPr lang="en-US"/>
               <a:t>Fifth level</a:t>
             </a:r>
-            <a:endParaRPr lang="en-US"/>
           </a:p>
         </p:txBody>
       </p:sp>
@@ -5627,7 +6417,7 @@
           <a:p>
             <a:fld id="{5BCAD085-E8A6-8845-BD4E-CB4CCA059FC4}" type="datetimeFigureOut">
               <a:rPr lang="en-US" smtClean="0"/>
-              <a:t>1/27/13</a:t>
+              <a:t>9/7/2026</a:t>
             </a:fld>
             <a:endParaRPr lang="en-US"/>
           </a:p>
@@ -5725,10 +6515,9 @@
           </a:lstStyle>
           <a:p>
             <a:r>
-              <a:rPr lang="en-US" smtClean="0"/>
+              <a:rPr lang="en-US"/>
               <a:t>Click to edit Master title style</a:t>
             </a:r>
-            <a:endParaRPr lang="en-US"/>
           </a:p>
         </p:txBody>
       </p:sp>
@@ -5791,7 +6580,7 @@
           <a:p>
             <a:pPr lvl="0"/>
             <a:r>
-              <a:rPr lang="en-US" smtClean="0"/>
+              <a:rPr lang="en-US"/>
               <a:t>Click to edit Master text styles</a:t>
             </a:r>
           </a:p>
@@ -5847,38 +6636,37 @@
           <a:p>
             <a:pPr lvl="0"/>
             <a:r>
-              <a:rPr lang="en-US" smtClean="0"/>
+              <a:rPr lang="en-US"/>
               <a:t>Click to edit Master text styles</a:t>
             </a:r>
           </a:p>
           <a:p>
             <a:pPr lvl="1"/>
             <a:r>
-              <a:rPr lang="en-US" smtClean="0"/>
+              <a:rPr lang="en-US"/>
               <a:t>Second level</a:t>
             </a:r>
           </a:p>
           <a:p>
             <a:pPr lvl="2"/>
             <a:r>
-              <a:rPr lang="en-US" smtClean="0"/>
+              <a:rPr lang="en-US"/>
               <a:t>Third level</a:t>
             </a:r>
           </a:p>
           <a:p>
             <a:pPr lvl="3"/>
             <a:r>
-              <a:rPr lang="en-US" smtClean="0"/>
+              <a:rPr lang="en-US"/>
               <a:t>Fourth level</a:t>
             </a:r>
           </a:p>
           <a:p>
             <a:pPr lvl="4"/>
             <a:r>
-              <a:rPr lang="en-US" smtClean="0"/>
+              <a:rPr lang="en-US"/>
               <a:t>Fifth level</a:t>
             </a:r>
-            <a:endParaRPr lang="en-US"/>
           </a:p>
         </p:txBody>
       </p:sp>
@@ -5941,7 +6729,7 @@
           <a:p>
             <a:pPr lvl="0"/>
             <a:r>
-              <a:rPr lang="en-US" smtClean="0"/>
+              <a:rPr lang="en-US"/>
               <a:t>Click to edit Master text styles</a:t>
             </a:r>
           </a:p>
@@ -5997,38 +6785,37 @@
           <a:p>
             <a:pPr lvl="0"/>
             <a:r>
-              <a:rPr lang="en-US" smtClean="0"/>
+              <a:rPr lang="en-US"/>
               <a:t>Click to edit Master text styles</a:t>
             </a:r>
           </a:p>
           <a:p>
             <a:pPr lvl="1"/>
             <a:r>
-              <a:rPr lang="en-US" smtClean="0"/>
+              <a:rPr lang="en-US"/>
               <a:t>Second level</a:t>
             </a:r>
           </a:p>
           <a:p>
             <a:pPr lvl="2"/>
             <a:r>
-              <a:rPr lang="en-US" smtClean="0"/>
+              <a:rPr lang="en-US"/>
               <a:t>Third level</a:t>
             </a:r>
           </a:p>
           <a:p>
             <a:pPr lvl="3"/>
             <a:r>
-              <a:rPr lang="en-US" smtClean="0"/>
+              <a:rPr lang="en-US"/>
               <a:t>Fourth level</a:t>
             </a:r>
           </a:p>
           <a:p>
             <a:pPr lvl="4"/>
             <a:r>
-              <a:rPr lang="en-US" smtClean="0"/>
+              <a:rPr lang="en-US"/>
               <a:t>Fifth level</a:t>
             </a:r>
-            <a:endParaRPr lang="en-US"/>
           </a:p>
         </p:txBody>
       </p:sp>
@@ -6049,7 +6836,7 @@
           <a:p>
             <a:fld id="{5BCAD085-E8A6-8845-BD4E-CB4CCA059FC4}" type="datetimeFigureOut">
               <a:rPr lang="en-US" smtClean="0"/>
-              <a:t>1/27/13</a:t>
+              <a:t>9/7/2026</a:t>
             </a:fld>
             <a:endParaRPr lang="en-US"/>
           </a:p>
@@ -6143,10 +6930,9 @@
           <a:lstStyle/>
           <a:p>
             <a:r>
-              <a:rPr lang="en-US" smtClean="0"/>
+              <a:rPr lang="en-US"/>
               <a:t>Click to edit Master title style</a:t>
             </a:r>
-            <a:endParaRPr lang="en-US"/>
           </a:p>
         </p:txBody>
       </p:sp>
@@ -6167,7 +6953,7 @@
           <a:p>
             <a:fld id="{5BCAD085-E8A6-8845-BD4E-CB4CCA059FC4}" type="datetimeFigureOut">
               <a:rPr lang="en-US" smtClean="0"/>
-              <a:t>1/27/13</a:t>
+              <a:t>9/7/2026</a:t>
             </a:fld>
             <a:endParaRPr lang="en-US"/>
           </a:p>
@@ -6262,7 +7048,7 @@
           <a:p>
             <a:fld id="{5BCAD085-E8A6-8845-BD4E-CB4CCA059FC4}" type="datetimeFigureOut">
               <a:rPr lang="en-US" smtClean="0"/>
-              <a:t>1/27/13</a:t>
+              <a:t>9/7/2026</a:t>
             </a:fld>
             <a:endParaRPr lang="en-US"/>
           </a:p>
@@ -6365,10 +7151,9 @@
           </a:lstStyle>
           <a:p>
             <a:r>
-              <a:rPr lang="en-US" smtClean="0"/>
+              <a:rPr lang="en-US"/>
               <a:t>Click to edit Master title style</a:t>
             </a:r>
-            <a:endParaRPr lang="en-US"/>
           </a:p>
         </p:txBody>
       </p:sp>
@@ -6422,38 +7207,37 @@
           <a:p>
             <a:pPr lvl="0"/>
             <a:r>
-              <a:rPr lang="en-US" smtClean="0"/>
+              <a:rPr lang="en-US"/>
               <a:t>Click to edit Master text styles</a:t>
             </a:r>
           </a:p>
           <a:p>
             <a:pPr lvl="1"/>
             <a:r>
-              <a:rPr lang="en-US" smtClean="0"/>
+              <a:rPr lang="en-US"/>
               <a:t>Second level</a:t>
             </a:r>
           </a:p>
           <a:p>
             <a:pPr lvl="2"/>
             <a:r>
-              <a:rPr lang="en-US" smtClean="0"/>
+              <a:rPr lang="en-US"/>
               <a:t>Third level</a:t>
             </a:r>
           </a:p>
           <a:p>
             <a:pPr lvl="3"/>
             <a:r>
-              <a:rPr lang="en-US" smtClean="0"/>
+              <a:rPr lang="en-US"/>
               <a:t>Fourth level</a:t>
             </a:r>
           </a:p>
           <a:p>
             <a:pPr lvl="4"/>
             <a:r>
-              <a:rPr lang="en-US" smtClean="0"/>
+              <a:rPr lang="en-US"/>
               <a:t>Fifth level</a:t>
             </a:r>
-            <a:endParaRPr lang="en-US"/>
           </a:p>
         </p:txBody>
       </p:sp>
@@ -6516,7 +7300,7 @@
           <a:p>
             <a:pPr lvl="0"/>
             <a:r>
-              <a:rPr lang="en-US" smtClean="0"/>
+              <a:rPr lang="en-US"/>
               <a:t>Click to edit Master text styles</a:t>
             </a:r>
           </a:p>
@@ -6539,7 +7323,7 @@
           <a:p>
             <a:fld id="{5BCAD085-E8A6-8845-BD4E-CB4CCA059FC4}" type="datetimeFigureOut">
               <a:rPr lang="en-US" smtClean="0"/>
-              <a:t>1/27/13</a:t>
+              <a:t>9/7/2026</a:t>
             </a:fld>
             <a:endParaRPr lang="en-US"/>
           </a:p>
@@ -6642,10 +7426,9 @@
           </a:lstStyle>
           <a:p>
             <a:r>
-              <a:rPr lang="en-US" smtClean="0"/>
+              <a:rPr lang="en-US"/>
               <a:t>Click to edit Master title style</a:t>
             </a:r>
-            <a:endParaRPr lang="en-US"/>
           </a:p>
         </p:txBody>
       </p:sp>
@@ -6769,7 +7552,7 @@
           <a:p>
             <a:pPr lvl="0"/>
             <a:r>
-              <a:rPr lang="en-US" smtClean="0"/>
+              <a:rPr lang="en-US"/>
               <a:t>Click to edit Master text styles</a:t>
             </a:r>
           </a:p>
@@ -6792,7 +7575,7 @@
           <a:p>
             <a:fld id="{5BCAD085-E8A6-8845-BD4E-CB4CCA059FC4}" type="datetimeFigureOut">
               <a:rPr lang="en-US" smtClean="0"/>
-              <a:t>1/27/13</a:t>
+              <a:t>9/7/2026</a:t>
             </a:fld>
             <a:endParaRPr lang="en-US"/>
           </a:p>
@@ -6901,10 +7684,9 @@
           <a:lstStyle/>
           <a:p>
             <a:r>
-              <a:rPr lang="en-US" smtClean="0"/>
+              <a:rPr lang="en-US"/>
               <a:t>Click to edit Master title style</a:t>
             </a:r>
-            <a:endParaRPr lang="en-US"/>
           </a:p>
         </p:txBody>
       </p:sp>
@@ -6935,38 +7717,37 @@
           <a:p>
             <a:pPr lvl="0"/>
             <a:r>
-              <a:rPr lang="en-US" smtClean="0"/>
+              <a:rPr lang="en-US"/>
               <a:t>Click to edit Master text styles</a:t>
             </a:r>
           </a:p>
           <a:p>
             <a:pPr lvl="1"/>
             <a:r>
-              <a:rPr lang="en-US" smtClean="0"/>
+              <a:rPr lang="en-US"/>
               <a:t>Second level</a:t>
             </a:r>
           </a:p>
           <a:p>
             <a:pPr lvl="2"/>
             <a:r>
-              <a:rPr lang="en-US" smtClean="0"/>
+              <a:rPr lang="en-US"/>
               <a:t>Third level</a:t>
             </a:r>
           </a:p>
           <a:p>
             <a:pPr lvl="3"/>
             <a:r>
-              <a:rPr lang="en-US" smtClean="0"/>
+              <a:rPr lang="en-US"/>
               <a:t>Fourth level</a:t>
             </a:r>
           </a:p>
           <a:p>
             <a:pPr lvl="4"/>
             <a:r>
-              <a:rPr lang="en-US" smtClean="0"/>
+              <a:rPr lang="en-US"/>
               <a:t>Fifth level</a:t>
             </a:r>
-            <a:endParaRPr lang="en-US"/>
           </a:p>
         </p:txBody>
       </p:sp>
@@ -7005,7 +7786,7 @@
           <a:p>
             <a:fld id="{5BCAD085-E8A6-8845-BD4E-CB4CCA059FC4}" type="datetimeFigureOut">
               <a:rPr lang="en-US" smtClean="0"/>
-              <a:t>1/27/13</a:t>
+              <a:t>9/7/2026</a:t>
             </a:fld>
             <a:endParaRPr lang="en-US"/>
           </a:p>
@@ -7364,7 +8145,7 @@
 </file>
 
 <file path=ppt/slides/slide1.xml><?xml version="1.0" encoding="utf-8"?>
-<p:sld xmlns:a="http://schemas.openxmlformats.org/drawingml/2006/main" xmlns:p="http://schemas.openxmlformats.org/presentationml/2006/main" xmlns:r="http://schemas.openxmlformats.org/officeDocument/2006/relationships">
+<p:sld xmlns:a="http://schemas.openxmlformats.org/drawingml/2006/main" xmlns:r="http://schemas.openxmlformats.org/officeDocument/2006/relationships" xmlns:p="http://schemas.openxmlformats.org/presentationml/2006/main">
   <p:cSld>
     <p:bg>
       <p:bgPr>
@@ -7380,7 +8161,14 @@
         <p:cNvGrpSpPr/>
         <p:nvPr/>
       </p:nvGrpSpPr>
-      <p:grpSpPr/>
+      <p:grpSpPr>
+        <a:xfrm>
+          <a:off x="0" y="0"/>
+          <a:ext cx="0" cy="0"/>
+          <a:chOff x="0" y="0"/>
+          <a:chExt cx="0" cy="0"/>
+        </a:xfrm>
+      </p:grpSpPr>
       <p:sp>
         <p:nvSpPr>
           <p:cNvPr id="2" name="Rounded Rectangle 1"/>
@@ -7423,6 +8211,7 @@
           <a:lstStyle/>
           <a:p>
             <a:pPr algn="ctr"/>
+            <a:endParaRPr/>
           </a:p>
         </p:txBody>
       </p:sp>
@@ -7443,7 +8232,7 @@
           <a:noFill/>
         </p:spPr>
         <p:txBody>
-          <a:bodyPr wrap="square" lIns="36576" rIns="36576" tIns="36576" bIns="36576" anchor="t">
+          <a:bodyPr wrap="square" lIns="36576" tIns="36576" rIns="36576" bIns="36576" anchor="t">
             <a:spAutoFit/>
           </a:bodyPr>
           <a:lstStyle/>
@@ -7478,7 +8267,7 @@
           <a:noFill/>
         </p:spPr>
         <p:txBody>
-          <a:bodyPr wrap="square" lIns="36576" rIns="36576" tIns="36576" bIns="36576" anchor="t">
+          <a:bodyPr wrap="square" lIns="36576" tIns="36576" rIns="36576" bIns="36576" anchor="t">
             <a:spAutoFit/>
           </a:bodyPr>
           <a:lstStyle/>
@@ -7513,7 +8302,7 @@
           <a:noFill/>
         </p:spPr>
         <p:txBody>
-          <a:bodyPr wrap="square" lIns="36576" rIns="36576" tIns="36576" bIns="36576" anchor="t">
+          <a:bodyPr wrap="square" lIns="36576" tIns="36576" rIns="36576" bIns="36576" anchor="t">
             <a:spAutoFit/>
           </a:bodyPr>
           <a:lstStyle/>
@@ -7548,7 +8337,7 @@
           <a:noFill/>
         </p:spPr>
         <p:txBody>
-          <a:bodyPr wrap="square" lIns="36576" rIns="36576" tIns="36576" bIns="36576" anchor="t">
+          <a:bodyPr wrap="square" lIns="36576" tIns="36576" rIns="36576" bIns="36576" anchor="t">
             <a:spAutoFit/>
           </a:bodyPr>
           <a:lstStyle/>
@@ -7608,6 +8397,7 @@
           <a:lstStyle/>
           <a:p>
             <a:pPr algn="ctr"/>
+            <a:endParaRPr/>
           </a:p>
         </p:txBody>
       </p:sp>
@@ -7628,7 +8418,7 @@
           <a:noFill/>
         </p:spPr>
         <p:txBody>
-          <a:bodyPr wrap="square" lIns="36576" rIns="36576" tIns="36576" bIns="36576" anchor="t">
+          <a:bodyPr wrap="square" lIns="36576" tIns="36576" rIns="36576" bIns="36576" anchor="t">
             <a:spAutoFit/>
           </a:bodyPr>
           <a:lstStyle/>
@@ -7663,7 +8453,7 @@
           <a:noFill/>
         </p:spPr>
         <p:txBody>
-          <a:bodyPr wrap="square" lIns="36576" rIns="36576" tIns="36576" bIns="36576" anchor="t">
+          <a:bodyPr wrap="square" lIns="36576" tIns="36576" rIns="36576" bIns="36576" anchor="t">
             <a:spAutoFit/>
           </a:bodyPr>
           <a:lstStyle/>
@@ -7698,7 +8488,7 @@
           <a:noFill/>
         </p:spPr>
         <p:txBody>
-          <a:bodyPr wrap="square" lIns="36576" rIns="36576" tIns="36576" bIns="36576" anchor="t">
+          <a:bodyPr wrap="square" lIns="36576" tIns="36576" rIns="36576" bIns="36576" anchor="t">
             <a:spAutoFit/>
           </a:bodyPr>
           <a:lstStyle/>
@@ -7733,7 +8523,7 @@
           <a:noFill/>
         </p:spPr>
         <p:txBody>
-          <a:bodyPr wrap="square" lIns="36576" rIns="36576" tIns="36576" bIns="36576" anchor="t">
+          <a:bodyPr wrap="square" lIns="36576" tIns="36576" rIns="36576" bIns="36576" anchor="t">
             <a:spAutoFit/>
           </a:bodyPr>
           <a:lstStyle/>
@@ -7768,7 +8558,7 @@
           <a:noFill/>
         </p:spPr>
         <p:txBody>
-          <a:bodyPr wrap="square" lIns="36576" rIns="36576" tIns="36576" bIns="36576" anchor="t">
+          <a:bodyPr wrap="square" lIns="36576" tIns="36576" rIns="36576" bIns="36576" anchor="t">
             <a:spAutoFit/>
           </a:bodyPr>
           <a:lstStyle/>
@@ -7795,7 +8585,7 @@
 </file>
 
 <file path=ppt/slides/slide10.xml><?xml version="1.0" encoding="utf-8"?>
-<p:sld xmlns:a="http://schemas.openxmlformats.org/drawingml/2006/main" xmlns:p="http://schemas.openxmlformats.org/presentationml/2006/main" xmlns:r="http://schemas.openxmlformats.org/officeDocument/2006/relationships">
+<p:sld xmlns:a="http://schemas.openxmlformats.org/drawingml/2006/main" xmlns:r="http://schemas.openxmlformats.org/officeDocument/2006/relationships" xmlns:p="http://schemas.openxmlformats.org/presentationml/2006/main">
   <p:cSld>
     <p:bg>
       <p:bgPr>
@@ -7811,7 +8601,14 @@
         <p:cNvGrpSpPr/>
         <p:nvPr/>
       </p:nvGrpSpPr>
-      <p:grpSpPr/>
+      <p:grpSpPr>
+        <a:xfrm>
+          <a:off x="0" y="0"/>
+          <a:ext cx="0" cy="0"/>
+          <a:chOff x="0" y="0"/>
+          <a:chExt cx="0" cy="0"/>
+        </a:xfrm>
+      </p:grpSpPr>
       <p:sp>
         <p:nvSpPr>
           <p:cNvPr id="2" name="TextBox 1"/>
@@ -7829,7 +8626,7 @@
           <a:noFill/>
         </p:spPr>
         <p:txBody>
-          <a:bodyPr wrap="square" lIns="36576" rIns="36576" tIns="36576" bIns="36576" anchor="t">
+          <a:bodyPr wrap="square" lIns="36576" tIns="36576" rIns="36576" bIns="36576" anchor="t">
             <a:spAutoFit/>
           </a:bodyPr>
           <a:lstStyle/>
@@ -7864,7 +8661,7 @@
           <a:noFill/>
         </p:spPr>
         <p:txBody>
-          <a:bodyPr wrap="square" lIns="36576" rIns="36576" tIns="36576" bIns="36576" anchor="t">
+          <a:bodyPr wrap="square" lIns="36576" tIns="36576" rIns="36576" bIns="36576" anchor="t">
             <a:spAutoFit/>
           </a:bodyPr>
           <a:lstStyle/>
@@ -7924,6 +8721,7 @@
           <a:lstStyle/>
           <a:p>
             <a:pPr algn="ctr"/>
+            <a:endParaRPr/>
           </a:p>
         </p:txBody>
       </p:sp>
@@ -7944,7 +8742,7 @@
           <a:noFill/>
         </p:spPr>
         <p:txBody>
-          <a:bodyPr wrap="square" lIns="36576" rIns="36576" tIns="36576" bIns="36576" anchor="t">
+          <a:bodyPr wrap="square" lIns="36576" tIns="36576" rIns="36576" bIns="36576" anchor="t">
             <a:spAutoFit/>
           </a:bodyPr>
           <a:lstStyle/>
@@ -8004,6 +8802,7 @@
           <a:lstStyle/>
           <a:p>
             <a:pPr algn="ctr"/>
+            <a:endParaRPr/>
           </a:p>
         </p:txBody>
       </p:sp>
@@ -8024,7 +8823,7 @@
           <a:noFill/>
         </p:spPr>
         <p:txBody>
-          <a:bodyPr wrap="square" lIns="36576" rIns="36576" tIns="36576" bIns="36576" anchor="t">
+          <a:bodyPr wrap="square" lIns="36576" tIns="36576" rIns="36576" bIns="36576" anchor="t">
             <a:spAutoFit/>
           </a:bodyPr>
           <a:lstStyle/>
@@ -8061,7 +8860,7 @@
           <a:noFill/>
         </p:spPr>
         <p:txBody>
-          <a:bodyPr wrap="square" lIns="36576" rIns="36576" tIns="36576" bIns="36576" anchor="t">
+          <a:bodyPr wrap="square" lIns="36576" tIns="36576" rIns="36576" bIns="36576" anchor="t">
             <a:spAutoFit/>
           </a:bodyPr>
           <a:lstStyle/>
@@ -8208,6 +9007,7 @@
           <a:lstStyle/>
           <a:p>
             <a:pPr algn="ctr"/>
+            <a:endParaRPr/>
           </a:p>
         </p:txBody>
       </p:sp>
@@ -8228,7 +9028,7 @@
           <a:noFill/>
         </p:spPr>
         <p:txBody>
-          <a:bodyPr wrap="square" lIns="36576" rIns="36576" tIns="36576" bIns="36576" anchor="t">
+          <a:bodyPr wrap="square" lIns="36576" tIns="36576" rIns="36576" bIns="36576" anchor="t">
             <a:spAutoFit/>
           </a:bodyPr>
           <a:lstStyle/>
@@ -8263,7 +9063,7 @@
           <a:noFill/>
         </p:spPr>
         <p:txBody>
-          <a:bodyPr wrap="square" lIns="36576" rIns="36576" tIns="36576" bIns="36576" anchor="t">
+          <a:bodyPr wrap="square" lIns="36576" tIns="36576" rIns="36576" bIns="36576" anchor="t">
             <a:spAutoFit/>
           </a:bodyPr>
           <a:lstStyle/>
@@ -8342,7 +9142,7 @@
           <a:noFill/>
         </p:spPr>
         <p:txBody>
-          <a:bodyPr wrap="square" lIns="36576" rIns="36576" tIns="36576" bIns="36576" anchor="t">
+          <a:bodyPr wrap="square" lIns="36576" tIns="36576" rIns="36576" bIns="36576" anchor="t">
             <a:spAutoFit/>
           </a:bodyPr>
           <a:lstStyle/>
@@ -8369,7 +9169,7 @@
 </file>
 
 <file path=ppt/slides/slide11.xml><?xml version="1.0" encoding="utf-8"?>
-<p:sld xmlns:a="http://schemas.openxmlformats.org/drawingml/2006/main" xmlns:p="http://schemas.openxmlformats.org/presentationml/2006/main" xmlns:r="http://schemas.openxmlformats.org/officeDocument/2006/relationships">
+<p:sld xmlns:a="http://schemas.openxmlformats.org/drawingml/2006/main" xmlns:r="http://schemas.openxmlformats.org/officeDocument/2006/relationships" xmlns:p="http://schemas.openxmlformats.org/presentationml/2006/main">
   <p:cSld>
     <p:bg>
       <p:bgPr>
@@ -8385,7 +9185,14 @@
         <p:cNvGrpSpPr/>
         <p:nvPr/>
       </p:nvGrpSpPr>
-      <p:grpSpPr/>
+      <p:grpSpPr>
+        <a:xfrm>
+          <a:off x="0" y="0"/>
+          <a:ext cx="0" cy="0"/>
+          <a:chOff x="0" y="0"/>
+          <a:chExt cx="0" cy="0"/>
+        </a:xfrm>
+      </p:grpSpPr>
       <p:sp>
         <p:nvSpPr>
           <p:cNvPr id="2" name="TextBox 1"/>
@@ -8403,7 +9210,7 @@
           <a:noFill/>
         </p:spPr>
         <p:txBody>
-          <a:bodyPr wrap="square" lIns="36576" rIns="36576" tIns="36576" bIns="36576" anchor="t">
+          <a:bodyPr wrap="square" lIns="36576" tIns="36576" rIns="36576" bIns="36576" anchor="t">
             <a:spAutoFit/>
           </a:bodyPr>
           <a:lstStyle/>
@@ -8438,7 +9245,7 @@
           <a:noFill/>
         </p:spPr>
         <p:txBody>
-          <a:bodyPr wrap="square" lIns="36576" rIns="36576" tIns="36576" bIns="36576" anchor="t">
+          <a:bodyPr wrap="square" lIns="36576" tIns="36576" rIns="36576" bIns="36576" anchor="t">
             <a:spAutoFit/>
           </a:bodyPr>
           <a:lstStyle/>
@@ -8498,6 +9305,7 @@
           <a:lstStyle/>
           <a:p>
             <a:pPr algn="ctr"/>
+            <a:endParaRPr/>
           </a:p>
         </p:txBody>
       </p:sp>
@@ -8518,7 +9326,7 @@
           <a:noFill/>
         </p:spPr>
         <p:txBody>
-          <a:bodyPr wrap="square" lIns="36576" rIns="36576" tIns="36576" bIns="36576" anchor="t">
+          <a:bodyPr wrap="square" lIns="36576" tIns="36576" rIns="36576" bIns="36576" anchor="t">
             <a:spAutoFit/>
           </a:bodyPr>
           <a:lstStyle/>
@@ -8578,6 +9386,7 @@
           <a:lstStyle/>
           <a:p>
             <a:pPr algn="ctr"/>
+            <a:endParaRPr/>
           </a:p>
         </p:txBody>
       </p:sp>
@@ -8598,7 +9407,7 @@
           <a:noFill/>
         </p:spPr>
         <p:txBody>
-          <a:bodyPr wrap="square" lIns="36576" rIns="36576" tIns="36576" bIns="36576" anchor="t">
+          <a:bodyPr wrap="square" lIns="36576" tIns="36576" rIns="36576" bIns="36576" anchor="t">
             <a:spAutoFit/>
           </a:bodyPr>
           <a:lstStyle/>
@@ -8633,7 +9442,7 @@
           <a:noFill/>
         </p:spPr>
         <p:txBody>
-          <a:bodyPr wrap="square" lIns="36576" rIns="36576" tIns="36576" bIns="36576" anchor="t">
+          <a:bodyPr wrap="square" lIns="36576" tIns="36576" rIns="36576" bIns="36576" anchor="t">
             <a:spAutoFit/>
           </a:bodyPr>
           <a:lstStyle/>
@@ -8693,6 +9502,7 @@
           <a:lstStyle/>
           <a:p>
             <a:pPr algn="ctr"/>
+            <a:endParaRPr/>
           </a:p>
         </p:txBody>
       </p:sp>
@@ -8713,7 +9523,7 @@
           <a:noFill/>
         </p:spPr>
         <p:txBody>
-          <a:bodyPr wrap="square" lIns="36576" rIns="36576" tIns="36576" bIns="36576" anchor="t">
+          <a:bodyPr wrap="square" lIns="36576" tIns="36576" rIns="36576" bIns="36576" anchor="t">
             <a:spAutoFit/>
           </a:bodyPr>
           <a:lstStyle/>
@@ -8748,7 +9558,7 @@
           <a:noFill/>
         </p:spPr>
         <p:txBody>
-          <a:bodyPr wrap="square" lIns="36576" rIns="36576" tIns="36576" bIns="36576" anchor="t">
+          <a:bodyPr wrap="square" lIns="36576" tIns="36576" rIns="36576" bIns="36576" anchor="t">
             <a:spAutoFit/>
           </a:bodyPr>
           <a:lstStyle/>
@@ -8808,6 +9618,7 @@
           <a:lstStyle/>
           <a:p>
             <a:pPr algn="ctr"/>
+            <a:endParaRPr/>
           </a:p>
         </p:txBody>
       </p:sp>
@@ -8828,7 +9639,7 @@
           <a:noFill/>
         </p:spPr>
         <p:txBody>
-          <a:bodyPr wrap="square" lIns="36576" rIns="36576" tIns="36576" bIns="36576" anchor="t">
+          <a:bodyPr wrap="square" lIns="36576" tIns="36576" rIns="36576" bIns="36576" anchor="t">
             <a:spAutoFit/>
           </a:bodyPr>
           <a:lstStyle/>
@@ -8863,7 +9674,7 @@
           <a:noFill/>
         </p:spPr>
         <p:txBody>
-          <a:bodyPr wrap="square" lIns="36576" rIns="36576" tIns="36576" bIns="36576" anchor="t">
+          <a:bodyPr wrap="square" lIns="36576" tIns="36576" rIns="36576" bIns="36576" anchor="t">
             <a:spAutoFit/>
           </a:bodyPr>
           <a:lstStyle/>
@@ -8923,6 +9734,7 @@
           <a:lstStyle/>
           <a:p>
             <a:pPr algn="ctr"/>
+            <a:endParaRPr/>
           </a:p>
         </p:txBody>
       </p:sp>
@@ -8943,7 +9755,7 @@
           <a:noFill/>
         </p:spPr>
         <p:txBody>
-          <a:bodyPr wrap="square" lIns="36576" rIns="36576" tIns="36576" bIns="36576" anchor="t">
+          <a:bodyPr wrap="square" lIns="36576" tIns="36576" rIns="36576" bIns="36576" anchor="t">
             <a:spAutoFit/>
           </a:bodyPr>
           <a:lstStyle/>
@@ -8978,7 +9790,7 @@
           <a:noFill/>
         </p:spPr>
         <p:txBody>
-          <a:bodyPr wrap="square" lIns="36576" rIns="36576" tIns="36576" bIns="36576" anchor="t">
+          <a:bodyPr wrap="square" lIns="36576" tIns="36576" rIns="36576" bIns="36576" anchor="t">
             <a:spAutoFit/>
           </a:bodyPr>
           <a:lstStyle/>
@@ -9013,7 +9825,7 @@
           <a:noFill/>
         </p:spPr>
         <p:txBody>
-          <a:bodyPr wrap="square" lIns="36576" rIns="36576" tIns="36576" bIns="36576" anchor="t">
+          <a:bodyPr wrap="square" lIns="36576" tIns="36576" rIns="36576" bIns="36576" anchor="t">
             <a:spAutoFit/>
           </a:bodyPr>
           <a:lstStyle/>
@@ -9048,7 +9860,7 @@
           <a:noFill/>
         </p:spPr>
         <p:txBody>
-          <a:bodyPr wrap="square" lIns="36576" rIns="36576" tIns="36576" bIns="36576" anchor="t">
+          <a:bodyPr wrap="square" lIns="36576" tIns="36576" rIns="36576" bIns="36576" anchor="t">
             <a:spAutoFit/>
           </a:bodyPr>
           <a:lstStyle/>
@@ -9083,7 +9895,7 @@
           <a:noFill/>
         </p:spPr>
         <p:txBody>
-          <a:bodyPr wrap="square" lIns="36576" rIns="36576" tIns="36576" bIns="36576" anchor="t">
+          <a:bodyPr wrap="square" lIns="36576" tIns="36576" rIns="36576" bIns="36576" anchor="t">
             <a:spAutoFit/>
           </a:bodyPr>
           <a:lstStyle/>
@@ -9118,7 +9930,7 @@
           <a:noFill/>
         </p:spPr>
         <p:txBody>
-          <a:bodyPr wrap="square" lIns="36576" rIns="36576" tIns="36576" bIns="36576" anchor="t">
+          <a:bodyPr wrap="square" lIns="36576" tIns="36576" rIns="36576" bIns="36576" anchor="t">
             <a:spAutoFit/>
           </a:bodyPr>
           <a:lstStyle/>
@@ -9153,7 +9965,7 @@
           <a:noFill/>
         </p:spPr>
         <p:txBody>
-          <a:bodyPr wrap="square" lIns="36576" rIns="36576" tIns="36576" bIns="36576" anchor="t">
+          <a:bodyPr wrap="square" lIns="36576" tIns="36576" rIns="36576" bIns="36576" anchor="t">
             <a:spAutoFit/>
           </a:bodyPr>
           <a:lstStyle/>
@@ -9188,7 +10000,7 @@
           <a:noFill/>
         </p:spPr>
         <p:txBody>
-          <a:bodyPr wrap="square" lIns="36576" rIns="36576" tIns="36576" bIns="36576" anchor="t">
+          <a:bodyPr wrap="square" lIns="36576" tIns="36576" rIns="36576" bIns="36576" anchor="t">
             <a:spAutoFit/>
           </a:bodyPr>
           <a:lstStyle/>
@@ -9223,7 +10035,7 @@
           <a:noFill/>
         </p:spPr>
         <p:txBody>
-          <a:bodyPr wrap="square" lIns="36576" rIns="36576" tIns="36576" bIns="36576" anchor="t">
+          <a:bodyPr wrap="square" lIns="36576" tIns="36576" rIns="36576" bIns="36576" anchor="t">
             <a:spAutoFit/>
           </a:bodyPr>
           <a:lstStyle/>
@@ -9250,7 +10062,7 @@
 </file>
 
 <file path=ppt/slides/slide12.xml><?xml version="1.0" encoding="utf-8"?>
-<p:sld xmlns:a="http://schemas.openxmlformats.org/drawingml/2006/main" xmlns:p="http://schemas.openxmlformats.org/presentationml/2006/main" xmlns:r="http://schemas.openxmlformats.org/officeDocument/2006/relationships">
+<p:sld xmlns:a="http://schemas.openxmlformats.org/drawingml/2006/main" xmlns:r="http://schemas.openxmlformats.org/officeDocument/2006/relationships" xmlns:p="http://schemas.openxmlformats.org/presentationml/2006/main">
   <p:cSld>
     <p:bg>
       <p:bgPr>
@@ -9266,7 +10078,14 @@
         <p:cNvGrpSpPr/>
         <p:nvPr/>
       </p:nvGrpSpPr>
-      <p:grpSpPr/>
+      <p:grpSpPr>
+        <a:xfrm>
+          <a:off x="0" y="0"/>
+          <a:ext cx="0" cy="0"/>
+          <a:chOff x="0" y="0"/>
+          <a:chExt cx="0" cy="0"/>
+        </a:xfrm>
+      </p:grpSpPr>
       <p:sp>
         <p:nvSpPr>
           <p:cNvPr id="2" name="TextBox 1"/>
@@ -9284,7 +10103,7 @@
           <a:noFill/>
         </p:spPr>
         <p:txBody>
-          <a:bodyPr wrap="square" lIns="36576" rIns="36576" tIns="36576" bIns="36576" anchor="t">
+          <a:bodyPr wrap="square" lIns="36576" tIns="36576" rIns="36576" bIns="36576" anchor="t">
             <a:spAutoFit/>
           </a:bodyPr>
           <a:lstStyle/>
@@ -9319,7 +10138,7 @@
           <a:noFill/>
         </p:spPr>
         <p:txBody>
-          <a:bodyPr wrap="square" lIns="36576" rIns="36576" tIns="36576" bIns="36576" anchor="t">
+          <a:bodyPr wrap="square" lIns="36576" tIns="36576" rIns="36576" bIns="36576" anchor="t">
             <a:spAutoFit/>
           </a:bodyPr>
           <a:lstStyle/>
@@ -9379,6 +10198,7 @@
           <a:lstStyle/>
           <a:p>
             <a:pPr algn="ctr"/>
+            <a:endParaRPr/>
           </a:p>
         </p:txBody>
       </p:sp>
@@ -9399,7 +10219,7 @@
           <a:noFill/>
         </p:spPr>
         <p:txBody>
-          <a:bodyPr wrap="square" lIns="36576" rIns="36576" tIns="36576" bIns="36576" anchor="t">
+          <a:bodyPr wrap="square" lIns="36576" tIns="36576" rIns="36576" bIns="36576" anchor="t">
             <a:spAutoFit/>
           </a:bodyPr>
           <a:lstStyle/>
@@ -9434,7 +10254,7 @@
           <a:noFill/>
         </p:spPr>
         <p:txBody>
-          <a:bodyPr wrap="square" lIns="36576" rIns="36576" tIns="36576" bIns="36576" anchor="t">
+          <a:bodyPr wrap="square" lIns="36576" tIns="36576" rIns="36576" bIns="36576" anchor="t">
             <a:spAutoFit/>
           </a:bodyPr>
           <a:lstStyle/>
@@ -9494,6 +10314,7 @@
           <a:lstStyle/>
           <a:p>
             <a:pPr algn="ctr"/>
+            <a:endParaRPr/>
           </a:p>
         </p:txBody>
       </p:sp>
@@ -9514,7 +10335,7 @@
           <a:noFill/>
         </p:spPr>
         <p:txBody>
-          <a:bodyPr wrap="square" lIns="36576" rIns="36576" tIns="36576" bIns="36576" anchor="t">
+          <a:bodyPr wrap="square" lIns="36576" tIns="36576" rIns="36576" bIns="36576" anchor="t">
             <a:spAutoFit/>
           </a:bodyPr>
           <a:lstStyle/>
@@ -9549,7 +10370,7 @@
           <a:noFill/>
         </p:spPr>
         <p:txBody>
-          <a:bodyPr wrap="square" lIns="36576" rIns="36576" tIns="36576" bIns="36576" anchor="t">
+          <a:bodyPr wrap="square" lIns="36576" tIns="36576" rIns="36576" bIns="36576" anchor="t">
             <a:spAutoFit/>
           </a:bodyPr>
           <a:lstStyle/>
@@ -9609,6 +10430,7 @@
           <a:lstStyle/>
           <a:p>
             <a:pPr algn="ctr"/>
+            <a:endParaRPr/>
           </a:p>
         </p:txBody>
       </p:sp>
@@ -9629,7 +10451,7 @@
           <a:noFill/>
         </p:spPr>
         <p:txBody>
-          <a:bodyPr wrap="square" lIns="36576" rIns="36576" tIns="36576" bIns="36576" anchor="t">
+          <a:bodyPr wrap="square" lIns="36576" tIns="36576" rIns="36576" bIns="36576" anchor="t">
             <a:spAutoFit/>
           </a:bodyPr>
           <a:lstStyle/>
@@ -9689,6 +10511,7 @@
           <a:lstStyle/>
           <a:p>
             <a:pPr algn="ctr"/>
+            <a:endParaRPr/>
           </a:p>
         </p:txBody>
       </p:sp>
@@ -9709,7 +10532,7 @@
           <a:noFill/>
         </p:spPr>
         <p:txBody>
-          <a:bodyPr wrap="square" lIns="36576" rIns="36576" tIns="36576" bIns="36576" anchor="t">
+          <a:bodyPr wrap="square" lIns="36576" tIns="36576" rIns="36576" bIns="36576" anchor="t">
             <a:spAutoFit/>
           </a:bodyPr>
           <a:lstStyle/>
@@ -9769,6 +10592,7 @@
           <a:lstStyle/>
           <a:p>
             <a:pPr algn="ctr"/>
+            <a:endParaRPr/>
           </a:p>
         </p:txBody>
       </p:sp>
@@ -9789,7 +10613,7 @@
           <a:noFill/>
         </p:spPr>
         <p:txBody>
-          <a:bodyPr wrap="square" lIns="36576" rIns="36576" tIns="36576" bIns="36576" anchor="t">
+          <a:bodyPr wrap="square" lIns="36576" tIns="36576" rIns="36576" bIns="36576" anchor="t">
             <a:spAutoFit/>
           </a:bodyPr>
           <a:lstStyle/>
@@ -9824,7 +10648,7 @@
           <a:noFill/>
         </p:spPr>
         <p:txBody>
-          <a:bodyPr wrap="square" lIns="36576" rIns="36576" tIns="36576" bIns="36576" anchor="t">
+          <a:bodyPr wrap="square" lIns="36576" tIns="36576" rIns="36576" bIns="36576" anchor="t">
             <a:spAutoFit/>
           </a:bodyPr>
           <a:lstStyle/>
@@ -9884,6 +10708,7 @@
           <a:lstStyle/>
           <a:p>
             <a:pPr algn="ctr"/>
+            <a:endParaRPr/>
           </a:p>
         </p:txBody>
       </p:sp>
@@ -9904,7 +10729,7 @@
           <a:noFill/>
         </p:spPr>
         <p:txBody>
-          <a:bodyPr wrap="square" lIns="36576" rIns="36576" tIns="36576" bIns="36576" anchor="t">
+          <a:bodyPr wrap="square" lIns="36576" tIns="36576" rIns="36576" bIns="36576" anchor="t">
             <a:spAutoFit/>
           </a:bodyPr>
           <a:lstStyle/>
@@ -9939,7 +10764,7 @@
           <a:noFill/>
         </p:spPr>
         <p:txBody>
-          <a:bodyPr wrap="square" lIns="36576" rIns="36576" tIns="36576" bIns="36576" anchor="t">
+          <a:bodyPr wrap="square" lIns="36576" tIns="36576" rIns="36576" bIns="36576" anchor="t">
             <a:spAutoFit/>
           </a:bodyPr>
           <a:lstStyle/>
@@ -9974,7 +10799,7 @@
           <a:noFill/>
         </p:spPr>
         <p:txBody>
-          <a:bodyPr wrap="square" lIns="36576" rIns="36576" tIns="36576" bIns="36576" anchor="t">
+          <a:bodyPr wrap="square" lIns="36576" tIns="36576" rIns="36576" bIns="36576" anchor="t">
             <a:spAutoFit/>
           </a:bodyPr>
           <a:lstStyle/>
@@ -10001,7 +10826,7 @@
 </file>
 
 <file path=ppt/slides/slide13.xml><?xml version="1.0" encoding="utf-8"?>
-<p:sld xmlns:a="http://schemas.openxmlformats.org/drawingml/2006/main" xmlns:p="http://schemas.openxmlformats.org/presentationml/2006/main" xmlns:r="http://schemas.openxmlformats.org/officeDocument/2006/relationships">
+<p:sld xmlns:a="http://schemas.openxmlformats.org/drawingml/2006/main" xmlns:r="http://schemas.openxmlformats.org/officeDocument/2006/relationships" xmlns:p="http://schemas.openxmlformats.org/presentationml/2006/main">
   <p:cSld>
     <p:bg>
       <p:bgPr>
@@ -10017,7 +10842,14 @@
         <p:cNvGrpSpPr/>
         <p:nvPr/>
       </p:nvGrpSpPr>
-      <p:grpSpPr/>
+      <p:grpSpPr>
+        <a:xfrm>
+          <a:off x="0" y="0"/>
+          <a:ext cx="0" cy="0"/>
+          <a:chOff x="0" y="0"/>
+          <a:chExt cx="0" cy="0"/>
+        </a:xfrm>
+      </p:grpSpPr>
       <p:sp>
         <p:nvSpPr>
           <p:cNvPr id="2" name="TextBox 1"/>
@@ -10035,7 +10867,7 @@
           <a:noFill/>
         </p:spPr>
         <p:txBody>
-          <a:bodyPr wrap="square" lIns="36576" rIns="36576" tIns="36576" bIns="36576" anchor="t">
+          <a:bodyPr wrap="square" lIns="36576" tIns="36576" rIns="36576" bIns="36576" anchor="t">
             <a:spAutoFit/>
           </a:bodyPr>
           <a:lstStyle/>
@@ -10070,7 +10902,7 @@
           <a:noFill/>
         </p:spPr>
         <p:txBody>
-          <a:bodyPr wrap="square" lIns="36576" rIns="36576" tIns="36576" bIns="36576" anchor="t">
+          <a:bodyPr wrap="square" lIns="36576" tIns="36576" rIns="36576" bIns="36576" anchor="t">
             <a:spAutoFit/>
           </a:bodyPr>
           <a:lstStyle/>
@@ -10130,6 +10962,7 @@
           <a:lstStyle/>
           <a:p>
             <a:pPr algn="ctr"/>
+            <a:endParaRPr/>
           </a:p>
         </p:txBody>
       </p:sp>
@@ -10150,7 +10983,7 @@
           <a:noFill/>
         </p:spPr>
         <p:txBody>
-          <a:bodyPr wrap="square" lIns="36576" rIns="36576" tIns="36576" bIns="36576" anchor="t">
+          <a:bodyPr wrap="square" lIns="36576" tIns="36576" rIns="36576" bIns="36576" anchor="t">
             <a:spAutoFit/>
           </a:bodyPr>
           <a:lstStyle/>
@@ -10210,6 +11043,7 @@
           <a:lstStyle/>
           <a:p>
             <a:pPr algn="ctr"/>
+            <a:endParaRPr/>
           </a:p>
         </p:txBody>
       </p:sp>
@@ -10230,7 +11064,7 @@
           <a:noFill/>
         </p:spPr>
         <p:txBody>
-          <a:bodyPr wrap="square" lIns="36576" rIns="36576" tIns="36576" bIns="36576" anchor="t">
+          <a:bodyPr wrap="square" lIns="36576" tIns="36576" rIns="36576" bIns="36576" anchor="t">
             <a:spAutoFit/>
           </a:bodyPr>
           <a:lstStyle/>
@@ -10292,6 +11126,7 @@
           <a:lstStyle/>
           <a:p>
             <a:pPr algn="ctr"/>
+            <a:endParaRPr/>
           </a:p>
         </p:txBody>
       </p:sp>
@@ -10312,7 +11147,7 @@
           <a:noFill/>
         </p:spPr>
         <p:txBody>
-          <a:bodyPr wrap="square" lIns="36576" rIns="36576" tIns="36576" bIns="36576" anchor="t">
+          <a:bodyPr wrap="square" lIns="36576" tIns="36576" rIns="36576" bIns="36576" anchor="t">
             <a:spAutoFit/>
           </a:bodyPr>
           <a:lstStyle/>
@@ -10376,6 +11211,7 @@
           <a:lstStyle/>
           <a:p>
             <a:pPr algn="ctr"/>
+            <a:endParaRPr/>
           </a:p>
         </p:txBody>
       </p:sp>
@@ -10396,7 +11232,7 @@
           <a:noFill/>
         </p:spPr>
         <p:txBody>
-          <a:bodyPr wrap="square" lIns="36576" rIns="36576" tIns="36576" bIns="36576" anchor="t">
+          <a:bodyPr wrap="square" lIns="36576" tIns="36576" rIns="36576" bIns="36576" anchor="t">
             <a:spAutoFit/>
           </a:bodyPr>
           <a:lstStyle/>
@@ -10431,7 +11267,7 @@
           <a:noFill/>
         </p:spPr>
         <p:txBody>
-          <a:bodyPr wrap="square" lIns="36576" rIns="36576" tIns="36576" bIns="36576" anchor="t">
+          <a:bodyPr wrap="square" lIns="36576" tIns="36576" rIns="36576" bIns="36576" anchor="t">
             <a:spAutoFit/>
           </a:bodyPr>
           <a:lstStyle/>
@@ -10491,6 +11327,7 @@
           <a:lstStyle/>
           <a:p>
             <a:pPr algn="ctr"/>
+            <a:endParaRPr/>
           </a:p>
         </p:txBody>
       </p:sp>
@@ -10511,7 +11348,7 @@
           <a:noFill/>
         </p:spPr>
         <p:txBody>
-          <a:bodyPr wrap="square" lIns="36576" rIns="36576" tIns="36576" bIns="36576" anchor="t">
+          <a:bodyPr wrap="square" lIns="36576" tIns="36576" rIns="36576" bIns="36576" anchor="t">
             <a:spAutoFit/>
           </a:bodyPr>
           <a:lstStyle/>
@@ -10546,7 +11383,7 @@
           <a:noFill/>
         </p:spPr>
         <p:txBody>
-          <a:bodyPr wrap="square" lIns="36576" rIns="36576" tIns="36576" bIns="36576" anchor="t">
+          <a:bodyPr wrap="square" lIns="36576" tIns="36576" rIns="36576" bIns="36576" anchor="t">
             <a:spAutoFit/>
           </a:bodyPr>
           <a:lstStyle/>
@@ -10573,7 +11410,7 @@
 </file>
 
 <file path=ppt/slides/slide14.xml><?xml version="1.0" encoding="utf-8"?>
-<p:sld xmlns:a="http://schemas.openxmlformats.org/drawingml/2006/main" xmlns:p="http://schemas.openxmlformats.org/presentationml/2006/main" xmlns:r="http://schemas.openxmlformats.org/officeDocument/2006/relationships">
+<p:sld xmlns:a="http://schemas.openxmlformats.org/drawingml/2006/main" xmlns:r="http://schemas.openxmlformats.org/officeDocument/2006/relationships" xmlns:p="http://schemas.openxmlformats.org/presentationml/2006/main">
   <p:cSld>
     <p:bg>
       <p:bgPr>
@@ -10589,7 +11426,14 @@
         <p:cNvGrpSpPr/>
         <p:nvPr/>
       </p:nvGrpSpPr>
-      <p:grpSpPr/>
+      <p:grpSpPr>
+        <a:xfrm>
+          <a:off x="0" y="0"/>
+          <a:ext cx="0" cy="0"/>
+          <a:chOff x="0" y="0"/>
+          <a:chExt cx="0" cy="0"/>
+        </a:xfrm>
+      </p:grpSpPr>
       <p:sp>
         <p:nvSpPr>
           <p:cNvPr id="2" name="TextBox 1"/>
@@ -10607,7 +11451,7 @@
           <a:noFill/>
         </p:spPr>
         <p:txBody>
-          <a:bodyPr wrap="square" lIns="36576" rIns="36576" tIns="36576" bIns="36576" anchor="t">
+          <a:bodyPr wrap="square" lIns="36576" tIns="36576" rIns="36576" bIns="36576" anchor="t">
             <a:spAutoFit/>
           </a:bodyPr>
           <a:lstStyle/>
@@ -10642,7 +11486,7 @@
           <a:noFill/>
         </p:spPr>
         <p:txBody>
-          <a:bodyPr wrap="square" lIns="36576" rIns="36576" tIns="36576" bIns="36576" anchor="t">
+          <a:bodyPr wrap="square" lIns="36576" tIns="36576" rIns="36576" bIns="36576" anchor="t">
             <a:spAutoFit/>
           </a:bodyPr>
           <a:lstStyle/>
@@ -10702,6 +11546,7 @@
           <a:lstStyle/>
           <a:p>
             <a:pPr algn="ctr"/>
+            <a:endParaRPr/>
           </a:p>
         </p:txBody>
       </p:sp>
@@ -10722,7 +11567,7 @@
           <a:noFill/>
         </p:spPr>
         <p:txBody>
-          <a:bodyPr wrap="square" lIns="36576" rIns="36576" tIns="36576" bIns="36576" anchor="t">
+          <a:bodyPr wrap="square" lIns="36576" tIns="36576" rIns="36576" bIns="36576" anchor="t">
             <a:spAutoFit/>
           </a:bodyPr>
           <a:lstStyle/>
@@ -10782,6 +11627,7 @@
           <a:lstStyle/>
           <a:p>
             <a:pPr algn="ctr"/>
+            <a:endParaRPr/>
           </a:p>
         </p:txBody>
       </p:sp>
@@ -10802,7 +11648,7 @@
           <a:noFill/>
         </p:spPr>
         <p:txBody>
-          <a:bodyPr wrap="square" lIns="36576" rIns="36576" tIns="36576" bIns="36576" anchor="t">
+          <a:bodyPr wrap="square" lIns="36576" tIns="36576" rIns="36576" bIns="36576" anchor="t">
             <a:spAutoFit/>
           </a:bodyPr>
           <a:lstStyle/>
@@ -10864,6 +11710,7 @@
           <a:lstStyle/>
           <a:p>
             <a:pPr algn="ctr"/>
+            <a:endParaRPr/>
           </a:p>
         </p:txBody>
       </p:sp>
@@ -10884,7 +11731,7 @@
           <a:noFill/>
         </p:spPr>
         <p:txBody>
-          <a:bodyPr wrap="square" lIns="36576" rIns="36576" tIns="36576" bIns="36576" anchor="t">
+          <a:bodyPr wrap="square" lIns="36576" tIns="36576" rIns="36576" bIns="36576" anchor="t">
             <a:spAutoFit/>
           </a:bodyPr>
           <a:lstStyle/>
@@ -10948,6 +11795,7 @@
           <a:lstStyle/>
           <a:p>
             <a:pPr algn="ctr"/>
+            <a:endParaRPr/>
           </a:p>
         </p:txBody>
       </p:sp>
@@ -10968,7 +11816,7 @@
           <a:noFill/>
         </p:spPr>
         <p:txBody>
-          <a:bodyPr wrap="square" lIns="36576" rIns="36576" tIns="36576" bIns="36576" anchor="t">
+          <a:bodyPr wrap="square" lIns="36576" tIns="36576" rIns="36576" bIns="36576" anchor="t">
             <a:spAutoFit/>
           </a:bodyPr>
           <a:lstStyle/>
@@ -11003,7 +11851,7 @@
           <a:noFill/>
         </p:spPr>
         <p:txBody>
-          <a:bodyPr wrap="square" lIns="36576" rIns="36576" tIns="36576" bIns="36576" anchor="t">
+          <a:bodyPr wrap="square" lIns="36576" tIns="36576" rIns="36576" bIns="36576" anchor="t">
             <a:spAutoFit/>
           </a:bodyPr>
           <a:lstStyle/>
@@ -11038,7 +11886,7 @@
           <a:noFill/>
         </p:spPr>
         <p:txBody>
-          <a:bodyPr wrap="square" lIns="36576" rIns="36576" tIns="36576" bIns="36576" anchor="t">
+          <a:bodyPr wrap="square" lIns="36576" tIns="36576" rIns="36576" bIns="36576" anchor="t">
             <a:spAutoFit/>
           </a:bodyPr>
           <a:lstStyle/>
@@ -11073,7 +11921,7 @@
           <a:noFill/>
         </p:spPr>
         <p:txBody>
-          <a:bodyPr wrap="square" lIns="36576" rIns="36576" tIns="36576" bIns="36576" anchor="t">
+          <a:bodyPr wrap="square" lIns="36576" tIns="36576" rIns="36576" bIns="36576" anchor="t">
             <a:spAutoFit/>
           </a:bodyPr>
           <a:lstStyle/>
@@ -11100,7 +11948,7 @@
 </file>
 
 <file path=ppt/slides/slide15.xml><?xml version="1.0" encoding="utf-8"?>
-<p:sld xmlns:a="http://schemas.openxmlformats.org/drawingml/2006/main" xmlns:p="http://schemas.openxmlformats.org/presentationml/2006/main" xmlns:r="http://schemas.openxmlformats.org/officeDocument/2006/relationships">
+<p:sld xmlns:a="http://schemas.openxmlformats.org/drawingml/2006/main" xmlns:r="http://schemas.openxmlformats.org/officeDocument/2006/relationships" xmlns:p="http://schemas.openxmlformats.org/presentationml/2006/main">
   <p:cSld>
     <p:bg>
       <p:bgPr>
@@ -11116,7 +11964,14 @@
         <p:cNvGrpSpPr/>
         <p:nvPr/>
       </p:nvGrpSpPr>
-      <p:grpSpPr/>
+      <p:grpSpPr>
+        <a:xfrm>
+          <a:off x="0" y="0"/>
+          <a:ext cx="0" cy="0"/>
+          <a:chOff x="0" y="0"/>
+          <a:chExt cx="0" cy="0"/>
+        </a:xfrm>
+      </p:grpSpPr>
       <p:sp>
         <p:nvSpPr>
           <p:cNvPr id="2" name="TextBox 1"/>
@@ -11134,7 +11989,7 @@
           <a:noFill/>
         </p:spPr>
         <p:txBody>
-          <a:bodyPr wrap="square" lIns="36576" rIns="36576" tIns="36576" bIns="36576" anchor="t">
+          <a:bodyPr wrap="square" lIns="36576" tIns="36576" rIns="36576" bIns="36576" anchor="t">
             <a:spAutoFit/>
           </a:bodyPr>
           <a:lstStyle/>
@@ -11169,7 +12024,7 @@
           <a:noFill/>
         </p:spPr>
         <p:txBody>
-          <a:bodyPr wrap="square" lIns="36576" rIns="36576" tIns="36576" bIns="36576" anchor="t">
+          <a:bodyPr wrap="square" lIns="36576" tIns="36576" rIns="36576" bIns="36576" anchor="t">
             <a:spAutoFit/>
           </a:bodyPr>
           <a:lstStyle/>
@@ -11229,6 +12084,7 @@
           <a:lstStyle/>
           <a:p>
             <a:pPr algn="ctr"/>
+            <a:endParaRPr/>
           </a:p>
         </p:txBody>
       </p:sp>
@@ -11249,7 +12105,7 @@
           <a:noFill/>
         </p:spPr>
         <p:txBody>
-          <a:bodyPr wrap="square" lIns="36576" rIns="36576" tIns="36576" bIns="36576" anchor="t">
+          <a:bodyPr wrap="square" lIns="36576" tIns="36576" rIns="36576" bIns="36576" anchor="t">
             <a:spAutoFit/>
           </a:bodyPr>
           <a:lstStyle/>
@@ -11309,6 +12165,7 @@
           <a:lstStyle/>
           <a:p>
             <a:pPr algn="ctr"/>
+            <a:endParaRPr/>
           </a:p>
         </p:txBody>
       </p:sp>
@@ -11329,7 +12186,7 @@
           <a:noFill/>
         </p:spPr>
         <p:txBody>
-          <a:bodyPr wrap="square" lIns="36576" rIns="36576" tIns="36576" bIns="36576" anchor="t">
+          <a:bodyPr wrap="square" lIns="36576" tIns="36576" rIns="36576" bIns="36576" anchor="t">
             <a:spAutoFit/>
           </a:bodyPr>
           <a:lstStyle/>
@@ -11390,6 +12247,7 @@
           <a:lstStyle/>
           <a:p>
             <a:pPr algn="ctr"/>
+            <a:endParaRPr/>
           </a:p>
         </p:txBody>
       </p:sp>
@@ -11410,7 +12268,7 @@
           <a:noFill/>
         </p:spPr>
         <p:txBody>
-          <a:bodyPr wrap="square" lIns="36576" rIns="36576" tIns="36576" bIns="36576" anchor="t">
+          <a:bodyPr wrap="square" lIns="36576" tIns="36576" rIns="36576" bIns="36576" anchor="t">
             <a:spAutoFit/>
           </a:bodyPr>
           <a:lstStyle/>
@@ -11471,6 +12329,7 @@
           <a:lstStyle/>
           <a:p>
             <a:pPr algn="ctr"/>
+            <a:endParaRPr/>
           </a:p>
         </p:txBody>
       </p:sp>
@@ -11491,7 +12350,7 @@
           <a:noFill/>
         </p:spPr>
         <p:txBody>
-          <a:bodyPr wrap="square" lIns="36576" rIns="36576" tIns="36576" bIns="36576" anchor="t">
+          <a:bodyPr wrap="square" lIns="36576" tIns="36576" rIns="36576" bIns="36576" anchor="t">
             <a:spAutoFit/>
           </a:bodyPr>
           <a:lstStyle/>
@@ -11526,7 +12385,7 @@
           <a:noFill/>
         </p:spPr>
         <p:txBody>
-          <a:bodyPr wrap="square" lIns="36576" rIns="36576" tIns="36576" bIns="36576" anchor="t">
+          <a:bodyPr wrap="square" lIns="36576" tIns="36576" rIns="36576" bIns="36576" anchor="t">
             <a:spAutoFit/>
           </a:bodyPr>
           <a:lstStyle/>
@@ -11561,7 +12420,7 @@
           <a:noFill/>
         </p:spPr>
         <p:txBody>
-          <a:bodyPr wrap="square" lIns="36576" rIns="36576" tIns="36576" bIns="36576" anchor="t">
+          <a:bodyPr wrap="square" lIns="36576" tIns="36576" rIns="36576" bIns="36576" anchor="t">
             <a:spAutoFit/>
           </a:bodyPr>
           <a:lstStyle/>
@@ -11621,6 +12480,7 @@
           <a:lstStyle/>
           <a:p>
             <a:pPr algn="ctr"/>
+            <a:endParaRPr/>
           </a:p>
         </p:txBody>
       </p:sp>
@@ -11641,7 +12501,7 @@
           <a:noFill/>
         </p:spPr>
         <p:txBody>
-          <a:bodyPr wrap="square" lIns="36576" rIns="36576" tIns="36576" bIns="36576" anchor="t">
+          <a:bodyPr wrap="square" lIns="36576" tIns="36576" rIns="36576" bIns="36576" anchor="t">
             <a:spAutoFit/>
           </a:bodyPr>
           <a:lstStyle/>
@@ -11676,7 +12536,7 @@
           <a:noFill/>
         </p:spPr>
         <p:txBody>
-          <a:bodyPr wrap="square" lIns="36576" rIns="36576" tIns="36576" bIns="36576" anchor="t">
+          <a:bodyPr wrap="square" lIns="36576" tIns="36576" rIns="36576" bIns="36576" anchor="t">
             <a:spAutoFit/>
           </a:bodyPr>
           <a:lstStyle/>
@@ -11711,7 +12571,7 @@
           <a:noFill/>
         </p:spPr>
         <p:txBody>
-          <a:bodyPr wrap="square" lIns="36576" rIns="36576" tIns="36576" bIns="36576" anchor="t">
+          <a:bodyPr wrap="square" lIns="36576" tIns="36576" rIns="36576" bIns="36576" anchor="t">
             <a:spAutoFit/>
           </a:bodyPr>
           <a:lstStyle/>
@@ -11746,7 +12606,7 @@
           <a:noFill/>
         </p:spPr>
         <p:txBody>
-          <a:bodyPr wrap="square" lIns="36576" rIns="36576" tIns="36576" bIns="36576" anchor="t">
+          <a:bodyPr wrap="square" lIns="36576" tIns="36576" rIns="36576" bIns="36576" anchor="t">
             <a:spAutoFit/>
           </a:bodyPr>
           <a:lstStyle/>
@@ -11781,7 +12641,7 @@
           <a:noFill/>
         </p:spPr>
         <p:txBody>
-          <a:bodyPr wrap="square" lIns="36576" rIns="36576" tIns="36576" bIns="36576" anchor="t">
+          <a:bodyPr wrap="square" lIns="36576" tIns="36576" rIns="36576" bIns="36576" anchor="t">
             <a:spAutoFit/>
           </a:bodyPr>
           <a:lstStyle/>
@@ -11808,7 +12668,7 @@
 </file>
 
 <file path=ppt/slides/slide16.xml><?xml version="1.0" encoding="utf-8"?>
-<p:sld xmlns:a="http://schemas.openxmlformats.org/drawingml/2006/main" xmlns:p="http://schemas.openxmlformats.org/presentationml/2006/main" xmlns:r="http://schemas.openxmlformats.org/officeDocument/2006/relationships">
+<p:sld xmlns:a="http://schemas.openxmlformats.org/drawingml/2006/main" xmlns:r="http://schemas.openxmlformats.org/officeDocument/2006/relationships" xmlns:p="http://schemas.openxmlformats.org/presentationml/2006/main">
   <p:cSld>
     <p:bg>
       <p:bgPr>
@@ -11824,7 +12684,14 @@
         <p:cNvGrpSpPr/>
         <p:nvPr/>
       </p:nvGrpSpPr>
-      <p:grpSpPr/>
+      <p:grpSpPr>
+        <a:xfrm>
+          <a:off x="0" y="0"/>
+          <a:ext cx="0" cy="0"/>
+          <a:chOff x="0" y="0"/>
+          <a:chExt cx="0" cy="0"/>
+        </a:xfrm>
+      </p:grpSpPr>
       <p:sp>
         <p:nvSpPr>
           <p:cNvPr id="2" name="TextBox 1"/>
@@ -11842,7 +12709,7 @@
           <a:noFill/>
         </p:spPr>
         <p:txBody>
-          <a:bodyPr wrap="square" lIns="36576" rIns="36576" tIns="36576" bIns="36576" anchor="t">
+          <a:bodyPr wrap="square" lIns="36576" tIns="36576" rIns="36576" bIns="36576" anchor="t">
             <a:spAutoFit/>
           </a:bodyPr>
           <a:lstStyle/>
@@ -11877,7 +12744,7 @@
           <a:noFill/>
         </p:spPr>
         <p:txBody>
-          <a:bodyPr wrap="square" lIns="36576" rIns="36576" tIns="36576" bIns="36576" anchor="t">
+          <a:bodyPr wrap="square" lIns="36576" tIns="36576" rIns="36576" bIns="36576" anchor="t">
             <a:spAutoFit/>
           </a:bodyPr>
           <a:lstStyle/>
@@ -11937,6 +12804,7 @@
           <a:lstStyle/>
           <a:p>
             <a:pPr algn="ctr"/>
+            <a:endParaRPr/>
           </a:p>
         </p:txBody>
       </p:sp>
@@ -11957,7 +12825,7 @@
           <a:noFill/>
         </p:spPr>
         <p:txBody>
-          <a:bodyPr wrap="square" lIns="36576" rIns="36576" tIns="36576" bIns="36576" anchor="t">
+          <a:bodyPr wrap="square" lIns="36576" tIns="36576" rIns="36576" bIns="36576" anchor="t">
             <a:spAutoFit/>
           </a:bodyPr>
           <a:lstStyle/>
@@ -12017,6 +12885,7 @@
           <a:lstStyle/>
           <a:p>
             <a:pPr algn="ctr"/>
+            <a:endParaRPr/>
           </a:p>
         </p:txBody>
       </p:sp>
@@ -12037,7 +12906,7 @@
           <a:noFill/>
         </p:spPr>
         <p:txBody>
-          <a:bodyPr wrap="square" lIns="36576" rIns="36576" tIns="36576" bIns="36576" anchor="t">
+          <a:bodyPr wrap="square" lIns="36576" tIns="36576" rIns="36576" bIns="36576" anchor="t">
             <a:spAutoFit/>
           </a:bodyPr>
           <a:lstStyle/>
@@ -12072,7 +12941,7 @@
           <a:noFill/>
         </p:spPr>
         <p:txBody>
-          <a:bodyPr wrap="square" lIns="36576" rIns="36576" tIns="36576" bIns="36576" anchor="t">
+          <a:bodyPr wrap="square" lIns="36576" tIns="36576" rIns="36576" bIns="36576" anchor="t">
             <a:spAutoFit/>
           </a:bodyPr>
           <a:lstStyle/>
@@ -12107,7 +12976,7 @@
           <a:noFill/>
         </p:spPr>
         <p:txBody>
-          <a:bodyPr wrap="square" lIns="36576" rIns="36576" tIns="36576" bIns="36576" anchor="t">
+          <a:bodyPr wrap="square" lIns="36576" tIns="36576" rIns="36576" bIns="36576" anchor="t">
             <a:spAutoFit/>
           </a:bodyPr>
           <a:lstStyle/>
@@ -12167,6 +13036,7 @@
           <a:lstStyle/>
           <a:p>
             <a:pPr algn="ctr"/>
+            <a:endParaRPr/>
           </a:p>
         </p:txBody>
       </p:sp>
@@ -12187,7 +13057,7 @@
           <a:noFill/>
         </p:spPr>
         <p:txBody>
-          <a:bodyPr wrap="square" lIns="36576" rIns="36576" tIns="36576" bIns="36576" anchor="t">
+          <a:bodyPr wrap="square" lIns="36576" tIns="36576" rIns="36576" bIns="36576" anchor="t">
             <a:spAutoFit/>
           </a:bodyPr>
           <a:lstStyle/>
@@ -12222,7 +13092,7 @@
           <a:noFill/>
         </p:spPr>
         <p:txBody>
-          <a:bodyPr wrap="square" lIns="36576" rIns="36576" tIns="36576" bIns="36576" anchor="t">
+          <a:bodyPr wrap="square" lIns="36576" tIns="36576" rIns="36576" bIns="36576" anchor="t">
             <a:spAutoFit/>
           </a:bodyPr>
           <a:lstStyle/>
@@ -12257,7 +13127,7 @@
           <a:noFill/>
         </p:spPr>
         <p:txBody>
-          <a:bodyPr wrap="square" lIns="36576" rIns="36576" tIns="36576" bIns="36576" anchor="t">
+          <a:bodyPr wrap="square" lIns="36576" tIns="36576" rIns="36576" bIns="36576" anchor="t">
             <a:spAutoFit/>
           </a:bodyPr>
           <a:lstStyle/>
@@ -12317,6 +13187,7 @@
           <a:lstStyle/>
           <a:p>
             <a:pPr algn="ctr"/>
+            <a:endParaRPr/>
           </a:p>
         </p:txBody>
       </p:sp>
@@ -12337,7 +13208,7 @@
           <a:noFill/>
         </p:spPr>
         <p:txBody>
-          <a:bodyPr wrap="square" lIns="36576" rIns="36576" tIns="36576" bIns="36576" anchor="t">
+          <a:bodyPr wrap="square" lIns="36576" tIns="36576" rIns="36576" bIns="36576" anchor="t">
             <a:spAutoFit/>
           </a:bodyPr>
           <a:lstStyle/>
@@ -12372,7 +13243,7 @@
           <a:noFill/>
         </p:spPr>
         <p:txBody>
-          <a:bodyPr wrap="square" lIns="36576" rIns="36576" tIns="36576" bIns="36576" anchor="t">
+          <a:bodyPr wrap="square" lIns="36576" tIns="36576" rIns="36576" bIns="36576" anchor="t">
             <a:spAutoFit/>
           </a:bodyPr>
           <a:lstStyle/>
@@ -12407,7 +13278,7 @@
           <a:noFill/>
         </p:spPr>
         <p:txBody>
-          <a:bodyPr wrap="square" lIns="36576" rIns="36576" tIns="36576" bIns="36576" anchor="t">
+          <a:bodyPr wrap="square" lIns="36576" tIns="36576" rIns="36576" bIns="36576" anchor="t">
             <a:spAutoFit/>
           </a:bodyPr>
           <a:lstStyle/>
@@ -12467,6 +13338,7 @@
           <a:lstStyle/>
           <a:p>
             <a:pPr algn="ctr"/>
+            <a:endParaRPr/>
           </a:p>
         </p:txBody>
       </p:sp>
@@ -12487,7 +13359,7 @@
           <a:noFill/>
         </p:spPr>
         <p:txBody>
-          <a:bodyPr wrap="square" lIns="36576" rIns="36576" tIns="36576" bIns="36576" anchor="t">
+          <a:bodyPr wrap="square" lIns="36576" tIns="36576" rIns="36576" bIns="36576" anchor="t">
             <a:spAutoFit/>
           </a:bodyPr>
           <a:lstStyle/>
@@ -12522,7 +13394,7 @@
           <a:noFill/>
         </p:spPr>
         <p:txBody>
-          <a:bodyPr wrap="square" lIns="36576" rIns="36576" tIns="36576" bIns="36576" anchor="t">
+          <a:bodyPr wrap="square" lIns="36576" tIns="36576" rIns="36576" bIns="36576" anchor="t">
             <a:spAutoFit/>
           </a:bodyPr>
           <a:lstStyle/>
@@ -12557,7 +13429,7 @@
           <a:noFill/>
         </p:spPr>
         <p:txBody>
-          <a:bodyPr wrap="square" lIns="36576" rIns="36576" tIns="36576" bIns="36576" anchor="t">
+          <a:bodyPr wrap="square" lIns="36576" tIns="36576" rIns="36576" bIns="36576" anchor="t">
             <a:spAutoFit/>
           </a:bodyPr>
           <a:lstStyle/>
@@ -12617,6 +13489,7 @@
           <a:lstStyle/>
           <a:p>
             <a:pPr algn="ctr"/>
+            <a:endParaRPr/>
           </a:p>
         </p:txBody>
       </p:sp>
@@ -12637,7 +13510,7 @@
           <a:noFill/>
         </p:spPr>
         <p:txBody>
-          <a:bodyPr wrap="square" lIns="36576" rIns="36576" tIns="36576" bIns="36576" anchor="t">
+          <a:bodyPr wrap="square" lIns="36576" tIns="36576" rIns="36576" bIns="36576" anchor="t">
             <a:spAutoFit/>
           </a:bodyPr>
           <a:lstStyle/>
@@ -12672,7 +13545,7 @@
           <a:noFill/>
         </p:spPr>
         <p:txBody>
-          <a:bodyPr wrap="square" lIns="36576" rIns="36576" tIns="36576" bIns="36576" anchor="t">
+          <a:bodyPr wrap="square" lIns="36576" tIns="36576" rIns="36576" bIns="36576" anchor="t">
             <a:spAutoFit/>
           </a:bodyPr>
           <a:lstStyle/>
@@ -12707,7 +13580,7 @@
           <a:noFill/>
         </p:spPr>
         <p:txBody>
-          <a:bodyPr wrap="square" lIns="36576" rIns="36576" tIns="36576" bIns="36576" anchor="t">
+          <a:bodyPr wrap="square" lIns="36576" tIns="36576" rIns="36576" bIns="36576" anchor="t">
             <a:spAutoFit/>
           </a:bodyPr>
           <a:lstStyle/>
@@ -12767,6 +13640,7 @@
           <a:lstStyle/>
           <a:p>
             <a:pPr algn="ctr"/>
+            <a:endParaRPr/>
           </a:p>
         </p:txBody>
       </p:sp>
@@ -12787,7 +13661,7 @@
           <a:noFill/>
         </p:spPr>
         <p:txBody>
-          <a:bodyPr wrap="square" lIns="36576" rIns="36576" tIns="36576" bIns="36576" anchor="t">
+          <a:bodyPr wrap="square" lIns="36576" tIns="36576" rIns="36576" bIns="36576" anchor="t">
             <a:spAutoFit/>
           </a:bodyPr>
           <a:lstStyle/>
@@ -12822,7 +13696,7 @@
           <a:noFill/>
         </p:spPr>
         <p:txBody>
-          <a:bodyPr wrap="square" lIns="36576" rIns="36576" tIns="36576" bIns="36576" anchor="t">
+          <a:bodyPr wrap="square" lIns="36576" tIns="36576" rIns="36576" bIns="36576" anchor="t">
             <a:spAutoFit/>
           </a:bodyPr>
           <a:lstStyle/>
@@ -12849,7 +13723,7 @@
 </file>
 
 <file path=ppt/slides/slide17.xml><?xml version="1.0" encoding="utf-8"?>
-<p:sld xmlns:a="http://schemas.openxmlformats.org/drawingml/2006/main" xmlns:p="http://schemas.openxmlformats.org/presentationml/2006/main" xmlns:r="http://schemas.openxmlformats.org/officeDocument/2006/relationships">
+<p:sld xmlns:a="http://schemas.openxmlformats.org/drawingml/2006/main" xmlns:r="http://schemas.openxmlformats.org/officeDocument/2006/relationships" xmlns:p="http://schemas.openxmlformats.org/presentationml/2006/main">
   <p:cSld>
     <p:bg>
       <p:bgPr>
@@ -12865,7 +13739,14 @@
         <p:cNvGrpSpPr/>
         <p:nvPr/>
       </p:nvGrpSpPr>
-      <p:grpSpPr/>
+      <p:grpSpPr>
+        <a:xfrm>
+          <a:off x="0" y="0"/>
+          <a:ext cx="0" cy="0"/>
+          <a:chOff x="0" y="0"/>
+          <a:chExt cx="0" cy="0"/>
+        </a:xfrm>
+      </p:grpSpPr>
       <p:sp>
         <p:nvSpPr>
           <p:cNvPr id="2" name="TextBox 1"/>
@@ -12883,7 +13764,7 @@
           <a:noFill/>
         </p:spPr>
         <p:txBody>
-          <a:bodyPr wrap="square" lIns="36576" rIns="36576" tIns="36576" bIns="36576" anchor="t">
+          <a:bodyPr wrap="square" lIns="36576" tIns="36576" rIns="36576" bIns="36576" anchor="t">
             <a:spAutoFit/>
           </a:bodyPr>
           <a:lstStyle/>
@@ -12918,7 +13799,7 @@
           <a:noFill/>
         </p:spPr>
         <p:txBody>
-          <a:bodyPr wrap="square" lIns="36576" rIns="36576" tIns="36576" bIns="36576" anchor="t">
+          <a:bodyPr wrap="square" lIns="36576" tIns="36576" rIns="36576" bIns="36576" anchor="t">
             <a:spAutoFit/>
           </a:bodyPr>
           <a:lstStyle/>
@@ -12978,6 +13859,7 @@
           <a:lstStyle/>
           <a:p>
             <a:pPr algn="ctr"/>
+            <a:endParaRPr/>
           </a:p>
         </p:txBody>
       </p:sp>
@@ -12998,7 +13880,7 @@
           <a:noFill/>
         </p:spPr>
         <p:txBody>
-          <a:bodyPr wrap="square" lIns="36576" rIns="36576" tIns="36576" bIns="36576" anchor="t">
+          <a:bodyPr wrap="square" lIns="36576" tIns="36576" rIns="36576" bIns="36576" anchor="t">
             <a:spAutoFit/>
           </a:bodyPr>
           <a:lstStyle/>
@@ -13058,6 +13940,7 @@
           <a:lstStyle/>
           <a:p>
             <a:pPr algn="ctr"/>
+            <a:endParaRPr/>
           </a:p>
         </p:txBody>
       </p:sp>
@@ -13103,6 +13986,7 @@
           <a:lstStyle/>
           <a:p>
             <a:pPr algn="ctr"/>
+            <a:endParaRPr/>
           </a:p>
         </p:txBody>
       </p:sp>
@@ -13123,7 +14007,7 @@
           <a:noFill/>
         </p:spPr>
         <p:txBody>
-          <a:bodyPr wrap="square" lIns="36576" rIns="36576" tIns="36576" bIns="36576" anchor="t">
+          <a:bodyPr wrap="square" lIns="36576" tIns="36576" rIns="36576" bIns="36576" anchor="t">
             <a:spAutoFit/>
           </a:bodyPr>
           <a:lstStyle/>
@@ -13158,7 +14042,7 @@
           <a:noFill/>
         </p:spPr>
         <p:txBody>
-          <a:bodyPr wrap="square" lIns="36576" rIns="36576" tIns="36576" bIns="36576" anchor="t">
+          <a:bodyPr wrap="square" lIns="36576" tIns="36576" rIns="36576" bIns="36576" anchor="t">
             <a:spAutoFit/>
           </a:bodyPr>
           <a:lstStyle/>
@@ -13193,7 +14077,7 @@
           <a:noFill/>
         </p:spPr>
         <p:txBody>
-          <a:bodyPr wrap="square" lIns="18288" rIns="18288" tIns="18288" bIns="18288" anchor="t">
+          <a:bodyPr wrap="square" lIns="18288" tIns="18288" rIns="18288" bIns="18288" anchor="t">
             <a:spAutoFit/>
           </a:bodyPr>
           <a:lstStyle/>
@@ -13253,6 +14137,7 @@
           <a:lstStyle/>
           <a:p>
             <a:pPr algn="ctr"/>
+            <a:endParaRPr/>
           </a:p>
         </p:txBody>
       </p:sp>
@@ -13298,6 +14183,7 @@
           <a:lstStyle/>
           <a:p>
             <a:pPr algn="ctr"/>
+            <a:endParaRPr/>
           </a:p>
         </p:txBody>
       </p:sp>
@@ -13318,7 +14204,7 @@
           <a:noFill/>
         </p:spPr>
         <p:txBody>
-          <a:bodyPr wrap="square" lIns="36576" rIns="36576" tIns="36576" bIns="36576" anchor="t">
+          <a:bodyPr wrap="square" lIns="36576" tIns="36576" rIns="36576" bIns="36576" anchor="t">
             <a:spAutoFit/>
           </a:bodyPr>
           <a:lstStyle/>
@@ -13353,7 +14239,7 @@
           <a:noFill/>
         </p:spPr>
         <p:txBody>
-          <a:bodyPr wrap="square" lIns="36576" rIns="36576" tIns="36576" bIns="36576" anchor="t">
+          <a:bodyPr wrap="square" lIns="36576" tIns="36576" rIns="36576" bIns="36576" anchor="t">
             <a:spAutoFit/>
           </a:bodyPr>
           <a:lstStyle/>
@@ -13388,7 +14274,7 @@
           <a:noFill/>
         </p:spPr>
         <p:txBody>
-          <a:bodyPr wrap="square" lIns="18288" rIns="18288" tIns="18288" bIns="18288" anchor="t">
+          <a:bodyPr wrap="square" lIns="18288" tIns="18288" rIns="18288" bIns="18288" anchor="t">
             <a:spAutoFit/>
           </a:bodyPr>
           <a:lstStyle/>
@@ -13448,6 +14334,7 @@
           <a:lstStyle/>
           <a:p>
             <a:pPr algn="ctr"/>
+            <a:endParaRPr/>
           </a:p>
         </p:txBody>
       </p:sp>
@@ -13493,6 +14380,7 @@
           <a:lstStyle/>
           <a:p>
             <a:pPr algn="ctr"/>
+            <a:endParaRPr/>
           </a:p>
         </p:txBody>
       </p:sp>
@@ -13513,7 +14401,7 @@
           <a:noFill/>
         </p:spPr>
         <p:txBody>
-          <a:bodyPr wrap="square" lIns="36576" rIns="36576" tIns="36576" bIns="36576" anchor="t">
+          <a:bodyPr wrap="square" lIns="36576" tIns="36576" rIns="36576" bIns="36576" anchor="t">
             <a:spAutoFit/>
           </a:bodyPr>
           <a:lstStyle/>
@@ -13548,7 +14436,7 @@
           <a:noFill/>
         </p:spPr>
         <p:txBody>
-          <a:bodyPr wrap="square" lIns="36576" rIns="36576" tIns="36576" bIns="36576" anchor="t">
+          <a:bodyPr wrap="square" lIns="36576" tIns="36576" rIns="36576" bIns="36576" anchor="t">
             <a:spAutoFit/>
           </a:bodyPr>
           <a:lstStyle/>
@@ -13583,7 +14471,7 @@
           <a:noFill/>
         </p:spPr>
         <p:txBody>
-          <a:bodyPr wrap="square" lIns="18288" rIns="18288" tIns="18288" bIns="18288" anchor="t">
+          <a:bodyPr wrap="square" lIns="18288" tIns="18288" rIns="18288" bIns="18288" anchor="t">
             <a:spAutoFit/>
           </a:bodyPr>
           <a:lstStyle/>
@@ -13618,7 +14506,7 @@
           <a:noFill/>
         </p:spPr>
         <p:txBody>
-          <a:bodyPr wrap="square" lIns="36576" rIns="36576" tIns="36576" bIns="36576" anchor="t">
+          <a:bodyPr wrap="square" lIns="36576" tIns="36576" rIns="36576" bIns="36576" anchor="t">
             <a:spAutoFit/>
           </a:bodyPr>
           <a:lstStyle/>
@@ -13653,7 +14541,7 @@
           <a:noFill/>
         </p:spPr>
         <p:txBody>
-          <a:bodyPr wrap="square" lIns="36576" rIns="36576" tIns="36576" bIns="36576" anchor="t">
+          <a:bodyPr wrap="square" lIns="36576" tIns="36576" rIns="36576" bIns="36576" anchor="t">
             <a:spAutoFit/>
           </a:bodyPr>
           <a:lstStyle/>
@@ -13688,7 +14576,7 @@
           <a:noFill/>
         </p:spPr>
         <p:txBody>
-          <a:bodyPr wrap="square" lIns="36576" rIns="36576" tIns="36576" bIns="36576" anchor="t">
+          <a:bodyPr wrap="square" lIns="36576" tIns="36576" rIns="36576" bIns="36576" anchor="t">
             <a:spAutoFit/>
           </a:bodyPr>
           <a:lstStyle/>
@@ -13715,7 +14603,7 @@
 </file>
 
 <file path=ppt/slides/slide18.xml><?xml version="1.0" encoding="utf-8"?>
-<p:sld xmlns:a="http://schemas.openxmlformats.org/drawingml/2006/main" xmlns:p="http://schemas.openxmlformats.org/presentationml/2006/main" xmlns:r="http://schemas.openxmlformats.org/officeDocument/2006/relationships">
+<p:sld xmlns:a="http://schemas.openxmlformats.org/drawingml/2006/main" xmlns:r="http://schemas.openxmlformats.org/officeDocument/2006/relationships" xmlns:p="http://schemas.openxmlformats.org/presentationml/2006/main">
   <p:cSld>
     <p:bg>
       <p:bgPr>
@@ -13731,7 +14619,14 @@
         <p:cNvGrpSpPr/>
         <p:nvPr/>
       </p:nvGrpSpPr>
-      <p:grpSpPr/>
+      <p:grpSpPr>
+        <a:xfrm>
+          <a:off x="0" y="0"/>
+          <a:ext cx="0" cy="0"/>
+          <a:chOff x="0" y="0"/>
+          <a:chExt cx="0" cy="0"/>
+        </a:xfrm>
+      </p:grpSpPr>
       <p:sp>
         <p:nvSpPr>
           <p:cNvPr id="2" name="TextBox 1"/>
@@ -13749,7 +14644,7 @@
           <a:noFill/>
         </p:spPr>
         <p:txBody>
-          <a:bodyPr wrap="square" lIns="36576" rIns="36576" tIns="36576" bIns="36576" anchor="t">
+          <a:bodyPr wrap="square" lIns="36576" tIns="36576" rIns="36576" bIns="36576" anchor="t">
             <a:spAutoFit/>
           </a:bodyPr>
           <a:lstStyle/>
@@ -13784,7 +14679,7 @@
           <a:noFill/>
         </p:spPr>
         <p:txBody>
-          <a:bodyPr wrap="square" lIns="36576" rIns="36576" tIns="36576" bIns="36576" anchor="t">
+          <a:bodyPr wrap="square" lIns="36576" tIns="36576" rIns="36576" bIns="36576" anchor="t">
             <a:spAutoFit/>
           </a:bodyPr>
           <a:lstStyle/>
@@ -13844,6 +14739,7 @@
           <a:lstStyle/>
           <a:p>
             <a:pPr algn="ctr"/>
+            <a:endParaRPr/>
           </a:p>
         </p:txBody>
       </p:sp>
@@ -13864,7 +14760,7 @@
           <a:noFill/>
         </p:spPr>
         <p:txBody>
-          <a:bodyPr wrap="square" lIns="36576" rIns="36576" tIns="36576" bIns="36576" anchor="t">
+          <a:bodyPr wrap="square" lIns="36576" tIns="36576" rIns="36576" bIns="36576" anchor="t">
             <a:spAutoFit/>
           </a:bodyPr>
           <a:lstStyle/>
@@ -13924,6 +14820,7 @@
           <a:lstStyle/>
           <a:p>
             <a:pPr algn="ctr"/>
+            <a:endParaRPr/>
           </a:p>
         </p:txBody>
       </p:sp>
@@ -13944,7 +14841,7 @@
           <a:noFill/>
         </p:spPr>
         <p:txBody>
-          <a:bodyPr wrap="square" lIns="36576" rIns="36576" tIns="36576" bIns="36576" anchor="t">
+          <a:bodyPr wrap="square" lIns="36576" tIns="36576" rIns="36576" bIns="36576" anchor="t">
             <a:spAutoFit/>
           </a:bodyPr>
           <a:lstStyle/>
@@ -13979,7 +14876,7 @@
           <a:noFill/>
         </p:spPr>
         <p:txBody>
-          <a:bodyPr wrap="square" lIns="36576" rIns="36576" tIns="36576" bIns="36576" anchor="t">
+          <a:bodyPr wrap="square" lIns="36576" tIns="36576" rIns="36576" bIns="36576" anchor="t">
             <a:spAutoFit/>
           </a:bodyPr>
           <a:lstStyle/>
@@ -13991,7 +14888,7 @@
                   <a:srgbClr val="58A6FF"/>
                 </a:solidFill>
                 <a:latin typeface="Cascadia Mono"/>
-                <a:hlinkClick r:id="rId2"/>
+                <a:hlinkClick r:id="rId3"/>
               </a:rPr>
               <a:t>https://github.blog/changelog/2026-08-20-windows-11-arm64-vs2026-image-generally-available</a:t>
             </a:r>
@@ -14040,6 +14937,7 @@
           <a:lstStyle/>
           <a:p>
             <a:pPr algn="ctr"/>
+            <a:endParaRPr/>
           </a:p>
         </p:txBody>
       </p:sp>
@@ -14060,7 +14958,7 @@
           <a:noFill/>
         </p:spPr>
         <p:txBody>
-          <a:bodyPr wrap="square" lIns="36576" rIns="36576" tIns="36576" bIns="36576" anchor="t">
+          <a:bodyPr wrap="square" lIns="36576" tIns="36576" rIns="36576" bIns="36576" anchor="t">
             <a:spAutoFit/>
           </a:bodyPr>
           <a:lstStyle/>
@@ -14095,7 +14993,7 @@
           <a:noFill/>
         </p:spPr>
         <p:txBody>
-          <a:bodyPr wrap="square" lIns="36576" rIns="36576" tIns="36576" bIns="36576" anchor="t">
+          <a:bodyPr wrap="square" lIns="36576" tIns="36576" rIns="36576" bIns="36576" anchor="t">
             <a:spAutoFit/>
           </a:bodyPr>
           <a:lstStyle/>
@@ -14107,7 +15005,7 @@
                   <a:srgbClr val="58A6FF"/>
                 </a:solidFill>
                 <a:latin typeface="Cascadia Mono"/>
-                <a:hlinkClick r:id="rId3"/>
+                <a:hlinkClick r:id="rId4"/>
               </a:rPr>
               <a:t>https://github.blog/changelog/2026-08-20-separate-github-actions-path-for-github-code-quality</a:t>
             </a:r>
@@ -14156,6 +15054,7 @@
           <a:lstStyle/>
           <a:p>
             <a:pPr algn="ctr"/>
+            <a:endParaRPr/>
           </a:p>
         </p:txBody>
       </p:sp>
@@ -14176,7 +15075,7 @@
           <a:noFill/>
         </p:spPr>
         <p:txBody>
-          <a:bodyPr wrap="square" lIns="36576" rIns="36576" tIns="36576" bIns="36576" anchor="t">
+          <a:bodyPr wrap="square" lIns="36576" tIns="36576" rIns="36576" bIns="36576" anchor="t">
             <a:spAutoFit/>
           </a:bodyPr>
           <a:lstStyle/>
@@ -14211,19 +15110,19 @@
           <a:noFill/>
         </p:spPr>
         <p:txBody>
-          <a:bodyPr wrap="square" lIns="36576" rIns="36576" tIns="36576" bIns="36576" anchor="t">
+          <a:bodyPr wrap="square" lIns="36576" tIns="36576" rIns="36576" bIns="36576" anchor="t">
             <a:spAutoFit/>
           </a:bodyPr>
           <a:lstStyle/>
           <a:p>
             <a:pPr algn="l"/>
             <a:r>
-              <a:rPr sz="900" b="0" u="sng">
+              <a:rPr sz="900" b="0" u="sng" dirty="0">
                 <a:solidFill>
                   <a:srgbClr val="58A6FF"/>
                 </a:solidFill>
                 <a:latin typeface="Cascadia Mono"/>
-                <a:hlinkClick r:id="rId4"/>
+                <a:hlinkClick r:id="rId5"/>
               </a:rPr>
               <a:t>https://github.blog/changelog/2026-08-27-actions-retention-will-cover-checks-workflow-runs-and-statuses</a:t>
             </a:r>
@@ -14272,6 +15171,7 @@
           <a:lstStyle/>
           <a:p>
             <a:pPr algn="ctr"/>
+            <a:endParaRPr/>
           </a:p>
         </p:txBody>
       </p:sp>
@@ -14292,7 +15192,7 @@
           <a:noFill/>
         </p:spPr>
         <p:txBody>
-          <a:bodyPr wrap="square" lIns="36576" rIns="36576" tIns="36576" bIns="36576" anchor="t">
+          <a:bodyPr wrap="square" lIns="36576" tIns="36576" rIns="36576" bIns="36576" anchor="t">
             <a:spAutoFit/>
           </a:bodyPr>
           <a:lstStyle/>
@@ -14327,7 +15227,7 @@
           <a:noFill/>
         </p:spPr>
         <p:txBody>
-          <a:bodyPr wrap="square" lIns="36576" rIns="36576" tIns="36576" bIns="36576" anchor="t">
+          <a:bodyPr wrap="square" lIns="36576" tIns="36576" rIns="36576" bIns="36576" anchor="t">
             <a:spAutoFit/>
           </a:bodyPr>
           <a:lstStyle/>
@@ -14339,7 +15239,7 @@
                   <a:srgbClr val="58A6FF"/>
                 </a:solidFill>
                 <a:latin typeface="Cascadia Mono"/>
-                <a:hlinkClick r:id="rId5"/>
+                <a:hlinkClick r:id="rId6"/>
               </a:rPr>
               <a:t>https://github.blog/changelog/2026-09-03-github-actions-early-september-2026-updates</a:t>
             </a:r>
@@ -14388,6 +15288,7 @@
           <a:lstStyle/>
           <a:p>
             <a:pPr algn="ctr"/>
+            <a:endParaRPr/>
           </a:p>
         </p:txBody>
       </p:sp>
@@ -14408,7 +15309,7 @@
           <a:noFill/>
         </p:spPr>
         <p:txBody>
-          <a:bodyPr wrap="square" lIns="36576" rIns="36576" tIns="36576" bIns="36576" anchor="t">
+          <a:bodyPr wrap="square" lIns="36576" tIns="36576" rIns="36576" bIns="36576" anchor="t">
             <a:spAutoFit/>
           </a:bodyPr>
           <a:lstStyle/>
@@ -14443,7 +15344,7 @@
           <a:noFill/>
         </p:spPr>
         <p:txBody>
-          <a:bodyPr wrap="square" lIns="36576" rIns="36576" tIns="36576" bIns="36576" anchor="t">
+          <a:bodyPr wrap="square" lIns="36576" tIns="36576" rIns="36576" bIns="36576" anchor="t">
             <a:spAutoFit/>
           </a:bodyPr>
           <a:lstStyle/>
@@ -14455,7 +15356,7 @@
                   <a:srgbClr val="58A6FF"/>
                 </a:solidFill>
                 <a:latin typeface="Cascadia Mono"/>
-                <a:hlinkClick r:id="rId5"/>
+                <a:hlinkClick r:id="rId6"/>
               </a:rPr>
               <a:t>https://github.blog/changelog/2026-09-03-github-actions-early-september-2026-updates</a:t>
             </a:r>
@@ -14504,6 +15405,7 @@
           <a:lstStyle/>
           <a:p>
             <a:pPr algn="ctr"/>
+            <a:endParaRPr/>
           </a:p>
         </p:txBody>
       </p:sp>
@@ -14524,7 +15426,7 @@
           <a:noFill/>
         </p:spPr>
         <p:txBody>
-          <a:bodyPr wrap="square" lIns="36576" rIns="36576" tIns="36576" bIns="36576" anchor="t">
+          <a:bodyPr wrap="square" lIns="36576" tIns="36576" rIns="36576" bIns="36576" anchor="t">
             <a:spAutoFit/>
           </a:bodyPr>
           <a:lstStyle/>
@@ -14559,7 +15461,7 @@
           <a:noFill/>
         </p:spPr>
         <p:txBody>
-          <a:bodyPr wrap="square" lIns="36576" rIns="36576" tIns="36576" bIns="36576" anchor="t">
+          <a:bodyPr wrap="square" lIns="36576" tIns="36576" rIns="36576" bIns="36576" anchor="t">
             <a:spAutoFit/>
           </a:bodyPr>
           <a:lstStyle/>
@@ -14571,7 +15473,7 @@
                   <a:srgbClr val="58A6FF"/>
                 </a:solidFill>
                 <a:latin typeface="Cascadia Mono"/>
-                <a:hlinkClick r:id="rId5"/>
+                <a:hlinkClick r:id="rId6"/>
               </a:rPr>
               <a:t>https://github.blog/changelog/2026-09-03-github-actions-early-september-2026-updates</a:t>
             </a:r>
@@ -14595,7 +15497,7 @@
           <a:noFill/>
         </p:spPr>
         <p:txBody>
-          <a:bodyPr wrap="square" lIns="36576" rIns="36576" tIns="36576" bIns="36576" anchor="t">
+          <a:bodyPr wrap="square" lIns="36576" tIns="36576" rIns="36576" bIns="36576" anchor="t">
             <a:spAutoFit/>
           </a:bodyPr>
           <a:lstStyle/>
@@ -14630,7 +15532,7 @@
           <a:noFill/>
         </p:spPr>
         <p:txBody>
-          <a:bodyPr wrap="square" lIns="36576" rIns="36576" tIns="36576" bIns="36576" anchor="t">
+          <a:bodyPr wrap="square" lIns="36576" tIns="36576" rIns="36576" bIns="36576" anchor="t">
             <a:spAutoFit/>
           </a:bodyPr>
           <a:lstStyle/>
@@ -14657,7 +15559,7 @@
 </file>
 
 <file path=ppt/slides/slide2.xml><?xml version="1.0" encoding="utf-8"?>
-<p:sld xmlns:a="http://schemas.openxmlformats.org/drawingml/2006/main" xmlns:p="http://schemas.openxmlformats.org/presentationml/2006/main" xmlns:r="http://schemas.openxmlformats.org/officeDocument/2006/relationships">
+<p:sld xmlns:a="http://schemas.openxmlformats.org/drawingml/2006/main" xmlns:r="http://schemas.openxmlformats.org/officeDocument/2006/relationships" xmlns:p="http://schemas.openxmlformats.org/presentationml/2006/main">
   <p:cSld>
     <p:bg>
       <p:bgPr>
@@ -14673,7 +15575,14 @@
         <p:cNvGrpSpPr/>
         <p:nvPr/>
       </p:nvGrpSpPr>
-      <p:grpSpPr/>
+      <p:grpSpPr>
+        <a:xfrm>
+          <a:off x="0" y="0"/>
+          <a:ext cx="0" cy="0"/>
+          <a:chOff x="0" y="0"/>
+          <a:chExt cx="0" cy="0"/>
+        </a:xfrm>
+      </p:grpSpPr>
       <p:sp>
         <p:nvSpPr>
           <p:cNvPr id="2" name="TextBox 1"/>
@@ -14691,7 +15600,7 @@
           <a:noFill/>
         </p:spPr>
         <p:txBody>
-          <a:bodyPr wrap="square" lIns="36576" rIns="36576" tIns="36576" bIns="36576" anchor="t">
+          <a:bodyPr wrap="square" lIns="36576" tIns="36576" rIns="36576" bIns="36576" anchor="t">
             <a:spAutoFit/>
           </a:bodyPr>
           <a:lstStyle/>
@@ -14726,7 +15635,7 @@
           <a:noFill/>
         </p:spPr>
         <p:txBody>
-          <a:bodyPr wrap="square" lIns="36576" rIns="36576" tIns="36576" bIns="36576" anchor="t">
+          <a:bodyPr wrap="square" lIns="36576" tIns="36576" rIns="36576" bIns="36576" anchor="t">
             <a:spAutoFit/>
           </a:bodyPr>
           <a:lstStyle/>
@@ -14786,6 +15695,7 @@
           <a:lstStyle/>
           <a:p>
             <a:pPr algn="ctr"/>
+            <a:endParaRPr/>
           </a:p>
         </p:txBody>
       </p:sp>
@@ -14806,7 +15716,7 @@
           <a:noFill/>
         </p:spPr>
         <p:txBody>
-          <a:bodyPr wrap="square" lIns="36576" rIns="36576" tIns="36576" bIns="36576" anchor="t">
+          <a:bodyPr wrap="square" lIns="36576" tIns="36576" rIns="36576" bIns="36576" anchor="t">
             <a:spAutoFit/>
           </a:bodyPr>
           <a:lstStyle/>
@@ -14866,6 +15776,7 @@
           <a:lstStyle/>
           <a:p>
             <a:pPr algn="ctr"/>
+            <a:endParaRPr/>
           </a:p>
         </p:txBody>
       </p:sp>
@@ -14911,6 +15822,7 @@
           <a:lstStyle/>
           <a:p>
             <a:pPr algn="ctr"/>
+            <a:endParaRPr/>
           </a:p>
         </p:txBody>
       </p:sp>
@@ -14931,7 +15843,7 @@
           <a:noFill/>
         </p:spPr>
         <p:txBody>
-          <a:bodyPr wrap="square" lIns="36576" rIns="36576" tIns="36576" bIns="36576" anchor="t">
+          <a:bodyPr wrap="square" lIns="36576" tIns="36576" rIns="36576" bIns="36576" anchor="t">
             <a:spAutoFit/>
           </a:bodyPr>
           <a:lstStyle/>
@@ -14966,7 +15878,7 @@
           <a:noFill/>
         </p:spPr>
         <p:txBody>
-          <a:bodyPr wrap="square" lIns="36576" rIns="36576" tIns="36576" bIns="36576" anchor="t">
+          <a:bodyPr wrap="square" lIns="36576" tIns="36576" rIns="36576" bIns="36576" anchor="t">
             <a:spAutoFit/>
           </a:bodyPr>
           <a:lstStyle/>
@@ -14993,15 +15905,15 @@
         <p:spPr>
           <a:xfrm>
             <a:off x="987552" y="3081528"/>
-            <a:ext cx="2916936" cy="-9144"/>
-          </a:xfrm>
-          <a:prstGeom prst="rect">
-            <a:avLst/>
-          </a:prstGeom>
-          <a:noFill/>
-        </p:spPr>
-        <p:txBody>
-          <a:bodyPr wrap="square" lIns="18288" rIns="18288" tIns="18288" bIns="18288" anchor="t">
+            <a:ext cx="2916936" cy="0"/>
+          </a:xfrm>
+          <a:prstGeom prst="rect">
+            <a:avLst/>
+          </a:prstGeom>
+          <a:noFill/>
+        </p:spPr>
+        <p:txBody>
+          <a:bodyPr wrap="square" lIns="18288" tIns="18288" rIns="18288" bIns="18288" anchor="t">
             <a:spAutoFit/>
           </a:bodyPr>
           <a:lstStyle/>
@@ -15061,6 +15973,7 @@
           <a:lstStyle/>
           <a:p>
             <a:pPr algn="ctr"/>
+            <a:endParaRPr/>
           </a:p>
         </p:txBody>
       </p:sp>
@@ -15106,6 +16019,7 @@
           <a:lstStyle/>
           <a:p>
             <a:pPr algn="ctr"/>
+            <a:endParaRPr/>
           </a:p>
         </p:txBody>
       </p:sp>
@@ -15126,7 +16040,7 @@
           <a:noFill/>
         </p:spPr>
         <p:txBody>
-          <a:bodyPr wrap="square" lIns="36576" rIns="36576" tIns="36576" bIns="36576" anchor="t">
+          <a:bodyPr wrap="square" lIns="36576" tIns="36576" rIns="36576" bIns="36576" anchor="t">
             <a:spAutoFit/>
           </a:bodyPr>
           <a:lstStyle/>
@@ -15161,7 +16075,7 @@
           <a:noFill/>
         </p:spPr>
         <p:txBody>
-          <a:bodyPr wrap="square" lIns="36576" rIns="36576" tIns="36576" bIns="36576" anchor="t">
+          <a:bodyPr wrap="square" lIns="36576" tIns="36576" rIns="36576" bIns="36576" anchor="t">
             <a:spAutoFit/>
           </a:bodyPr>
           <a:lstStyle/>
@@ -15188,15 +16102,15 @@
         <p:spPr>
           <a:xfrm>
             <a:off x="4782312" y="3081528"/>
-            <a:ext cx="2916936" cy="-9144"/>
-          </a:xfrm>
-          <a:prstGeom prst="rect">
-            <a:avLst/>
-          </a:prstGeom>
-          <a:noFill/>
-        </p:spPr>
-        <p:txBody>
-          <a:bodyPr wrap="square" lIns="18288" rIns="18288" tIns="18288" bIns="18288" anchor="t">
+            <a:ext cx="2916936" cy="0"/>
+          </a:xfrm>
+          <a:prstGeom prst="rect">
+            <a:avLst/>
+          </a:prstGeom>
+          <a:noFill/>
+        </p:spPr>
+        <p:txBody>
+          <a:bodyPr wrap="square" lIns="18288" tIns="18288" rIns="18288" bIns="18288" anchor="t">
             <a:spAutoFit/>
           </a:bodyPr>
           <a:lstStyle/>
@@ -15256,6 +16170,7 @@
           <a:lstStyle/>
           <a:p>
             <a:pPr algn="ctr"/>
+            <a:endParaRPr/>
           </a:p>
         </p:txBody>
       </p:sp>
@@ -15301,6 +16216,7 @@
           <a:lstStyle/>
           <a:p>
             <a:pPr algn="ctr"/>
+            <a:endParaRPr/>
           </a:p>
         </p:txBody>
       </p:sp>
@@ -15321,7 +16237,7 @@
           <a:noFill/>
         </p:spPr>
         <p:txBody>
-          <a:bodyPr wrap="square" lIns="36576" rIns="36576" tIns="36576" bIns="36576" anchor="t">
+          <a:bodyPr wrap="square" lIns="36576" tIns="36576" rIns="36576" bIns="36576" anchor="t">
             <a:spAutoFit/>
           </a:bodyPr>
           <a:lstStyle/>
@@ -15356,7 +16272,7 @@
           <a:noFill/>
         </p:spPr>
         <p:txBody>
-          <a:bodyPr wrap="square" lIns="36576" rIns="36576" tIns="36576" bIns="36576" anchor="t">
+          <a:bodyPr wrap="square" lIns="36576" tIns="36576" rIns="36576" bIns="36576" anchor="t">
             <a:spAutoFit/>
           </a:bodyPr>
           <a:lstStyle/>
@@ -15383,15 +16299,15 @@
         <p:spPr>
           <a:xfrm>
             <a:off x="8577072" y="3081528"/>
-            <a:ext cx="2916936" cy="-9144"/>
-          </a:xfrm>
-          <a:prstGeom prst="rect">
-            <a:avLst/>
-          </a:prstGeom>
-          <a:noFill/>
-        </p:spPr>
-        <p:txBody>
-          <a:bodyPr wrap="square" lIns="18288" rIns="18288" tIns="18288" bIns="18288" anchor="t">
+            <a:ext cx="2916936" cy="0"/>
+          </a:xfrm>
+          <a:prstGeom prst="rect">
+            <a:avLst/>
+          </a:prstGeom>
+          <a:noFill/>
+        </p:spPr>
+        <p:txBody>
+          <a:bodyPr wrap="square" lIns="18288" tIns="18288" rIns="18288" bIns="18288" anchor="t">
             <a:spAutoFit/>
           </a:bodyPr>
           <a:lstStyle/>
@@ -15451,6 +16367,7 @@
           <a:lstStyle/>
           <a:p>
             <a:pPr algn="ctr"/>
+            <a:endParaRPr/>
           </a:p>
         </p:txBody>
       </p:sp>
@@ -15496,6 +16413,7 @@
           <a:lstStyle/>
           <a:p>
             <a:pPr algn="ctr"/>
+            <a:endParaRPr/>
           </a:p>
         </p:txBody>
       </p:sp>
@@ -15516,7 +16434,7 @@
           <a:noFill/>
         </p:spPr>
         <p:txBody>
-          <a:bodyPr wrap="square" lIns="36576" rIns="36576" tIns="36576" bIns="36576" anchor="t">
+          <a:bodyPr wrap="square" lIns="36576" tIns="36576" rIns="36576" bIns="36576" anchor="t">
             <a:spAutoFit/>
           </a:bodyPr>
           <a:lstStyle/>
@@ -15551,7 +16469,7 @@
           <a:noFill/>
         </p:spPr>
         <p:txBody>
-          <a:bodyPr wrap="square" lIns="36576" rIns="36576" tIns="36576" bIns="36576" anchor="t">
+          <a:bodyPr wrap="square" lIns="36576" tIns="36576" rIns="36576" bIns="36576" anchor="t">
             <a:spAutoFit/>
           </a:bodyPr>
           <a:lstStyle/>
@@ -15578,15 +16496,15 @@
         <p:spPr>
           <a:xfrm>
             <a:off x="987552" y="5047488"/>
-            <a:ext cx="2916936" cy="-9144"/>
-          </a:xfrm>
-          <a:prstGeom prst="rect">
-            <a:avLst/>
-          </a:prstGeom>
-          <a:noFill/>
-        </p:spPr>
-        <p:txBody>
-          <a:bodyPr wrap="square" lIns="18288" rIns="18288" tIns="18288" bIns="18288" anchor="t">
+            <a:ext cx="2916936" cy="0"/>
+          </a:xfrm>
+          <a:prstGeom prst="rect">
+            <a:avLst/>
+          </a:prstGeom>
+          <a:noFill/>
+        </p:spPr>
+        <p:txBody>
+          <a:bodyPr wrap="square" lIns="18288" tIns="18288" rIns="18288" bIns="18288" anchor="t">
             <a:spAutoFit/>
           </a:bodyPr>
           <a:lstStyle/>
@@ -15646,6 +16564,7 @@
           <a:lstStyle/>
           <a:p>
             <a:pPr algn="ctr"/>
+            <a:endParaRPr/>
           </a:p>
         </p:txBody>
       </p:sp>
@@ -15691,6 +16610,7 @@
           <a:lstStyle/>
           <a:p>
             <a:pPr algn="ctr"/>
+            <a:endParaRPr/>
           </a:p>
         </p:txBody>
       </p:sp>
@@ -15711,7 +16631,7 @@
           <a:noFill/>
         </p:spPr>
         <p:txBody>
-          <a:bodyPr wrap="square" lIns="36576" rIns="36576" tIns="36576" bIns="36576" anchor="t">
+          <a:bodyPr wrap="square" lIns="36576" tIns="36576" rIns="36576" bIns="36576" anchor="t">
             <a:spAutoFit/>
           </a:bodyPr>
           <a:lstStyle/>
@@ -15746,7 +16666,7 @@
           <a:noFill/>
         </p:spPr>
         <p:txBody>
-          <a:bodyPr wrap="square" lIns="36576" rIns="36576" tIns="36576" bIns="36576" anchor="t">
+          <a:bodyPr wrap="square" lIns="36576" tIns="36576" rIns="36576" bIns="36576" anchor="t">
             <a:spAutoFit/>
           </a:bodyPr>
           <a:lstStyle/>
@@ -15773,15 +16693,15 @@
         <p:spPr>
           <a:xfrm>
             <a:off x="4782312" y="5047488"/>
-            <a:ext cx="2916936" cy="-9144"/>
-          </a:xfrm>
-          <a:prstGeom prst="rect">
-            <a:avLst/>
-          </a:prstGeom>
-          <a:noFill/>
-        </p:spPr>
-        <p:txBody>
-          <a:bodyPr wrap="square" lIns="18288" rIns="18288" tIns="18288" bIns="18288" anchor="t">
+            <a:ext cx="2916936" cy="0"/>
+          </a:xfrm>
+          <a:prstGeom prst="rect">
+            <a:avLst/>
+          </a:prstGeom>
+          <a:noFill/>
+        </p:spPr>
+        <p:txBody>
+          <a:bodyPr wrap="square" lIns="18288" tIns="18288" rIns="18288" bIns="18288" anchor="t">
             <a:spAutoFit/>
           </a:bodyPr>
           <a:lstStyle/>
@@ -15841,6 +16761,7 @@
           <a:lstStyle/>
           <a:p>
             <a:pPr algn="ctr"/>
+            <a:endParaRPr/>
           </a:p>
         </p:txBody>
       </p:sp>
@@ -15886,6 +16807,7 @@
           <a:lstStyle/>
           <a:p>
             <a:pPr algn="ctr"/>
+            <a:endParaRPr/>
           </a:p>
         </p:txBody>
       </p:sp>
@@ -15906,7 +16828,7 @@
           <a:noFill/>
         </p:spPr>
         <p:txBody>
-          <a:bodyPr wrap="square" lIns="36576" rIns="36576" tIns="36576" bIns="36576" anchor="t">
+          <a:bodyPr wrap="square" lIns="36576" tIns="36576" rIns="36576" bIns="36576" anchor="t">
             <a:spAutoFit/>
           </a:bodyPr>
           <a:lstStyle/>
@@ -15941,7 +16863,7 @@
           <a:noFill/>
         </p:spPr>
         <p:txBody>
-          <a:bodyPr wrap="square" lIns="36576" rIns="36576" tIns="36576" bIns="36576" anchor="t">
+          <a:bodyPr wrap="square" lIns="36576" tIns="36576" rIns="36576" bIns="36576" anchor="t">
             <a:spAutoFit/>
           </a:bodyPr>
           <a:lstStyle/>
@@ -15968,15 +16890,15 @@
         <p:spPr>
           <a:xfrm>
             <a:off x="8577072" y="5047488"/>
-            <a:ext cx="2916936" cy="-9144"/>
-          </a:xfrm>
-          <a:prstGeom prst="rect">
-            <a:avLst/>
-          </a:prstGeom>
-          <a:noFill/>
-        </p:spPr>
-        <p:txBody>
-          <a:bodyPr wrap="square" lIns="18288" rIns="18288" tIns="18288" bIns="18288" anchor="t">
+            <a:ext cx="2916936" cy="0"/>
+          </a:xfrm>
+          <a:prstGeom prst="rect">
+            <a:avLst/>
+          </a:prstGeom>
+          <a:noFill/>
+        </p:spPr>
+        <p:txBody>
+          <a:bodyPr wrap="square" lIns="18288" tIns="18288" rIns="18288" bIns="18288" anchor="t">
             <a:spAutoFit/>
           </a:bodyPr>
           <a:lstStyle/>
@@ -16011,7 +16933,7 @@
           <a:noFill/>
         </p:spPr>
         <p:txBody>
-          <a:bodyPr wrap="square" lIns="36576" rIns="36576" tIns="36576" bIns="36576" anchor="t">
+          <a:bodyPr wrap="square" lIns="36576" tIns="36576" rIns="36576" bIns="36576" anchor="t">
             <a:spAutoFit/>
           </a:bodyPr>
           <a:lstStyle/>
@@ -16038,7 +16960,7 @@
 </file>
 
 <file path=ppt/slides/slide3.xml><?xml version="1.0" encoding="utf-8"?>
-<p:sld xmlns:a="http://schemas.openxmlformats.org/drawingml/2006/main" xmlns:p="http://schemas.openxmlformats.org/presentationml/2006/main" xmlns:r="http://schemas.openxmlformats.org/officeDocument/2006/relationships">
+<p:sld xmlns:a="http://schemas.openxmlformats.org/drawingml/2006/main" xmlns:r="http://schemas.openxmlformats.org/officeDocument/2006/relationships" xmlns:p="http://schemas.openxmlformats.org/presentationml/2006/main">
   <p:cSld>
     <p:bg>
       <p:bgPr>
@@ -16054,7 +16976,14 @@
         <p:cNvGrpSpPr/>
         <p:nvPr/>
       </p:nvGrpSpPr>
-      <p:grpSpPr/>
+      <p:grpSpPr>
+        <a:xfrm>
+          <a:off x="0" y="0"/>
+          <a:ext cx="0" cy="0"/>
+          <a:chOff x="0" y="0"/>
+          <a:chExt cx="0" cy="0"/>
+        </a:xfrm>
+      </p:grpSpPr>
       <p:sp>
         <p:nvSpPr>
           <p:cNvPr id="2" name="TextBox 1"/>
@@ -16072,7 +17001,7 @@
           <a:noFill/>
         </p:spPr>
         <p:txBody>
-          <a:bodyPr wrap="square" lIns="36576" rIns="36576" tIns="36576" bIns="36576" anchor="t">
+          <a:bodyPr wrap="square" lIns="36576" tIns="36576" rIns="36576" bIns="36576" anchor="t">
             <a:spAutoFit/>
           </a:bodyPr>
           <a:lstStyle/>
@@ -16107,7 +17036,7 @@
           <a:noFill/>
         </p:spPr>
         <p:txBody>
-          <a:bodyPr wrap="square" lIns="36576" rIns="36576" tIns="36576" bIns="36576" anchor="t">
+          <a:bodyPr wrap="square" lIns="36576" tIns="36576" rIns="36576" bIns="36576" anchor="t">
             <a:spAutoFit/>
           </a:bodyPr>
           <a:lstStyle/>
@@ -16167,6 +17096,7 @@
           <a:lstStyle/>
           <a:p>
             <a:pPr algn="ctr"/>
+            <a:endParaRPr/>
           </a:p>
         </p:txBody>
       </p:sp>
@@ -16187,7 +17117,7 @@
           <a:noFill/>
         </p:spPr>
         <p:txBody>
-          <a:bodyPr wrap="square" lIns="36576" rIns="36576" tIns="36576" bIns="36576" anchor="t">
+          <a:bodyPr wrap="square" lIns="36576" tIns="36576" rIns="36576" bIns="36576" anchor="t">
             <a:spAutoFit/>
           </a:bodyPr>
           <a:lstStyle/>
@@ -16247,6 +17177,7 @@
           <a:lstStyle/>
           <a:p>
             <a:pPr algn="ctr"/>
+            <a:endParaRPr/>
           </a:p>
         </p:txBody>
       </p:sp>
@@ -16292,6 +17223,7 @@
           <a:lstStyle/>
           <a:p>
             <a:pPr algn="ctr"/>
+            <a:endParaRPr/>
           </a:p>
         </p:txBody>
       </p:sp>
@@ -16312,7 +17244,7 @@
           <a:noFill/>
         </p:spPr>
         <p:txBody>
-          <a:bodyPr wrap="square" lIns="36576" rIns="36576" tIns="36576" bIns="36576" anchor="t">
+          <a:bodyPr wrap="square" lIns="36576" tIns="36576" rIns="36576" bIns="36576" anchor="t">
             <a:spAutoFit/>
           </a:bodyPr>
           <a:lstStyle/>
@@ -16347,7 +17279,7 @@
           <a:noFill/>
         </p:spPr>
         <p:txBody>
-          <a:bodyPr wrap="square" lIns="36576" rIns="36576" tIns="36576" bIns="36576" anchor="t">
+          <a:bodyPr wrap="square" lIns="36576" tIns="36576" rIns="36576" bIns="36576" anchor="t">
             <a:spAutoFit/>
           </a:bodyPr>
           <a:lstStyle/>
@@ -16382,7 +17314,7 @@
           <a:noFill/>
         </p:spPr>
         <p:txBody>
-          <a:bodyPr wrap="square" lIns="18288" rIns="18288" tIns="18288" bIns="18288" anchor="t">
+          <a:bodyPr wrap="square" lIns="18288" tIns="18288" rIns="18288" bIns="18288" anchor="t">
             <a:spAutoFit/>
           </a:bodyPr>
           <a:lstStyle/>
@@ -16442,6 +17374,7 @@
           <a:lstStyle/>
           <a:p>
             <a:pPr algn="ctr"/>
+            <a:endParaRPr/>
           </a:p>
         </p:txBody>
       </p:sp>
@@ -16487,6 +17420,7 @@
           <a:lstStyle/>
           <a:p>
             <a:pPr algn="ctr"/>
+            <a:endParaRPr/>
           </a:p>
         </p:txBody>
       </p:sp>
@@ -16507,7 +17441,7 @@
           <a:noFill/>
         </p:spPr>
         <p:txBody>
-          <a:bodyPr wrap="square" lIns="36576" rIns="36576" tIns="36576" bIns="36576" anchor="t">
+          <a:bodyPr wrap="square" lIns="36576" tIns="36576" rIns="36576" bIns="36576" anchor="t">
             <a:spAutoFit/>
           </a:bodyPr>
           <a:lstStyle/>
@@ -16542,7 +17476,7 @@
           <a:noFill/>
         </p:spPr>
         <p:txBody>
-          <a:bodyPr wrap="square" lIns="36576" rIns="36576" tIns="36576" bIns="36576" anchor="t">
+          <a:bodyPr wrap="square" lIns="36576" tIns="36576" rIns="36576" bIns="36576" anchor="t">
             <a:spAutoFit/>
           </a:bodyPr>
           <a:lstStyle/>
@@ -16577,7 +17511,7 @@
           <a:noFill/>
         </p:spPr>
         <p:txBody>
-          <a:bodyPr wrap="square" lIns="18288" rIns="18288" tIns="18288" bIns="18288" anchor="t">
+          <a:bodyPr wrap="square" lIns="18288" tIns="18288" rIns="18288" bIns="18288" anchor="t">
             <a:spAutoFit/>
           </a:bodyPr>
           <a:lstStyle/>
@@ -16637,6 +17571,7 @@
           <a:lstStyle/>
           <a:p>
             <a:pPr algn="ctr"/>
+            <a:endParaRPr/>
           </a:p>
         </p:txBody>
       </p:sp>
@@ -16682,6 +17617,7 @@
           <a:lstStyle/>
           <a:p>
             <a:pPr algn="ctr"/>
+            <a:endParaRPr/>
           </a:p>
         </p:txBody>
       </p:sp>
@@ -16702,7 +17638,7 @@
           <a:noFill/>
         </p:spPr>
         <p:txBody>
-          <a:bodyPr wrap="square" lIns="36576" rIns="36576" tIns="36576" bIns="36576" anchor="t">
+          <a:bodyPr wrap="square" lIns="36576" tIns="36576" rIns="36576" bIns="36576" anchor="t">
             <a:spAutoFit/>
           </a:bodyPr>
           <a:lstStyle/>
@@ -16737,7 +17673,7 @@
           <a:noFill/>
         </p:spPr>
         <p:txBody>
-          <a:bodyPr wrap="square" lIns="36576" rIns="36576" tIns="36576" bIns="36576" anchor="t">
+          <a:bodyPr wrap="square" lIns="36576" tIns="36576" rIns="36576" bIns="36576" anchor="t">
             <a:spAutoFit/>
           </a:bodyPr>
           <a:lstStyle/>
@@ -16772,7 +17708,7 @@
           <a:noFill/>
         </p:spPr>
         <p:txBody>
-          <a:bodyPr wrap="square" lIns="18288" rIns="18288" tIns="18288" bIns="18288" anchor="t">
+          <a:bodyPr wrap="square" lIns="18288" tIns="18288" rIns="18288" bIns="18288" anchor="t">
             <a:spAutoFit/>
           </a:bodyPr>
           <a:lstStyle/>
@@ -16807,7 +17743,7 @@
           <a:noFill/>
         </p:spPr>
         <p:txBody>
-          <a:bodyPr wrap="square" lIns="36576" rIns="36576" tIns="36576" bIns="36576" anchor="t">
+          <a:bodyPr wrap="square" lIns="36576" tIns="36576" rIns="36576" bIns="36576" anchor="t">
             <a:spAutoFit/>
           </a:bodyPr>
           <a:lstStyle/>
@@ -16842,7 +17778,7 @@
           <a:noFill/>
         </p:spPr>
         <p:txBody>
-          <a:bodyPr wrap="square" lIns="36576" rIns="36576" tIns="36576" bIns="36576" anchor="t">
+          <a:bodyPr wrap="square" lIns="36576" tIns="36576" rIns="36576" bIns="36576" anchor="t">
             <a:spAutoFit/>
           </a:bodyPr>
           <a:lstStyle/>
@@ -16869,7 +17805,7 @@
 </file>
 
 <file path=ppt/slides/slide4.xml><?xml version="1.0" encoding="utf-8"?>
-<p:sld xmlns:a="http://schemas.openxmlformats.org/drawingml/2006/main" xmlns:p="http://schemas.openxmlformats.org/presentationml/2006/main" xmlns:r="http://schemas.openxmlformats.org/officeDocument/2006/relationships">
+<p:sld xmlns:a="http://schemas.openxmlformats.org/drawingml/2006/main" xmlns:r="http://schemas.openxmlformats.org/officeDocument/2006/relationships" xmlns:p="http://schemas.openxmlformats.org/presentationml/2006/main">
   <p:cSld>
     <p:bg>
       <p:bgPr>
@@ -16885,7 +17821,14 @@
         <p:cNvGrpSpPr/>
         <p:nvPr/>
       </p:nvGrpSpPr>
-      <p:grpSpPr/>
+      <p:grpSpPr>
+        <a:xfrm>
+          <a:off x="0" y="0"/>
+          <a:ext cx="0" cy="0"/>
+          <a:chOff x="0" y="0"/>
+          <a:chExt cx="0" cy="0"/>
+        </a:xfrm>
+      </p:grpSpPr>
       <p:sp>
         <p:nvSpPr>
           <p:cNvPr id="2" name="TextBox 1"/>
@@ -16903,7 +17846,7 @@
           <a:noFill/>
         </p:spPr>
         <p:txBody>
-          <a:bodyPr wrap="square" lIns="36576" rIns="36576" tIns="36576" bIns="36576" anchor="t">
+          <a:bodyPr wrap="square" lIns="36576" tIns="36576" rIns="36576" bIns="36576" anchor="t">
             <a:spAutoFit/>
           </a:bodyPr>
           <a:lstStyle/>
@@ -16938,7 +17881,7 @@
           <a:noFill/>
         </p:spPr>
         <p:txBody>
-          <a:bodyPr wrap="square" lIns="36576" rIns="36576" tIns="36576" bIns="36576" anchor="t">
+          <a:bodyPr wrap="square" lIns="36576" tIns="36576" rIns="36576" bIns="36576" anchor="t">
             <a:spAutoFit/>
           </a:bodyPr>
           <a:lstStyle/>
@@ -16998,6 +17941,7 @@
           <a:lstStyle/>
           <a:p>
             <a:pPr algn="ctr"/>
+            <a:endParaRPr/>
           </a:p>
         </p:txBody>
       </p:sp>
@@ -17018,7 +17962,7 @@
           <a:noFill/>
         </p:spPr>
         <p:txBody>
-          <a:bodyPr wrap="square" lIns="36576" rIns="36576" tIns="36576" bIns="36576" anchor="t">
+          <a:bodyPr wrap="square" lIns="36576" tIns="36576" rIns="36576" bIns="36576" anchor="t">
             <a:spAutoFit/>
           </a:bodyPr>
           <a:lstStyle/>
@@ -17078,6 +18022,7 @@
           <a:lstStyle/>
           <a:p>
             <a:pPr algn="ctr"/>
+            <a:endParaRPr/>
           </a:p>
         </p:txBody>
       </p:sp>
@@ -17098,7 +18043,7 @@
           <a:noFill/>
         </p:spPr>
         <p:txBody>
-          <a:bodyPr wrap="square" lIns="36576" rIns="36576" tIns="36576" bIns="36576" anchor="t">
+          <a:bodyPr wrap="square" lIns="36576" tIns="36576" rIns="36576" bIns="36576" anchor="t">
             <a:spAutoFit/>
           </a:bodyPr>
           <a:lstStyle/>
@@ -17158,6 +18103,7 @@
           <a:lstStyle/>
           <a:p>
             <a:pPr algn="ctr"/>
+            <a:endParaRPr/>
           </a:p>
         </p:txBody>
       </p:sp>
@@ -17178,7 +18124,7 @@
           <a:noFill/>
         </p:spPr>
         <p:txBody>
-          <a:bodyPr wrap="square" lIns="36576" rIns="36576" tIns="36576" bIns="36576" anchor="t">
+          <a:bodyPr wrap="square" lIns="36576" tIns="36576" rIns="36576" bIns="36576" anchor="t">
             <a:spAutoFit/>
           </a:bodyPr>
           <a:lstStyle/>
@@ -17213,7 +18159,7 @@
           <a:noFill/>
         </p:spPr>
         <p:txBody>
-          <a:bodyPr wrap="square" lIns="36576" rIns="36576" tIns="36576" bIns="36576" anchor="t">
+          <a:bodyPr wrap="square" lIns="36576" tIns="36576" rIns="36576" bIns="36576" anchor="t">
             <a:spAutoFit/>
           </a:bodyPr>
           <a:lstStyle/>
@@ -17273,6 +18219,7 @@
           <a:lstStyle/>
           <a:p>
             <a:pPr algn="ctr"/>
+            <a:endParaRPr/>
           </a:p>
         </p:txBody>
       </p:sp>
@@ -17293,7 +18240,7 @@
           <a:noFill/>
         </p:spPr>
         <p:txBody>
-          <a:bodyPr wrap="square" lIns="36576" rIns="36576" tIns="36576" bIns="36576" anchor="t">
+          <a:bodyPr wrap="square" lIns="36576" tIns="36576" rIns="36576" bIns="36576" anchor="t">
             <a:spAutoFit/>
           </a:bodyPr>
           <a:lstStyle/>
@@ -17353,6 +18300,7 @@
           <a:lstStyle/>
           <a:p>
             <a:pPr algn="ctr"/>
+            <a:endParaRPr/>
           </a:p>
         </p:txBody>
       </p:sp>
@@ -17373,7 +18321,7 @@
           <a:noFill/>
         </p:spPr>
         <p:txBody>
-          <a:bodyPr wrap="square" lIns="36576" rIns="36576" tIns="36576" bIns="36576" anchor="t">
+          <a:bodyPr wrap="square" lIns="36576" tIns="36576" rIns="36576" bIns="36576" anchor="t">
             <a:spAutoFit/>
           </a:bodyPr>
           <a:lstStyle/>
@@ -17408,7 +18356,7 @@
           <a:noFill/>
         </p:spPr>
         <p:txBody>
-          <a:bodyPr wrap="square" lIns="36576" rIns="36576" tIns="36576" bIns="36576" anchor="t">
+          <a:bodyPr wrap="square" lIns="36576" tIns="36576" rIns="36576" bIns="36576" anchor="t">
             <a:spAutoFit/>
           </a:bodyPr>
           <a:lstStyle/>
@@ -17468,6 +18416,7 @@
           <a:lstStyle/>
           <a:p>
             <a:pPr algn="ctr"/>
+            <a:endParaRPr/>
           </a:p>
         </p:txBody>
       </p:sp>
@@ -17488,7 +18437,7 @@
           <a:noFill/>
         </p:spPr>
         <p:txBody>
-          <a:bodyPr wrap="square" lIns="36576" rIns="36576" tIns="36576" bIns="36576" anchor="t">
+          <a:bodyPr wrap="square" lIns="36576" tIns="36576" rIns="36576" bIns="36576" anchor="t">
             <a:spAutoFit/>
           </a:bodyPr>
           <a:lstStyle/>
@@ -17548,6 +18497,7 @@
           <a:lstStyle/>
           <a:p>
             <a:pPr algn="ctr"/>
+            <a:endParaRPr/>
           </a:p>
         </p:txBody>
       </p:sp>
@@ -17568,7 +18518,7 @@
           <a:noFill/>
         </p:spPr>
         <p:txBody>
-          <a:bodyPr wrap="square" lIns="36576" rIns="36576" tIns="36576" bIns="36576" anchor="t">
+          <a:bodyPr wrap="square" lIns="36576" tIns="36576" rIns="36576" bIns="36576" anchor="t">
             <a:spAutoFit/>
           </a:bodyPr>
           <a:lstStyle/>
@@ -17603,7 +18553,7 @@
           <a:noFill/>
         </p:spPr>
         <p:txBody>
-          <a:bodyPr wrap="square" lIns="36576" rIns="36576" tIns="36576" bIns="36576" anchor="t">
+          <a:bodyPr wrap="square" lIns="36576" tIns="36576" rIns="36576" bIns="36576" anchor="t">
             <a:spAutoFit/>
           </a:bodyPr>
           <a:lstStyle/>
@@ -17638,7 +18588,7 @@
           <a:noFill/>
         </p:spPr>
         <p:txBody>
-          <a:bodyPr wrap="square" lIns="36576" rIns="36576" tIns="36576" bIns="36576" anchor="t">
+          <a:bodyPr wrap="square" lIns="36576" tIns="36576" rIns="36576" bIns="36576" anchor="t">
             <a:spAutoFit/>
           </a:bodyPr>
           <a:lstStyle/>
@@ -17665,7 +18615,7 @@
 </file>
 
 <file path=ppt/slides/slide5.xml><?xml version="1.0" encoding="utf-8"?>
-<p:sld xmlns:a="http://schemas.openxmlformats.org/drawingml/2006/main" xmlns:p="http://schemas.openxmlformats.org/presentationml/2006/main" xmlns:r="http://schemas.openxmlformats.org/officeDocument/2006/relationships">
+<p:sld xmlns:a="http://schemas.openxmlformats.org/drawingml/2006/main" xmlns:r="http://schemas.openxmlformats.org/officeDocument/2006/relationships" xmlns:p="http://schemas.openxmlformats.org/presentationml/2006/main">
   <p:cSld>
     <p:bg>
       <p:bgPr>
@@ -17681,7 +18631,14 @@
         <p:cNvGrpSpPr/>
         <p:nvPr/>
       </p:nvGrpSpPr>
-      <p:grpSpPr/>
+      <p:grpSpPr>
+        <a:xfrm>
+          <a:off x="0" y="0"/>
+          <a:ext cx="0" cy="0"/>
+          <a:chOff x="0" y="0"/>
+          <a:chExt cx="0" cy="0"/>
+        </a:xfrm>
+      </p:grpSpPr>
       <p:sp>
         <p:nvSpPr>
           <p:cNvPr id="2" name="TextBox 1"/>
@@ -17699,7 +18656,7 @@
           <a:noFill/>
         </p:spPr>
         <p:txBody>
-          <a:bodyPr wrap="square" lIns="36576" rIns="36576" tIns="36576" bIns="36576" anchor="t">
+          <a:bodyPr wrap="square" lIns="36576" tIns="36576" rIns="36576" bIns="36576" anchor="t">
             <a:spAutoFit/>
           </a:bodyPr>
           <a:lstStyle/>
@@ -17734,7 +18691,7 @@
           <a:noFill/>
         </p:spPr>
         <p:txBody>
-          <a:bodyPr wrap="square" lIns="36576" rIns="36576" tIns="36576" bIns="36576" anchor="t">
+          <a:bodyPr wrap="square" lIns="36576" tIns="36576" rIns="36576" bIns="36576" anchor="t">
             <a:spAutoFit/>
           </a:bodyPr>
           <a:lstStyle/>
@@ -17794,6 +18751,7 @@
           <a:lstStyle/>
           <a:p>
             <a:pPr algn="ctr"/>
+            <a:endParaRPr/>
           </a:p>
         </p:txBody>
       </p:sp>
@@ -17814,7 +18772,7 @@
           <a:noFill/>
         </p:spPr>
         <p:txBody>
-          <a:bodyPr wrap="square" lIns="36576" rIns="36576" tIns="36576" bIns="36576" anchor="t">
+          <a:bodyPr wrap="square" lIns="36576" tIns="36576" rIns="36576" bIns="36576" anchor="t">
             <a:spAutoFit/>
           </a:bodyPr>
           <a:lstStyle/>
@@ -17874,6 +18832,7 @@
           <a:lstStyle/>
           <a:p>
             <a:pPr algn="ctr"/>
+            <a:endParaRPr/>
           </a:p>
         </p:txBody>
       </p:sp>
@@ -17894,7 +18853,7 @@
           <a:noFill/>
         </p:spPr>
         <p:txBody>
-          <a:bodyPr wrap="square" lIns="36576" rIns="36576" tIns="36576" bIns="36576" anchor="t">
+          <a:bodyPr wrap="square" lIns="36576" tIns="36576" rIns="36576" bIns="36576" anchor="t">
             <a:spAutoFit/>
           </a:bodyPr>
           <a:lstStyle/>
@@ -17954,6 +18913,7 @@
           <a:lstStyle/>
           <a:p>
             <a:pPr algn="ctr"/>
+            <a:endParaRPr/>
           </a:p>
         </p:txBody>
       </p:sp>
@@ -17974,7 +18934,7 @@
           <a:noFill/>
         </p:spPr>
         <p:txBody>
-          <a:bodyPr wrap="square" lIns="36576" rIns="36576" tIns="36576" bIns="36576" anchor="t">
+          <a:bodyPr wrap="square" lIns="36576" tIns="36576" rIns="36576" bIns="36576" anchor="t">
             <a:spAutoFit/>
           </a:bodyPr>
           <a:lstStyle/>
@@ -18126,6 +19086,7 @@
           <a:lstStyle/>
           <a:p>
             <a:pPr algn="ctr"/>
+            <a:endParaRPr/>
           </a:p>
         </p:txBody>
       </p:sp>
@@ -18190,7 +19151,7 @@
           <a:noFill/>
         </p:spPr>
         <p:txBody>
-          <a:bodyPr wrap="square" lIns="36576" rIns="36576" tIns="36576" bIns="36576" anchor="t">
+          <a:bodyPr wrap="square" lIns="36576" tIns="36576" rIns="36576" bIns="36576" anchor="t">
             <a:spAutoFit/>
           </a:bodyPr>
           <a:lstStyle/>
@@ -18217,7 +19178,7 @@
 </file>
 
 <file path=ppt/slides/slide6.xml><?xml version="1.0" encoding="utf-8"?>
-<p:sld xmlns:a="http://schemas.openxmlformats.org/drawingml/2006/main" xmlns:p="http://schemas.openxmlformats.org/presentationml/2006/main" xmlns:r="http://schemas.openxmlformats.org/officeDocument/2006/relationships">
+<p:sld xmlns:a="http://schemas.openxmlformats.org/drawingml/2006/main" xmlns:r="http://schemas.openxmlformats.org/officeDocument/2006/relationships" xmlns:p="http://schemas.openxmlformats.org/presentationml/2006/main">
   <p:cSld>
     <p:bg>
       <p:bgPr>
@@ -18233,7 +19194,14 @@
         <p:cNvGrpSpPr/>
         <p:nvPr/>
       </p:nvGrpSpPr>
-      <p:grpSpPr/>
+      <p:grpSpPr>
+        <a:xfrm>
+          <a:off x="0" y="0"/>
+          <a:ext cx="0" cy="0"/>
+          <a:chOff x="0" y="0"/>
+          <a:chExt cx="0" cy="0"/>
+        </a:xfrm>
+      </p:grpSpPr>
       <p:sp>
         <p:nvSpPr>
           <p:cNvPr id="2" name="TextBox 1"/>
@@ -18251,7 +19219,7 @@
           <a:noFill/>
         </p:spPr>
         <p:txBody>
-          <a:bodyPr wrap="square" lIns="36576" rIns="36576" tIns="36576" bIns="36576" anchor="t">
+          <a:bodyPr wrap="square" lIns="36576" tIns="36576" rIns="36576" bIns="36576" anchor="t">
             <a:spAutoFit/>
           </a:bodyPr>
           <a:lstStyle/>
@@ -18286,7 +19254,7 @@
           <a:noFill/>
         </p:spPr>
         <p:txBody>
-          <a:bodyPr wrap="square" lIns="36576" rIns="36576" tIns="36576" bIns="36576" anchor="t">
+          <a:bodyPr wrap="square" lIns="36576" tIns="36576" rIns="36576" bIns="36576" anchor="t">
             <a:spAutoFit/>
           </a:bodyPr>
           <a:lstStyle/>
@@ -18346,6 +19314,7 @@
           <a:lstStyle/>
           <a:p>
             <a:pPr algn="ctr"/>
+            <a:endParaRPr/>
           </a:p>
         </p:txBody>
       </p:sp>
@@ -18366,7 +19335,7 @@
           <a:noFill/>
         </p:spPr>
         <p:txBody>
-          <a:bodyPr wrap="square" lIns="36576" rIns="36576" tIns="36576" bIns="36576" anchor="t">
+          <a:bodyPr wrap="square" lIns="36576" tIns="36576" rIns="36576" bIns="36576" anchor="t">
             <a:spAutoFit/>
           </a:bodyPr>
           <a:lstStyle/>
@@ -18426,6 +19395,7 @@
           <a:lstStyle/>
           <a:p>
             <a:pPr algn="ctr"/>
+            <a:endParaRPr/>
           </a:p>
         </p:txBody>
       </p:sp>
@@ -18446,7 +19416,7 @@
           <a:noFill/>
         </p:spPr>
         <p:txBody>
-          <a:bodyPr wrap="square" lIns="36576" rIns="36576" tIns="36576" bIns="36576" anchor="t">
+          <a:bodyPr wrap="square" lIns="36576" tIns="36576" rIns="36576" bIns="36576" anchor="t">
             <a:spAutoFit/>
           </a:bodyPr>
           <a:lstStyle/>
@@ -18506,6 +19476,7 @@
           <a:lstStyle/>
           <a:p>
             <a:pPr algn="ctr"/>
+            <a:endParaRPr/>
           </a:p>
         </p:txBody>
       </p:sp>
@@ -18526,7 +19497,7 @@
           <a:noFill/>
         </p:spPr>
         <p:txBody>
-          <a:bodyPr wrap="square" lIns="36576" rIns="36576" tIns="36576" bIns="36576" anchor="t">
+          <a:bodyPr wrap="square" lIns="36576" tIns="36576" rIns="36576" bIns="36576" anchor="t">
             <a:spAutoFit/>
           </a:bodyPr>
           <a:lstStyle/>
@@ -18586,6 +19557,7 @@
           <a:lstStyle/>
           <a:p>
             <a:pPr algn="ctr"/>
+            <a:endParaRPr/>
           </a:p>
         </p:txBody>
       </p:sp>
@@ -18606,7 +19578,7 @@
           <a:noFill/>
         </p:spPr>
         <p:txBody>
-          <a:bodyPr wrap="square" lIns="36576" rIns="36576" tIns="36576" bIns="36576" anchor="t">
+          <a:bodyPr wrap="square" lIns="36576" tIns="36576" rIns="36576" bIns="36576" anchor="t">
             <a:spAutoFit/>
           </a:bodyPr>
           <a:lstStyle/>
@@ -18666,6 +19638,7 @@
           <a:lstStyle/>
           <a:p>
             <a:pPr algn="ctr"/>
+            <a:endParaRPr/>
           </a:p>
         </p:txBody>
       </p:sp>
@@ -18686,7 +19659,7 @@
           <a:noFill/>
         </p:spPr>
         <p:txBody>
-          <a:bodyPr wrap="square" lIns="36576" rIns="36576" tIns="36576" bIns="36576" anchor="t">
+          <a:bodyPr wrap="square" lIns="36576" tIns="36576" rIns="36576" bIns="36576" anchor="t">
             <a:spAutoFit/>
           </a:bodyPr>
           <a:lstStyle/>
@@ -18746,6 +19719,7 @@
           <a:lstStyle/>
           <a:p>
             <a:pPr algn="ctr"/>
+            <a:endParaRPr/>
           </a:p>
         </p:txBody>
       </p:sp>
@@ -18766,7 +19740,7 @@
           <a:noFill/>
         </p:spPr>
         <p:txBody>
-          <a:bodyPr wrap="square" lIns="36576" rIns="36576" tIns="36576" bIns="36576" anchor="t">
+          <a:bodyPr wrap="square" lIns="36576" tIns="36576" rIns="36576" bIns="36576" anchor="t">
             <a:spAutoFit/>
           </a:bodyPr>
           <a:lstStyle/>
@@ -18801,7 +19775,7 @@
           <a:noFill/>
         </p:spPr>
         <p:txBody>
-          <a:bodyPr wrap="square" lIns="36576" rIns="36576" tIns="36576" bIns="36576" anchor="t">
+          <a:bodyPr wrap="square" lIns="36576" tIns="36576" rIns="36576" bIns="36576" anchor="t">
             <a:spAutoFit/>
           </a:bodyPr>
           <a:lstStyle/>
@@ -18836,7 +19810,7 @@
           <a:noFill/>
         </p:spPr>
         <p:txBody>
-          <a:bodyPr wrap="square" lIns="36576" rIns="36576" tIns="36576" bIns="36576" anchor="t">
+          <a:bodyPr wrap="square" lIns="36576" tIns="36576" rIns="36576" bIns="36576" anchor="t">
             <a:spAutoFit/>
           </a:bodyPr>
           <a:lstStyle/>
@@ -18896,6 +19870,7 @@
           <a:lstStyle/>
           <a:p>
             <a:pPr algn="ctr"/>
+            <a:endParaRPr/>
           </a:p>
         </p:txBody>
       </p:sp>
@@ -18916,7 +19891,7 @@
           <a:noFill/>
         </p:spPr>
         <p:txBody>
-          <a:bodyPr wrap="square" lIns="36576" rIns="36576" tIns="36576" bIns="36576" anchor="t">
+          <a:bodyPr wrap="square" lIns="36576" tIns="36576" rIns="36576" bIns="36576" anchor="t">
             <a:spAutoFit/>
           </a:bodyPr>
           <a:lstStyle/>
@@ -18951,7 +19926,7 @@
           <a:noFill/>
         </p:spPr>
         <p:txBody>
-          <a:bodyPr wrap="square" lIns="36576" rIns="36576" tIns="36576" bIns="36576" anchor="t">
+          <a:bodyPr wrap="square" lIns="36576" tIns="36576" rIns="36576" bIns="36576" anchor="t">
             <a:spAutoFit/>
           </a:bodyPr>
           <a:lstStyle/>
@@ -18986,14 +19961,14 @@
           <a:noFill/>
         </p:spPr>
         <p:txBody>
-          <a:bodyPr wrap="square" lIns="36576" rIns="36576" tIns="36576" bIns="36576" anchor="t">
+          <a:bodyPr wrap="square" lIns="36576" tIns="36576" rIns="36576" bIns="36576" anchor="t">
             <a:spAutoFit/>
           </a:bodyPr>
           <a:lstStyle/>
           <a:p>
             <a:pPr algn="ctr"/>
             <a:r>
-              <a:rPr sz="1500" b="0">
+              <a:rPr sz="1500" b="0" dirty="0">
                 <a:solidFill>
                   <a:srgbClr val="8B949E"/>
                 </a:solidFill>
@@ -19021,7 +19996,7 @@
           <a:noFill/>
         </p:spPr>
         <p:txBody>
-          <a:bodyPr wrap="square" lIns="36576" rIns="36576" tIns="36576" bIns="36576" anchor="t">
+          <a:bodyPr wrap="square" lIns="36576" tIns="36576" rIns="36576" bIns="36576" anchor="t">
             <a:spAutoFit/>
           </a:bodyPr>
           <a:lstStyle/>
@@ -19048,7 +20023,7 @@
 </file>
 
 <file path=ppt/slides/slide7.xml><?xml version="1.0" encoding="utf-8"?>
-<p:sld xmlns:a="http://schemas.openxmlformats.org/drawingml/2006/main" xmlns:p="http://schemas.openxmlformats.org/presentationml/2006/main" xmlns:r="http://schemas.openxmlformats.org/officeDocument/2006/relationships">
+<p:sld xmlns:a="http://schemas.openxmlformats.org/drawingml/2006/main" xmlns:r="http://schemas.openxmlformats.org/officeDocument/2006/relationships" xmlns:p="http://schemas.openxmlformats.org/presentationml/2006/main">
   <p:cSld>
     <p:bg>
       <p:bgPr>
@@ -19064,7 +20039,14 @@
         <p:cNvGrpSpPr/>
         <p:nvPr/>
       </p:nvGrpSpPr>
-      <p:grpSpPr/>
+      <p:grpSpPr>
+        <a:xfrm>
+          <a:off x="0" y="0"/>
+          <a:ext cx="0" cy="0"/>
+          <a:chOff x="0" y="0"/>
+          <a:chExt cx="0" cy="0"/>
+        </a:xfrm>
+      </p:grpSpPr>
       <p:sp>
         <p:nvSpPr>
           <p:cNvPr id="2" name="TextBox 1"/>
@@ -19082,7 +20064,7 @@
           <a:noFill/>
         </p:spPr>
         <p:txBody>
-          <a:bodyPr wrap="square" lIns="36576" rIns="36576" tIns="36576" bIns="36576" anchor="t">
+          <a:bodyPr wrap="square" lIns="36576" tIns="36576" rIns="36576" bIns="36576" anchor="t">
             <a:spAutoFit/>
           </a:bodyPr>
           <a:lstStyle/>
@@ -19117,7 +20099,7 @@
           <a:noFill/>
         </p:spPr>
         <p:txBody>
-          <a:bodyPr wrap="square" lIns="36576" rIns="36576" tIns="36576" bIns="36576" anchor="t">
+          <a:bodyPr wrap="square" lIns="36576" tIns="36576" rIns="36576" bIns="36576" anchor="t">
             <a:spAutoFit/>
           </a:bodyPr>
           <a:lstStyle/>
@@ -19177,6 +20159,7 @@
           <a:lstStyle/>
           <a:p>
             <a:pPr algn="ctr"/>
+            <a:endParaRPr/>
           </a:p>
         </p:txBody>
       </p:sp>
@@ -19197,7 +20180,7 @@
           <a:noFill/>
         </p:spPr>
         <p:txBody>
-          <a:bodyPr wrap="square" lIns="36576" rIns="36576" tIns="36576" bIns="36576" anchor="t">
+          <a:bodyPr wrap="square" lIns="36576" tIns="36576" rIns="36576" bIns="36576" anchor="t">
             <a:spAutoFit/>
           </a:bodyPr>
           <a:lstStyle/>
@@ -19232,7 +20215,7 @@
           <a:noFill/>
         </p:spPr>
         <p:txBody>
-          <a:bodyPr wrap="square" lIns="36576" rIns="36576" tIns="36576" bIns="36576" anchor="t">
+          <a:bodyPr wrap="square" lIns="36576" tIns="36576" rIns="36576" bIns="36576" anchor="t">
             <a:spAutoFit/>
           </a:bodyPr>
           <a:lstStyle/>
@@ -19292,6 +20275,7 @@
           <a:lstStyle/>
           <a:p>
             <a:pPr algn="ctr"/>
+            <a:endParaRPr/>
           </a:p>
         </p:txBody>
       </p:sp>
@@ -19312,7 +20296,7 @@
           <a:noFill/>
         </p:spPr>
         <p:txBody>
-          <a:bodyPr wrap="square" lIns="36576" rIns="36576" tIns="36576" bIns="36576" anchor="t">
+          <a:bodyPr wrap="square" lIns="36576" tIns="36576" rIns="36576" bIns="36576" anchor="t">
             <a:spAutoFit/>
           </a:bodyPr>
           <a:lstStyle/>
@@ -19348,7 +20332,7 @@
           <a:noFill/>
         </p:spPr>
         <p:txBody>
-          <a:bodyPr wrap="square" lIns="36576" rIns="36576" tIns="36576" bIns="36576" anchor="t">
+          <a:bodyPr wrap="square" lIns="36576" tIns="36576" rIns="36576" bIns="36576" anchor="t">
             <a:spAutoFit/>
           </a:bodyPr>
           <a:lstStyle/>
@@ -19383,7 +20367,7 @@
           <a:noFill/>
         </p:spPr>
         <p:txBody>
-          <a:bodyPr wrap="square" lIns="36576" rIns="36576" tIns="36576" bIns="36576" anchor="t">
+          <a:bodyPr wrap="square" lIns="36576" tIns="36576" rIns="36576" bIns="36576" anchor="t">
             <a:spAutoFit/>
           </a:bodyPr>
           <a:lstStyle/>
@@ -19443,6 +20427,7 @@
           <a:lstStyle/>
           <a:p>
             <a:pPr algn="ctr"/>
+            <a:endParaRPr/>
           </a:p>
         </p:txBody>
       </p:sp>
@@ -19463,7 +20448,7 @@
           <a:noFill/>
         </p:spPr>
         <p:txBody>
-          <a:bodyPr wrap="square" lIns="36576" rIns="36576" tIns="36576" bIns="36576" anchor="t">
+          <a:bodyPr wrap="square" lIns="36576" tIns="36576" rIns="36576" bIns="36576" anchor="t">
             <a:spAutoFit/>
           </a:bodyPr>
           <a:lstStyle/>
@@ -19570,7 +20555,7 @@
           <a:noFill/>
         </p:spPr>
         <p:txBody>
-          <a:bodyPr wrap="square" lIns="36576" rIns="36576" tIns="36576" bIns="36576" anchor="t">
+          <a:bodyPr wrap="square" lIns="36576" tIns="36576" rIns="36576" bIns="36576" anchor="t">
             <a:spAutoFit/>
           </a:bodyPr>
           <a:lstStyle/>
@@ -19597,7 +20582,7 @@
 </file>
 
 <file path=ppt/slides/slide8.xml><?xml version="1.0" encoding="utf-8"?>
-<p:sld xmlns:a="http://schemas.openxmlformats.org/drawingml/2006/main" xmlns:p="http://schemas.openxmlformats.org/presentationml/2006/main" xmlns:r="http://schemas.openxmlformats.org/officeDocument/2006/relationships">
+<p:sld xmlns:a="http://schemas.openxmlformats.org/drawingml/2006/main" xmlns:r="http://schemas.openxmlformats.org/officeDocument/2006/relationships" xmlns:p="http://schemas.openxmlformats.org/presentationml/2006/main">
   <p:cSld>
     <p:bg>
       <p:bgPr>
@@ -19613,7 +20598,14 @@
         <p:cNvGrpSpPr/>
         <p:nvPr/>
       </p:nvGrpSpPr>
-      <p:grpSpPr/>
+      <p:grpSpPr>
+        <a:xfrm>
+          <a:off x="0" y="0"/>
+          <a:ext cx="0" cy="0"/>
+          <a:chOff x="0" y="0"/>
+          <a:chExt cx="0" cy="0"/>
+        </a:xfrm>
+      </p:grpSpPr>
       <p:sp>
         <p:nvSpPr>
           <p:cNvPr id="2" name="TextBox 1"/>
@@ -19631,7 +20623,7 @@
           <a:noFill/>
         </p:spPr>
         <p:txBody>
-          <a:bodyPr wrap="square" lIns="36576" rIns="36576" tIns="36576" bIns="36576" anchor="t">
+          <a:bodyPr wrap="square" lIns="36576" tIns="36576" rIns="36576" bIns="36576" anchor="t">
             <a:spAutoFit/>
           </a:bodyPr>
           <a:lstStyle/>
@@ -19666,7 +20658,7 @@
           <a:noFill/>
         </p:spPr>
         <p:txBody>
-          <a:bodyPr wrap="square" lIns="36576" rIns="36576" tIns="36576" bIns="36576" anchor="t">
+          <a:bodyPr wrap="square" lIns="36576" tIns="36576" rIns="36576" bIns="36576" anchor="t">
             <a:spAutoFit/>
           </a:bodyPr>
           <a:lstStyle/>
@@ -19726,6 +20718,7 @@
           <a:lstStyle/>
           <a:p>
             <a:pPr algn="ctr"/>
+            <a:endParaRPr/>
           </a:p>
         </p:txBody>
       </p:sp>
@@ -19746,7 +20739,7 @@
           <a:noFill/>
         </p:spPr>
         <p:txBody>
-          <a:bodyPr wrap="square" lIns="36576" rIns="36576" tIns="36576" bIns="36576" anchor="t">
+          <a:bodyPr wrap="square" lIns="36576" tIns="36576" rIns="36576" bIns="36576" anchor="t">
             <a:spAutoFit/>
           </a:bodyPr>
           <a:lstStyle/>
@@ -19806,6 +20799,7 @@
           <a:lstStyle/>
           <a:p>
             <a:pPr algn="ctr"/>
+            <a:endParaRPr/>
           </a:p>
         </p:txBody>
       </p:sp>
@@ -19851,6 +20845,7 @@
           <a:lstStyle/>
           <a:p>
             <a:pPr algn="ctr"/>
+            <a:endParaRPr/>
           </a:p>
         </p:txBody>
       </p:sp>
@@ -19871,7 +20866,7 @@
           <a:noFill/>
         </p:spPr>
         <p:txBody>
-          <a:bodyPr wrap="square" lIns="36576" rIns="36576" tIns="36576" bIns="36576" anchor="t">
+          <a:bodyPr wrap="square" lIns="36576" tIns="36576" rIns="36576" bIns="36576" anchor="t">
             <a:spAutoFit/>
           </a:bodyPr>
           <a:lstStyle/>
@@ -19906,7 +20901,7 @@
           <a:noFill/>
         </p:spPr>
         <p:txBody>
-          <a:bodyPr wrap="square" lIns="36576" rIns="36576" tIns="36576" bIns="36576" anchor="t">
+          <a:bodyPr wrap="square" lIns="36576" tIns="36576" rIns="36576" bIns="36576" anchor="t">
             <a:spAutoFit/>
           </a:bodyPr>
           <a:lstStyle/>
@@ -19941,7 +20936,7 @@
           <a:noFill/>
         </p:spPr>
         <p:txBody>
-          <a:bodyPr wrap="square" lIns="18288" rIns="18288" tIns="18288" bIns="18288" anchor="t">
+          <a:bodyPr wrap="square" lIns="18288" tIns="18288" rIns="18288" bIns="18288" anchor="t">
             <a:spAutoFit/>
           </a:bodyPr>
           <a:lstStyle/>
@@ -20001,6 +20996,7 @@
           <a:lstStyle/>
           <a:p>
             <a:pPr algn="ctr"/>
+            <a:endParaRPr/>
           </a:p>
         </p:txBody>
       </p:sp>
@@ -20046,6 +21042,7 @@
           <a:lstStyle/>
           <a:p>
             <a:pPr algn="ctr"/>
+            <a:endParaRPr/>
           </a:p>
         </p:txBody>
       </p:sp>
@@ -20066,7 +21063,7 @@
           <a:noFill/>
         </p:spPr>
         <p:txBody>
-          <a:bodyPr wrap="square" lIns="36576" rIns="36576" tIns="36576" bIns="36576" anchor="t">
+          <a:bodyPr wrap="square" lIns="36576" tIns="36576" rIns="36576" bIns="36576" anchor="t">
             <a:spAutoFit/>
           </a:bodyPr>
           <a:lstStyle/>
@@ -20101,7 +21098,7 @@
           <a:noFill/>
         </p:spPr>
         <p:txBody>
-          <a:bodyPr wrap="square" lIns="36576" rIns="36576" tIns="36576" bIns="36576" anchor="t">
+          <a:bodyPr wrap="square" lIns="36576" tIns="36576" rIns="36576" bIns="36576" anchor="t">
             <a:spAutoFit/>
           </a:bodyPr>
           <a:lstStyle/>
@@ -20136,7 +21133,7 @@
           <a:noFill/>
         </p:spPr>
         <p:txBody>
-          <a:bodyPr wrap="square" lIns="18288" rIns="18288" tIns="18288" bIns="18288" anchor="t">
+          <a:bodyPr wrap="square" lIns="18288" tIns="18288" rIns="18288" bIns="18288" anchor="t">
             <a:spAutoFit/>
           </a:bodyPr>
           <a:lstStyle/>
@@ -20196,6 +21193,7 @@
           <a:lstStyle/>
           <a:p>
             <a:pPr algn="ctr"/>
+            <a:endParaRPr/>
           </a:p>
         </p:txBody>
       </p:sp>
@@ -20241,6 +21239,7 @@
           <a:lstStyle/>
           <a:p>
             <a:pPr algn="ctr"/>
+            <a:endParaRPr/>
           </a:p>
         </p:txBody>
       </p:sp>
@@ -20261,7 +21260,7 @@
           <a:noFill/>
         </p:spPr>
         <p:txBody>
-          <a:bodyPr wrap="square" lIns="36576" rIns="36576" tIns="36576" bIns="36576" anchor="t">
+          <a:bodyPr wrap="square" lIns="36576" tIns="36576" rIns="36576" bIns="36576" anchor="t">
             <a:spAutoFit/>
           </a:bodyPr>
           <a:lstStyle/>
@@ -20296,7 +21295,7 @@
           <a:noFill/>
         </p:spPr>
         <p:txBody>
-          <a:bodyPr wrap="square" lIns="36576" rIns="36576" tIns="36576" bIns="36576" anchor="t">
+          <a:bodyPr wrap="square" lIns="36576" tIns="36576" rIns="36576" bIns="36576" anchor="t">
             <a:spAutoFit/>
           </a:bodyPr>
           <a:lstStyle/>
@@ -20331,7 +21330,7 @@
           <a:noFill/>
         </p:spPr>
         <p:txBody>
-          <a:bodyPr wrap="square" lIns="18288" rIns="18288" tIns="18288" bIns="18288" anchor="t">
+          <a:bodyPr wrap="square" lIns="18288" tIns="18288" rIns="18288" bIns="18288" anchor="t">
             <a:spAutoFit/>
           </a:bodyPr>
           <a:lstStyle/>
@@ -20366,7 +21365,7 @@
           <a:noFill/>
         </p:spPr>
         <p:txBody>
-          <a:bodyPr wrap="square" lIns="36576" rIns="36576" tIns="36576" bIns="36576" anchor="t">
+          <a:bodyPr wrap="square" lIns="36576" tIns="36576" rIns="36576" bIns="36576" anchor="t">
             <a:spAutoFit/>
           </a:bodyPr>
           <a:lstStyle/>
@@ -20401,7 +21400,7 @@
           <a:noFill/>
         </p:spPr>
         <p:txBody>
-          <a:bodyPr wrap="square" lIns="36576" rIns="36576" tIns="36576" bIns="36576" anchor="t">
+          <a:bodyPr wrap="square" lIns="36576" tIns="36576" rIns="36576" bIns="36576" anchor="t">
             <a:spAutoFit/>
           </a:bodyPr>
           <a:lstStyle/>
@@ -20428,7 +21427,7 @@
 </file>
 
 <file path=ppt/slides/slide9.xml><?xml version="1.0" encoding="utf-8"?>
-<p:sld xmlns:a="http://schemas.openxmlformats.org/drawingml/2006/main" xmlns:p="http://schemas.openxmlformats.org/presentationml/2006/main" xmlns:r="http://schemas.openxmlformats.org/officeDocument/2006/relationships">
+<p:sld xmlns:a="http://schemas.openxmlformats.org/drawingml/2006/main" xmlns:r="http://schemas.openxmlformats.org/officeDocument/2006/relationships" xmlns:p="http://schemas.openxmlformats.org/presentationml/2006/main">
   <p:cSld>
     <p:bg>
       <p:bgPr>
@@ -20444,7 +21443,14 @@
         <p:cNvGrpSpPr/>
         <p:nvPr/>
       </p:nvGrpSpPr>
-      <p:grpSpPr/>
+      <p:grpSpPr>
+        <a:xfrm>
+          <a:off x="0" y="0"/>
+          <a:ext cx="0" cy="0"/>
+          <a:chOff x="0" y="0"/>
+          <a:chExt cx="0" cy="0"/>
+        </a:xfrm>
+      </p:grpSpPr>
       <p:sp>
         <p:nvSpPr>
           <p:cNvPr id="2" name="TextBox 1"/>
@@ -20462,7 +21468,7 @@
           <a:noFill/>
         </p:spPr>
         <p:txBody>
-          <a:bodyPr wrap="square" lIns="36576" rIns="36576" tIns="36576" bIns="36576" anchor="t">
+          <a:bodyPr wrap="square" lIns="36576" tIns="36576" rIns="36576" bIns="36576" anchor="t">
             <a:spAutoFit/>
           </a:bodyPr>
           <a:lstStyle/>
@@ -20497,7 +21503,7 @@
           <a:noFill/>
         </p:spPr>
         <p:txBody>
-          <a:bodyPr wrap="square" lIns="36576" rIns="36576" tIns="36576" bIns="36576" anchor="t">
+          <a:bodyPr wrap="square" lIns="36576" tIns="36576" rIns="36576" bIns="36576" anchor="t">
             <a:spAutoFit/>
           </a:bodyPr>
           <a:lstStyle/>
@@ -20557,6 +21563,7 @@
           <a:lstStyle/>
           <a:p>
             <a:pPr algn="ctr"/>
+            <a:endParaRPr/>
           </a:p>
         </p:txBody>
       </p:sp>
@@ -20577,7 +21584,7 @@
           <a:noFill/>
         </p:spPr>
         <p:txBody>
-          <a:bodyPr wrap="square" lIns="36576" rIns="36576" tIns="36576" bIns="36576" anchor="t">
+          <a:bodyPr wrap="square" lIns="36576" tIns="36576" rIns="36576" bIns="36576" anchor="t">
             <a:spAutoFit/>
           </a:bodyPr>
           <a:lstStyle/>
@@ -20637,6 +21644,7 @@
           <a:lstStyle/>
           <a:p>
             <a:pPr algn="ctr"/>
+            <a:endParaRPr/>
           </a:p>
         </p:txBody>
       </p:sp>
@@ -20657,7 +21665,7 @@
           <a:noFill/>
         </p:spPr>
         <p:txBody>
-          <a:bodyPr wrap="square" lIns="36576" rIns="36576" tIns="36576" bIns="36576" anchor="t">
+          <a:bodyPr wrap="square" lIns="36576" tIns="36576" rIns="36576" bIns="36576" anchor="t">
             <a:spAutoFit/>
           </a:bodyPr>
           <a:lstStyle/>
@@ -20718,6 +21726,7 @@
           <a:lstStyle/>
           <a:p>
             <a:pPr algn="ctr"/>
+            <a:endParaRPr/>
           </a:p>
         </p:txBody>
       </p:sp>
@@ -20738,7 +21747,7 @@
           <a:noFill/>
         </p:spPr>
         <p:txBody>
-          <a:bodyPr wrap="square" lIns="36576" rIns="36576" tIns="36576" bIns="36576" anchor="t">
+          <a:bodyPr wrap="square" lIns="36576" tIns="36576" rIns="36576" bIns="36576" anchor="t">
             <a:spAutoFit/>
           </a:bodyPr>
           <a:lstStyle/>
@@ -20889,6 +21898,7 @@
           <a:lstStyle/>
           <a:p>
             <a:pPr algn="ctr"/>
+            <a:endParaRPr/>
           </a:p>
         </p:txBody>
       </p:sp>
@@ -20909,7 +21919,7 @@
           <a:noFill/>
         </p:spPr>
         <p:txBody>
-          <a:bodyPr wrap="square" lIns="36576" rIns="36576" tIns="36576" bIns="36576" anchor="t">
+          <a:bodyPr wrap="square" lIns="36576" tIns="36576" rIns="36576" bIns="36576" anchor="t">
             <a:spAutoFit/>
           </a:bodyPr>
           <a:lstStyle/>
@@ -20944,7 +21954,7 @@
           <a:noFill/>
         </p:spPr>
         <p:txBody>
-          <a:bodyPr wrap="square" lIns="36576" rIns="36576" tIns="36576" bIns="36576" anchor="t">
+          <a:bodyPr wrap="square" lIns="36576" tIns="36576" rIns="36576" bIns="36576" anchor="t">
             <a:spAutoFit/>
           </a:bodyPr>
           <a:lstStyle/>
@@ -21301,44 +22311,44 @@
         <a:sysClr val="window" lastClr="FFFFFF"/>
       </a:lt1>
       <a:dk2>
-        <a:srgbClr val="1F497D"/>
+        <a:srgbClr val="0E2841"/>
       </a:dk2>
       <a:lt2>
-        <a:srgbClr val="EEECE1"/>
+        <a:srgbClr val="E8E8E8"/>
       </a:lt2>
       <a:accent1>
-        <a:srgbClr val="4F81BD"/>
+        <a:srgbClr val="156082"/>
       </a:accent1>
       <a:accent2>
-        <a:srgbClr val="C0504D"/>
+        <a:srgbClr val="E97132"/>
       </a:accent2>
       <a:accent3>
-        <a:srgbClr val="9BBB59"/>
+        <a:srgbClr val="196B24"/>
       </a:accent3>
       <a:accent4>
-        <a:srgbClr val="8064A2"/>
+        <a:srgbClr val="0F9ED5"/>
       </a:accent4>
       <a:accent5>
-        <a:srgbClr val="4BACC6"/>
+        <a:srgbClr val="A02B93"/>
       </a:accent5>
       <a:accent6>
-        <a:srgbClr val="F79646"/>
+        <a:srgbClr val="4EA72E"/>
       </a:accent6>
       <a:hlink>
-        <a:srgbClr val="0000FF"/>
+        <a:srgbClr val="467886"/>
       </a:hlink>
       <a:folHlink>
-        <a:srgbClr val="800080"/>
+        <a:srgbClr val="96607D"/>
       </a:folHlink>
     </a:clrScheme>
     <a:fontScheme name="Office">
       <a:majorFont>
-        <a:latin typeface="Calibri"/>
+        <a:latin typeface="Aptos Display" panose="02110004020202020204"/>
         <a:ea typeface=""/>
         <a:cs typeface=""/>
-        <a:font script="Jpan" typeface="ＭＳ Ｐゴシック"/>
+        <a:font script="Jpan" typeface="游ゴシック Light"/>
         <a:font script="Hang" typeface="맑은 고딕"/>
-        <a:font script="Hans" typeface="宋体"/>
+        <a:font script="Hans" typeface="等线 Light"/>
         <a:font script="Hant" typeface="新細明體"/>
         <a:font script="Arab" typeface="Times New Roman"/>
         <a:font script="Hebr" typeface="Times New Roman"/>
@@ -21366,14 +22376,31 @@
         <a:font script="Viet" typeface="Times New Roman"/>
         <a:font script="Uigh" typeface="Microsoft Uighur"/>
         <a:font script="Geor" typeface="Sylfaen"/>
+        <a:font script="Armn" typeface="Arial"/>
+        <a:font script="Bugi" typeface="Leelawadee UI"/>
+        <a:font script="Bopo" typeface="Microsoft JhengHei"/>
+        <a:font script="Java" typeface="Javanese Text"/>
+        <a:font script="Lisu" typeface="Segoe UI"/>
+        <a:font script="Mymr" typeface="Myanmar Text"/>
+        <a:font script="Nkoo" typeface="Ebrima"/>
+        <a:font script="Olck" typeface="Nirmala UI"/>
+        <a:font script="Osma" typeface="Ebrima"/>
+        <a:font script="Phag" typeface="Phagspa"/>
+        <a:font script="Syrn" typeface="Estrangelo Edessa"/>
+        <a:font script="Syrj" typeface="Estrangelo Edessa"/>
+        <a:font script="Syre" typeface="Estrangelo Edessa"/>
+        <a:font script="Sora" typeface="Nirmala UI"/>
+        <a:font script="Tale" typeface="Microsoft Tai Le"/>
+        <a:font script="Talu" typeface="Microsoft New Tai Lue"/>
+        <a:font script="Tfng" typeface="Ebrima"/>
       </a:majorFont>
       <a:minorFont>
-        <a:latin typeface="Calibri"/>
+        <a:latin typeface="Aptos" panose="02110004020202020204"/>
         <a:ea typeface=""/>
         <a:cs typeface=""/>
-        <a:font script="Jpan" typeface="ＭＳ Ｐゴシック"/>
+        <a:font script="Jpan" typeface="游ゴシック"/>
         <a:font script="Hang" typeface="맑은 고딕"/>
-        <a:font script="Hans" typeface="宋体"/>
+        <a:font script="Hans" typeface="等线"/>
         <a:font script="Hant" typeface="新細明體"/>
         <a:font script="Arab" typeface="Arial"/>
         <a:font script="Hebr" typeface="Arial"/>
@@ -21401,6 +22428,23 @@
         <a:font script="Viet" typeface="Arial"/>
         <a:font script="Uigh" typeface="Microsoft Uighur"/>
         <a:font script="Geor" typeface="Sylfaen"/>
+        <a:font script="Armn" typeface="Arial"/>
+        <a:font script="Bugi" typeface="Leelawadee UI"/>
+        <a:font script="Bopo" typeface="Microsoft JhengHei"/>
+        <a:font script="Java" typeface="Javanese Text"/>
+        <a:font script="Lisu" typeface="Segoe UI"/>
+        <a:font script="Mymr" typeface="Myanmar Text"/>
+        <a:font script="Nkoo" typeface="Ebrima"/>
+        <a:font script="Olck" typeface="Nirmala UI"/>
+        <a:font script="Osma" typeface="Ebrima"/>
+        <a:font script="Phag" typeface="Phagspa"/>
+        <a:font script="Syrn" typeface="Estrangelo Edessa"/>
+        <a:font script="Syrj" typeface="Estrangelo Edessa"/>
+        <a:font script="Syre" typeface="Estrangelo Edessa"/>
+        <a:font script="Sora" typeface="Nirmala UI"/>
+        <a:font script="Tale" typeface="Microsoft Tai Le"/>
+        <a:font script="Talu" typeface="Microsoft New Tai Lue"/>
+        <a:font script="Tfng" typeface="Ebrima"/>
       </a:minorFont>
     </a:fontScheme>
     <a:fmtScheme name="Office">
@@ -21412,180 +22456,136 @@
           <a:gsLst>
             <a:gs pos="0">
               <a:schemeClr val="phClr">
-                <a:tint val="50000"/>
-                <a:satMod val="300000"/>
+                <a:lumMod val="110000"/>
+                <a:satMod val="105000"/>
+                <a:tint val="67000"/>
               </a:schemeClr>
             </a:gs>
-            <a:gs pos="35000">
+            <a:gs pos="50000">
               <a:schemeClr val="phClr">
-                <a:tint val="37000"/>
-                <a:satMod val="300000"/>
+                <a:lumMod val="105000"/>
+                <a:satMod val="103000"/>
+                <a:tint val="73000"/>
               </a:schemeClr>
             </a:gs>
             <a:gs pos="100000">
               <a:schemeClr val="phClr">
-                <a:tint val="15000"/>
-                <a:satMod val="350000"/>
+                <a:lumMod val="105000"/>
+                <a:satMod val="109000"/>
+                <a:tint val="81000"/>
               </a:schemeClr>
             </a:gs>
           </a:gsLst>
-          <a:lin ang="16200000" scaled="1"/>
+          <a:lin ang="5400000" scaled="0"/>
         </a:gradFill>
         <a:gradFill rotWithShape="1">
           <a:gsLst>
             <a:gs pos="0">
               <a:schemeClr val="phClr">
-                <a:tint val="100000"/>
+                <a:satMod val="103000"/>
+                <a:lumMod val="102000"/>
+                <a:tint val="94000"/>
+              </a:schemeClr>
+            </a:gs>
+            <a:gs pos="50000">
+              <a:schemeClr val="phClr">
+                <a:satMod val="110000"/>
+                <a:lumMod val="100000"/>
                 <a:shade val="100000"/>
-                <a:satMod val="130000"/>
               </a:schemeClr>
             </a:gs>
             <a:gs pos="100000">
               <a:schemeClr val="phClr">
-                <a:tint val="50000"/>
-                <a:shade val="100000"/>
-                <a:satMod val="350000"/>
+                <a:lumMod val="99000"/>
+                <a:satMod val="120000"/>
+                <a:shade val="78000"/>
               </a:schemeClr>
             </a:gs>
           </a:gsLst>
-          <a:lin ang="16200000" scaled="0"/>
+          <a:lin ang="5400000" scaled="0"/>
         </a:gradFill>
       </a:fillStyleLst>
       <a:lnStyleLst>
-        <a:ln w="9525" cap="flat" cmpd="sng" algn="ctr">
+        <a:ln w="12700" cap="flat" cmpd="sng" algn="ctr">
           <a:solidFill>
-            <a:schemeClr val="phClr">
-              <a:shade val="95000"/>
-              <a:satMod val="105000"/>
-            </a:schemeClr>
+            <a:schemeClr val="phClr"/>
           </a:solidFill>
           <a:prstDash val="solid"/>
+          <a:miter lim="800000"/>
+        </a:ln>
+        <a:ln w="19050" cap="flat" cmpd="sng" algn="ctr">
+          <a:solidFill>
+            <a:schemeClr val="phClr"/>
+          </a:solidFill>
+          <a:prstDash val="solid"/>
+          <a:miter lim="800000"/>
         </a:ln>
         <a:ln w="25400" cap="flat" cmpd="sng" algn="ctr">
           <a:solidFill>
             <a:schemeClr val="phClr"/>
           </a:solidFill>
           <a:prstDash val="solid"/>
-        </a:ln>
-        <a:ln w="38100" cap="flat" cmpd="sng" algn="ctr">
-          <a:solidFill>
-            <a:schemeClr val="phClr"/>
-          </a:solidFill>
-          <a:prstDash val="solid"/>
+          <a:miter lim="800000"/>
         </a:ln>
       </a:lnStyleLst>
       <a:effectStyleLst>
         <a:effectStyle>
+          <a:effectLst/>
+        </a:effectStyle>
+        <a:effectStyle>
+          <a:effectLst/>
+        </a:effectStyle>
+        <a:effectStyle>
           <a:effectLst>
-            <a:outerShdw blurRad="40000" dist="20000" dir="5400000" rotWithShape="0">
+            <a:outerShdw blurRad="57150" dist="19050" dir="5400000" algn="ctr" rotWithShape="0">
               <a:srgbClr val="000000">
-                <a:alpha val="38000"/>
+                <a:alpha val="63000"/>
               </a:srgbClr>
             </a:outerShdw>
           </a:effectLst>
-        </a:effectStyle>
-        <a:effectStyle>
-          <a:effectLst>
-            <a:outerShdw blurRad="40000" dist="23000" dir="5400000" rotWithShape="0">
-              <a:srgbClr val="000000">
-                <a:alpha val="35000"/>
-              </a:srgbClr>
-            </a:outerShdw>
-          </a:effectLst>
-        </a:effectStyle>
-        <a:effectStyle>
-          <a:effectLst>
-            <a:outerShdw blurRad="40000" dist="23000" dir="5400000" rotWithShape="0">
-              <a:srgbClr val="000000">
-                <a:alpha val="35000"/>
-              </a:srgbClr>
-            </a:outerShdw>
-          </a:effectLst>
-          <a:scene3d>
-            <a:camera prst="orthographicFront">
-              <a:rot lat="0" lon="0" rev="0"/>
-            </a:camera>
-            <a:lightRig rig="threePt" dir="t">
-              <a:rot lat="0" lon="0" rev="1200000"/>
-            </a:lightRig>
-          </a:scene3d>
-          <a:sp3d>
-            <a:bevelT w="63500" h="25400"/>
-          </a:sp3d>
         </a:effectStyle>
       </a:effectStyleLst>
       <a:bgFillStyleLst>
         <a:solidFill>
           <a:schemeClr val="phClr"/>
         </a:solidFill>
+        <a:solidFill>
+          <a:schemeClr val="phClr">
+            <a:tint val="95000"/>
+            <a:satMod val="170000"/>
+          </a:schemeClr>
+        </a:solidFill>
         <a:gradFill rotWithShape="1">
           <a:gsLst>
             <a:gs pos="0">
               <a:schemeClr val="phClr">
-                <a:tint val="40000"/>
-                <a:satMod val="350000"/>
+                <a:tint val="93000"/>
+                <a:satMod val="150000"/>
+                <a:shade val="98000"/>
+                <a:lumMod val="102000"/>
               </a:schemeClr>
             </a:gs>
-            <a:gs pos="40000">
+            <a:gs pos="50000">
               <a:schemeClr val="phClr">
-                <a:tint val="45000"/>
-                <a:shade val="99000"/>
-                <a:satMod val="350000"/>
+                <a:tint val="98000"/>
+                <a:satMod val="130000"/>
+                <a:shade val="90000"/>
+                <a:lumMod val="103000"/>
               </a:schemeClr>
             </a:gs>
             <a:gs pos="100000">
               <a:schemeClr val="phClr">
-                <a:shade val="20000"/>
-                <a:satMod val="255000"/>
+                <a:shade val="63000"/>
+                <a:satMod val="120000"/>
               </a:schemeClr>
             </a:gs>
           </a:gsLst>
-          <a:path path="circle">
-            <a:fillToRect l="50000" t="-80000" r="50000" b="180000"/>
-          </a:path>
-        </a:gradFill>
-        <a:gradFill rotWithShape="1">
-          <a:gsLst>
-            <a:gs pos="0">
-              <a:schemeClr val="phClr">
-                <a:tint val="80000"/>
-                <a:satMod val="300000"/>
-              </a:schemeClr>
-            </a:gs>
-            <a:gs pos="100000">
-              <a:schemeClr val="phClr">
-                <a:shade val="30000"/>
-                <a:satMod val="200000"/>
-              </a:schemeClr>
-            </a:gs>
-          </a:gsLst>
-          <a:path path="circle">
-            <a:fillToRect l="50000" t="50000" r="50000" b="50000"/>
-          </a:path>
+          <a:lin ang="5400000" scaled="0"/>
         </a:gradFill>
       </a:bgFillStyleLst>
     </a:fmtScheme>
   </a:themeElements>
   <a:objectDefaults>
-    <a:spDef>
-      <a:spPr/>
-      <a:bodyPr/>
-      <a:lstStyle/>
-      <a:style>
-        <a:lnRef idx="1">
-          <a:schemeClr val="accent1"/>
-        </a:lnRef>
-        <a:fillRef idx="3">
-          <a:schemeClr val="accent1"/>
-        </a:fillRef>
-        <a:effectRef idx="2">
-          <a:schemeClr val="accent1"/>
-        </a:effectRef>
-        <a:fontRef idx="minor">
-          <a:schemeClr val="lt1"/>
-        </a:fontRef>
-      </a:style>
-    </a:spDef>
     <a:lnDef>
       <a:spPr/>
       <a:bodyPr/>
@@ -21607,5 +22607,10 @@
     </a:lnDef>
   </a:objectDefaults>
   <a:extraClrSchemeLst/>
+  <a:extLst>
+    <a:ext uri="{05A4C25C-085E-4340-85A3-A5531E510DB2}">
+      <thm15:themeFamily xmlns:thm15="http://schemas.microsoft.com/office/thememl/2012/main" name="Office Theme" id="{2E142A2C-CD16-42D6-873A-C26D2A0506FA}" vid="{1BDDFF52-6CD6-40A5-AB3C-68EB2F1E4D0A}"/>
+    </a:ext>
+  </a:extLst>
 </a:theme>
 </file>